--- a/docs/サーバー構成のご提案.pptx
+++ b/docs/サーバー構成のご提案.pptx
@@ -5,15 +5,15 @@
     <p:sldMasterId id="2147483648" r:id="rId1"/>
   </p:sldMasterIdLst>
   <p:sldIdLst>
-    <p:sldId id="256" r:id="rId7"/>
-    <p:sldId id="257" r:id="rId8"/>
-    <p:sldId id="258" r:id="rId9"/>
-    <p:sldId id="259" r:id="rId10"/>
-    <p:sldId id="260" r:id="rId11"/>
-    <p:sldId id="261" r:id="rId12"/>
-    <p:sldId id="262" r:id="rId13"/>
+    <p:sldId id="256" r:id="rId2"/>
+    <p:sldId id="257" r:id="rId3"/>
+    <p:sldId id="258" r:id="rId4"/>
+    <p:sldId id="259" r:id="rId5"/>
+    <p:sldId id="260" r:id="rId6"/>
+    <p:sldId id="261" r:id="rId7"/>
+    <p:sldId id="262" r:id="rId8"/>
   </p:sldIdLst>
-  <p:sldSz cx="12191695" cy="6858000" type="screen4x3"/>
+  <p:sldSz cx="12192000" cy="6858000"/>
   <p:notesSz cx="6858000" cy="9144000"/>
   <p:defaultTextStyle>
     <a:defPPr>
@@ -110,6 +110,22 @@
       </a:defRPr>
     </a:lvl9pPr>
   </p:defaultTextStyle>
+  <p:extLst>
+    <p:ext uri="{EFAFB233-063F-42B5-8137-9DF3F51BA10A}">
+      <p15:sldGuideLst xmlns:p15="http://schemas.microsoft.com/office/powerpoint/2012/main">
+        <p15:guide id="1" orient="horz" pos="2160">
+          <p15:clr>
+            <a:srgbClr val="A4A3A4"/>
+          </p15:clr>
+        </p15:guide>
+        <p15:guide id="2" pos="2880">
+          <p15:clr>
+            <a:srgbClr val="A4A3A4"/>
+          </p15:clr>
+        </p15:guide>
+      </p15:sldGuideLst>
+    </p:ext>
+  </p:extLst>
 </p:presentation>
 </file>
 
@@ -151,10 +167,9 @@
           <a:lstStyle/>
           <a:p>
             <a:r>
-              <a:rPr lang="en-US" smtClean="0"/>
+              <a:rPr lang="en-US"/>
               <a:t>Click to edit Master title style</a:t>
             </a:r>
-            <a:endParaRPr lang="en-US"/>
           </a:p>
         </p:txBody>
       </p:sp>
@@ -270,10 +285,9 @@
           </a:lstStyle>
           <a:p>
             <a:r>
-              <a:rPr lang="en-US" smtClean="0"/>
+              <a:rPr lang="en-US"/>
               <a:t>Click to edit Master subtitle style</a:t>
             </a:r>
-            <a:endParaRPr lang="en-US"/>
           </a:p>
         </p:txBody>
       </p:sp>
@@ -294,7 +308,7 @@
           <a:p>
             <a:fld id="{5BCAD085-E8A6-8845-BD4E-CB4CCA059FC4}" type="datetimeFigureOut">
               <a:rPr lang="en-US" smtClean="0"/>
-              <a:t>1/27/13</a:t>
+              <a:t>8/6/2026</a:t>
             </a:fld>
             <a:endParaRPr lang="en-US"/>
           </a:p>
@@ -388,10 +402,9 @@
           <a:lstStyle/>
           <a:p>
             <a:r>
-              <a:rPr lang="en-US" smtClean="0"/>
+              <a:rPr lang="en-US"/>
               <a:t>Click to edit Master title style</a:t>
             </a:r>
-            <a:endParaRPr lang="en-US"/>
           </a:p>
         </p:txBody>
       </p:sp>
@@ -412,38 +425,37 @@
           <a:p>
             <a:pPr lvl="0"/>
             <a:r>
-              <a:rPr lang="en-US" smtClean="0"/>
+              <a:rPr lang="en-US"/>
               <a:t>Click to edit Master text styles</a:t>
             </a:r>
           </a:p>
           <a:p>
             <a:pPr lvl="1"/>
             <a:r>
-              <a:rPr lang="en-US" smtClean="0"/>
+              <a:rPr lang="en-US"/>
               <a:t>Second level</a:t>
             </a:r>
           </a:p>
           <a:p>
             <a:pPr lvl="2"/>
             <a:r>
-              <a:rPr lang="en-US" smtClean="0"/>
+              <a:rPr lang="en-US"/>
               <a:t>Third level</a:t>
             </a:r>
           </a:p>
           <a:p>
             <a:pPr lvl="3"/>
             <a:r>
-              <a:rPr lang="en-US" smtClean="0"/>
+              <a:rPr lang="en-US"/>
               <a:t>Fourth level</a:t>
             </a:r>
           </a:p>
           <a:p>
             <a:pPr lvl="4"/>
             <a:r>
-              <a:rPr lang="en-US" smtClean="0"/>
+              <a:rPr lang="en-US"/>
               <a:t>Fifth level</a:t>
             </a:r>
-            <a:endParaRPr lang="en-US"/>
           </a:p>
         </p:txBody>
       </p:sp>
@@ -464,7 +476,7 @@
           <a:p>
             <a:fld id="{5BCAD085-E8A6-8845-BD4E-CB4CCA059FC4}" type="datetimeFigureOut">
               <a:rPr lang="en-US" smtClean="0"/>
-              <a:t>1/27/13</a:t>
+              <a:t>8/6/2026</a:t>
             </a:fld>
             <a:endParaRPr lang="en-US"/>
           </a:p>
@@ -563,10 +575,9 @@
           <a:lstStyle/>
           <a:p>
             <a:r>
-              <a:rPr lang="en-US" smtClean="0"/>
+              <a:rPr lang="en-US"/>
               <a:t>Click to edit Master title style</a:t>
             </a:r>
-            <a:endParaRPr lang="en-US"/>
           </a:p>
         </p:txBody>
       </p:sp>
@@ -592,38 +603,37 @@
           <a:p>
             <a:pPr lvl="0"/>
             <a:r>
-              <a:rPr lang="en-US" smtClean="0"/>
+              <a:rPr lang="en-US"/>
               <a:t>Click to edit Master text styles</a:t>
             </a:r>
           </a:p>
           <a:p>
             <a:pPr lvl="1"/>
             <a:r>
-              <a:rPr lang="en-US" smtClean="0"/>
+              <a:rPr lang="en-US"/>
               <a:t>Second level</a:t>
             </a:r>
           </a:p>
           <a:p>
             <a:pPr lvl="2"/>
             <a:r>
-              <a:rPr lang="en-US" smtClean="0"/>
+              <a:rPr lang="en-US"/>
               <a:t>Third level</a:t>
             </a:r>
           </a:p>
           <a:p>
             <a:pPr lvl="3"/>
             <a:r>
-              <a:rPr lang="en-US" smtClean="0"/>
+              <a:rPr lang="en-US"/>
               <a:t>Fourth level</a:t>
             </a:r>
           </a:p>
           <a:p>
             <a:pPr lvl="4"/>
             <a:r>
-              <a:rPr lang="en-US" smtClean="0"/>
+              <a:rPr lang="en-US"/>
               <a:t>Fifth level</a:t>
             </a:r>
-            <a:endParaRPr lang="en-US"/>
           </a:p>
         </p:txBody>
       </p:sp>
@@ -644,7 +654,7 @@
           <a:p>
             <a:fld id="{5BCAD085-E8A6-8845-BD4E-CB4CCA059FC4}" type="datetimeFigureOut">
               <a:rPr lang="en-US" smtClean="0"/>
-              <a:t>1/27/13</a:t>
+              <a:t>8/6/2026</a:t>
             </a:fld>
             <a:endParaRPr lang="en-US"/>
           </a:p>
@@ -738,10 +748,9 @@
           <a:lstStyle/>
           <a:p>
             <a:r>
-              <a:rPr lang="en-US" smtClean="0"/>
+              <a:rPr lang="en-US"/>
               <a:t>Click to edit Master title style</a:t>
             </a:r>
-            <a:endParaRPr lang="en-US"/>
           </a:p>
         </p:txBody>
       </p:sp>
@@ -762,38 +771,37 @@
           <a:p>
             <a:pPr lvl="0"/>
             <a:r>
-              <a:rPr lang="en-US" smtClean="0"/>
+              <a:rPr lang="en-US"/>
               <a:t>Click to edit Master text styles</a:t>
             </a:r>
           </a:p>
           <a:p>
             <a:pPr lvl="1"/>
             <a:r>
-              <a:rPr lang="en-US" smtClean="0"/>
+              <a:rPr lang="en-US"/>
               <a:t>Second level</a:t>
             </a:r>
           </a:p>
           <a:p>
             <a:pPr lvl="2"/>
             <a:r>
-              <a:rPr lang="en-US" smtClean="0"/>
+              <a:rPr lang="en-US"/>
               <a:t>Third level</a:t>
             </a:r>
           </a:p>
           <a:p>
             <a:pPr lvl="3"/>
             <a:r>
-              <a:rPr lang="en-US" smtClean="0"/>
+              <a:rPr lang="en-US"/>
               <a:t>Fourth level</a:t>
             </a:r>
           </a:p>
           <a:p>
             <a:pPr lvl="4"/>
             <a:r>
-              <a:rPr lang="en-US" smtClean="0"/>
+              <a:rPr lang="en-US"/>
               <a:t>Fifth level</a:t>
             </a:r>
-            <a:endParaRPr lang="en-US"/>
           </a:p>
         </p:txBody>
       </p:sp>
@@ -814,7 +822,7 @@
           <a:p>
             <a:fld id="{5BCAD085-E8A6-8845-BD4E-CB4CCA059FC4}" type="datetimeFigureOut">
               <a:rPr lang="en-US" smtClean="0"/>
-              <a:t>1/27/13</a:t>
+              <a:t>8/6/2026</a:t>
             </a:fld>
             <a:endParaRPr lang="en-US"/>
           </a:p>
@@ -917,10 +925,9 @@
           </a:lstStyle>
           <a:p>
             <a:r>
-              <a:rPr lang="en-US" smtClean="0"/>
+              <a:rPr lang="en-US"/>
               <a:t>Click to edit Master title style</a:t>
             </a:r>
-            <a:endParaRPr lang="en-US"/>
           </a:p>
         </p:txBody>
       </p:sp>
@@ -1037,7 +1044,7 @@
           <a:p>
             <a:pPr lvl="0"/>
             <a:r>
-              <a:rPr lang="en-US" smtClean="0"/>
+              <a:rPr lang="en-US"/>
               <a:t>Click to edit Master text styles</a:t>
             </a:r>
           </a:p>
@@ -1060,7 +1067,7 @@
           <a:p>
             <a:fld id="{5BCAD085-E8A6-8845-BD4E-CB4CCA059FC4}" type="datetimeFigureOut">
               <a:rPr lang="en-US" smtClean="0"/>
-              <a:t>1/27/13</a:t>
+              <a:t>8/6/2026</a:t>
             </a:fld>
             <a:endParaRPr lang="en-US"/>
           </a:p>
@@ -1154,10 +1161,9 @@
           <a:lstStyle/>
           <a:p>
             <a:r>
-              <a:rPr lang="en-US" smtClean="0"/>
+              <a:rPr lang="en-US"/>
               <a:t>Click to edit Master title style</a:t>
             </a:r>
-            <a:endParaRPr lang="en-US"/>
           </a:p>
         </p:txBody>
       </p:sp>
@@ -1211,38 +1217,37 @@
           <a:p>
             <a:pPr lvl="0"/>
             <a:r>
-              <a:rPr lang="en-US" smtClean="0"/>
+              <a:rPr lang="en-US"/>
               <a:t>Click to edit Master text styles</a:t>
             </a:r>
           </a:p>
           <a:p>
             <a:pPr lvl="1"/>
             <a:r>
-              <a:rPr lang="en-US" smtClean="0"/>
+              <a:rPr lang="en-US"/>
               <a:t>Second level</a:t>
             </a:r>
           </a:p>
           <a:p>
             <a:pPr lvl="2"/>
             <a:r>
-              <a:rPr lang="en-US" smtClean="0"/>
+              <a:rPr lang="en-US"/>
               <a:t>Third level</a:t>
             </a:r>
           </a:p>
           <a:p>
             <a:pPr lvl="3"/>
             <a:r>
-              <a:rPr lang="en-US" smtClean="0"/>
+              <a:rPr lang="en-US"/>
               <a:t>Fourth level</a:t>
             </a:r>
           </a:p>
           <a:p>
             <a:pPr lvl="4"/>
             <a:r>
-              <a:rPr lang="en-US" smtClean="0"/>
+              <a:rPr lang="en-US"/>
               <a:t>Fifth level</a:t>
             </a:r>
-            <a:endParaRPr lang="en-US"/>
           </a:p>
         </p:txBody>
       </p:sp>
@@ -1296,38 +1301,37 @@
           <a:p>
             <a:pPr lvl="0"/>
             <a:r>
-              <a:rPr lang="en-US" smtClean="0"/>
+              <a:rPr lang="en-US"/>
               <a:t>Click to edit Master text styles</a:t>
             </a:r>
           </a:p>
           <a:p>
             <a:pPr lvl="1"/>
             <a:r>
-              <a:rPr lang="en-US" smtClean="0"/>
+              <a:rPr lang="en-US"/>
               <a:t>Second level</a:t>
             </a:r>
           </a:p>
           <a:p>
             <a:pPr lvl="2"/>
             <a:r>
-              <a:rPr lang="en-US" smtClean="0"/>
+              <a:rPr lang="en-US"/>
               <a:t>Third level</a:t>
             </a:r>
           </a:p>
           <a:p>
             <a:pPr lvl="3"/>
             <a:r>
-              <a:rPr lang="en-US" smtClean="0"/>
+              <a:rPr lang="en-US"/>
               <a:t>Fourth level</a:t>
             </a:r>
           </a:p>
           <a:p>
             <a:pPr lvl="4"/>
             <a:r>
-              <a:rPr lang="en-US" smtClean="0"/>
+              <a:rPr lang="en-US"/>
               <a:t>Fifth level</a:t>
             </a:r>
-            <a:endParaRPr lang="en-US"/>
           </a:p>
         </p:txBody>
       </p:sp>
@@ -1348,7 +1352,7 @@
           <a:p>
             <a:fld id="{5BCAD085-E8A6-8845-BD4E-CB4CCA059FC4}" type="datetimeFigureOut">
               <a:rPr lang="en-US" smtClean="0"/>
-              <a:t>1/27/13</a:t>
+              <a:t>8/6/2026</a:t>
             </a:fld>
             <a:endParaRPr lang="en-US"/>
           </a:p>
@@ -1446,10 +1450,9 @@
           </a:lstStyle>
           <a:p>
             <a:r>
-              <a:rPr lang="en-US" smtClean="0"/>
+              <a:rPr lang="en-US"/>
               <a:t>Click to edit Master title style</a:t>
             </a:r>
-            <a:endParaRPr lang="en-US"/>
           </a:p>
         </p:txBody>
       </p:sp>
@@ -1512,7 +1515,7 @@
           <a:p>
             <a:pPr lvl="0"/>
             <a:r>
-              <a:rPr lang="en-US" smtClean="0"/>
+              <a:rPr lang="en-US"/>
               <a:t>Click to edit Master text styles</a:t>
             </a:r>
           </a:p>
@@ -1568,38 +1571,37 @@
           <a:p>
             <a:pPr lvl="0"/>
             <a:r>
-              <a:rPr lang="en-US" smtClean="0"/>
+              <a:rPr lang="en-US"/>
               <a:t>Click to edit Master text styles</a:t>
             </a:r>
           </a:p>
           <a:p>
             <a:pPr lvl="1"/>
             <a:r>
-              <a:rPr lang="en-US" smtClean="0"/>
+              <a:rPr lang="en-US"/>
               <a:t>Second level</a:t>
             </a:r>
           </a:p>
           <a:p>
             <a:pPr lvl="2"/>
             <a:r>
-              <a:rPr lang="en-US" smtClean="0"/>
+              <a:rPr lang="en-US"/>
               <a:t>Third level</a:t>
             </a:r>
           </a:p>
           <a:p>
             <a:pPr lvl="3"/>
             <a:r>
-              <a:rPr lang="en-US" smtClean="0"/>
+              <a:rPr lang="en-US"/>
               <a:t>Fourth level</a:t>
             </a:r>
           </a:p>
           <a:p>
             <a:pPr lvl="4"/>
             <a:r>
-              <a:rPr lang="en-US" smtClean="0"/>
+              <a:rPr lang="en-US"/>
               <a:t>Fifth level</a:t>
             </a:r>
-            <a:endParaRPr lang="en-US"/>
           </a:p>
         </p:txBody>
       </p:sp>
@@ -1662,7 +1664,7 @@
           <a:p>
             <a:pPr lvl="0"/>
             <a:r>
-              <a:rPr lang="en-US" smtClean="0"/>
+              <a:rPr lang="en-US"/>
               <a:t>Click to edit Master text styles</a:t>
             </a:r>
           </a:p>
@@ -1718,38 +1720,37 @@
           <a:p>
             <a:pPr lvl="0"/>
             <a:r>
-              <a:rPr lang="en-US" smtClean="0"/>
+              <a:rPr lang="en-US"/>
               <a:t>Click to edit Master text styles</a:t>
             </a:r>
           </a:p>
           <a:p>
             <a:pPr lvl="1"/>
             <a:r>
-              <a:rPr lang="en-US" smtClean="0"/>
+              <a:rPr lang="en-US"/>
               <a:t>Second level</a:t>
             </a:r>
           </a:p>
           <a:p>
             <a:pPr lvl="2"/>
             <a:r>
-              <a:rPr lang="en-US" smtClean="0"/>
+              <a:rPr lang="en-US"/>
               <a:t>Third level</a:t>
             </a:r>
           </a:p>
           <a:p>
             <a:pPr lvl="3"/>
             <a:r>
-              <a:rPr lang="en-US" smtClean="0"/>
+              <a:rPr lang="en-US"/>
               <a:t>Fourth level</a:t>
             </a:r>
           </a:p>
           <a:p>
             <a:pPr lvl="4"/>
             <a:r>
-              <a:rPr lang="en-US" smtClean="0"/>
+              <a:rPr lang="en-US"/>
               <a:t>Fifth level</a:t>
             </a:r>
-            <a:endParaRPr lang="en-US"/>
           </a:p>
         </p:txBody>
       </p:sp>
@@ -1770,7 +1771,7 @@
           <a:p>
             <a:fld id="{5BCAD085-E8A6-8845-BD4E-CB4CCA059FC4}" type="datetimeFigureOut">
               <a:rPr lang="en-US" smtClean="0"/>
-              <a:t>1/27/13</a:t>
+              <a:t>8/6/2026</a:t>
             </a:fld>
             <a:endParaRPr lang="en-US"/>
           </a:p>
@@ -1864,10 +1865,9 @@
           <a:lstStyle/>
           <a:p>
             <a:r>
-              <a:rPr lang="en-US" smtClean="0"/>
+              <a:rPr lang="en-US"/>
               <a:t>Click to edit Master title style</a:t>
             </a:r>
-            <a:endParaRPr lang="en-US"/>
           </a:p>
         </p:txBody>
       </p:sp>
@@ -1888,7 +1888,7 @@
           <a:p>
             <a:fld id="{5BCAD085-E8A6-8845-BD4E-CB4CCA059FC4}" type="datetimeFigureOut">
               <a:rPr lang="en-US" smtClean="0"/>
-              <a:t>1/27/13</a:t>
+              <a:t>8/6/2026</a:t>
             </a:fld>
             <a:endParaRPr lang="en-US"/>
           </a:p>
@@ -1983,7 +1983,7 @@
           <a:p>
             <a:fld id="{5BCAD085-E8A6-8845-BD4E-CB4CCA059FC4}" type="datetimeFigureOut">
               <a:rPr lang="en-US" smtClean="0"/>
-              <a:t>1/27/13</a:t>
+              <a:t>8/6/2026</a:t>
             </a:fld>
             <a:endParaRPr lang="en-US"/>
           </a:p>
@@ -2086,10 +2086,9 @@
           </a:lstStyle>
           <a:p>
             <a:r>
-              <a:rPr lang="en-US" smtClean="0"/>
+              <a:rPr lang="en-US"/>
               <a:t>Click to edit Master title style</a:t>
             </a:r>
-            <a:endParaRPr lang="en-US"/>
           </a:p>
         </p:txBody>
       </p:sp>
@@ -2143,38 +2142,37 @@
           <a:p>
             <a:pPr lvl="0"/>
             <a:r>
-              <a:rPr lang="en-US" smtClean="0"/>
+              <a:rPr lang="en-US"/>
               <a:t>Click to edit Master text styles</a:t>
             </a:r>
           </a:p>
           <a:p>
             <a:pPr lvl="1"/>
             <a:r>
-              <a:rPr lang="en-US" smtClean="0"/>
+              <a:rPr lang="en-US"/>
               <a:t>Second level</a:t>
             </a:r>
           </a:p>
           <a:p>
             <a:pPr lvl="2"/>
             <a:r>
-              <a:rPr lang="en-US" smtClean="0"/>
+              <a:rPr lang="en-US"/>
               <a:t>Third level</a:t>
             </a:r>
           </a:p>
           <a:p>
             <a:pPr lvl="3"/>
             <a:r>
-              <a:rPr lang="en-US" smtClean="0"/>
+              <a:rPr lang="en-US"/>
               <a:t>Fourth level</a:t>
             </a:r>
           </a:p>
           <a:p>
             <a:pPr lvl="4"/>
             <a:r>
-              <a:rPr lang="en-US" smtClean="0"/>
+              <a:rPr lang="en-US"/>
               <a:t>Fifth level</a:t>
             </a:r>
-            <a:endParaRPr lang="en-US"/>
           </a:p>
         </p:txBody>
       </p:sp>
@@ -2237,7 +2235,7 @@
           <a:p>
             <a:pPr lvl="0"/>
             <a:r>
-              <a:rPr lang="en-US" smtClean="0"/>
+              <a:rPr lang="en-US"/>
               <a:t>Click to edit Master text styles</a:t>
             </a:r>
           </a:p>
@@ -2260,7 +2258,7 @@
           <a:p>
             <a:fld id="{5BCAD085-E8A6-8845-BD4E-CB4CCA059FC4}" type="datetimeFigureOut">
               <a:rPr lang="en-US" smtClean="0"/>
-              <a:t>1/27/13</a:t>
+              <a:t>8/6/2026</a:t>
             </a:fld>
             <a:endParaRPr lang="en-US"/>
           </a:p>
@@ -2363,10 +2361,9 @@
           </a:lstStyle>
           <a:p>
             <a:r>
-              <a:rPr lang="en-US" smtClean="0"/>
+              <a:rPr lang="en-US"/>
               <a:t>Click to edit Master title style</a:t>
             </a:r>
-            <a:endParaRPr lang="en-US"/>
           </a:p>
         </p:txBody>
       </p:sp>
@@ -2490,7 +2487,7 @@
           <a:p>
             <a:pPr lvl="0"/>
             <a:r>
-              <a:rPr lang="en-US" smtClean="0"/>
+              <a:rPr lang="en-US"/>
               <a:t>Click to edit Master text styles</a:t>
             </a:r>
           </a:p>
@@ -2513,7 +2510,7 @@
           <a:p>
             <a:fld id="{5BCAD085-E8A6-8845-BD4E-CB4CCA059FC4}" type="datetimeFigureOut">
               <a:rPr lang="en-US" smtClean="0"/>
-              <a:t>1/27/13</a:t>
+              <a:t>8/6/2026</a:t>
             </a:fld>
             <a:endParaRPr lang="en-US"/>
           </a:p>
@@ -2622,10 +2619,9 @@
           <a:lstStyle/>
           <a:p>
             <a:r>
-              <a:rPr lang="en-US" smtClean="0"/>
+              <a:rPr lang="en-US"/>
               <a:t>Click to edit Master title style</a:t>
             </a:r>
-            <a:endParaRPr lang="en-US"/>
           </a:p>
         </p:txBody>
       </p:sp>
@@ -2656,38 +2652,37 @@
           <a:p>
             <a:pPr lvl="0"/>
             <a:r>
-              <a:rPr lang="en-US" smtClean="0"/>
+              <a:rPr lang="en-US"/>
               <a:t>Click to edit Master text styles</a:t>
             </a:r>
           </a:p>
           <a:p>
             <a:pPr lvl="1"/>
             <a:r>
-              <a:rPr lang="en-US" smtClean="0"/>
+              <a:rPr lang="en-US"/>
               <a:t>Second level</a:t>
             </a:r>
           </a:p>
           <a:p>
             <a:pPr lvl="2"/>
             <a:r>
-              <a:rPr lang="en-US" smtClean="0"/>
+              <a:rPr lang="en-US"/>
               <a:t>Third level</a:t>
             </a:r>
           </a:p>
           <a:p>
             <a:pPr lvl="3"/>
             <a:r>
-              <a:rPr lang="en-US" smtClean="0"/>
+              <a:rPr lang="en-US"/>
               <a:t>Fourth level</a:t>
             </a:r>
           </a:p>
           <a:p>
             <a:pPr lvl="4"/>
             <a:r>
-              <a:rPr lang="en-US" smtClean="0"/>
+              <a:rPr lang="en-US"/>
               <a:t>Fifth level</a:t>
             </a:r>
-            <a:endParaRPr lang="en-US"/>
           </a:p>
         </p:txBody>
       </p:sp>
@@ -2726,7 +2721,7 @@
           <a:p>
             <a:fld id="{5BCAD085-E8A6-8845-BD4E-CB4CCA059FC4}" type="datetimeFigureOut">
               <a:rPr lang="en-US" smtClean="0"/>
-              <a:t>1/27/13</a:t>
+              <a:t>8/6/2026</a:t>
             </a:fld>
             <a:endParaRPr lang="en-US"/>
           </a:p>
@@ -3085,7 +3080,7 @@
 </file>
 
 <file path=ppt/slides/slide1.xml><?xml version="1.0" encoding="utf-8"?>
-<p:sld xmlns:a="http://schemas.openxmlformats.org/drawingml/2006/main" xmlns:p="http://schemas.openxmlformats.org/presentationml/2006/main" xmlns:r="http://schemas.openxmlformats.org/officeDocument/2006/relationships">
+<p:sld xmlns:a="http://schemas.openxmlformats.org/drawingml/2006/main" xmlns:r="http://schemas.openxmlformats.org/officeDocument/2006/relationships" xmlns:p="http://schemas.openxmlformats.org/presentationml/2006/main">
   <p:cSld>
     <p:spTree>
       <p:nvGrpSpPr>
@@ -3093,7 +3088,14 @@
         <p:cNvGrpSpPr/>
         <p:nvPr/>
       </p:nvGrpSpPr>
-      <p:grpSpPr/>
+      <p:grpSpPr>
+        <a:xfrm>
+          <a:off x="0" y="0"/>
+          <a:ext cx="0" cy="0"/>
+          <a:chOff x="0" y="0"/>
+          <a:chExt cx="0" cy="0"/>
+        </a:xfrm>
+      </p:grpSpPr>
       <p:sp>
         <p:nvSpPr>
           <p:cNvPr id="2" name="Rectangle 1"/>
@@ -3133,7 +3135,9 @@
         <p:txBody>
           <a:bodyPr rtlCol="0" anchor="ctr"/>
           <a:lstStyle/>
-          <a:p/>
+          <a:p>
+            <a:endParaRPr/>
+          </a:p>
         </p:txBody>
       </p:sp>
       <p:sp>
@@ -3175,7 +3179,9 @@
         <p:txBody>
           <a:bodyPr rtlCol="0" anchor="ctr"/>
           <a:lstStyle/>
-          <a:p/>
+          <a:p>
+            <a:endParaRPr/>
+          </a:p>
         </p:txBody>
       </p:sp>
       <p:sp>
@@ -3195,7 +3201,7 @@
           <a:noFill/>
         </p:spPr>
         <p:txBody>
-          <a:bodyPr wrap="square" anchor="t" lIns="0" rIns="0" tIns="0" bIns="0">
+          <a:bodyPr wrap="square" lIns="0" tIns="0" rIns="0" bIns="0" anchor="t">
             <a:spAutoFit/>
           </a:bodyPr>
           <a:lstStyle/>
@@ -3237,7 +3243,7 @@
           <a:noFill/>
         </p:spPr>
         <p:txBody>
-          <a:bodyPr wrap="square" anchor="t" lIns="0" rIns="0" tIns="0" bIns="0">
+          <a:bodyPr wrap="square" lIns="0" tIns="0" rIns="0" bIns="0" anchor="t">
             <a:spAutoFit/>
           </a:bodyPr>
           <a:lstStyle/>
@@ -3279,7 +3285,7 @@
           <a:noFill/>
         </p:spPr>
         <p:txBody>
-          <a:bodyPr wrap="square" anchor="t" lIns="0" rIns="0" tIns="0" bIns="0">
+          <a:bodyPr wrap="square" lIns="0" tIns="0" rIns="0" bIns="0" anchor="t">
             <a:spAutoFit/>
           </a:bodyPr>
           <a:lstStyle/>
@@ -3321,7 +3327,7 @@
           <a:noFill/>
         </p:spPr>
         <p:txBody>
-          <a:bodyPr wrap="square" anchor="t" lIns="0" rIns="0" tIns="0" bIns="0">
+          <a:bodyPr wrap="square" lIns="0" tIns="0" rIns="0" bIns="0" anchor="t">
             <a:spAutoFit/>
           </a:bodyPr>
           <a:lstStyle/>
@@ -3355,7 +3361,7 @@
 </file>
 
 <file path=ppt/slides/slide2.xml><?xml version="1.0" encoding="utf-8"?>
-<p:sld xmlns:a="http://schemas.openxmlformats.org/drawingml/2006/main" xmlns:p="http://schemas.openxmlformats.org/presentationml/2006/main" xmlns:r="http://schemas.openxmlformats.org/officeDocument/2006/relationships">
+<p:sld xmlns:a="http://schemas.openxmlformats.org/drawingml/2006/main" xmlns:r="http://schemas.openxmlformats.org/officeDocument/2006/relationships" xmlns:p="http://schemas.openxmlformats.org/presentationml/2006/main">
   <p:cSld>
     <p:spTree>
       <p:nvGrpSpPr>
@@ -3363,7 +3369,14 @@
         <p:cNvGrpSpPr/>
         <p:nvPr/>
       </p:nvGrpSpPr>
-      <p:grpSpPr/>
+      <p:grpSpPr>
+        <a:xfrm>
+          <a:off x="0" y="0"/>
+          <a:ext cx="0" cy="0"/>
+          <a:chOff x="0" y="0"/>
+          <a:chExt cx="0" cy="0"/>
+        </a:xfrm>
+      </p:grpSpPr>
       <p:sp>
         <p:nvSpPr>
           <p:cNvPr id="2" name="Rectangle 1"/>
@@ -3403,7 +3416,9 @@
         <p:txBody>
           <a:bodyPr rtlCol="0" anchor="ctr"/>
           <a:lstStyle/>
-          <a:p/>
+          <a:p>
+            <a:endParaRPr/>
+          </a:p>
         </p:txBody>
       </p:sp>
       <p:sp>
@@ -3423,7 +3438,7 @@
           <a:noFill/>
         </p:spPr>
         <p:txBody>
-          <a:bodyPr wrap="square" anchor="t" lIns="0" rIns="0" tIns="0" bIns="0">
+          <a:bodyPr wrap="square" lIns="0" tIns="0" rIns="0" bIns="0" anchor="t">
             <a:spAutoFit/>
           </a:bodyPr>
           <a:lstStyle/>
@@ -3465,7 +3480,7 @@
           <a:noFill/>
         </p:spPr>
         <p:txBody>
-          <a:bodyPr wrap="square" anchor="t" lIns="0" rIns="0" tIns="0" bIns="0">
+          <a:bodyPr wrap="square" lIns="0" tIns="0" rIns="0" bIns="0" anchor="t">
             <a:spAutoFit/>
           </a:bodyPr>
           <a:lstStyle/>
@@ -3533,7 +3548,9 @@
         <p:txBody>
           <a:bodyPr rtlCol="0" anchor="ctr"/>
           <a:lstStyle/>
-          <a:p/>
+          <a:p>
+            <a:endParaRPr/>
+          </a:p>
         </p:txBody>
       </p:sp>
       <p:sp>
@@ -3575,7 +3592,9 @@
         <p:txBody>
           <a:bodyPr rtlCol="0" anchor="ctr"/>
           <a:lstStyle/>
-          <a:p/>
+          <a:p>
+            <a:endParaRPr/>
+          </a:p>
         </p:txBody>
       </p:sp>
       <p:sp>
@@ -3595,7 +3614,7 @@
           <a:noFill/>
         </p:spPr>
         <p:txBody>
-          <a:bodyPr wrap="square" anchor="t" lIns="0" rIns="0" tIns="0" bIns="0">
+          <a:bodyPr wrap="square" lIns="0" tIns="0" rIns="0" bIns="0" anchor="t">
             <a:spAutoFit/>
           </a:bodyPr>
           <a:lstStyle/>
@@ -3637,7 +3656,7 @@
           <a:noFill/>
         </p:spPr>
         <p:txBody>
-          <a:bodyPr wrap="square" anchor="t" lIns="0" rIns="0" tIns="0" bIns="0">
+          <a:bodyPr wrap="square" lIns="0" tIns="0" rIns="0" bIns="0" anchor="t">
             <a:spAutoFit/>
           </a:bodyPr>
           <a:lstStyle/>
@@ -3679,7 +3698,7 @@
           <a:noFill/>
         </p:spPr>
         <p:txBody>
-          <a:bodyPr wrap="square" anchor="t" lIns="0" rIns="0" tIns="0" bIns="0">
+          <a:bodyPr wrap="square" lIns="0" tIns="0" rIns="0" bIns="0" anchor="t">
             <a:spAutoFit/>
           </a:bodyPr>
           <a:lstStyle/>
@@ -3823,7 +3842,9 @@
         <p:txBody>
           <a:bodyPr rtlCol="0" anchor="ctr"/>
           <a:lstStyle/>
-          <a:p/>
+          <a:p>
+            <a:endParaRPr/>
+          </a:p>
         </p:txBody>
       </p:sp>
       <p:sp>
@@ -3865,7 +3886,9 @@
         <p:txBody>
           <a:bodyPr rtlCol="0" anchor="ctr"/>
           <a:lstStyle/>
-          <a:p/>
+          <a:p>
+            <a:endParaRPr/>
+          </a:p>
         </p:txBody>
       </p:sp>
       <p:sp>
@@ -3885,7 +3908,7 @@
           <a:noFill/>
         </p:spPr>
         <p:txBody>
-          <a:bodyPr wrap="square" anchor="t" lIns="0" rIns="0" tIns="0" bIns="0">
+          <a:bodyPr wrap="square" lIns="0" tIns="0" rIns="0" bIns="0" anchor="t">
             <a:spAutoFit/>
           </a:bodyPr>
           <a:lstStyle/>
@@ -3927,7 +3950,7 @@
           <a:noFill/>
         </p:spPr>
         <p:txBody>
-          <a:bodyPr wrap="square" anchor="t" lIns="0" rIns="0" tIns="0" bIns="0">
+          <a:bodyPr wrap="square" lIns="0" tIns="0" rIns="0" bIns="0" anchor="t">
             <a:spAutoFit/>
           </a:bodyPr>
           <a:lstStyle/>
@@ -3969,7 +3992,7 @@
           <a:noFill/>
         </p:spPr>
         <p:txBody>
-          <a:bodyPr wrap="square" anchor="t" lIns="0" rIns="0" tIns="0" bIns="0">
+          <a:bodyPr wrap="square" lIns="0" tIns="0" rIns="0" bIns="0" anchor="t">
             <a:spAutoFit/>
           </a:bodyPr>
           <a:lstStyle/>
@@ -4113,7 +4136,9 @@
         <p:txBody>
           <a:bodyPr rtlCol="0" anchor="ctr"/>
           <a:lstStyle/>
-          <a:p/>
+          <a:p>
+            <a:endParaRPr/>
+          </a:p>
         </p:txBody>
       </p:sp>
       <p:sp>
@@ -4155,7 +4180,9 @@
         <p:txBody>
           <a:bodyPr rtlCol="0" anchor="ctr"/>
           <a:lstStyle/>
-          <a:p/>
+          <a:p>
+            <a:endParaRPr/>
+          </a:p>
         </p:txBody>
       </p:sp>
       <p:sp>
@@ -4175,7 +4202,7 @@
           <a:noFill/>
         </p:spPr>
         <p:txBody>
-          <a:bodyPr wrap="square" anchor="t" lIns="0" rIns="0" tIns="0" bIns="0">
+          <a:bodyPr wrap="square" lIns="0" tIns="0" rIns="0" bIns="0" anchor="t">
             <a:spAutoFit/>
           </a:bodyPr>
           <a:lstStyle/>
@@ -4217,7 +4244,7 @@
           <a:noFill/>
         </p:spPr>
         <p:txBody>
-          <a:bodyPr wrap="square" anchor="t" lIns="0" rIns="0" tIns="0" bIns="0">
+          <a:bodyPr wrap="square" lIns="0" tIns="0" rIns="0" bIns="0" anchor="t">
             <a:spAutoFit/>
           </a:bodyPr>
           <a:lstStyle/>
@@ -4259,7 +4286,7 @@
           <a:noFill/>
         </p:spPr>
         <p:txBody>
-          <a:bodyPr wrap="square" anchor="t" lIns="0" rIns="0" tIns="0" bIns="0">
+          <a:bodyPr wrap="square" lIns="0" tIns="0" rIns="0" bIns="0" anchor="t">
             <a:spAutoFit/>
           </a:bodyPr>
           <a:lstStyle/>
@@ -4401,7 +4428,9 @@
         <p:txBody>
           <a:bodyPr rtlCol="0" anchor="ctr"/>
           <a:lstStyle/>
-          <a:p/>
+          <a:p>
+            <a:endParaRPr/>
+          </a:p>
         </p:txBody>
       </p:sp>
       <p:sp>
@@ -4421,7 +4450,7 @@
           <a:noFill/>
         </p:spPr>
         <p:txBody>
-          <a:bodyPr wrap="square" anchor="t" lIns="0" rIns="0" tIns="0" bIns="0">
+          <a:bodyPr wrap="square" lIns="0" tIns="0" rIns="0" bIns="0" anchor="t">
             <a:spAutoFit/>
           </a:bodyPr>
           <a:lstStyle/>
@@ -4455,7 +4484,7 @@
 </file>
 
 <file path=ppt/slides/slide3.xml><?xml version="1.0" encoding="utf-8"?>
-<p:sld xmlns:a="http://schemas.openxmlformats.org/drawingml/2006/main" xmlns:p="http://schemas.openxmlformats.org/presentationml/2006/main" xmlns:r="http://schemas.openxmlformats.org/officeDocument/2006/relationships">
+<p:sld xmlns:a="http://schemas.openxmlformats.org/drawingml/2006/main" xmlns:r="http://schemas.openxmlformats.org/officeDocument/2006/relationships" xmlns:p="http://schemas.openxmlformats.org/presentationml/2006/main">
   <p:cSld>
     <p:spTree>
       <p:nvGrpSpPr>
@@ -4463,7 +4492,14 @@
         <p:cNvGrpSpPr/>
         <p:nvPr/>
       </p:nvGrpSpPr>
-      <p:grpSpPr/>
+      <p:grpSpPr>
+        <a:xfrm>
+          <a:off x="0" y="0"/>
+          <a:ext cx="0" cy="0"/>
+          <a:chOff x="0" y="0"/>
+          <a:chExt cx="0" cy="0"/>
+        </a:xfrm>
+      </p:grpSpPr>
       <p:sp>
         <p:nvSpPr>
           <p:cNvPr id="2" name="Rectangle 1"/>
@@ -4503,7 +4539,9 @@
         <p:txBody>
           <a:bodyPr rtlCol="0" anchor="ctr"/>
           <a:lstStyle/>
-          <a:p/>
+          <a:p>
+            <a:endParaRPr/>
+          </a:p>
         </p:txBody>
       </p:sp>
       <p:sp>
@@ -4523,7 +4561,7 @@
           <a:noFill/>
         </p:spPr>
         <p:txBody>
-          <a:bodyPr wrap="square" anchor="t" lIns="0" rIns="0" tIns="0" bIns="0">
+          <a:bodyPr wrap="square" lIns="0" tIns="0" rIns="0" bIns="0" anchor="t">
             <a:spAutoFit/>
           </a:bodyPr>
           <a:lstStyle/>
@@ -4565,7 +4603,7 @@
           <a:noFill/>
         </p:spPr>
         <p:txBody>
-          <a:bodyPr wrap="square" anchor="t" lIns="0" rIns="0" tIns="0" bIns="0">
+          <a:bodyPr wrap="square" lIns="0" tIns="0" rIns="0" bIns="0" anchor="t">
             <a:spAutoFit/>
           </a:bodyPr>
           <a:lstStyle/>
@@ -4633,7 +4671,9 @@
         <p:txBody>
           <a:bodyPr rtlCol="0" anchor="ctr"/>
           <a:lstStyle/>
-          <a:p/>
+          <a:p>
+            <a:endParaRPr/>
+          </a:p>
         </p:txBody>
       </p:sp>
       <p:sp>
@@ -4653,7 +4693,7 @@
           <a:noFill/>
         </p:spPr>
         <p:txBody>
-          <a:bodyPr wrap="square" anchor="t" lIns="0" rIns="0" tIns="0" bIns="0">
+          <a:bodyPr wrap="square" lIns="0" tIns="0" rIns="0" bIns="0" anchor="t">
             <a:spAutoFit/>
           </a:bodyPr>
           <a:lstStyle/>
@@ -4721,7 +4761,9 @@
         <p:txBody>
           <a:bodyPr rtlCol="0" anchor="ctr"/>
           <a:lstStyle/>
-          <a:p/>
+          <a:p>
+            <a:endParaRPr/>
+          </a:p>
         </p:txBody>
       </p:sp>
       <p:sp>
@@ -4741,7 +4783,7 @@
           <a:noFill/>
         </p:spPr>
         <p:txBody>
-          <a:bodyPr wrap="square" anchor="t" lIns="0" rIns="0" tIns="0" bIns="0">
+          <a:bodyPr wrap="square" lIns="0" tIns="0" rIns="0" bIns="0" anchor="t">
             <a:spAutoFit/>
           </a:bodyPr>
           <a:lstStyle/>
@@ -4783,7 +4825,7 @@
           <a:noFill/>
         </p:spPr>
         <p:txBody>
-          <a:bodyPr wrap="square" anchor="t" lIns="0" rIns="0" tIns="0" bIns="0">
+          <a:bodyPr wrap="square" lIns="0" tIns="0" rIns="0" bIns="0" anchor="t">
             <a:spAutoFit/>
           </a:bodyPr>
           <a:lstStyle/>
@@ -4853,15 +4895,12 @@
                 <a:spcPts val="400"/>
               </a:spcAft>
             </a:pPr>
-            <a:r>
-              <a:rPr sz="1150" b="0">
-                <a:solidFill>
-                  <a:srgbClr val="6B7280"/>
-                </a:solidFill>
-                <a:latin typeface="Meiryo"/>
-              </a:rPr>
-              <a:t/>
-            </a:r>
+            <a:endParaRPr sz="1150" b="0">
+              <a:solidFill>
+                <a:srgbClr val="6B7280"/>
+              </a:solidFill>
+              <a:latin typeface="Meiryo"/>
+            </a:endParaRPr>
           </a:p>
           <a:p>
             <a:pPr algn="l">
@@ -4927,7 +4966,9 @@
         <p:txBody>
           <a:bodyPr rtlCol="0" anchor="ctr"/>
           <a:lstStyle/>
-          <a:p/>
+          <a:p>
+            <a:endParaRPr/>
+          </a:p>
         </p:txBody>
       </p:sp>
       <p:sp>
@@ -4947,7 +4988,7 @@
           <a:noFill/>
         </p:spPr>
         <p:txBody>
-          <a:bodyPr wrap="square" anchor="t" lIns="0" rIns="0" tIns="0" bIns="0">
+          <a:bodyPr wrap="square" lIns="0" tIns="0" rIns="0" bIns="0" anchor="t">
             <a:spAutoFit/>
           </a:bodyPr>
           <a:lstStyle/>
@@ -4989,7 +5030,7 @@
           <a:noFill/>
         </p:spPr>
         <p:txBody>
-          <a:bodyPr wrap="square" anchor="t" lIns="0" rIns="0" tIns="0" bIns="0">
+          <a:bodyPr wrap="square" lIns="0" tIns="0" rIns="0" bIns="0" anchor="t">
             <a:spAutoFit/>
           </a:bodyPr>
           <a:lstStyle/>
@@ -5059,15 +5100,12 @@
                 <a:spcPts val="400"/>
               </a:spcAft>
             </a:pPr>
-            <a:r>
-              <a:rPr sz="1150" b="0">
-                <a:solidFill>
-                  <a:srgbClr val="6B7280"/>
-                </a:solidFill>
-                <a:latin typeface="Meiryo"/>
-              </a:rPr>
-              <a:t/>
-            </a:r>
+            <a:endParaRPr sz="1150" b="0">
+              <a:solidFill>
+                <a:srgbClr val="6B7280"/>
+              </a:solidFill>
+              <a:latin typeface="Meiryo"/>
+            </a:endParaRPr>
           </a:p>
           <a:p>
             <a:pPr algn="l">
@@ -5129,7 +5167,9 @@
         <p:txBody>
           <a:bodyPr rtlCol="0" anchor="ctr"/>
           <a:lstStyle/>
-          <a:p/>
+          <a:p>
+            <a:endParaRPr/>
+          </a:p>
         </p:txBody>
       </p:sp>
       <p:sp>
@@ -5175,7 +5215,9 @@
         <p:txBody>
           <a:bodyPr rtlCol="0" anchor="ctr"/>
           <a:lstStyle/>
-          <a:p/>
+          <a:p>
+            <a:endParaRPr/>
+          </a:p>
         </p:txBody>
       </p:sp>
       <p:sp>
@@ -5195,7 +5237,7 @@
           <a:noFill/>
         </p:spPr>
         <p:txBody>
-          <a:bodyPr wrap="square" anchor="t" lIns="0" rIns="0" tIns="0" bIns="0">
+          <a:bodyPr wrap="square" lIns="0" tIns="0" rIns="0" bIns="0" anchor="t">
             <a:spAutoFit/>
           </a:bodyPr>
           <a:lstStyle/>
@@ -5263,7 +5305,9 @@
         <p:txBody>
           <a:bodyPr rtlCol="0" anchor="ctr"/>
           <a:lstStyle/>
-          <a:p/>
+          <a:p>
+            <a:endParaRPr/>
+          </a:p>
         </p:txBody>
       </p:sp>
       <p:sp>
@@ -5283,7 +5327,7 @@
           <a:noFill/>
         </p:spPr>
         <p:txBody>
-          <a:bodyPr wrap="square" anchor="t" lIns="0" rIns="0" tIns="0" bIns="0">
+          <a:bodyPr wrap="square" lIns="0" tIns="0" rIns="0" bIns="0" anchor="t">
             <a:spAutoFit/>
           </a:bodyPr>
           <a:lstStyle/>
@@ -5325,7 +5369,7 @@
           <a:noFill/>
         </p:spPr>
         <p:txBody>
-          <a:bodyPr wrap="square" anchor="t" lIns="0" rIns="0" tIns="0" bIns="0">
+          <a:bodyPr wrap="square" lIns="0" tIns="0" rIns="0" bIns="0" anchor="t">
             <a:spAutoFit/>
           </a:bodyPr>
           <a:lstStyle/>
@@ -5414,15 +5458,12 @@
                 <a:spcPts val="400"/>
               </a:spcAft>
             </a:pPr>
-            <a:r>
-              <a:rPr sz="1150" b="0">
-                <a:solidFill>
-                  <a:srgbClr val="6B7280"/>
-                </a:solidFill>
-                <a:latin typeface="Meiryo"/>
-              </a:rPr>
-              <a:t/>
-            </a:r>
+            <a:endParaRPr sz="1150" b="0">
+              <a:solidFill>
+                <a:srgbClr val="6B7280"/>
+              </a:solidFill>
+              <a:latin typeface="Meiryo"/>
+            </a:endParaRPr>
           </a:p>
           <a:p>
             <a:pPr algn="l">
@@ -5486,7 +5527,9 @@
         <p:txBody>
           <a:bodyPr rtlCol="0" anchor="ctr"/>
           <a:lstStyle/>
-          <a:p/>
+          <a:p>
+            <a:endParaRPr/>
+          </a:p>
         </p:txBody>
       </p:sp>
       <p:sp>
@@ -5506,7 +5549,7 @@
           <a:noFill/>
         </p:spPr>
         <p:txBody>
-          <a:bodyPr wrap="square" anchor="t" lIns="0" rIns="0" tIns="0" bIns="0">
+          <a:bodyPr wrap="square" lIns="0" tIns="0" rIns="0" bIns="0" anchor="t">
             <a:spAutoFit/>
           </a:bodyPr>
           <a:lstStyle/>
@@ -5559,7 +5602,7 @@
 </file>
 
 <file path=ppt/slides/slide4.xml><?xml version="1.0" encoding="utf-8"?>
-<p:sld xmlns:a="http://schemas.openxmlformats.org/drawingml/2006/main" xmlns:p="http://schemas.openxmlformats.org/presentationml/2006/main" xmlns:r="http://schemas.openxmlformats.org/officeDocument/2006/relationships">
+<p:sld xmlns:a="http://schemas.openxmlformats.org/drawingml/2006/main" xmlns:r="http://schemas.openxmlformats.org/officeDocument/2006/relationships" xmlns:p="http://schemas.openxmlformats.org/presentationml/2006/main">
   <p:cSld>
     <p:spTree>
       <p:nvGrpSpPr>
@@ -5567,7 +5610,14 @@
         <p:cNvGrpSpPr/>
         <p:nvPr/>
       </p:nvGrpSpPr>
-      <p:grpSpPr/>
+      <p:grpSpPr>
+        <a:xfrm>
+          <a:off x="0" y="0"/>
+          <a:ext cx="0" cy="0"/>
+          <a:chOff x="0" y="0"/>
+          <a:chExt cx="0" cy="0"/>
+        </a:xfrm>
+      </p:grpSpPr>
       <p:sp>
         <p:nvSpPr>
           <p:cNvPr id="2" name="Rectangle 1"/>
@@ -5607,7 +5657,9 @@
         <p:txBody>
           <a:bodyPr rtlCol="0" anchor="ctr"/>
           <a:lstStyle/>
-          <a:p/>
+          <a:p>
+            <a:endParaRPr/>
+          </a:p>
         </p:txBody>
       </p:sp>
       <p:sp>
@@ -5627,7 +5679,7 @@
           <a:noFill/>
         </p:spPr>
         <p:txBody>
-          <a:bodyPr wrap="square" anchor="t" lIns="0" rIns="0" tIns="0" bIns="0">
+          <a:bodyPr wrap="square" lIns="0" tIns="0" rIns="0" bIns="0" anchor="t">
             <a:spAutoFit/>
           </a:bodyPr>
           <a:lstStyle/>
@@ -5669,7 +5721,7 @@
           <a:noFill/>
         </p:spPr>
         <p:txBody>
-          <a:bodyPr wrap="square" anchor="t" lIns="0" rIns="0" tIns="0" bIns="0">
+          <a:bodyPr wrap="square" lIns="0" tIns="0" rIns="0" bIns="0" anchor="t">
             <a:spAutoFit/>
           </a:bodyPr>
           <a:lstStyle/>
@@ -5711,7 +5763,7 @@
           <a:noFill/>
         </p:spPr>
         <p:txBody>
-          <a:bodyPr wrap="square" anchor="t" lIns="0" rIns="0" tIns="0" bIns="0">
+          <a:bodyPr wrap="square" lIns="0" tIns="0" rIns="0" bIns="0" anchor="t">
             <a:spAutoFit/>
           </a:bodyPr>
           <a:lstStyle/>
@@ -5777,7 +5829,9 @@
         <p:txBody>
           <a:bodyPr rtlCol="0" anchor="ctr"/>
           <a:lstStyle/>
-          <a:p/>
+          <a:p>
+            <a:endParaRPr/>
+          </a:p>
         </p:txBody>
       </p:sp>
       <p:sp>
@@ -5797,7 +5851,7 @@
           <a:noFill/>
         </p:spPr>
         <p:txBody>
-          <a:bodyPr wrap="square" anchor="t" lIns="0" rIns="0" tIns="0" bIns="0">
+          <a:bodyPr wrap="square" lIns="0" tIns="0" rIns="0" bIns="0" anchor="t">
             <a:spAutoFit/>
           </a:bodyPr>
           <a:lstStyle/>
@@ -5863,7 +5917,9 @@
         <p:txBody>
           <a:bodyPr rtlCol="0" anchor="ctr"/>
           <a:lstStyle/>
-          <a:p/>
+          <a:p>
+            <a:endParaRPr/>
+          </a:p>
         </p:txBody>
       </p:sp>
       <p:sp>
@@ -5883,7 +5939,7 @@
           <a:noFill/>
         </p:spPr>
         <p:txBody>
-          <a:bodyPr wrap="square" anchor="t" lIns="0" rIns="0" tIns="0" bIns="0">
+          <a:bodyPr wrap="square" lIns="0" tIns="0" rIns="0" bIns="0" anchor="t">
             <a:spAutoFit/>
           </a:bodyPr>
           <a:lstStyle/>
@@ -5925,7 +5981,7 @@
           <a:noFill/>
         </p:spPr>
         <p:txBody>
-          <a:bodyPr wrap="square" anchor="t" lIns="0" rIns="0" tIns="0" bIns="0">
+          <a:bodyPr wrap="square" lIns="0" tIns="0" rIns="0" bIns="0" anchor="t">
             <a:spAutoFit/>
           </a:bodyPr>
           <a:lstStyle/>
@@ -5967,7 +6023,7 @@
           <a:noFill/>
         </p:spPr>
         <p:txBody>
-          <a:bodyPr wrap="square" anchor="t" lIns="0" rIns="0" tIns="0" bIns="0">
+          <a:bodyPr wrap="square" lIns="0" tIns="0" rIns="0" bIns="0" anchor="t">
             <a:spAutoFit/>
           </a:bodyPr>
           <a:lstStyle/>
@@ -6009,7 +6065,7 @@
           <a:noFill/>
         </p:spPr>
         <p:txBody>
-          <a:bodyPr wrap="square" anchor="t" lIns="0" rIns="0" tIns="0" bIns="0">
+          <a:bodyPr wrap="square" lIns="0" tIns="0" rIns="0" bIns="0" anchor="t">
             <a:spAutoFit/>
           </a:bodyPr>
           <a:lstStyle/>
@@ -6073,7 +6129,9 @@
         <p:txBody>
           <a:bodyPr rtlCol="0" anchor="ctr"/>
           <a:lstStyle/>
-          <a:p/>
+          <a:p>
+            <a:endParaRPr/>
+          </a:p>
         </p:txBody>
       </p:sp>
       <p:sp>
@@ -6093,7 +6151,7 @@
           <a:noFill/>
         </p:spPr>
         <p:txBody>
-          <a:bodyPr wrap="square" anchor="t" lIns="0" rIns="0" tIns="0" bIns="0">
+          <a:bodyPr wrap="square" lIns="0" tIns="0" rIns="0" bIns="0" anchor="t">
             <a:spAutoFit/>
           </a:bodyPr>
           <a:lstStyle/>
@@ -6135,7 +6193,7 @@
           <a:noFill/>
         </p:spPr>
         <p:txBody>
-          <a:bodyPr wrap="square" anchor="t" lIns="0" rIns="0" tIns="0" bIns="0">
+          <a:bodyPr wrap="square" lIns="0" tIns="0" rIns="0" bIns="0" anchor="t">
             <a:spAutoFit/>
           </a:bodyPr>
           <a:lstStyle/>
@@ -6177,7 +6235,7 @@
           <a:noFill/>
         </p:spPr>
         <p:txBody>
-          <a:bodyPr wrap="square" anchor="t" lIns="0" rIns="0" tIns="0" bIns="0">
+          <a:bodyPr wrap="square" lIns="0" tIns="0" rIns="0" bIns="0" anchor="t">
             <a:spAutoFit/>
           </a:bodyPr>
           <a:lstStyle/>
@@ -6219,7 +6277,7 @@
           <a:noFill/>
         </p:spPr>
         <p:txBody>
-          <a:bodyPr wrap="square" anchor="t" lIns="0" rIns="0" tIns="0" bIns="0">
+          <a:bodyPr wrap="square" lIns="0" tIns="0" rIns="0" bIns="0" anchor="t">
             <a:spAutoFit/>
           </a:bodyPr>
           <a:lstStyle/>
@@ -6261,7 +6319,7 @@
           <a:noFill/>
         </p:spPr>
         <p:txBody>
-          <a:bodyPr wrap="square" anchor="t" lIns="0" rIns="0" tIns="0" bIns="0">
+          <a:bodyPr wrap="square" lIns="0" tIns="0" rIns="0" bIns="0" anchor="t">
             <a:spAutoFit/>
           </a:bodyPr>
           <a:lstStyle/>
@@ -6303,7 +6361,7 @@
           <a:noFill/>
         </p:spPr>
         <p:txBody>
-          <a:bodyPr wrap="square" anchor="t" lIns="0" rIns="0" tIns="0" bIns="0">
+          <a:bodyPr wrap="square" lIns="0" tIns="0" rIns="0" bIns="0" anchor="t">
             <a:spAutoFit/>
           </a:bodyPr>
           <a:lstStyle/>
@@ -6367,7 +6425,9 @@
         <p:txBody>
           <a:bodyPr rtlCol="0" anchor="ctr"/>
           <a:lstStyle/>
-          <a:p/>
+          <a:p>
+            <a:endParaRPr/>
+          </a:p>
         </p:txBody>
       </p:sp>
       <p:sp>
@@ -6387,7 +6447,7 @@
           <a:noFill/>
         </p:spPr>
         <p:txBody>
-          <a:bodyPr wrap="square" anchor="t" lIns="0" rIns="0" tIns="0" bIns="0">
+          <a:bodyPr wrap="square" lIns="0" tIns="0" rIns="0" bIns="0" anchor="t">
             <a:spAutoFit/>
           </a:bodyPr>
           <a:lstStyle/>
@@ -6429,7 +6489,7 @@
           <a:noFill/>
         </p:spPr>
         <p:txBody>
-          <a:bodyPr wrap="square" anchor="t" lIns="0" rIns="0" tIns="0" bIns="0">
+          <a:bodyPr wrap="square" lIns="0" tIns="0" rIns="0" bIns="0" anchor="t">
             <a:spAutoFit/>
           </a:bodyPr>
           <a:lstStyle/>
@@ -6471,7 +6531,7 @@
           <a:noFill/>
         </p:spPr>
         <p:txBody>
-          <a:bodyPr wrap="square" anchor="t" lIns="0" rIns="0" tIns="0" bIns="0">
+          <a:bodyPr wrap="square" lIns="0" tIns="0" rIns="0" bIns="0" anchor="t">
             <a:spAutoFit/>
           </a:bodyPr>
           <a:lstStyle/>
@@ -6513,7 +6573,7 @@
           <a:noFill/>
         </p:spPr>
         <p:txBody>
-          <a:bodyPr wrap="square" anchor="t" lIns="0" rIns="0" tIns="0" bIns="0">
+          <a:bodyPr wrap="square" lIns="0" tIns="0" rIns="0" bIns="0" anchor="t">
             <a:spAutoFit/>
           </a:bodyPr>
           <a:lstStyle/>
@@ -6555,7 +6615,7 @@
           <a:noFill/>
         </p:spPr>
         <p:txBody>
-          <a:bodyPr wrap="square" anchor="t" lIns="0" rIns="0" tIns="0" bIns="0">
+          <a:bodyPr wrap="square" lIns="0" tIns="0" rIns="0" bIns="0" anchor="t">
             <a:spAutoFit/>
           </a:bodyPr>
           <a:lstStyle/>
@@ -6597,7 +6657,7 @@
           <a:noFill/>
         </p:spPr>
         <p:txBody>
-          <a:bodyPr wrap="square" anchor="t" lIns="0" rIns="0" tIns="0" bIns="0">
+          <a:bodyPr wrap="square" lIns="0" tIns="0" rIns="0" bIns="0" anchor="t">
             <a:spAutoFit/>
           </a:bodyPr>
           <a:lstStyle/>
@@ -6663,7 +6723,9 @@
         <p:txBody>
           <a:bodyPr rtlCol="0" anchor="ctr"/>
           <a:lstStyle/>
-          <a:p/>
+          <a:p>
+            <a:endParaRPr/>
+          </a:p>
         </p:txBody>
       </p:sp>
       <p:sp>
@@ -6683,7 +6745,7 @@
           <a:noFill/>
         </p:spPr>
         <p:txBody>
-          <a:bodyPr wrap="square" anchor="t" lIns="0" rIns="0" tIns="0" bIns="0">
+          <a:bodyPr wrap="square" lIns="0" tIns="0" rIns="0" bIns="0" anchor="t">
             <a:spAutoFit/>
           </a:bodyPr>
           <a:lstStyle/>
@@ -6717,7 +6779,7 @@
 </file>
 
 <file path=ppt/slides/slide5.xml><?xml version="1.0" encoding="utf-8"?>
-<p:sld xmlns:a="http://schemas.openxmlformats.org/drawingml/2006/main" xmlns:p="http://schemas.openxmlformats.org/presentationml/2006/main" xmlns:r="http://schemas.openxmlformats.org/officeDocument/2006/relationships">
+<p:sld xmlns:a="http://schemas.openxmlformats.org/drawingml/2006/main" xmlns:r="http://schemas.openxmlformats.org/officeDocument/2006/relationships" xmlns:p="http://schemas.openxmlformats.org/presentationml/2006/main">
   <p:cSld>
     <p:spTree>
       <p:nvGrpSpPr>
@@ -6725,7 +6787,14 @@
         <p:cNvGrpSpPr/>
         <p:nvPr/>
       </p:nvGrpSpPr>
-      <p:grpSpPr/>
+      <p:grpSpPr>
+        <a:xfrm>
+          <a:off x="0" y="0"/>
+          <a:ext cx="0" cy="0"/>
+          <a:chOff x="0" y="0"/>
+          <a:chExt cx="0" cy="0"/>
+        </a:xfrm>
+      </p:grpSpPr>
       <p:sp>
         <p:nvSpPr>
           <p:cNvPr id="2" name="Rectangle 1"/>
@@ -6765,7 +6834,9 @@
         <p:txBody>
           <a:bodyPr rtlCol="0" anchor="ctr"/>
           <a:lstStyle/>
-          <a:p/>
+          <a:p>
+            <a:endParaRPr/>
+          </a:p>
         </p:txBody>
       </p:sp>
       <p:sp>
@@ -6785,7 +6856,7 @@
           <a:noFill/>
         </p:spPr>
         <p:txBody>
-          <a:bodyPr wrap="square" anchor="t" lIns="0" rIns="0" tIns="0" bIns="0">
+          <a:bodyPr wrap="square" lIns="0" tIns="0" rIns="0" bIns="0" anchor="t">
             <a:spAutoFit/>
           </a:bodyPr>
           <a:lstStyle/>
@@ -6827,7 +6898,7 @@
           <a:noFill/>
         </p:spPr>
         <p:txBody>
-          <a:bodyPr wrap="square" anchor="t" lIns="0" rIns="0" tIns="0" bIns="0">
+          <a:bodyPr wrap="square" lIns="0" tIns="0" rIns="0" bIns="0" anchor="t">
             <a:spAutoFit/>
           </a:bodyPr>
           <a:lstStyle/>
@@ -6895,7 +6966,9 @@
         <p:txBody>
           <a:bodyPr rtlCol="0" anchor="ctr"/>
           <a:lstStyle/>
-          <a:p/>
+          <a:p>
+            <a:endParaRPr/>
+          </a:p>
         </p:txBody>
       </p:sp>
       <p:sp>
@@ -6915,7 +6988,7 @@
           <a:noFill/>
         </p:spPr>
         <p:txBody>
-          <a:bodyPr wrap="square" anchor="t" lIns="0" rIns="0" tIns="0" bIns="0">
+          <a:bodyPr wrap="square" lIns="0" tIns="0" rIns="0" bIns="0" anchor="t">
             <a:spAutoFit/>
           </a:bodyPr>
           <a:lstStyle/>
@@ -6979,7 +7052,9 @@
         <p:txBody>
           <a:bodyPr rtlCol="0" anchor="ctr"/>
           <a:lstStyle/>
-          <a:p/>
+          <a:p>
+            <a:endParaRPr/>
+          </a:p>
         </p:txBody>
       </p:sp>
       <p:sp>
@@ -6999,7 +7074,7 @@
           <a:noFill/>
         </p:spPr>
         <p:txBody>
-          <a:bodyPr wrap="square" anchor="t" lIns="0" rIns="0" tIns="0" bIns="0">
+          <a:bodyPr wrap="square" lIns="0" tIns="0" rIns="0" bIns="0" anchor="t">
             <a:spAutoFit/>
           </a:bodyPr>
           <a:lstStyle/>
@@ -7105,7 +7180,9 @@
         <p:txBody>
           <a:bodyPr rtlCol="0" anchor="ctr"/>
           <a:lstStyle/>
-          <a:p/>
+          <a:p>
+            <a:endParaRPr/>
+          </a:p>
         </p:txBody>
       </p:sp>
       <p:sp>
@@ -7125,7 +7202,7 @@
           <a:noFill/>
         </p:spPr>
         <p:txBody>
-          <a:bodyPr wrap="square" anchor="t" lIns="0" rIns="0" tIns="0" bIns="0">
+          <a:bodyPr wrap="square" lIns="0" tIns="0" rIns="0" bIns="0" anchor="t">
             <a:spAutoFit/>
           </a:bodyPr>
           <a:lstStyle/>
@@ -7189,7 +7266,9 @@
         <p:txBody>
           <a:bodyPr rtlCol="0" anchor="ctr"/>
           <a:lstStyle/>
-          <a:p/>
+          <a:p>
+            <a:endParaRPr/>
+          </a:p>
         </p:txBody>
       </p:sp>
       <p:sp>
@@ -7209,7 +7288,7 @@
           <a:noFill/>
         </p:spPr>
         <p:txBody>
-          <a:bodyPr wrap="square" anchor="t" lIns="0" rIns="0" tIns="0" bIns="0">
+          <a:bodyPr wrap="square" lIns="0" tIns="0" rIns="0" bIns="0" anchor="t">
             <a:spAutoFit/>
           </a:bodyPr>
           <a:lstStyle/>
@@ -7315,7 +7394,9 @@
         <p:txBody>
           <a:bodyPr rtlCol="0" anchor="ctr"/>
           <a:lstStyle/>
-          <a:p/>
+          <a:p>
+            <a:endParaRPr/>
+          </a:p>
         </p:txBody>
       </p:sp>
       <p:sp>
@@ -7335,7 +7416,7 @@
           <a:noFill/>
         </p:spPr>
         <p:txBody>
-          <a:bodyPr wrap="square" anchor="t" lIns="0" rIns="0" tIns="0" bIns="0">
+          <a:bodyPr wrap="square" lIns="0" tIns="0" rIns="0" bIns="0" anchor="t">
             <a:spAutoFit/>
           </a:bodyPr>
           <a:lstStyle/>
@@ -7399,7 +7480,9 @@
         <p:txBody>
           <a:bodyPr rtlCol="0" anchor="ctr"/>
           <a:lstStyle/>
-          <a:p/>
+          <a:p>
+            <a:endParaRPr/>
+          </a:p>
         </p:txBody>
       </p:sp>
       <p:sp>
@@ -7419,7 +7502,7 @@
           <a:noFill/>
         </p:spPr>
         <p:txBody>
-          <a:bodyPr wrap="square" anchor="t" lIns="0" rIns="0" tIns="0" bIns="0">
+          <a:bodyPr wrap="square" lIns="0" tIns="0" rIns="0" bIns="0" anchor="t">
             <a:spAutoFit/>
           </a:bodyPr>
           <a:lstStyle/>
@@ -7525,7 +7608,9 @@
         <p:txBody>
           <a:bodyPr rtlCol="0" anchor="ctr"/>
           <a:lstStyle/>
-          <a:p/>
+          <a:p>
+            <a:endParaRPr/>
+          </a:p>
         </p:txBody>
       </p:sp>
       <p:sp>
@@ -7545,7 +7630,7 @@
           <a:noFill/>
         </p:spPr>
         <p:txBody>
-          <a:bodyPr wrap="square" anchor="t" lIns="0" rIns="0" tIns="0" bIns="0">
+          <a:bodyPr wrap="square" lIns="0" tIns="0" rIns="0" bIns="0" anchor="t">
             <a:spAutoFit/>
           </a:bodyPr>
           <a:lstStyle/>
@@ -7609,7 +7694,9 @@
         <p:txBody>
           <a:bodyPr rtlCol="0" anchor="ctr"/>
           <a:lstStyle/>
-          <a:p/>
+          <a:p>
+            <a:endParaRPr/>
+          </a:p>
         </p:txBody>
       </p:sp>
       <p:sp>
@@ -7629,7 +7716,7 @@
           <a:noFill/>
         </p:spPr>
         <p:txBody>
-          <a:bodyPr wrap="square" anchor="t" lIns="0" rIns="0" tIns="0" bIns="0">
+          <a:bodyPr wrap="square" lIns="0" tIns="0" rIns="0" bIns="0" anchor="t">
             <a:spAutoFit/>
           </a:bodyPr>
           <a:lstStyle/>
@@ -7735,7 +7822,9 @@
         <p:txBody>
           <a:bodyPr rtlCol="0" anchor="ctr"/>
           <a:lstStyle/>
-          <a:p/>
+          <a:p>
+            <a:endParaRPr/>
+          </a:p>
         </p:txBody>
       </p:sp>
       <p:sp>
@@ -7755,7 +7844,7 @@
           <a:noFill/>
         </p:spPr>
         <p:txBody>
-          <a:bodyPr wrap="square" anchor="t" lIns="0" rIns="0" tIns="0" bIns="0">
+          <a:bodyPr wrap="square" lIns="0" tIns="0" rIns="0" bIns="0" anchor="t">
             <a:spAutoFit/>
           </a:bodyPr>
           <a:lstStyle/>
@@ -7819,7 +7908,9 @@
         <p:txBody>
           <a:bodyPr rtlCol="0" anchor="ctr"/>
           <a:lstStyle/>
-          <a:p/>
+          <a:p>
+            <a:endParaRPr/>
+          </a:p>
         </p:txBody>
       </p:sp>
       <p:sp>
@@ -7839,7 +7930,7 @@
           <a:noFill/>
         </p:spPr>
         <p:txBody>
-          <a:bodyPr wrap="square" anchor="t" lIns="0" rIns="0" tIns="0" bIns="0">
+          <a:bodyPr wrap="square" lIns="0" tIns="0" rIns="0" bIns="0" anchor="t">
             <a:spAutoFit/>
           </a:bodyPr>
           <a:lstStyle/>
@@ -7945,7 +8036,9 @@
         <p:txBody>
           <a:bodyPr rtlCol="0" anchor="ctr"/>
           <a:lstStyle/>
-          <a:p/>
+          <a:p>
+            <a:endParaRPr/>
+          </a:p>
         </p:txBody>
       </p:sp>
       <p:sp>
@@ -7965,7 +8058,7 @@
           <a:noFill/>
         </p:spPr>
         <p:txBody>
-          <a:bodyPr wrap="square" anchor="t" lIns="0" rIns="0" tIns="0" bIns="0">
+          <a:bodyPr wrap="square" lIns="0" tIns="0" rIns="0" bIns="0" anchor="t">
             <a:spAutoFit/>
           </a:bodyPr>
           <a:lstStyle/>
@@ -8029,7 +8122,9 @@
         <p:txBody>
           <a:bodyPr rtlCol="0" anchor="ctr"/>
           <a:lstStyle/>
-          <a:p/>
+          <a:p>
+            <a:endParaRPr/>
+          </a:p>
         </p:txBody>
       </p:sp>
       <p:sp>
@@ -8049,7 +8144,7 @@
           <a:noFill/>
         </p:spPr>
         <p:txBody>
-          <a:bodyPr wrap="square" anchor="t" lIns="0" rIns="0" tIns="0" bIns="0">
+          <a:bodyPr wrap="square" lIns="0" tIns="0" rIns="0" bIns="0" anchor="t">
             <a:spAutoFit/>
           </a:bodyPr>
           <a:lstStyle/>
@@ -8102,7 +8197,7 @@
 </file>
 
 <file path=ppt/slides/slide6.xml><?xml version="1.0" encoding="utf-8"?>
-<p:sld xmlns:a="http://schemas.openxmlformats.org/drawingml/2006/main" xmlns:p="http://schemas.openxmlformats.org/presentationml/2006/main" xmlns:r="http://schemas.openxmlformats.org/officeDocument/2006/relationships">
+<p:sld xmlns:a="http://schemas.openxmlformats.org/drawingml/2006/main" xmlns:r="http://schemas.openxmlformats.org/officeDocument/2006/relationships" xmlns:p="http://schemas.openxmlformats.org/presentationml/2006/main">
   <p:cSld>
     <p:spTree>
       <p:nvGrpSpPr>
@@ -8110,7 +8205,14 @@
         <p:cNvGrpSpPr/>
         <p:nvPr/>
       </p:nvGrpSpPr>
-      <p:grpSpPr/>
+      <p:grpSpPr>
+        <a:xfrm>
+          <a:off x="0" y="0"/>
+          <a:ext cx="0" cy="0"/>
+          <a:chOff x="0" y="0"/>
+          <a:chExt cx="0" cy="0"/>
+        </a:xfrm>
+      </p:grpSpPr>
       <p:sp>
         <p:nvSpPr>
           <p:cNvPr id="2" name="Rectangle 1"/>
@@ -8150,7 +8252,9 @@
         <p:txBody>
           <a:bodyPr rtlCol="0" anchor="ctr"/>
           <a:lstStyle/>
-          <a:p/>
+          <a:p>
+            <a:endParaRPr/>
+          </a:p>
         </p:txBody>
       </p:sp>
       <p:sp>
@@ -8170,7 +8274,7 @@
           <a:noFill/>
         </p:spPr>
         <p:txBody>
-          <a:bodyPr wrap="square" anchor="t" lIns="0" rIns="0" tIns="0" bIns="0">
+          <a:bodyPr wrap="square" lIns="0" tIns="0" rIns="0" bIns="0" anchor="t">
             <a:spAutoFit/>
           </a:bodyPr>
           <a:lstStyle/>
@@ -8212,7 +8316,7 @@
           <a:noFill/>
         </p:spPr>
         <p:txBody>
-          <a:bodyPr wrap="square" anchor="t" lIns="0" rIns="0" tIns="0" bIns="0">
+          <a:bodyPr wrap="square" lIns="0" tIns="0" rIns="0" bIns="0" anchor="t">
             <a:spAutoFit/>
           </a:bodyPr>
           <a:lstStyle/>
@@ -8280,7 +8384,9 @@
         <p:txBody>
           <a:bodyPr rtlCol="0" anchor="ctr"/>
           <a:lstStyle/>
-          <a:p/>
+          <a:p>
+            <a:endParaRPr/>
+          </a:p>
         </p:txBody>
       </p:sp>
       <p:sp>
@@ -8300,7 +8406,7 @@
           <a:noFill/>
         </p:spPr>
         <p:txBody>
-          <a:bodyPr wrap="square" anchor="t" lIns="0" rIns="0" tIns="0" bIns="0">
+          <a:bodyPr wrap="square" lIns="0" tIns="0" rIns="0" bIns="0" anchor="t">
             <a:spAutoFit/>
           </a:bodyPr>
           <a:lstStyle/>
@@ -8364,7 +8470,9 @@
         <p:txBody>
           <a:bodyPr rtlCol="0" anchor="ctr"/>
           <a:lstStyle/>
-          <a:p/>
+          <a:p>
+            <a:endParaRPr/>
+          </a:p>
         </p:txBody>
       </p:sp>
       <p:sp>
@@ -8384,7 +8492,7 @@
           <a:noFill/>
         </p:spPr>
         <p:txBody>
-          <a:bodyPr wrap="square" anchor="t" lIns="0" rIns="0" tIns="0" bIns="0">
+          <a:bodyPr wrap="square" lIns="0" tIns="0" rIns="0" bIns="0" anchor="t">
             <a:spAutoFit/>
           </a:bodyPr>
           <a:lstStyle/>
@@ -8426,7 +8534,7 @@
           <a:noFill/>
         </p:spPr>
         <p:txBody>
-          <a:bodyPr wrap="square" anchor="t" lIns="0" rIns="0" tIns="0" bIns="0">
+          <a:bodyPr wrap="square" lIns="0" tIns="0" rIns="0" bIns="0" anchor="t">
             <a:spAutoFit/>
           </a:bodyPr>
           <a:lstStyle/>
@@ -8468,7 +8576,7 @@
           <a:noFill/>
         </p:spPr>
         <p:txBody>
-          <a:bodyPr wrap="square" anchor="t" lIns="0" rIns="0" tIns="0" bIns="0">
+          <a:bodyPr wrap="square" lIns="0" tIns="0" rIns="0" bIns="0" anchor="t">
             <a:spAutoFit/>
           </a:bodyPr>
           <a:lstStyle/>
@@ -8510,7 +8618,7 @@
           <a:noFill/>
         </p:spPr>
         <p:txBody>
-          <a:bodyPr wrap="square" anchor="t" lIns="0" rIns="0" tIns="0" bIns="0">
+          <a:bodyPr wrap="square" lIns="0" tIns="0" rIns="0" bIns="0" anchor="t">
             <a:spAutoFit/>
           </a:bodyPr>
           <a:lstStyle/>
@@ -8552,7 +8660,7 @@
           <a:noFill/>
         </p:spPr>
         <p:txBody>
-          <a:bodyPr wrap="square" anchor="t" lIns="0" rIns="0" tIns="0" bIns="0">
+          <a:bodyPr wrap="square" lIns="0" tIns="0" rIns="0" bIns="0" anchor="t">
             <a:spAutoFit/>
           </a:bodyPr>
           <a:lstStyle/>
@@ -8594,7 +8702,7 @@
           <a:noFill/>
         </p:spPr>
         <p:txBody>
-          <a:bodyPr wrap="square" anchor="t" lIns="0" rIns="0" tIns="0" bIns="0">
+          <a:bodyPr wrap="square" lIns="0" tIns="0" rIns="0" bIns="0" anchor="t">
             <a:spAutoFit/>
           </a:bodyPr>
           <a:lstStyle/>
@@ -8658,7 +8766,9 @@
         <p:txBody>
           <a:bodyPr rtlCol="0" anchor="ctr"/>
           <a:lstStyle/>
-          <a:p/>
+          <a:p>
+            <a:endParaRPr/>
+          </a:p>
         </p:txBody>
       </p:sp>
       <p:sp>
@@ -8678,7 +8788,7 @@
           <a:noFill/>
         </p:spPr>
         <p:txBody>
-          <a:bodyPr wrap="square" anchor="t" lIns="0" rIns="0" tIns="0" bIns="0">
+          <a:bodyPr wrap="square" lIns="0" tIns="0" rIns="0" bIns="0" anchor="t">
             <a:spAutoFit/>
           </a:bodyPr>
           <a:lstStyle/>
@@ -8720,7 +8830,7 @@
           <a:noFill/>
         </p:spPr>
         <p:txBody>
-          <a:bodyPr wrap="square" anchor="t" lIns="0" rIns="0" tIns="0" bIns="0">
+          <a:bodyPr wrap="square" lIns="0" tIns="0" rIns="0" bIns="0" anchor="t">
             <a:spAutoFit/>
           </a:bodyPr>
           <a:lstStyle/>
@@ -8762,7 +8872,7 @@
           <a:noFill/>
         </p:spPr>
         <p:txBody>
-          <a:bodyPr wrap="square" anchor="t" lIns="0" rIns="0" tIns="0" bIns="0">
+          <a:bodyPr wrap="square" lIns="0" tIns="0" rIns="0" bIns="0" anchor="t">
             <a:spAutoFit/>
           </a:bodyPr>
           <a:lstStyle/>
@@ -8830,7 +8940,9 @@
         <p:txBody>
           <a:bodyPr rtlCol="0" anchor="ctr"/>
           <a:lstStyle/>
-          <a:p/>
+          <a:p>
+            <a:endParaRPr/>
+          </a:p>
         </p:txBody>
       </p:sp>
       <p:sp>
@@ -8850,7 +8962,7 @@
           <a:noFill/>
         </p:spPr>
         <p:txBody>
-          <a:bodyPr wrap="square" anchor="t" lIns="0" rIns="0" tIns="0" bIns="0">
+          <a:bodyPr wrap="square" lIns="0" tIns="0" rIns="0" bIns="0" anchor="t">
             <a:spAutoFit/>
           </a:bodyPr>
           <a:lstStyle/>
@@ -8914,7 +9026,9 @@
         <p:txBody>
           <a:bodyPr rtlCol="0" anchor="ctr"/>
           <a:lstStyle/>
-          <a:p/>
+          <a:p>
+            <a:endParaRPr/>
+          </a:p>
         </p:txBody>
       </p:sp>
       <p:sp>
@@ -8934,7 +9048,7 @@
           <a:noFill/>
         </p:spPr>
         <p:txBody>
-          <a:bodyPr wrap="square" anchor="t" lIns="0" rIns="0" tIns="0" bIns="0">
+          <a:bodyPr wrap="square" lIns="0" tIns="0" rIns="0" bIns="0" anchor="t">
             <a:spAutoFit/>
           </a:bodyPr>
           <a:lstStyle/>
@@ -8976,7 +9090,7 @@
           <a:noFill/>
         </p:spPr>
         <p:txBody>
-          <a:bodyPr wrap="square" anchor="t" lIns="0" rIns="0" tIns="0" bIns="0">
+          <a:bodyPr wrap="square" lIns="0" tIns="0" rIns="0" bIns="0" anchor="t">
             <a:spAutoFit/>
           </a:bodyPr>
           <a:lstStyle/>
@@ -9018,7 +9132,7 @@
           <a:noFill/>
         </p:spPr>
         <p:txBody>
-          <a:bodyPr wrap="square" anchor="t" lIns="0" rIns="0" tIns="0" bIns="0">
+          <a:bodyPr wrap="square" lIns="0" tIns="0" rIns="0" bIns="0" anchor="t">
             <a:spAutoFit/>
           </a:bodyPr>
           <a:lstStyle/>
@@ -9060,7 +9174,7 @@
           <a:noFill/>
         </p:spPr>
         <p:txBody>
-          <a:bodyPr wrap="square" anchor="t" lIns="0" rIns="0" tIns="0" bIns="0">
+          <a:bodyPr wrap="square" lIns="0" tIns="0" rIns="0" bIns="0" anchor="t">
             <a:spAutoFit/>
           </a:bodyPr>
           <a:lstStyle/>
@@ -9102,7 +9216,7 @@
           <a:noFill/>
         </p:spPr>
         <p:txBody>
-          <a:bodyPr wrap="square" anchor="t" lIns="0" rIns="0" tIns="0" bIns="0">
+          <a:bodyPr wrap="square" lIns="0" tIns="0" rIns="0" bIns="0" anchor="t">
             <a:spAutoFit/>
           </a:bodyPr>
           <a:lstStyle/>
@@ -9144,7 +9258,7 @@
           <a:noFill/>
         </p:spPr>
         <p:txBody>
-          <a:bodyPr wrap="square" anchor="t" lIns="0" rIns="0" tIns="0" bIns="0">
+          <a:bodyPr wrap="square" lIns="0" tIns="0" rIns="0" bIns="0" anchor="t">
             <a:spAutoFit/>
           </a:bodyPr>
           <a:lstStyle/>
@@ -9208,7 +9322,9 @@
         <p:txBody>
           <a:bodyPr rtlCol="0" anchor="ctr"/>
           <a:lstStyle/>
-          <a:p/>
+          <a:p>
+            <a:endParaRPr/>
+          </a:p>
         </p:txBody>
       </p:sp>
       <p:sp>
@@ -9228,7 +9344,7 @@
           <a:noFill/>
         </p:spPr>
         <p:txBody>
-          <a:bodyPr wrap="square" anchor="t" lIns="0" rIns="0" tIns="0" bIns="0">
+          <a:bodyPr wrap="square" lIns="0" tIns="0" rIns="0" bIns="0" anchor="t">
             <a:spAutoFit/>
           </a:bodyPr>
           <a:lstStyle/>
@@ -9270,7 +9386,7 @@
           <a:noFill/>
         </p:spPr>
         <p:txBody>
-          <a:bodyPr wrap="square" anchor="t" lIns="0" rIns="0" tIns="0" bIns="0">
+          <a:bodyPr wrap="square" lIns="0" tIns="0" rIns="0" bIns="0" anchor="t">
             <a:spAutoFit/>
           </a:bodyPr>
           <a:lstStyle/>
@@ -9336,7 +9452,9 @@
         <p:txBody>
           <a:bodyPr rtlCol="0" anchor="ctr"/>
           <a:lstStyle/>
-          <a:p/>
+          <a:p>
+            <a:endParaRPr/>
+          </a:p>
         </p:txBody>
       </p:sp>
       <p:sp>
@@ -9356,7 +9474,7 @@
           <a:noFill/>
         </p:spPr>
         <p:txBody>
-          <a:bodyPr wrap="square" anchor="t" lIns="0" rIns="0" tIns="0" bIns="0">
+          <a:bodyPr wrap="square" lIns="0" tIns="0" rIns="0" bIns="0" anchor="t">
             <a:spAutoFit/>
           </a:bodyPr>
           <a:lstStyle/>
@@ -9447,7 +9565,7 @@
 </file>
 
 <file path=ppt/slides/slide7.xml><?xml version="1.0" encoding="utf-8"?>
-<p:sld xmlns:a="http://schemas.openxmlformats.org/drawingml/2006/main" xmlns:p="http://schemas.openxmlformats.org/presentationml/2006/main" xmlns:r="http://schemas.openxmlformats.org/officeDocument/2006/relationships">
+<p:sld xmlns:a="http://schemas.openxmlformats.org/drawingml/2006/main" xmlns:r="http://schemas.openxmlformats.org/officeDocument/2006/relationships" xmlns:p="http://schemas.openxmlformats.org/presentationml/2006/main">
   <p:cSld>
     <p:spTree>
       <p:nvGrpSpPr>
@@ -9455,7 +9573,14 @@
         <p:cNvGrpSpPr/>
         <p:nvPr/>
       </p:nvGrpSpPr>
-      <p:grpSpPr/>
+      <p:grpSpPr>
+        <a:xfrm>
+          <a:off x="0" y="0"/>
+          <a:ext cx="0" cy="0"/>
+          <a:chOff x="0" y="0"/>
+          <a:chExt cx="0" cy="0"/>
+        </a:xfrm>
+      </p:grpSpPr>
       <p:sp>
         <p:nvSpPr>
           <p:cNvPr id="2" name="Rectangle 1"/>
@@ -9495,7 +9620,9 @@
         <p:txBody>
           <a:bodyPr rtlCol="0" anchor="ctr"/>
           <a:lstStyle/>
-          <a:p/>
+          <a:p>
+            <a:endParaRPr/>
+          </a:p>
         </p:txBody>
       </p:sp>
       <p:sp>
@@ -9515,7 +9642,7 @@
           <a:noFill/>
         </p:spPr>
         <p:txBody>
-          <a:bodyPr wrap="square" anchor="t" lIns="0" rIns="0" tIns="0" bIns="0">
+          <a:bodyPr wrap="square" lIns="0" tIns="0" rIns="0" bIns="0" anchor="t">
             <a:spAutoFit/>
           </a:bodyPr>
           <a:lstStyle/>
@@ -9557,7 +9684,7 @@
           <a:noFill/>
         </p:spPr>
         <p:txBody>
-          <a:bodyPr wrap="square" anchor="t" lIns="0" rIns="0" tIns="0" bIns="0">
+          <a:bodyPr wrap="square" lIns="0" tIns="0" rIns="0" bIns="0" anchor="t">
             <a:spAutoFit/>
           </a:bodyPr>
           <a:lstStyle/>
@@ -9625,7 +9752,9 @@
         <p:txBody>
           <a:bodyPr rtlCol="0" anchor="ctr"/>
           <a:lstStyle/>
-          <a:p/>
+          <a:p>
+            <a:endParaRPr/>
+          </a:p>
         </p:txBody>
       </p:sp>
       <p:sp>
@@ -9667,7 +9796,9 @@
         <p:txBody>
           <a:bodyPr rtlCol="0" anchor="ctr"/>
           <a:lstStyle/>
-          <a:p/>
+          <a:p>
+            <a:endParaRPr/>
+          </a:p>
         </p:txBody>
       </p:sp>
       <p:sp>
@@ -9687,7 +9818,7 @@
           <a:noFill/>
         </p:spPr>
         <p:txBody>
-          <a:bodyPr wrap="square" anchor="t" lIns="0" rIns="0" tIns="0" bIns="0">
+          <a:bodyPr wrap="square" lIns="0" tIns="0" rIns="0" bIns="0" anchor="t">
             <a:spAutoFit/>
           </a:bodyPr>
           <a:lstStyle/>
@@ -9729,7 +9860,7 @@
           <a:noFill/>
         </p:spPr>
         <p:txBody>
-          <a:bodyPr wrap="square" anchor="t" lIns="0" rIns="0" tIns="0" bIns="0">
+          <a:bodyPr wrap="square" lIns="0" tIns="0" rIns="0" bIns="0" anchor="t">
             <a:spAutoFit/>
           </a:bodyPr>
           <a:lstStyle/>
@@ -9771,7 +9902,7 @@
           <a:noFill/>
         </p:spPr>
         <p:txBody>
-          <a:bodyPr wrap="square" anchor="t" lIns="0" rIns="0" tIns="0" bIns="0">
+          <a:bodyPr wrap="square" lIns="0" tIns="0" rIns="0" bIns="0" anchor="t">
             <a:spAutoFit/>
           </a:bodyPr>
           <a:lstStyle/>
@@ -9832,7 +9963,7 @@
           <a:noFill/>
         </p:spPr>
         <p:txBody>
-          <a:bodyPr wrap="square" anchor="t" lIns="0" rIns="0" tIns="0" bIns="0">
+          <a:bodyPr wrap="square" lIns="0" tIns="0" rIns="0" bIns="0" anchor="t">
             <a:spAutoFit/>
           </a:bodyPr>
           <a:lstStyle/>
@@ -9900,7 +10031,9 @@
         <p:txBody>
           <a:bodyPr rtlCol="0" anchor="ctr"/>
           <a:lstStyle/>
-          <a:p/>
+          <a:p>
+            <a:endParaRPr/>
+          </a:p>
         </p:txBody>
       </p:sp>
       <p:sp>
@@ -9942,7 +10075,9 @@
         <p:txBody>
           <a:bodyPr rtlCol="0" anchor="ctr"/>
           <a:lstStyle/>
-          <a:p/>
+          <a:p>
+            <a:endParaRPr/>
+          </a:p>
         </p:txBody>
       </p:sp>
       <p:sp>
@@ -9962,7 +10097,7 @@
           <a:noFill/>
         </p:spPr>
         <p:txBody>
-          <a:bodyPr wrap="square" anchor="t" lIns="0" rIns="0" tIns="0" bIns="0">
+          <a:bodyPr wrap="square" lIns="0" tIns="0" rIns="0" bIns="0" anchor="t">
             <a:spAutoFit/>
           </a:bodyPr>
           <a:lstStyle/>
@@ -10004,7 +10139,7 @@
           <a:noFill/>
         </p:spPr>
         <p:txBody>
-          <a:bodyPr wrap="square" anchor="t" lIns="0" rIns="0" tIns="0" bIns="0">
+          <a:bodyPr wrap="square" lIns="0" tIns="0" rIns="0" bIns="0" anchor="t">
             <a:spAutoFit/>
           </a:bodyPr>
           <a:lstStyle/>
@@ -10046,7 +10181,7 @@
           <a:noFill/>
         </p:spPr>
         <p:txBody>
-          <a:bodyPr wrap="square" anchor="t" lIns="0" rIns="0" tIns="0" bIns="0">
+          <a:bodyPr wrap="square" lIns="0" tIns="0" rIns="0" bIns="0" anchor="t">
             <a:spAutoFit/>
           </a:bodyPr>
           <a:lstStyle/>
@@ -10107,7 +10242,7 @@
           <a:noFill/>
         </p:spPr>
         <p:txBody>
-          <a:bodyPr wrap="square" anchor="t" lIns="0" rIns="0" tIns="0" bIns="0">
+          <a:bodyPr wrap="square" lIns="0" tIns="0" rIns="0" bIns="0" anchor="t">
             <a:spAutoFit/>
           </a:bodyPr>
           <a:lstStyle/>
@@ -10175,7 +10310,9 @@
         <p:txBody>
           <a:bodyPr rtlCol="0" anchor="ctr"/>
           <a:lstStyle/>
-          <a:p/>
+          <a:p>
+            <a:endParaRPr/>
+          </a:p>
         </p:txBody>
       </p:sp>
       <p:sp>
@@ -10217,7 +10354,9 @@
         <p:txBody>
           <a:bodyPr rtlCol="0" anchor="ctr"/>
           <a:lstStyle/>
-          <a:p/>
+          <a:p>
+            <a:endParaRPr/>
+          </a:p>
         </p:txBody>
       </p:sp>
       <p:sp>
@@ -10237,7 +10376,7 @@
           <a:noFill/>
         </p:spPr>
         <p:txBody>
-          <a:bodyPr wrap="square" anchor="t" lIns="0" rIns="0" tIns="0" bIns="0">
+          <a:bodyPr wrap="square" lIns="0" tIns="0" rIns="0" bIns="0" anchor="t">
             <a:spAutoFit/>
           </a:bodyPr>
           <a:lstStyle/>
@@ -10279,7 +10418,7 @@
           <a:noFill/>
         </p:spPr>
         <p:txBody>
-          <a:bodyPr wrap="square" anchor="t" lIns="0" rIns="0" tIns="0" bIns="0">
+          <a:bodyPr wrap="square" lIns="0" tIns="0" rIns="0" bIns="0" anchor="t">
             <a:spAutoFit/>
           </a:bodyPr>
           <a:lstStyle/>
@@ -10321,7 +10460,7 @@
           <a:noFill/>
         </p:spPr>
         <p:txBody>
-          <a:bodyPr wrap="square" anchor="t" lIns="0" rIns="0" tIns="0" bIns="0">
+          <a:bodyPr wrap="square" lIns="0" tIns="0" rIns="0" bIns="0" anchor="t">
             <a:spAutoFit/>
           </a:bodyPr>
           <a:lstStyle/>
@@ -10382,7 +10521,7 @@
           <a:noFill/>
         </p:spPr>
         <p:txBody>
-          <a:bodyPr wrap="square" anchor="t" lIns="0" rIns="0" tIns="0" bIns="0">
+          <a:bodyPr wrap="square" lIns="0" tIns="0" rIns="0" bIns="0" anchor="t">
             <a:spAutoFit/>
           </a:bodyPr>
           <a:lstStyle/>
@@ -10450,7 +10589,9 @@
         <p:txBody>
           <a:bodyPr rtlCol="0" anchor="ctr"/>
           <a:lstStyle/>
-          <a:p/>
+          <a:p>
+            <a:endParaRPr/>
+          </a:p>
         </p:txBody>
       </p:sp>
       <p:sp>
@@ -10492,7 +10633,9 @@
         <p:txBody>
           <a:bodyPr rtlCol="0" anchor="ctr"/>
           <a:lstStyle/>
-          <a:p/>
+          <a:p>
+            <a:endParaRPr/>
+          </a:p>
         </p:txBody>
       </p:sp>
       <p:sp>
@@ -10512,7 +10655,7 @@
           <a:noFill/>
         </p:spPr>
         <p:txBody>
-          <a:bodyPr wrap="square" anchor="t" lIns="0" rIns="0" tIns="0" bIns="0">
+          <a:bodyPr wrap="square" lIns="0" tIns="0" rIns="0" bIns="0" anchor="t">
             <a:spAutoFit/>
           </a:bodyPr>
           <a:lstStyle/>
@@ -10554,7 +10697,7 @@
           <a:noFill/>
         </p:spPr>
         <p:txBody>
-          <a:bodyPr wrap="square" anchor="t" lIns="0" rIns="0" tIns="0" bIns="0">
+          <a:bodyPr wrap="square" lIns="0" tIns="0" rIns="0" bIns="0" anchor="t">
             <a:spAutoFit/>
           </a:bodyPr>
           <a:lstStyle/>
@@ -10596,7 +10739,7 @@
           <a:noFill/>
         </p:spPr>
         <p:txBody>
-          <a:bodyPr wrap="square" anchor="t" lIns="0" rIns="0" tIns="0" bIns="0">
+          <a:bodyPr wrap="square" lIns="0" tIns="0" rIns="0" bIns="0" anchor="t">
             <a:spAutoFit/>
           </a:bodyPr>
           <a:lstStyle/>
@@ -10681,7 +10824,9 @@
         <p:txBody>
           <a:bodyPr rtlCol="0" anchor="ctr"/>
           <a:lstStyle/>
-          <a:p/>
+          <a:p>
+            <a:endParaRPr/>
+          </a:p>
         </p:txBody>
       </p:sp>
       <p:sp>
@@ -10701,7 +10846,7 @@
           <a:noFill/>
         </p:spPr>
         <p:txBody>
-          <a:bodyPr wrap="square" anchor="t" lIns="0" rIns="0" tIns="0" bIns="0">
+          <a:bodyPr wrap="square" lIns="0" tIns="0" rIns="0" bIns="0" anchor="t">
             <a:spAutoFit/>
           </a:bodyPr>
           <a:lstStyle/>

--- a/docs/サーバー構成のご提案.pptx
+++ b/docs/サーバー構成のご提案.pptx
@@ -10,6 +10,9 @@
     <p:sldId id="258" r:id="rId4"/>
     <p:sldId id="259" r:id="rId5"/>
     <p:sldId id="260" r:id="rId6"/>
+    <p:sldId id="263" r:id="rId13"/>
+    <p:sldId id="264" r:id="rId14"/>
+    <p:sldId id="265" r:id="rId15"/>
     <p:sldId id="261" r:id="rId7"/>
     <p:sldId id="262" r:id="rId8"/>
   </p:sldIdLst>
@@ -3360,6 +3363,548 @@
 </p:sld>
 </file>
 
+<file path=ppt/slides/slide10.xml><?xml version="1.0" encoding="utf-8"?>
+<p:sld xmlns:a="http://schemas.openxmlformats.org/drawingml/2006/main" xmlns:p="http://schemas.openxmlformats.org/presentationml/2006/main" xmlns:r="http://schemas.openxmlformats.org/officeDocument/2006/relationships">
+  <p:cSld>
+    <p:spTree>
+      <p:nvGrpSpPr>
+        <p:cNvPr id="1" name=""/>
+        <p:cNvGrpSpPr/>
+        <p:nvPr/>
+      </p:nvGrpSpPr>
+      <p:grpSpPr/>
+      <p:sp>
+        <p:nvSpPr>
+          <p:cNvPr id="2" name="Rectangle 1"/>
+          <p:cNvSpPr/>
+          <p:nvPr/>
+        </p:nvSpPr>
+        <p:spPr>
+          <a:xfrm>
+            <a:off x="0" y="0"/>
+            <a:ext cx="12191695" cy="868680"/>
+          </a:xfrm>
+          <a:prstGeom prst="rect">
+            <a:avLst/>
+          </a:prstGeom>
+          <a:solidFill>
+            <a:srgbClr val="1E2761"/>
+          </a:solidFill>
+          <a:ln>
+            <a:noFill/>
+          </a:ln>
+          <a:effectLst/>
+        </p:spPr>
+        <p:style>
+          <a:lnRef idx="1">
+            <a:schemeClr val="accent1"/>
+          </a:lnRef>
+          <a:fillRef idx="3">
+            <a:schemeClr val="accent1"/>
+          </a:fillRef>
+          <a:effectRef idx="2">
+            <a:schemeClr val="accent1"/>
+          </a:effectRef>
+          <a:fontRef idx="minor">
+            <a:schemeClr val="lt1"/>
+          </a:fontRef>
+        </p:style>
+        <p:txBody>
+          <a:bodyPr rtlCol="0" anchor="ctr"/>
+          <a:lstStyle/>
+          <a:p/>
+        </p:txBody>
+      </p:sp>
+      <p:sp>
+        <p:nvSpPr>
+          <p:cNvPr id="3" name="TextBox 2"/>
+          <p:cNvSpPr txBox="1"/>
+          <p:nvPr/>
+        </p:nvSpPr>
+        <p:spPr>
+          <a:xfrm>
+            <a:off x="566928" y="237744"/>
+            <a:ext cx="8686800" cy="411480"/>
+          </a:xfrm>
+          <a:prstGeom prst="rect">
+            <a:avLst/>
+          </a:prstGeom>
+          <a:noFill/>
+        </p:spPr>
+        <p:txBody>
+          <a:bodyPr wrap="square" lIns="0" rIns="0" tIns="0" bIns="0">
+            <a:spAutoFit/>
+          </a:bodyPr>
+          <a:lstStyle/>
+          <a:p>
+            <a:pPr algn="l"/>
+            <a:r>
+              <a:rPr sz="2200" b="1">
+                <a:solidFill>
+                  <a:srgbClr val="FFFFFF"/>
+                </a:solidFill>
+                <a:latin typeface="Meiryo"/>
+                <a:ea typeface="Meiryo"/>
+              </a:rPr>
+              <a:t>プライバシーポリシー 記載文言案</a:t>
+            </a:r>
+          </a:p>
+        </p:txBody>
+      </p:sp>
+      <p:sp>
+        <p:nvSpPr>
+          <p:cNvPr id="4" name="TextBox 3"/>
+          <p:cNvSpPr txBox="1"/>
+          <p:nvPr/>
+        </p:nvSpPr>
+        <p:spPr>
+          <a:xfrm>
+            <a:off x="566928" y="1024128"/>
+            <a:ext cx="11064240" cy="365760"/>
+          </a:xfrm>
+          <a:prstGeom prst="rect">
+            <a:avLst/>
+          </a:prstGeom>
+          <a:noFill/>
+        </p:spPr>
+        <p:txBody>
+          <a:bodyPr wrap="square" lIns="0" rIns="0" tIns="0" bIns="0">
+            <a:spAutoFit/>
+          </a:bodyPr>
+          <a:lstStyle/>
+          <a:p>
+            <a:pPr algn="l"/>
+            <a:r>
+              <a:rPr sz="1250" b="0">
+                <a:solidFill>
+                  <a:srgbClr val="6B7280"/>
+                </a:solidFill>
+                <a:latin typeface="Meiryo"/>
+                <a:ea typeface="Meiryo"/>
+              </a:rPr>
+              <a:t>下記をプライバシーポリシーに追加します。最終的な文面は、顧問の専門家にご確認ください。</a:t>
+            </a:r>
+          </a:p>
+        </p:txBody>
+      </p:sp>
+      <p:sp>
+        <p:nvSpPr>
+          <p:cNvPr id="5" name="Rounded Rectangle 4"/>
+          <p:cNvSpPr/>
+          <p:nvPr/>
+        </p:nvSpPr>
+        <p:spPr>
+          <a:xfrm>
+            <a:off x="566928" y="1554480"/>
+            <a:ext cx="11183112" cy="3931920"/>
+          </a:xfrm>
+          <a:prstGeom prst="roundRect">
+            <a:avLst>
+              <a:gd name="adj" fmla="val 3000"/>
+            </a:avLst>
+          </a:prstGeom>
+          <a:solidFill>
+            <a:srgbClr val="FFFFFF"/>
+          </a:solidFill>
+          <a:ln w="12700">
+            <a:solidFill>
+              <a:srgbClr val="C7CDD8"/>
+            </a:solidFill>
+          </a:ln>
+          <a:effectLst/>
+        </p:spPr>
+        <p:style>
+          <a:lnRef idx="1">
+            <a:schemeClr val="accent1"/>
+          </a:lnRef>
+          <a:fillRef idx="3">
+            <a:schemeClr val="accent1"/>
+          </a:fillRef>
+          <a:effectRef idx="2">
+            <a:schemeClr val="accent1"/>
+          </a:effectRef>
+          <a:fontRef idx="minor">
+            <a:schemeClr val="lt1"/>
+          </a:fontRef>
+        </p:style>
+        <p:txBody>
+          <a:bodyPr rtlCol="0" anchor="ctr"/>
+          <a:lstStyle/>
+          <a:p/>
+        </p:txBody>
+      </p:sp>
+      <p:sp>
+        <p:nvSpPr>
+          <p:cNvPr id="6" name="TextBox 5"/>
+          <p:cNvSpPr txBox="1"/>
+          <p:nvPr/>
+        </p:nvSpPr>
+        <p:spPr>
+          <a:xfrm>
+            <a:off x="932688" y="1874520"/>
+            <a:ext cx="10430640" cy="411480"/>
+          </a:xfrm>
+          <a:prstGeom prst="rect">
+            <a:avLst/>
+          </a:prstGeom>
+          <a:noFill/>
+        </p:spPr>
+        <p:txBody>
+          <a:bodyPr wrap="square" lIns="0" rIns="0" tIns="0" bIns="0">
+            <a:spAutoFit/>
+          </a:bodyPr>
+          <a:lstStyle/>
+          <a:p>
+            <a:pPr algn="l"/>
+            <a:r>
+              <a:rPr sz="1350" b="1">
+                <a:solidFill>
+                  <a:srgbClr val="141A33"/>
+                </a:solidFill>
+                <a:latin typeface="Meiryo"/>
+                <a:ea typeface="Meiryo"/>
+              </a:rPr>
+              <a:t>第◯条（外国にある第三者への個人データの提供）</a:t>
+            </a:r>
+          </a:p>
+        </p:txBody>
+      </p:sp>
+      <p:sp>
+        <p:nvSpPr>
+          <p:cNvPr id="7" name="TextBox 6"/>
+          <p:cNvSpPr txBox="1"/>
+          <p:nvPr/>
+        </p:nvSpPr>
+        <p:spPr>
+          <a:xfrm>
+            <a:off x="932688" y="2423160"/>
+            <a:ext cx="10430640" cy="2926080"/>
+          </a:xfrm>
+          <a:prstGeom prst="rect">
+            <a:avLst/>
+          </a:prstGeom>
+          <a:noFill/>
+        </p:spPr>
+        <p:txBody>
+          <a:bodyPr wrap="square" lIns="0" rIns="0" tIns="0" bIns="0">
+            <a:spAutoFit/>
+          </a:bodyPr>
+          <a:lstStyle/>
+          <a:p>
+            <a:pPr algn="l">
+              <a:spcAft>
+                <a:spcPts val="200"/>
+              </a:spcAft>
+            </a:pPr>
+            <a:r>
+              <a:rPr sz="1150" b="0">
+                <a:solidFill>
+                  <a:srgbClr val="141A33"/>
+                </a:solidFill>
+                <a:latin typeface="Meiryo"/>
+                <a:ea typeface="Meiryo"/>
+              </a:rPr>
+              <a:t>当社は、業務の遂行にあたり、次のとおり外国にある第三者へ個人データの取扱いを委託しています。</a:t>
+            </a:r>
+          </a:p>
+          <a:p>
+            <a:pPr algn="l">
+              <a:spcAft>
+                <a:spcPts val="200"/>
+              </a:spcAft>
+            </a:pPr>
+            <a:r>
+              <a:rPr sz="1150" b="0">
+                <a:solidFill>
+                  <a:srgbClr val="141A33"/>
+                </a:solidFill>
+                <a:latin typeface="Meiryo"/>
+                <a:ea typeface="Meiryo"/>
+              </a:rPr>
+              <a:t/>
+            </a:r>
+          </a:p>
+          <a:p>
+            <a:pPr algn="l">
+              <a:spcAft>
+                <a:spcPts val="200"/>
+              </a:spcAft>
+            </a:pPr>
+            <a:r>
+              <a:rPr sz="1150" b="0">
+                <a:solidFill>
+                  <a:srgbClr val="141A33"/>
+                </a:solidFill>
+                <a:latin typeface="Meiryo"/>
+                <a:ea typeface="Meiryo"/>
+              </a:rPr>
+              <a:t>　・Supabase, Inc.（アメリカ合衆国／データの保管場所：日本）</a:t>
+            </a:r>
+          </a:p>
+          <a:p>
+            <a:pPr algn="l">
+              <a:spcAft>
+                <a:spcPts val="200"/>
+              </a:spcAft>
+            </a:pPr>
+            <a:r>
+              <a:rPr sz="1150" b="0">
+                <a:solidFill>
+                  <a:srgbClr val="141A33"/>
+                </a:solidFill>
+                <a:latin typeface="Meiryo"/>
+                <a:ea typeface="Meiryo"/>
+              </a:rPr>
+              <a:t>　　委託する業務：案件情報およびお預かりした書類の保管</a:t>
+            </a:r>
+          </a:p>
+          <a:p>
+            <a:pPr algn="l">
+              <a:spcAft>
+                <a:spcPts val="200"/>
+              </a:spcAft>
+            </a:pPr>
+            <a:r>
+              <a:rPr sz="1150" b="0">
+                <a:solidFill>
+                  <a:srgbClr val="141A33"/>
+                </a:solidFill>
+                <a:latin typeface="Meiryo"/>
+                <a:ea typeface="Meiryo"/>
+              </a:rPr>
+              <a:t/>
+            </a:r>
+          </a:p>
+          <a:p>
+            <a:pPr algn="l">
+              <a:spcAft>
+                <a:spcPts val="200"/>
+              </a:spcAft>
+            </a:pPr>
+            <a:r>
+              <a:rPr sz="1150" b="0">
+                <a:solidFill>
+                  <a:srgbClr val="141A33"/>
+                </a:solidFill>
+                <a:latin typeface="Meiryo"/>
+                <a:ea typeface="Meiryo"/>
+              </a:rPr>
+              <a:t>　・Anthropic PBC（アメリカ合衆国）</a:t>
+            </a:r>
+          </a:p>
+          <a:p>
+            <a:pPr algn="l">
+              <a:spcAft>
+                <a:spcPts val="200"/>
+              </a:spcAft>
+            </a:pPr>
+            <a:r>
+              <a:rPr sz="1150" b="0">
+                <a:solidFill>
+                  <a:srgbClr val="141A33"/>
+                </a:solidFill>
+                <a:latin typeface="Meiryo"/>
+                <a:ea typeface="Meiryo"/>
+              </a:rPr>
+              <a:t>　　委託する業務：書類画像の文字読み取り（OCR）および文章の要約</a:t>
+            </a:r>
+          </a:p>
+          <a:p>
+            <a:pPr algn="l">
+              <a:spcAft>
+                <a:spcPts val="200"/>
+              </a:spcAft>
+            </a:pPr>
+            <a:r>
+              <a:rPr sz="1150" b="0">
+                <a:solidFill>
+                  <a:srgbClr val="141A33"/>
+                </a:solidFill>
+                <a:latin typeface="Meiryo"/>
+                <a:ea typeface="Meiryo"/>
+              </a:rPr>
+              <a:t/>
+            </a:r>
+          </a:p>
+          <a:p>
+            <a:pPr algn="l">
+              <a:spcAft>
+                <a:spcPts val="200"/>
+              </a:spcAft>
+            </a:pPr>
+            <a:r>
+              <a:rPr sz="1150" b="0">
+                <a:solidFill>
+                  <a:srgbClr val="141A33"/>
+                </a:solidFill>
+                <a:latin typeface="Meiryo"/>
+                <a:ea typeface="Meiryo"/>
+              </a:rPr>
+              <a:t>各国における個人情報の保護に関する制度については、個人情報保護委員会の公表資料をご参照ください。</a:t>
+            </a:r>
+          </a:p>
+          <a:p>
+            <a:pPr algn="l">
+              <a:spcAft>
+                <a:spcPts val="200"/>
+              </a:spcAft>
+            </a:pPr>
+            <a:r>
+              <a:rPr sz="1150" b="0">
+                <a:solidFill>
+                  <a:srgbClr val="141A33"/>
+                </a:solidFill>
+                <a:latin typeface="Meiryo"/>
+                <a:ea typeface="Meiryo"/>
+              </a:rPr>
+              <a:t>各委託先はいずれも第三者機関によるセキュリティ認証を取得しており、当社は各社との間でデータの</a:t>
+            </a:r>
+          </a:p>
+          <a:p>
+            <a:pPr algn="l">
+              <a:spcAft>
+                <a:spcPts val="200"/>
+              </a:spcAft>
+            </a:pPr>
+            <a:r>
+              <a:rPr sz="1150" b="0">
+                <a:solidFill>
+                  <a:srgbClr val="141A33"/>
+                </a:solidFill>
+                <a:latin typeface="Meiryo"/>
+                <a:ea typeface="Meiryo"/>
+              </a:rPr>
+              <a:t>取扱いに関する契約を締結したうえで、個人データの安全管理措置を講じています。</a:t>
+            </a:r>
+          </a:p>
+          <a:p>
+            <a:pPr algn="l">
+              <a:spcAft>
+                <a:spcPts val="200"/>
+              </a:spcAft>
+            </a:pPr>
+            <a:r>
+              <a:rPr sz="1150" b="0">
+                <a:solidFill>
+                  <a:srgbClr val="141A33"/>
+                </a:solidFill>
+                <a:latin typeface="Meiryo"/>
+                <a:ea typeface="Meiryo"/>
+              </a:rPr>
+              <a:t/>
+            </a:r>
+          </a:p>
+          <a:p>
+            <a:pPr algn="l">
+              <a:spcAft>
+                <a:spcPts val="200"/>
+              </a:spcAft>
+            </a:pPr>
+            <a:r>
+              <a:rPr sz="1150" b="0">
+                <a:solidFill>
+                  <a:srgbClr val="141A33"/>
+                </a:solidFill>
+                <a:latin typeface="Meiryo"/>
+                <a:ea typeface="Meiryo"/>
+              </a:rPr>
+              <a:t>なお、上記のAI事業者へ送信した情報が、同社のAIモデルの学習に利用されることはありません。</a:t>
+            </a:r>
+          </a:p>
+        </p:txBody>
+      </p:sp>
+      <p:sp>
+        <p:nvSpPr>
+          <p:cNvPr id="8" name="Rounded Rectangle 7"/>
+          <p:cNvSpPr/>
+          <p:nvPr/>
+        </p:nvSpPr>
+        <p:spPr>
+          <a:xfrm>
+            <a:off x="566928" y="5760720"/>
+            <a:ext cx="11073384" cy="685800"/>
+          </a:xfrm>
+          <a:prstGeom prst="roundRect">
+            <a:avLst>
+              <a:gd name="adj" fmla="val 12000"/>
+            </a:avLst>
+          </a:prstGeom>
+          <a:solidFill>
+            <a:srgbClr val="FAFAFB"/>
+          </a:solidFill>
+          <a:ln>
+            <a:noFill/>
+          </a:ln>
+          <a:effectLst/>
+        </p:spPr>
+        <p:style>
+          <a:lnRef idx="1">
+            <a:schemeClr val="accent1"/>
+          </a:lnRef>
+          <a:fillRef idx="3">
+            <a:schemeClr val="accent1"/>
+          </a:fillRef>
+          <a:effectRef idx="2">
+            <a:schemeClr val="accent1"/>
+          </a:effectRef>
+          <a:fontRef idx="minor">
+            <a:schemeClr val="lt1"/>
+          </a:fontRef>
+        </p:style>
+        <p:txBody>
+          <a:bodyPr rtlCol="0" anchor="ctr"/>
+          <a:lstStyle/>
+          <a:p/>
+        </p:txBody>
+      </p:sp>
+      <p:sp>
+        <p:nvSpPr>
+          <p:cNvPr id="9" name="TextBox 8"/>
+          <p:cNvSpPr txBox="1"/>
+          <p:nvPr/>
+        </p:nvSpPr>
+        <p:spPr>
+          <a:xfrm>
+            <a:off x="868680" y="5920740"/>
+            <a:ext cx="10515600" cy="365760"/>
+          </a:xfrm>
+          <a:prstGeom prst="rect">
+            <a:avLst/>
+          </a:prstGeom>
+          <a:noFill/>
+        </p:spPr>
+        <p:txBody>
+          <a:bodyPr wrap="square" lIns="0" rIns="0" tIns="0" bIns="0">
+            <a:spAutoFit/>
+          </a:bodyPr>
+          <a:lstStyle/>
+          <a:p>
+            <a:pPr algn="l">
+              <a:spcAft>
+                <a:spcPts val="300"/>
+              </a:spcAft>
+            </a:pPr>
+            <a:r>
+              <a:rPr sz="1200" b="0">
+                <a:solidFill>
+                  <a:srgbClr val="141A33"/>
+                </a:solidFill>
+                <a:latin typeface="Meiryo"/>
+                <a:ea typeface="Meiryo"/>
+              </a:rPr>
+              <a:t>東京への移行が完了するまでは、Supabase の保管場所を「韓国」と記載してください。移行後に「日本」へ改めます。</a:t>
+            </a:r>
+          </a:p>
+        </p:txBody>
+      </p:sp>
+    </p:spTree>
+  </p:cSld>
+  <p:clrMapOvr>
+    <a:masterClrMapping/>
+  </p:clrMapOvr>
+</p:sld>
+</file>
+
 <file path=ppt/slides/slide2.xml><?xml version="1.0" encoding="utf-8"?>
 <p:sld xmlns:a="http://schemas.openxmlformats.org/drawingml/2006/main" xmlns:r="http://schemas.openxmlformats.org/officeDocument/2006/relationships" xmlns:p="http://schemas.openxmlformats.org/presentationml/2006/main">
   <p:cSld>
@@ -5256,8 +5801,9 @@
                   <a:srgbClr val="1F5E4B"/>
                 </a:solidFill>
                 <a:latin typeface="Meiryo"/>
-              </a:rPr>
-              <a:t>Supabase（東京リージョン）</a:t>
+                <a:ea typeface="Meiryo"/>
+              </a:rPr>
+              <a:t>Supabase（現在：韓国 → 東京へ移行）</a:t>
             </a:r>
           </a:p>
         </p:txBody>
@@ -5388,100 +5934,81 @@
                   <a:srgbClr val="6B7280"/>
                 </a:solidFill>
                 <a:latin typeface="Meiryo"/>
+                <a:ea typeface="Meiryo"/>
               </a:rPr>
               <a:t>案件・依頼者情報を</a:t>
             </a:r>
           </a:p>
           <a:p>
-            <a:pPr algn="l">
-              <a:lnSpc>
-                <a:spcPct val="145000"/>
-              </a:lnSpc>
-              <a:spcAft>
-                <a:spcPts val="400"/>
-              </a:spcAft>
-            </a:pPr>
             <a:r>
               <a:rPr sz="1150" b="0">
                 <a:solidFill>
                   <a:srgbClr val="6B7280"/>
                 </a:solidFill>
                 <a:latin typeface="Meiryo"/>
+                <a:ea typeface="Meiryo"/>
               </a:rPr>
               <a:t>保管する倉庫。</a:t>
             </a:r>
           </a:p>
           <a:p>
-            <a:pPr algn="l">
-              <a:lnSpc>
-                <a:spcPct val="145000"/>
-              </a:lnSpc>
-              <a:spcAft>
-                <a:spcPts val="400"/>
-              </a:spcAft>
-            </a:pPr>
             <a:r>
               <a:rPr sz="1150" b="0">
                 <a:solidFill>
                   <a:srgbClr val="6B7280"/>
                 </a:solidFill>
                 <a:latin typeface="Meiryo"/>
-              </a:rPr>
-              <a:t>ログイン管理と</a:t>
-            </a:r>
-          </a:p>
-          <a:p>
-            <a:pPr algn="l">
-              <a:lnSpc>
-                <a:spcPct val="145000"/>
-              </a:lnSpc>
-              <a:spcAft>
-                <a:spcPts val="400"/>
-              </a:spcAft>
-            </a:pPr>
+                <a:ea typeface="Meiryo"/>
+              </a:rPr>
+              <a:t>ログイン管理や</a:t>
+            </a:r>
+          </a:p>
+          <a:p>
             <a:r>
               <a:rPr sz="1150" b="0">
                 <a:solidFill>
                   <a:srgbClr val="6B7280"/>
                 </a:solidFill>
                 <a:latin typeface="Meiryo"/>
+                <a:ea typeface="Meiryo"/>
               </a:rPr>
               <a:t>ファイル保管も担当。</a:t>
             </a:r>
           </a:p>
           <a:p>
-            <a:pPr algn="l">
-              <a:lnSpc>
-                <a:spcPct val="145000"/>
-              </a:lnSpc>
-              <a:spcAft>
-                <a:spcPts val="400"/>
-              </a:spcAft>
-            </a:pPr>
-            <a:endParaRPr sz="1150" b="0">
-              <a:solidFill>
-                <a:srgbClr val="6B7280"/>
-              </a:solidFill>
-              <a:latin typeface="Meiryo"/>
-            </a:endParaRPr>
-          </a:p>
-          <a:p>
-            <a:pPr algn="l">
-              <a:lnSpc>
-                <a:spcPct val="145000"/>
-              </a:lnSpc>
-              <a:spcAft>
-                <a:spcPts val="400"/>
-              </a:spcAft>
-            </a:pPr>
             <a:r>
               <a:rPr sz="1150" b="0">
                 <a:solidFill>
                   <a:srgbClr val="6B7280"/>
                 </a:solidFill>
                 <a:latin typeface="Meiryo"/>
-              </a:rPr>
-              <a:t>現在のまま変更なし</a:t>
+                <a:ea typeface="Meiryo"/>
+              </a:rPr>
+              <a:t/>
+            </a:r>
+          </a:p>
+          <a:p>
+            <a:r>
+              <a:rPr sz="1150" b="0">
+                <a:solidFill>
+                  <a:srgbClr val="6B7280"/>
+                </a:solidFill>
+                <a:latin typeface="Meiryo"/>
+                <a:ea typeface="Meiryo"/>
+              </a:rPr>
+              <a:t>現在：韓国リージョン</a:t>
+            </a:r>
+          </a:p>
+          <a:p>
+            <a:r>
+              <a:rPr sz="1150" b="0">
+                <a:solidFill>
+                  <a:srgbClr val="6B7280"/>
+                </a:solidFill>
+                <a:latin typeface="Meiryo"/>
+                <a:ea typeface="Meiryo"/>
+              </a:rPr>
+              <a:t>2026年8月中に東京へ</a:t>
             </a:r>
           </a:p>
         </p:txBody>
@@ -5568,27 +6095,21 @@
                   <a:srgbClr val="141A33"/>
                 </a:solidFill>
                 <a:latin typeface="Meiryo"/>
+                <a:ea typeface="Meiryo"/>
               </a:rPr>
               <a:t>今回 Azure に新しく置くのは「アプリ本体」と「AI・OCR」の2つです。</a:t>
             </a:r>
           </a:p>
           <a:p>
-            <a:pPr algn="l">
-              <a:lnSpc>
-                <a:spcPct val="150000"/>
-              </a:lnSpc>
-              <a:spcAft>
-                <a:spcPts val="400"/>
-              </a:spcAft>
-            </a:pPr>
             <a:r>
               <a:rPr sz="1250" b="0">
                 <a:solidFill>
                   <a:srgbClr val="141A33"/>
                 </a:solidFill>
                 <a:latin typeface="Meiryo"/>
-              </a:rPr>
-              <a:t>データベースは現在の Supabase（東京リージョン＝国内保管）をそのまま利用するため、移行作業は発生しません。</a:t>
+                <a:ea typeface="Meiryo"/>
+              </a:rPr>
+              <a:t>データベースは Supabase をそのまま利用しますが、保管先を韓国リージョンから東京リージョンへ移します（次々ページ）。</a:t>
             </a:r>
           </a:p>
         </p:txBody>
@@ -6917,8 +7438,9 @@
                   <a:srgbClr val="6B7280"/>
                 </a:solidFill>
                 <a:latin typeface="Meiryo"/>
-              </a:rPr>
-              <a:t>新規契約でも、安全性は既存サーバーと同等以上を確保します。</a:t>
+                <a:ea typeface="Meiryo"/>
+              </a:rPr>
+              <a:t>新規契約でも、安全性は既存サーバーと同等以上を確保します。保管場所は下記のとおり整理しています。</a:t>
             </a:r>
           </a:p>
         </p:txBody>
@@ -7007,8 +7529,9 @@
                   <a:srgbClr val="1E2761"/>
                 </a:solidFill>
                 <a:latin typeface="Meiryo"/>
-              </a:rPr>
-              <a:t>国内保管</a:t>
+                <a:ea typeface="Meiryo"/>
+              </a:rPr>
+              <a:t>保管場所</a:t>
             </a:r>
           </a:p>
         </p:txBody>
@@ -7093,46 +7616,33 @@
                   <a:srgbClr val="6B7280"/>
                 </a:solidFill>
                 <a:latin typeface="Meiryo"/>
-              </a:rPr>
-              <a:t>データは東京リージョンに</a:t>
-            </a:r>
-          </a:p>
-          <a:p>
-            <a:pPr algn="l">
-              <a:lnSpc>
-                <a:spcPct val="140000"/>
-              </a:lnSpc>
-              <a:spcAft>
-                <a:spcPts val="400"/>
-              </a:spcAft>
-            </a:pPr>
+                <a:ea typeface="Meiryo"/>
+              </a:rPr>
+              <a:t>アプリは東京。データは</a:t>
+            </a:r>
+          </a:p>
+          <a:p>
             <a:r>
               <a:rPr sz="1150" b="0">
                 <a:solidFill>
                   <a:srgbClr val="6B7280"/>
                 </a:solidFill>
                 <a:latin typeface="Meiryo"/>
-              </a:rPr>
-              <a:t>保管。個人情報が海外へ</a:t>
-            </a:r>
-          </a:p>
-          <a:p>
-            <a:pPr algn="l">
-              <a:lnSpc>
-                <a:spcPct val="140000"/>
-              </a:lnSpc>
-              <a:spcAft>
-                <a:spcPts val="400"/>
-              </a:spcAft>
-            </a:pPr>
+                <a:ea typeface="Meiryo"/>
+              </a:rPr>
+              <a:t>2026年8月中に東京へ</a:t>
+            </a:r>
+          </a:p>
+          <a:p>
             <a:r>
               <a:rPr sz="1150" b="0">
                 <a:solidFill>
                   <a:srgbClr val="6B7280"/>
                 </a:solidFill>
                 <a:latin typeface="Meiryo"/>
-              </a:rPr>
-              <a:t>出ることはありません。</a:t>
+                <a:ea typeface="Meiryo"/>
+              </a:rPr>
+              <a:t>移し、国内保管とします。</a:t>
             </a:r>
           </a:p>
         </p:txBody>
@@ -7735,46 +8245,33 @@
                   <a:srgbClr val="6B7280"/>
                 </a:solidFill>
                 <a:latin typeface="Meiryo"/>
+                <a:ea typeface="Meiryo"/>
               </a:rPr>
               <a:t>AIに送ったデータが学習に</a:t>
             </a:r>
           </a:p>
           <a:p>
-            <a:pPr algn="l">
-              <a:lnSpc>
-                <a:spcPct val="140000"/>
-              </a:lnSpc>
-              <a:spcAft>
-                <a:spcPts val="400"/>
-              </a:spcAft>
-            </a:pPr>
             <a:r>
               <a:rPr sz="1150" b="0">
                 <a:solidFill>
                   <a:srgbClr val="6B7280"/>
                 </a:solidFill>
                 <a:latin typeface="Meiryo"/>
+                <a:ea typeface="Meiryo"/>
               </a:rPr>
               <a:t>使われることはありません。</a:t>
             </a:r>
           </a:p>
           <a:p>
-            <a:pPr algn="l">
-              <a:lnSpc>
-                <a:spcPct val="140000"/>
-              </a:lnSpc>
-              <a:spcAft>
-                <a:spcPts val="400"/>
-              </a:spcAft>
-            </a:pPr>
             <a:r>
               <a:rPr sz="1150" b="0">
                 <a:solidFill>
                   <a:srgbClr val="6B7280"/>
                 </a:solidFill>
                 <a:latin typeface="Meiryo"/>
-              </a:rPr>
-              <a:t>処理もAzure内で完結。</a:t>
+                <a:ea typeface="Meiryo"/>
+              </a:rPr>
+              <a:t>送信先は米国、保管もされません。</a:t>
             </a:r>
           </a:p>
         </p:txBody>
@@ -10865,46 +11362,1971 @@
                   <a:srgbClr val="FFFFFF"/>
                 </a:solidFill>
                 <a:latin typeface="Meiryo"/>
+                <a:ea typeface="Meiryo"/>
               </a:rPr>
               <a:t>ご確認いただきたい点</a:t>
             </a:r>
           </a:p>
           <a:p>
-            <a:pPr algn="l">
-              <a:lnSpc>
-                <a:spcPct val="160000"/>
-              </a:lnSpc>
-              <a:spcAft>
-                <a:spcPts val="400"/>
-              </a:spcAft>
-            </a:pPr>
             <a:r>
               <a:rPr sz="1300" b="0">
                 <a:solidFill>
                   <a:srgbClr val="FFFFFF"/>
                 </a:solidFill>
                 <a:latin typeface="Meiryo"/>
+                <a:ea typeface="Meiryo"/>
               </a:rPr>
               <a:t>　保管データについて「必ず御社Azure内に置く」という社内ルールはございますか。</a:t>
             </a:r>
           </a:p>
           <a:p>
-            <a:pPr algn="l">
-              <a:lnSpc>
-                <a:spcPct val="160000"/>
-              </a:lnSpc>
-              <a:spcAft>
-                <a:spcPts val="400"/>
-              </a:spcAft>
-            </a:pPr>
             <a:r>
               <a:rPr sz="1300" b="0">
                 <a:solidFill>
                   <a:srgbClr val="FFFFFF"/>
                 </a:solidFill>
                 <a:latin typeface="Meiryo"/>
-              </a:rPr>
-              <a:t>　特になければ、現在のSupabase（東京リージョン・国内保管）のまま進めます。</a:t>
+                <a:ea typeface="Meiryo"/>
+              </a:rPr>
+              <a:t>　特になければ、データベースは Supabase のまま東京リージョンへ移し、国内保管といたします。</a:t>
+            </a:r>
+          </a:p>
+        </p:txBody>
+      </p:sp>
+    </p:spTree>
+  </p:cSld>
+  <p:clrMapOvr>
+    <a:masterClrMapping/>
+  </p:clrMapOvr>
+</p:sld>
+</file>
+
+<file path=ppt/slides/slide8.xml><?xml version="1.0" encoding="utf-8"?>
+<p:sld xmlns:a="http://schemas.openxmlformats.org/drawingml/2006/main" xmlns:p="http://schemas.openxmlformats.org/presentationml/2006/main" xmlns:r="http://schemas.openxmlformats.org/officeDocument/2006/relationships">
+  <p:cSld>
+    <p:spTree>
+      <p:nvGrpSpPr>
+        <p:cNvPr id="1" name=""/>
+        <p:cNvGrpSpPr/>
+        <p:nvPr/>
+      </p:nvGrpSpPr>
+      <p:grpSpPr/>
+      <p:sp>
+        <p:nvSpPr>
+          <p:cNvPr id="2" name="Rectangle 1"/>
+          <p:cNvSpPr/>
+          <p:nvPr/>
+        </p:nvSpPr>
+        <p:spPr>
+          <a:xfrm>
+            <a:off x="0" y="0"/>
+            <a:ext cx="12191695" cy="868680"/>
+          </a:xfrm>
+          <a:prstGeom prst="rect">
+            <a:avLst/>
+          </a:prstGeom>
+          <a:solidFill>
+            <a:srgbClr val="1E2761"/>
+          </a:solidFill>
+          <a:ln>
+            <a:noFill/>
+          </a:ln>
+          <a:effectLst/>
+        </p:spPr>
+        <p:style>
+          <a:lnRef idx="1">
+            <a:schemeClr val="accent1"/>
+          </a:lnRef>
+          <a:fillRef idx="3">
+            <a:schemeClr val="accent1"/>
+          </a:fillRef>
+          <a:effectRef idx="2">
+            <a:schemeClr val="accent1"/>
+          </a:effectRef>
+          <a:fontRef idx="minor">
+            <a:schemeClr val="lt1"/>
+          </a:fontRef>
+        </p:style>
+        <p:txBody>
+          <a:bodyPr rtlCol="0" anchor="ctr"/>
+          <a:lstStyle/>
+          <a:p/>
+        </p:txBody>
+      </p:sp>
+      <p:sp>
+        <p:nvSpPr>
+          <p:cNvPr id="3" name="TextBox 2"/>
+          <p:cNvSpPr txBox="1"/>
+          <p:nvPr/>
+        </p:nvSpPr>
+        <p:spPr>
+          <a:xfrm>
+            <a:off x="566928" y="237744"/>
+            <a:ext cx="8686800" cy="411480"/>
+          </a:xfrm>
+          <a:prstGeom prst="rect">
+            <a:avLst/>
+          </a:prstGeom>
+          <a:noFill/>
+        </p:spPr>
+        <p:txBody>
+          <a:bodyPr wrap="square" lIns="0" rIns="0" tIns="0" bIns="0">
+            <a:spAutoFit/>
+          </a:bodyPr>
+          <a:lstStyle/>
+          <a:p>
+            <a:pPr algn="l"/>
+            <a:r>
+              <a:rPr sz="2200" b="1">
+                <a:solidFill>
+                  <a:srgbClr val="FFFFFF"/>
+                </a:solidFill>
+                <a:latin typeface="Meiryo"/>
+                <a:ea typeface="Meiryo"/>
+              </a:rPr>
+              <a:t>データの保管場所</a:t>
+            </a:r>
+          </a:p>
+        </p:txBody>
+      </p:sp>
+      <p:sp>
+        <p:nvSpPr>
+          <p:cNvPr id="4" name="TextBox 3"/>
+          <p:cNvSpPr txBox="1"/>
+          <p:nvPr/>
+        </p:nvSpPr>
+        <p:spPr>
+          <a:xfrm>
+            <a:off x="566928" y="1024128"/>
+            <a:ext cx="11064240" cy="365760"/>
+          </a:xfrm>
+          <a:prstGeom prst="rect">
+            <a:avLst/>
+          </a:prstGeom>
+          <a:noFill/>
+        </p:spPr>
+        <p:txBody>
+          <a:bodyPr wrap="square" lIns="0" rIns="0" tIns="0" bIns="0">
+            <a:spAutoFit/>
+          </a:bodyPr>
+          <a:lstStyle/>
+          <a:p>
+            <a:pPr algn="l"/>
+            <a:r>
+              <a:rPr sz="1250" b="0">
+                <a:solidFill>
+                  <a:srgbClr val="6B7280"/>
+                </a:solidFill>
+                <a:latin typeface="Meiryo"/>
+                <a:ea typeface="Meiryo"/>
+              </a:rPr>
+              <a:t>システムは3つの部品でできています。それぞれの保管・処理の場所は次のとおりです。</a:t>
+            </a:r>
+          </a:p>
+        </p:txBody>
+      </p:sp>
+      <p:sp>
+        <p:nvSpPr>
+          <p:cNvPr id="5" name="TextBox 4"/>
+          <p:cNvSpPr txBox="1"/>
+          <p:nvPr/>
+        </p:nvSpPr>
+        <p:spPr>
+          <a:xfrm>
+            <a:off x="566928" y="1600200"/>
+            <a:ext cx="2926080" cy="320040"/>
+          </a:xfrm>
+          <a:prstGeom prst="rect">
+            <a:avLst/>
+          </a:prstGeom>
+          <a:noFill/>
+        </p:spPr>
+        <p:txBody>
+          <a:bodyPr wrap="square" lIns="0" rIns="0" tIns="0" bIns="0">
+            <a:spAutoFit/>
+          </a:bodyPr>
+          <a:lstStyle/>
+          <a:p>
+            <a:pPr algn="l"/>
+            <a:r>
+              <a:rPr sz="1200" b="1">
+                <a:solidFill>
+                  <a:srgbClr val="6B7280"/>
+                </a:solidFill>
+                <a:latin typeface="Meiryo"/>
+                <a:ea typeface="Meiryo"/>
+              </a:rPr>
+              <a:t>部品</a:t>
+            </a:r>
+          </a:p>
+        </p:txBody>
+      </p:sp>
+      <p:sp>
+        <p:nvSpPr>
+          <p:cNvPr id="6" name="TextBox 5"/>
+          <p:cNvSpPr txBox="1"/>
+          <p:nvPr/>
+        </p:nvSpPr>
+        <p:spPr>
+          <a:xfrm>
+            <a:off x="3767328" y="1600200"/>
+            <a:ext cx="2743200" cy="320040"/>
+          </a:xfrm>
+          <a:prstGeom prst="rect">
+            <a:avLst/>
+          </a:prstGeom>
+          <a:noFill/>
+        </p:spPr>
+        <p:txBody>
+          <a:bodyPr wrap="square" lIns="0" rIns="0" tIns="0" bIns="0">
+            <a:spAutoFit/>
+          </a:bodyPr>
+          <a:lstStyle/>
+          <a:p>
+            <a:pPr algn="l"/>
+            <a:r>
+              <a:rPr sz="1200" b="1">
+                <a:solidFill>
+                  <a:srgbClr val="6B7280"/>
+                </a:solidFill>
+                <a:latin typeface="Meiryo"/>
+                <a:ea typeface="Meiryo"/>
+              </a:rPr>
+              <a:t>現在</a:t>
+            </a:r>
+          </a:p>
+        </p:txBody>
+      </p:sp>
+      <p:sp>
+        <p:nvSpPr>
+          <p:cNvPr id="7" name="TextBox 6"/>
+          <p:cNvSpPr txBox="1"/>
+          <p:nvPr/>
+        </p:nvSpPr>
+        <p:spPr>
+          <a:xfrm>
+            <a:off x="6784848" y="1600200"/>
+            <a:ext cx="2743200" cy="320040"/>
+          </a:xfrm>
+          <a:prstGeom prst="rect">
+            <a:avLst/>
+          </a:prstGeom>
+          <a:noFill/>
+        </p:spPr>
+        <p:txBody>
+          <a:bodyPr wrap="square" lIns="0" rIns="0" tIns="0" bIns="0">
+            <a:spAutoFit/>
+          </a:bodyPr>
+          <a:lstStyle/>
+          <a:p>
+            <a:pPr algn="l"/>
+            <a:r>
+              <a:rPr sz="1200" b="1">
+                <a:solidFill>
+                  <a:srgbClr val="6B7280"/>
+                </a:solidFill>
+                <a:latin typeface="Meiryo"/>
+                <a:ea typeface="Meiryo"/>
+              </a:rPr>
+              <a:t>対応後</a:t>
+            </a:r>
+          </a:p>
+        </p:txBody>
+      </p:sp>
+      <p:sp>
+        <p:nvSpPr>
+          <p:cNvPr id="8" name="TextBox 7"/>
+          <p:cNvSpPr txBox="1"/>
+          <p:nvPr/>
+        </p:nvSpPr>
+        <p:spPr>
+          <a:xfrm>
+            <a:off x="9802368" y="1600200"/>
+            <a:ext cx="2514600" cy="320040"/>
+          </a:xfrm>
+          <a:prstGeom prst="rect">
+            <a:avLst/>
+          </a:prstGeom>
+          <a:noFill/>
+        </p:spPr>
+        <p:txBody>
+          <a:bodyPr wrap="square" lIns="0" rIns="0" tIns="0" bIns="0">
+            <a:spAutoFit/>
+          </a:bodyPr>
+          <a:lstStyle/>
+          <a:p>
+            <a:pPr algn="l"/>
+            <a:r>
+              <a:rPr sz="1200" b="1">
+                <a:solidFill>
+                  <a:srgbClr val="6B7280"/>
+                </a:solidFill>
+                <a:latin typeface="Meiryo"/>
+                <a:ea typeface="Meiryo"/>
+              </a:rPr>
+              <a:t>時期</a:t>
+            </a:r>
+          </a:p>
+        </p:txBody>
+      </p:sp>
+      <p:sp>
+        <p:nvSpPr>
+          <p:cNvPr id="9" name="TextBox 8"/>
+          <p:cNvSpPr txBox="1"/>
+          <p:nvPr/>
+        </p:nvSpPr>
+        <p:spPr>
+          <a:xfrm>
+            <a:off x="566928" y="2240280"/>
+            <a:ext cx="2926080" cy="365760"/>
+          </a:xfrm>
+          <a:prstGeom prst="rect">
+            <a:avLst/>
+          </a:prstGeom>
+          <a:noFill/>
+        </p:spPr>
+        <p:txBody>
+          <a:bodyPr wrap="square" lIns="0" rIns="0" tIns="0" bIns="0">
+            <a:spAutoFit/>
+          </a:bodyPr>
+          <a:lstStyle/>
+          <a:p>
+            <a:pPr algn="l"/>
+            <a:r>
+              <a:rPr sz="1250" b="1">
+                <a:solidFill>
+                  <a:srgbClr val="141A33"/>
+                </a:solidFill>
+                <a:latin typeface="Meiryo"/>
+                <a:ea typeface="Meiryo"/>
+              </a:rPr>
+              <a:t>アプリ本体</a:t>
+            </a:r>
+          </a:p>
+        </p:txBody>
+      </p:sp>
+      <p:sp>
+        <p:nvSpPr>
+          <p:cNvPr id="10" name="TextBox 9"/>
+          <p:cNvSpPr txBox="1"/>
+          <p:nvPr/>
+        </p:nvSpPr>
+        <p:spPr>
+          <a:xfrm>
+            <a:off x="3767328" y="2240280"/>
+            <a:ext cx="2743200" cy="365760"/>
+          </a:xfrm>
+          <a:prstGeom prst="rect">
+            <a:avLst/>
+          </a:prstGeom>
+          <a:noFill/>
+        </p:spPr>
+        <p:txBody>
+          <a:bodyPr wrap="square" lIns="0" rIns="0" tIns="0" bIns="0">
+            <a:spAutoFit/>
+          </a:bodyPr>
+          <a:lstStyle/>
+          <a:p>
+            <a:pPr algn="l"/>
+            <a:r>
+              <a:rPr sz="1200" b="0">
+                <a:solidFill>
+                  <a:srgbClr val="6B7280"/>
+                </a:solidFill>
+                <a:latin typeface="Meiryo"/>
+                <a:ea typeface="Meiryo"/>
+              </a:rPr>
+              <a:t>米国オレゴン（Render）</a:t>
+            </a:r>
+          </a:p>
+        </p:txBody>
+      </p:sp>
+      <p:sp>
+        <p:nvSpPr>
+          <p:cNvPr id="11" name="TextBox 10"/>
+          <p:cNvSpPr txBox="1"/>
+          <p:nvPr/>
+        </p:nvSpPr>
+        <p:spPr>
+          <a:xfrm>
+            <a:off x="6784848" y="2240280"/>
+            <a:ext cx="2743200" cy="365760"/>
+          </a:xfrm>
+          <a:prstGeom prst="rect">
+            <a:avLst/>
+          </a:prstGeom>
+          <a:noFill/>
+        </p:spPr>
+        <p:txBody>
+          <a:bodyPr wrap="square" lIns="0" rIns="0" tIns="0" bIns="0">
+            <a:spAutoFit/>
+          </a:bodyPr>
+          <a:lstStyle/>
+          <a:p>
+            <a:pPr algn="l"/>
+            <a:r>
+              <a:rPr sz="1200" b="1">
+                <a:solidFill>
+                  <a:srgbClr val="141A33"/>
+                </a:solidFill>
+                <a:latin typeface="Meiryo"/>
+                <a:ea typeface="Meiryo"/>
+              </a:rPr>
+              <a:t>東京（Azure）</a:t>
+            </a:r>
+          </a:p>
+        </p:txBody>
+      </p:sp>
+      <p:sp>
+        <p:nvSpPr>
+          <p:cNvPr id="12" name="TextBox 11"/>
+          <p:cNvSpPr txBox="1"/>
+          <p:nvPr/>
+        </p:nvSpPr>
+        <p:spPr>
+          <a:xfrm>
+            <a:off x="9802368" y="2240280"/>
+            <a:ext cx="2514600" cy="365760"/>
+          </a:xfrm>
+          <a:prstGeom prst="rect">
+            <a:avLst/>
+          </a:prstGeom>
+          <a:noFill/>
+        </p:spPr>
+        <p:txBody>
+          <a:bodyPr wrap="square" lIns="0" rIns="0" tIns="0" bIns="0">
+            <a:spAutoFit/>
+          </a:bodyPr>
+          <a:lstStyle/>
+          <a:p>
+            <a:pPr algn="l"/>
+            <a:r>
+              <a:rPr sz="1200" b="0">
+                <a:solidFill>
+                  <a:srgbClr val="6B7280"/>
+                </a:solidFill>
+                <a:latin typeface="Meiryo"/>
+                <a:ea typeface="Meiryo"/>
+              </a:rPr>
+              <a:t>完了</a:t>
+            </a:r>
+          </a:p>
+        </p:txBody>
+      </p:sp>
+      <p:sp>
+        <p:nvSpPr>
+          <p:cNvPr id="13" name="Rectangle 12"/>
+          <p:cNvSpPr/>
+          <p:nvPr/>
+        </p:nvSpPr>
+        <p:spPr>
+          <a:xfrm>
+            <a:off x="566928" y="2788920"/>
+            <a:ext cx="11183112" cy="731520"/>
+          </a:xfrm>
+          <a:prstGeom prst="rect">
+            <a:avLst/>
+          </a:prstGeom>
+          <a:solidFill>
+            <a:srgbClr val="F5F6F8"/>
+          </a:solidFill>
+          <a:ln>
+            <a:noFill/>
+          </a:ln>
+          <a:effectLst/>
+        </p:spPr>
+        <p:style>
+          <a:lnRef idx="1">
+            <a:schemeClr val="accent1"/>
+          </a:lnRef>
+          <a:fillRef idx="3">
+            <a:schemeClr val="accent1"/>
+          </a:fillRef>
+          <a:effectRef idx="2">
+            <a:schemeClr val="accent1"/>
+          </a:effectRef>
+          <a:fontRef idx="minor">
+            <a:schemeClr val="lt1"/>
+          </a:fontRef>
+        </p:style>
+        <p:txBody>
+          <a:bodyPr rtlCol="0" anchor="ctr"/>
+          <a:lstStyle/>
+          <a:p/>
+        </p:txBody>
+      </p:sp>
+      <p:sp>
+        <p:nvSpPr>
+          <p:cNvPr id="14" name="TextBox 13"/>
+          <p:cNvSpPr txBox="1"/>
+          <p:nvPr/>
+        </p:nvSpPr>
+        <p:spPr>
+          <a:xfrm>
+            <a:off x="566928" y="2971800"/>
+            <a:ext cx="2926080" cy="365760"/>
+          </a:xfrm>
+          <a:prstGeom prst="rect">
+            <a:avLst/>
+          </a:prstGeom>
+          <a:noFill/>
+        </p:spPr>
+        <p:txBody>
+          <a:bodyPr wrap="square" lIns="0" rIns="0" tIns="0" bIns="0">
+            <a:spAutoFit/>
+          </a:bodyPr>
+          <a:lstStyle/>
+          <a:p>
+            <a:pPr algn="l"/>
+            <a:r>
+              <a:rPr sz="1250" b="1">
+                <a:solidFill>
+                  <a:srgbClr val="141A33"/>
+                </a:solidFill>
+                <a:latin typeface="Meiryo"/>
+                <a:ea typeface="Meiryo"/>
+              </a:rPr>
+              <a:t>データベース・添付ファイル</a:t>
+            </a:r>
+          </a:p>
+        </p:txBody>
+      </p:sp>
+      <p:sp>
+        <p:nvSpPr>
+          <p:cNvPr id="15" name="TextBox 14"/>
+          <p:cNvSpPr txBox="1"/>
+          <p:nvPr/>
+        </p:nvSpPr>
+        <p:spPr>
+          <a:xfrm>
+            <a:off x="3767328" y="2971800"/>
+            <a:ext cx="2743200" cy="365760"/>
+          </a:xfrm>
+          <a:prstGeom prst="rect">
+            <a:avLst/>
+          </a:prstGeom>
+          <a:noFill/>
+        </p:spPr>
+        <p:txBody>
+          <a:bodyPr wrap="square" lIns="0" rIns="0" tIns="0" bIns="0">
+            <a:spAutoFit/>
+          </a:bodyPr>
+          <a:lstStyle/>
+          <a:p>
+            <a:pPr algn="l"/>
+            <a:r>
+              <a:rPr sz="1200" b="0">
+                <a:solidFill>
+                  <a:srgbClr val="6B7280"/>
+                </a:solidFill>
+                <a:latin typeface="Meiryo"/>
+                <a:ea typeface="Meiryo"/>
+              </a:rPr>
+              <a:t>韓国ソウル（Supabase）</a:t>
+            </a:r>
+          </a:p>
+        </p:txBody>
+      </p:sp>
+      <p:sp>
+        <p:nvSpPr>
+          <p:cNvPr id="16" name="TextBox 15"/>
+          <p:cNvSpPr txBox="1"/>
+          <p:nvPr/>
+        </p:nvSpPr>
+        <p:spPr>
+          <a:xfrm>
+            <a:off x="6784848" y="2971800"/>
+            <a:ext cx="2743200" cy="365760"/>
+          </a:xfrm>
+          <a:prstGeom prst="rect">
+            <a:avLst/>
+          </a:prstGeom>
+          <a:noFill/>
+        </p:spPr>
+        <p:txBody>
+          <a:bodyPr wrap="square" lIns="0" rIns="0" tIns="0" bIns="0">
+            <a:spAutoFit/>
+          </a:bodyPr>
+          <a:lstStyle/>
+          <a:p>
+            <a:pPr algn="l"/>
+            <a:r>
+              <a:rPr sz="1200" b="1">
+                <a:solidFill>
+                  <a:srgbClr val="141A33"/>
+                </a:solidFill>
+                <a:latin typeface="Meiryo"/>
+                <a:ea typeface="Meiryo"/>
+              </a:rPr>
+              <a:t>東京（Supabase）</a:t>
+            </a:r>
+          </a:p>
+        </p:txBody>
+      </p:sp>
+      <p:sp>
+        <p:nvSpPr>
+          <p:cNvPr id="17" name="TextBox 16"/>
+          <p:cNvSpPr txBox="1"/>
+          <p:nvPr/>
+        </p:nvSpPr>
+        <p:spPr>
+          <a:xfrm>
+            <a:off x="9802368" y="2971800"/>
+            <a:ext cx="2514600" cy="365760"/>
+          </a:xfrm>
+          <a:prstGeom prst="rect">
+            <a:avLst/>
+          </a:prstGeom>
+          <a:noFill/>
+        </p:spPr>
+        <p:txBody>
+          <a:bodyPr wrap="square" lIns="0" rIns="0" tIns="0" bIns="0">
+            <a:spAutoFit/>
+          </a:bodyPr>
+          <a:lstStyle/>
+          <a:p>
+            <a:pPr algn="l"/>
+            <a:r>
+              <a:rPr sz="1200" b="0">
+                <a:solidFill>
+                  <a:srgbClr val="6B7280"/>
+                </a:solidFill>
+                <a:latin typeface="Meiryo"/>
+                <a:ea typeface="Meiryo"/>
+              </a:rPr>
+              <a:t>2026年8月中</a:t>
+            </a:r>
+          </a:p>
+        </p:txBody>
+      </p:sp>
+      <p:sp>
+        <p:nvSpPr>
+          <p:cNvPr id="18" name="TextBox 17"/>
+          <p:cNvSpPr txBox="1"/>
+          <p:nvPr/>
+        </p:nvSpPr>
+        <p:spPr>
+          <a:xfrm>
+            <a:off x="566928" y="3703320"/>
+            <a:ext cx="2926080" cy="365760"/>
+          </a:xfrm>
+          <a:prstGeom prst="rect">
+            <a:avLst/>
+          </a:prstGeom>
+          <a:noFill/>
+        </p:spPr>
+        <p:txBody>
+          <a:bodyPr wrap="square" lIns="0" rIns="0" tIns="0" bIns="0">
+            <a:spAutoFit/>
+          </a:bodyPr>
+          <a:lstStyle/>
+          <a:p>
+            <a:pPr algn="l"/>
+            <a:r>
+              <a:rPr sz="1250" b="1">
+                <a:solidFill>
+                  <a:srgbClr val="141A33"/>
+                </a:solidFill>
+                <a:latin typeface="Meiryo"/>
+                <a:ea typeface="Meiryo"/>
+              </a:rPr>
+              <a:t>AI・OCR</a:t>
+            </a:r>
+          </a:p>
+        </p:txBody>
+      </p:sp>
+      <p:sp>
+        <p:nvSpPr>
+          <p:cNvPr id="19" name="TextBox 18"/>
+          <p:cNvSpPr txBox="1"/>
+          <p:nvPr/>
+        </p:nvSpPr>
+        <p:spPr>
+          <a:xfrm>
+            <a:off x="3767328" y="3703320"/>
+            <a:ext cx="2743200" cy="365760"/>
+          </a:xfrm>
+          <a:prstGeom prst="rect">
+            <a:avLst/>
+          </a:prstGeom>
+          <a:noFill/>
+        </p:spPr>
+        <p:txBody>
+          <a:bodyPr wrap="square" lIns="0" rIns="0" tIns="0" bIns="0">
+            <a:spAutoFit/>
+          </a:bodyPr>
+          <a:lstStyle/>
+          <a:p>
+            <a:pPr algn="l"/>
+            <a:r>
+              <a:rPr sz="1200" b="0">
+                <a:solidFill>
+                  <a:srgbClr val="6B7280"/>
+                </a:solidFill>
+                <a:latin typeface="Meiryo"/>
+                <a:ea typeface="Meiryo"/>
+              </a:rPr>
+              <a:t>米国（Anthropic）</a:t>
+            </a:r>
+          </a:p>
+        </p:txBody>
+      </p:sp>
+      <p:sp>
+        <p:nvSpPr>
+          <p:cNvPr id="20" name="TextBox 19"/>
+          <p:cNvSpPr txBox="1"/>
+          <p:nvPr/>
+        </p:nvSpPr>
+        <p:spPr>
+          <a:xfrm>
+            <a:off x="6784848" y="3703320"/>
+            <a:ext cx="2743200" cy="365760"/>
+          </a:xfrm>
+          <a:prstGeom prst="rect">
+            <a:avLst/>
+          </a:prstGeom>
+          <a:noFill/>
+        </p:spPr>
+        <p:txBody>
+          <a:bodyPr wrap="square" lIns="0" rIns="0" tIns="0" bIns="0">
+            <a:spAutoFit/>
+          </a:bodyPr>
+          <a:lstStyle/>
+          <a:p>
+            <a:pPr algn="l"/>
+            <a:r>
+              <a:rPr sz="1200" b="1">
+                <a:solidFill>
+                  <a:srgbClr val="141A33"/>
+                </a:solidFill>
+                <a:latin typeface="Meiryo"/>
+                <a:ea typeface="Meiryo"/>
+              </a:rPr>
+              <a:t>当面は米国のまま</a:t>
+            </a:r>
+          </a:p>
+        </p:txBody>
+      </p:sp>
+      <p:sp>
+        <p:nvSpPr>
+          <p:cNvPr id="21" name="TextBox 20"/>
+          <p:cNvSpPr txBox="1"/>
+          <p:nvPr/>
+        </p:nvSpPr>
+        <p:spPr>
+          <a:xfrm>
+            <a:off x="9802368" y="3703320"/>
+            <a:ext cx="2514600" cy="365760"/>
+          </a:xfrm>
+          <a:prstGeom prst="rect">
+            <a:avLst/>
+          </a:prstGeom>
+          <a:noFill/>
+        </p:spPr>
+        <p:txBody>
+          <a:bodyPr wrap="square" lIns="0" rIns="0" tIns="0" bIns="0">
+            <a:spAutoFit/>
+          </a:bodyPr>
+          <a:lstStyle/>
+          <a:p>
+            <a:pPr algn="l"/>
+            <a:r>
+              <a:rPr sz="1200" b="0">
+                <a:solidFill>
+                  <a:srgbClr val="6B7280"/>
+                </a:solidFill>
+                <a:latin typeface="Meiryo"/>
+                <a:ea typeface="Meiryo"/>
+              </a:rPr>
+              <a:t>規約・公表で対応</a:t>
+            </a:r>
+          </a:p>
+        </p:txBody>
+      </p:sp>
+      <p:sp>
+        <p:nvSpPr>
+          <p:cNvPr id="22" name="Rounded Rectangle 21"/>
+          <p:cNvSpPr/>
+          <p:nvPr/>
+        </p:nvSpPr>
+        <p:spPr>
+          <a:xfrm>
+            <a:off x="566928" y="4480560"/>
+            <a:ext cx="11073384" cy="960120"/>
+          </a:xfrm>
+          <a:prstGeom prst="roundRect">
+            <a:avLst>
+              <a:gd name="adj" fmla="val 12000"/>
+            </a:avLst>
+          </a:prstGeom>
+          <a:solidFill>
+            <a:srgbClr val="FAFAFB"/>
+          </a:solidFill>
+          <a:ln>
+            <a:noFill/>
+          </a:ln>
+          <a:effectLst/>
+        </p:spPr>
+        <p:style>
+          <a:lnRef idx="1">
+            <a:schemeClr val="accent1"/>
+          </a:lnRef>
+          <a:fillRef idx="3">
+            <a:schemeClr val="accent1"/>
+          </a:fillRef>
+          <a:effectRef idx="2">
+            <a:schemeClr val="accent1"/>
+          </a:effectRef>
+          <a:fontRef idx="minor">
+            <a:schemeClr val="lt1"/>
+          </a:fontRef>
+        </p:style>
+        <p:txBody>
+          <a:bodyPr rtlCol="0" anchor="ctr"/>
+          <a:lstStyle/>
+          <a:p/>
+        </p:txBody>
+      </p:sp>
+      <p:sp>
+        <p:nvSpPr>
+          <p:cNvPr id="23" name="TextBox 22"/>
+          <p:cNvSpPr txBox="1"/>
+          <p:nvPr/>
+        </p:nvSpPr>
+        <p:spPr>
+          <a:xfrm>
+            <a:off x="868680" y="4640580"/>
+            <a:ext cx="10515600" cy="640080"/>
+          </a:xfrm>
+          <a:prstGeom prst="rect">
+            <a:avLst/>
+          </a:prstGeom>
+          <a:noFill/>
+        </p:spPr>
+        <p:txBody>
+          <a:bodyPr wrap="square" lIns="0" rIns="0" tIns="0" bIns="0">
+            <a:spAutoFit/>
+          </a:bodyPr>
+          <a:lstStyle/>
+          <a:p>
+            <a:pPr algn="l">
+              <a:spcAft>
+                <a:spcPts val="300"/>
+              </a:spcAft>
+            </a:pPr>
+            <a:r>
+              <a:rPr sz="1200" b="0">
+                <a:solidFill>
+                  <a:srgbClr val="141A33"/>
+                </a:solidFill>
+                <a:latin typeface="Meiryo"/>
+                <a:ea typeface="Meiryo"/>
+              </a:rPr>
+              <a:t>案件情報と、戸籍・通帳などの書類ファイルは、すべてデータベース側にあります。</a:t>
+            </a:r>
+          </a:p>
+          <a:p>
+            <a:pPr algn="l">
+              <a:spcAft>
+                <a:spcPts val="300"/>
+              </a:spcAft>
+            </a:pPr>
+            <a:r>
+              <a:rPr sz="1200" b="0">
+                <a:solidFill>
+                  <a:srgbClr val="141A33"/>
+                </a:solidFill>
+                <a:latin typeface="Meiryo"/>
+                <a:ea typeface="Meiryo"/>
+              </a:rPr>
+              <a:t>ここを国内に移すことの効果が最も大きいため、優先して実施します。</a:t>
+            </a:r>
+          </a:p>
+        </p:txBody>
+      </p:sp>
+      <p:sp>
+        <p:nvSpPr>
+          <p:cNvPr id="24" name="Rounded Rectangle 23"/>
+          <p:cNvSpPr/>
+          <p:nvPr/>
+        </p:nvSpPr>
+        <p:spPr>
+          <a:xfrm>
+            <a:off x="566928" y="5486400"/>
+            <a:ext cx="11073384" cy="685800"/>
+          </a:xfrm>
+          <a:prstGeom prst="roundRect">
+            <a:avLst>
+              <a:gd name="adj" fmla="val 12000"/>
+            </a:avLst>
+          </a:prstGeom>
+          <a:solidFill>
+            <a:srgbClr val="F2F4FB"/>
+          </a:solidFill>
+          <a:ln>
+            <a:noFill/>
+          </a:ln>
+          <a:effectLst/>
+        </p:spPr>
+        <p:style>
+          <a:lnRef idx="1">
+            <a:schemeClr val="accent1"/>
+          </a:lnRef>
+          <a:fillRef idx="3">
+            <a:schemeClr val="accent1"/>
+          </a:fillRef>
+          <a:effectRef idx="2">
+            <a:schemeClr val="accent1"/>
+          </a:effectRef>
+          <a:fontRef idx="minor">
+            <a:schemeClr val="lt1"/>
+          </a:fontRef>
+        </p:style>
+        <p:txBody>
+          <a:bodyPr rtlCol="0" anchor="ctr"/>
+          <a:lstStyle/>
+          <a:p/>
+        </p:txBody>
+      </p:sp>
+      <p:sp>
+        <p:nvSpPr>
+          <p:cNvPr id="25" name="TextBox 24"/>
+          <p:cNvSpPr txBox="1"/>
+          <p:nvPr/>
+        </p:nvSpPr>
+        <p:spPr>
+          <a:xfrm>
+            <a:off x="868680" y="5646420"/>
+            <a:ext cx="10515600" cy="365760"/>
+          </a:xfrm>
+          <a:prstGeom prst="rect">
+            <a:avLst/>
+          </a:prstGeom>
+          <a:noFill/>
+        </p:spPr>
+        <p:txBody>
+          <a:bodyPr wrap="square" lIns="0" rIns="0" tIns="0" bIns="0">
+            <a:spAutoFit/>
+          </a:bodyPr>
+          <a:lstStyle/>
+          <a:p>
+            <a:pPr algn="l">
+              <a:spcAft>
+                <a:spcPts val="300"/>
+              </a:spcAft>
+            </a:pPr>
+            <a:r>
+              <a:rPr sz="1250" b="1">
+                <a:solidFill>
+                  <a:srgbClr val="4F46E5"/>
+                </a:solidFill>
+                <a:latin typeface="Meiryo"/>
+                <a:ea typeface="Meiryo"/>
+              </a:rPr>
+              <a:t>AI は現時点で日本国内で処理する選択肢が提供されていないため、当面は米国のまま、契約と公表で対応します。</a:t>
+            </a:r>
+          </a:p>
+        </p:txBody>
+      </p:sp>
+    </p:spTree>
+  </p:cSld>
+  <p:clrMapOvr>
+    <a:masterClrMapping/>
+  </p:clrMapOvr>
+</p:sld>
+</file>
+
+<file path=ppt/slides/slide9.xml><?xml version="1.0" encoding="utf-8"?>
+<p:sld xmlns:a="http://schemas.openxmlformats.org/drawingml/2006/main" xmlns:p="http://schemas.openxmlformats.org/presentationml/2006/main" xmlns:r="http://schemas.openxmlformats.org/officeDocument/2006/relationships">
+  <p:cSld>
+    <p:spTree>
+      <p:nvGrpSpPr>
+        <p:cNvPr id="1" name=""/>
+        <p:cNvGrpSpPr/>
+        <p:nvPr/>
+      </p:nvGrpSpPr>
+      <p:grpSpPr/>
+      <p:sp>
+        <p:nvSpPr>
+          <p:cNvPr id="2" name="Rectangle 1"/>
+          <p:cNvSpPr/>
+          <p:nvPr/>
+        </p:nvSpPr>
+        <p:spPr>
+          <a:xfrm>
+            <a:off x="0" y="0"/>
+            <a:ext cx="12191695" cy="868680"/>
+          </a:xfrm>
+          <a:prstGeom prst="rect">
+            <a:avLst/>
+          </a:prstGeom>
+          <a:solidFill>
+            <a:srgbClr val="1E2761"/>
+          </a:solidFill>
+          <a:ln>
+            <a:noFill/>
+          </a:ln>
+          <a:effectLst/>
+        </p:spPr>
+        <p:style>
+          <a:lnRef idx="1">
+            <a:schemeClr val="accent1"/>
+          </a:lnRef>
+          <a:fillRef idx="3">
+            <a:schemeClr val="accent1"/>
+          </a:fillRef>
+          <a:effectRef idx="2">
+            <a:schemeClr val="accent1"/>
+          </a:effectRef>
+          <a:fontRef idx="minor">
+            <a:schemeClr val="lt1"/>
+          </a:fontRef>
+        </p:style>
+        <p:txBody>
+          <a:bodyPr rtlCol="0" anchor="ctr"/>
+          <a:lstStyle/>
+          <a:p/>
+        </p:txBody>
+      </p:sp>
+      <p:sp>
+        <p:nvSpPr>
+          <p:cNvPr id="3" name="TextBox 2"/>
+          <p:cNvSpPr txBox="1"/>
+          <p:nvPr/>
+        </p:nvSpPr>
+        <p:spPr>
+          <a:xfrm>
+            <a:off x="566928" y="237744"/>
+            <a:ext cx="8686800" cy="411480"/>
+          </a:xfrm>
+          <a:prstGeom prst="rect">
+            <a:avLst/>
+          </a:prstGeom>
+          <a:noFill/>
+        </p:spPr>
+        <p:txBody>
+          <a:bodyPr wrap="square" lIns="0" rIns="0" tIns="0" bIns="0">
+            <a:spAutoFit/>
+          </a:bodyPr>
+          <a:lstStyle/>
+          <a:p>
+            <a:pPr algn="l"/>
+            <a:r>
+              <a:rPr sz="2200" b="1">
+                <a:solidFill>
+                  <a:srgbClr val="FFFFFF"/>
+                </a:solidFill>
+                <a:latin typeface="Meiryo"/>
+                <a:ea typeface="Meiryo"/>
+              </a:rPr>
+              <a:t>個人情報保護法への対応</a:t>
+            </a:r>
+          </a:p>
+        </p:txBody>
+      </p:sp>
+      <p:sp>
+        <p:nvSpPr>
+          <p:cNvPr id="4" name="TextBox 3"/>
+          <p:cNvSpPr txBox="1"/>
+          <p:nvPr/>
+        </p:nvSpPr>
+        <p:spPr>
+          <a:xfrm>
+            <a:off x="566928" y="1024128"/>
+            <a:ext cx="11064240" cy="365760"/>
+          </a:xfrm>
+          <a:prstGeom prst="rect">
+            <a:avLst/>
+          </a:prstGeom>
+          <a:noFill/>
+        </p:spPr>
+        <p:txBody>
+          <a:bodyPr wrap="square" lIns="0" rIns="0" tIns="0" bIns="0">
+            <a:spAutoFit/>
+          </a:bodyPr>
+          <a:lstStyle/>
+          <a:p>
+            <a:pPr algn="l"/>
+            <a:r>
+              <a:rPr sz="1250" b="0">
+                <a:solidFill>
+                  <a:srgbClr val="6B7280"/>
+                </a:solidFill>
+                <a:latin typeface="Meiryo"/>
+                <a:ea typeface="Meiryo"/>
+              </a:rPr>
+              <a:t>外国の事業者に個人データを預ける場合、本人の同意または「体制の確認と公表」が必要です（法第28条）。</a:t>
+            </a:r>
+          </a:p>
+        </p:txBody>
+      </p:sp>
+      <p:sp>
+        <p:nvSpPr>
+          <p:cNvPr id="5" name="Rounded Rectangle 4"/>
+          <p:cNvSpPr/>
+          <p:nvPr/>
+        </p:nvSpPr>
+        <p:spPr>
+          <a:xfrm>
+            <a:off x="566928" y="1600200"/>
+            <a:ext cx="3529584" cy="3200400"/>
+          </a:xfrm>
+          <a:prstGeom prst="roundRect">
+            <a:avLst>
+              <a:gd name="adj" fmla="val 3500"/>
+            </a:avLst>
+          </a:prstGeom>
+          <a:solidFill>
+            <a:srgbClr val="FFFFFF"/>
+          </a:solidFill>
+          <a:ln w="12700">
+            <a:solidFill>
+              <a:srgbClr val="C7CDD8"/>
+            </a:solidFill>
+          </a:ln>
+          <a:effectLst/>
+        </p:spPr>
+        <p:style>
+          <a:lnRef idx="1">
+            <a:schemeClr val="accent1"/>
+          </a:lnRef>
+          <a:fillRef idx="3">
+            <a:schemeClr val="accent1"/>
+          </a:fillRef>
+          <a:effectRef idx="2">
+            <a:schemeClr val="accent1"/>
+          </a:effectRef>
+          <a:fontRef idx="minor">
+            <a:schemeClr val="lt1"/>
+          </a:fontRef>
+        </p:style>
+        <p:txBody>
+          <a:bodyPr rtlCol="0" anchor="ctr"/>
+          <a:lstStyle/>
+          <a:p/>
+        </p:txBody>
+      </p:sp>
+      <p:sp>
+        <p:nvSpPr>
+          <p:cNvPr id="6" name="Rectangle 5"/>
+          <p:cNvSpPr/>
+          <p:nvPr/>
+        </p:nvSpPr>
+        <p:spPr>
+          <a:xfrm>
+            <a:off x="566928" y="1600200"/>
+            <a:ext cx="3529584" cy="82296"/>
+          </a:xfrm>
+          <a:prstGeom prst="rect">
+            <a:avLst/>
+          </a:prstGeom>
+          <a:solidFill>
+            <a:srgbClr val="4F46E5"/>
+          </a:solidFill>
+          <a:ln>
+            <a:noFill/>
+          </a:ln>
+          <a:effectLst/>
+        </p:spPr>
+        <p:style>
+          <a:lnRef idx="1">
+            <a:schemeClr val="accent1"/>
+          </a:lnRef>
+          <a:fillRef idx="3">
+            <a:schemeClr val="accent1"/>
+          </a:fillRef>
+          <a:effectRef idx="2">
+            <a:schemeClr val="accent1"/>
+          </a:effectRef>
+          <a:fontRef idx="minor">
+            <a:schemeClr val="lt1"/>
+          </a:fontRef>
+        </p:style>
+        <p:txBody>
+          <a:bodyPr rtlCol="0" anchor="ctr"/>
+          <a:lstStyle/>
+          <a:p/>
+        </p:txBody>
+      </p:sp>
+      <p:sp>
+        <p:nvSpPr>
+          <p:cNvPr id="7" name="TextBox 6"/>
+          <p:cNvSpPr txBox="1"/>
+          <p:nvPr/>
+        </p:nvSpPr>
+        <p:spPr>
+          <a:xfrm>
+            <a:off x="859536" y="1938528"/>
+            <a:ext cx="3017520" cy="365760"/>
+          </a:xfrm>
+          <a:prstGeom prst="rect">
+            <a:avLst/>
+          </a:prstGeom>
+          <a:noFill/>
+        </p:spPr>
+        <p:txBody>
+          <a:bodyPr wrap="square" lIns="0" rIns="0" tIns="0" bIns="0">
+            <a:spAutoFit/>
+          </a:bodyPr>
+          <a:lstStyle/>
+          <a:p>
+            <a:pPr algn="l"/>
+            <a:r>
+              <a:rPr sz="1100" b="1">
+                <a:solidFill>
+                  <a:srgbClr val="4F46E5"/>
+                </a:solidFill>
+                <a:latin typeface="Meiryo"/>
+                <a:ea typeface="Meiryo"/>
+              </a:rPr>
+              <a:t>01</a:t>
+            </a:r>
+          </a:p>
+        </p:txBody>
+      </p:sp>
+      <p:sp>
+        <p:nvSpPr>
+          <p:cNvPr id="8" name="TextBox 7"/>
+          <p:cNvSpPr txBox="1"/>
+          <p:nvPr/>
+        </p:nvSpPr>
+        <p:spPr>
+          <a:xfrm>
+            <a:off x="859536" y="2304288"/>
+            <a:ext cx="3017520" cy="411480"/>
+          </a:xfrm>
+          <a:prstGeom prst="rect">
+            <a:avLst/>
+          </a:prstGeom>
+          <a:noFill/>
+        </p:spPr>
+        <p:txBody>
+          <a:bodyPr wrap="square" lIns="0" rIns="0" tIns="0" bIns="0">
+            <a:spAutoFit/>
+          </a:bodyPr>
+          <a:lstStyle/>
+          <a:p>
+            <a:pPr algn="l"/>
+            <a:r>
+              <a:rPr sz="1500" b="1">
+                <a:solidFill>
+                  <a:srgbClr val="141A33"/>
+                </a:solidFill>
+                <a:latin typeface="Meiryo"/>
+                <a:ea typeface="Meiryo"/>
+              </a:rPr>
+              <a:t>国内へ移す</a:t>
+            </a:r>
+          </a:p>
+        </p:txBody>
+      </p:sp>
+      <p:sp>
+        <p:nvSpPr>
+          <p:cNvPr id="9" name="TextBox 8"/>
+          <p:cNvSpPr txBox="1"/>
+          <p:nvPr/>
+        </p:nvSpPr>
+        <p:spPr>
+          <a:xfrm>
+            <a:off x="859536" y="2889504"/>
+            <a:ext cx="3017520" cy="1828800"/>
+          </a:xfrm>
+          <a:prstGeom prst="rect">
+            <a:avLst/>
+          </a:prstGeom>
+          <a:noFill/>
+        </p:spPr>
+        <p:txBody>
+          <a:bodyPr wrap="square" lIns="0" rIns="0" tIns="0" bIns="0">
+            <a:spAutoFit/>
+          </a:bodyPr>
+          <a:lstStyle/>
+          <a:p>
+            <a:pPr algn="l">
+              <a:spcAft>
+                <a:spcPts val="200"/>
+              </a:spcAft>
+            </a:pPr>
+            <a:r>
+              <a:rPr sz="1150" b="0">
+                <a:solidFill>
+                  <a:srgbClr val="6B7280"/>
+                </a:solidFill>
+                <a:latin typeface="Meiryo"/>
+                <a:ea typeface="Meiryo"/>
+              </a:rPr>
+              <a:t>データベースと添付ファイルを</a:t>
+            </a:r>
+          </a:p>
+          <a:p>
+            <a:pPr algn="l">
+              <a:spcAft>
+                <a:spcPts val="200"/>
+              </a:spcAft>
+            </a:pPr>
+            <a:r>
+              <a:rPr sz="1150" b="0">
+                <a:solidFill>
+                  <a:srgbClr val="6B7280"/>
+                </a:solidFill>
+                <a:latin typeface="Meiryo"/>
+                <a:ea typeface="Meiryo"/>
+              </a:rPr>
+              <a:t>東京リージョンへ移します。</a:t>
+            </a:r>
+          </a:p>
+          <a:p>
+            <a:pPr algn="l">
+              <a:spcAft>
+                <a:spcPts val="200"/>
+              </a:spcAft>
+            </a:pPr>
+            <a:r>
+              <a:rPr sz="1150" b="0">
+                <a:solidFill>
+                  <a:srgbClr val="6B7280"/>
+                </a:solidFill>
+                <a:latin typeface="Meiryo"/>
+                <a:ea typeface="Meiryo"/>
+              </a:rPr>
+              <a:t/>
+            </a:r>
+          </a:p>
+          <a:p>
+            <a:pPr algn="l">
+              <a:spcAft>
+                <a:spcPts val="200"/>
+              </a:spcAft>
+            </a:pPr>
+            <a:r>
+              <a:rPr sz="1150" b="0">
+                <a:solidFill>
+                  <a:srgbClr val="6B7280"/>
+                </a:solidFill>
+                <a:latin typeface="Meiryo"/>
+                <a:ea typeface="Meiryo"/>
+              </a:rPr>
+              <a:t>全案件のデータが国内保管に</a:t>
+            </a:r>
+          </a:p>
+          <a:p>
+            <a:pPr algn="l">
+              <a:spcAft>
+                <a:spcPts val="200"/>
+              </a:spcAft>
+            </a:pPr>
+            <a:r>
+              <a:rPr sz="1150" b="0">
+                <a:solidFill>
+                  <a:srgbClr val="6B7280"/>
+                </a:solidFill>
+                <a:latin typeface="Meiryo"/>
+                <a:ea typeface="Meiryo"/>
+              </a:rPr>
+              <a:t>なります。2026年8月中に実施。</a:t>
+            </a:r>
+          </a:p>
+        </p:txBody>
+      </p:sp>
+      <p:sp>
+        <p:nvSpPr>
+          <p:cNvPr id="10" name="Rounded Rectangle 9"/>
+          <p:cNvSpPr/>
+          <p:nvPr/>
+        </p:nvSpPr>
+        <p:spPr>
+          <a:xfrm>
+            <a:off x="4334256" y="1600200"/>
+            <a:ext cx="3529584" cy="3200400"/>
+          </a:xfrm>
+          <a:prstGeom prst="roundRect">
+            <a:avLst>
+              <a:gd name="adj" fmla="val 3500"/>
+            </a:avLst>
+          </a:prstGeom>
+          <a:solidFill>
+            <a:srgbClr val="FFFFFF"/>
+          </a:solidFill>
+          <a:ln w="12700">
+            <a:solidFill>
+              <a:srgbClr val="C7CDD8"/>
+            </a:solidFill>
+          </a:ln>
+          <a:effectLst/>
+        </p:spPr>
+        <p:style>
+          <a:lnRef idx="1">
+            <a:schemeClr val="accent1"/>
+          </a:lnRef>
+          <a:fillRef idx="3">
+            <a:schemeClr val="accent1"/>
+          </a:fillRef>
+          <a:effectRef idx="2">
+            <a:schemeClr val="accent1"/>
+          </a:effectRef>
+          <a:fontRef idx="minor">
+            <a:schemeClr val="lt1"/>
+          </a:fontRef>
+        </p:style>
+        <p:txBody>
+          <a:bodyPr rtlCol="0" anchor="ctr"/>
+          <a:lstStyle/>
+          <a:p/>
+        </p:txBody>
+      </p:sp>
+      <p:sp>
+        <p:nvSpPr>
+          <p:cNvPr id="11" name="Rectangle 10"/>
+          <p:cNvSpPr/>
+          <p:nvPr/>
+        </p:nvSpPr>
+        <p:spPr>
+          <a:xfrm>
+            <a:off x="4334256" y="1600200"/>
+            <a:ext cx="3529584" cy="82296"/>
+          </a:xfrm>
+          <a:prstGeom prst="rect">
+            <a:avLst/>
+          </a:prstGeom>
+          <a:solidFill>
+            <a:srgbClr val="4F46E5"/>
+          </a:solidFill>
+          <a:ln>
+            <a:noFill/>
+          </a:ln>
+          <a:effectLst/>
+        </p:spPr>
+        <p:style>
+          <a:lnRef idx="1">
+            <a:schemeClr val="accent1"/>
+          </a:lnRef>
+          <a:fillRef idx="3">
+            <a:schemeClr val="accent1"/>
+          </a:fillRef>
+          <a:effectRef idx="2">
+            <a:schemeClr val="accent1"/>
+          </a:effectRef>
+          <a:fontRef idx="minor">
+            <a:schemeClr val="lt1"/>
+          </a:fontRef>
+        </p:style>
+        <p:txBody>
+          <a:bodyPr rtlCol="0" anchor="ctr"/>
+          <a:lstStyle/>
+          <a:p/>
+        </p:txBody>
+      </p:sp>
+      <p:sp>
+        <p:nvSpPr>
+          <p:cNvPr id="12" name="TextBox 11"/>
+          <p:cNvSpPr txBox="1"/>
+          <p:nvPr/>
+        </p:nvSpPr>
+        <p:spPr>
+          <a:xfrm>
+            <a:off x="4626864" y="1938528"/>
+            <a:ext cx="3017520" cy="365760"/>
+          </a:xfrm>
+          <a:prstGeom prst="rect">
+            <a:avLst/>
+          </a:prstGeom>
+          <a:noFill/>
+        </p:spPr>
+        <p:txBody>
+          <a:bodyPr wrap="square" lIns="0" rIns="0" tIns="0" bIns="0">
+            <a:spAutoFit/>
+          </a:bodyPr>
+          <a:lstStyle/>
+          <a:p>
+            <a:pPr algn="l"/>
+            <a:r>
+              <a:rPr sz="1100" b="1">
+                <a:solidFill>
+                  <a:srgbClr val="4F46E5"/>
+                </a:solidFill>
+                <a:latin typeface="Meiryo"/>
+                <a:ea typeface="Meiryo"/>
+              </a:rPr>
+              <a:t>02</a:t>
+            </a:r>
+          </a:p>
+        </p:txBody>
+      </p:sp>
+      <p:sp>
+        <p:nvSpPr>
+          <p:cNvPr id="13" name="TextBox 12"/>
+          <p:cNvSpPr txBox="1"/>
+          <p:nvPr/>
+        </p:nvSpPr>
+        <p:spPr>
+          <a:xfrm>
+            <a:off x="4626864" y="2304288"/>
+            <a:ext cx="3017520" cy="411480"/>
+          </a:xfrm>
+          <a:prstGeom prst="rect">
+            <a:avLst/>
+          </a:prstGeom>
+          <a:noFill/>
+        </p:spPr>
+        <p:txBody>
+          <a:bodyPr wrap="square" lIns="0" rIns="0" tIns="0" bIns="0">
+            <a:spAutoFit/>
+          </a:bodyPr>
+          <a:lstStyle/>
+          <a:p>
+            <a:pPr algn="l"/>
+            <a:r>
+              <a:rPr sz="1500" b="1">
+                <a:solidFill>
+                  <a:srgbClr val="141A33"/>
+                </a:solidFill>
+                <a:latin typeface="Meiryo"/>
+                <a:ea typeface="Meiryo"/>
+              </a:rPr>
+              <a:t>契約を結ぶ</a:t>
+            </a:r>
+          </a:p>
+        </p:txBody>
+      </p:sp>
+      <p:sp>
+        <p:nvSpPr>
+          <p:cNvPr id="14" name="TextBox 13"/>
+          <p:cNvSpPr txBox="1"/>
+          <p:nvPr/>
+        </p:nvSpPr>
+        <p:spPr>
+          <a:xfrm>
+            <a:off x="4626864" y="2889504"/>
+            <a:ext cx="3017520" cy="1828800"/>
+          </a:xfrm>
+          <a:prstGeom prst="rect">
+            <a:avLst/>
+          </a:prstGeom>
+          <a:noFill/>
+        </p:spPr>
+        <p:txBody>
+          <a:bodyPr wrap="square" lIns="0" rIns="0" tIns="0" bIns="0">
+            <a:spAutoFit/>
+          </a:bodyPr>
+          <a:lstStyle/>
+          <a:p>
+            <a:pPr algn="l">
+              <a:spcAft>
+                <a:spcPts val="200"/>
+              </a:spcAft>
+            </a:pPr>
+            <a:r>
+              <a:rPr sz="1150" b="0">
+                <a:solidFill>
+                  <a:srgbClr val="6B7280"/>
+                </a:solidFill>
+                <a:latin typeface="Meiryo"/>
+                <a:ea typeface="Meiryo"/>
+              </a:rPr>
+              <a:t>各委託先との間でデータの</a:t>
+            </a:r>
+          </a:p>
+          <a:p>
+            <a:pPr algn="l">
+              <a:spcAft>
+                <a:spcPts val="200"/>
+              </a:spcAft>
+            </a:pPr>
+            <a:r>
+              <a:rPr sz="1150" b="0">
+                <a:solidFill>
+                  <a:srgbClr val="6B7280"/>
+                </a:solidFill>
+                <a:latin typeface="Meiryo"/>
+                <a:ea typeface="Meiryo"/>
+              </a:rPr>
+              <a:t>取扱いに関する契約を締結し、</a:t>
+            </a:r>
+          </a:p>
+          <a:p>
+            <a:pPr algn="l">
+              <a:spcAft>
+                <a:spcPts val="200"/>
+              </a:spcAft>
+            </a:pPr>
+            <a:r>
+              <a:rPr sz="1150" b="0">
+                <a:solidFill>
+                  <a:srgbClr val="6B7280"/>
+                </a:solidFill>
+                <a:latin typeface="Meiryo"/>
+                <a:ea typeface="Meiryo"/>
+              </a:rPr>
+              <a:t/>
+            </a:r>
+          </a:p>
+          <a:p>
+            <a:pPr algn="l">
+              <a:spcAft>
+                <a:spcPts val="200"/>
+              </a:spcAft>
+            </a:pPr>
+            <a:r>
+              <a:rPr sz="1150" b="0">
+                <a:solidFill>
+                  <a:srgbClr val="6B7280"/>
+                </a:solidFill>
+                <a:latin typeface="Meiryo"/>
+                <a:ea typeface="Meiryo"/>
+              </a:rPr>
+              <a:t>安全管理措置を確認します。</a:t>
+            </a:r>
+          </a:p>
+        </p:txBody>
+      </p:sp>
+      <p:sp>
+        <p:nvSpPr>
+          <p:cNvPr id="15" name="Rounded Rectangle 14"/>
+          <p:cNvSpPr/>
+          <p:nvPr/>
+        </p:nvSpPr>
+        <p:spPr>
+          <a:xfrm>
+            <a:off x="8101584" y="1600200"/>
+            <a:ext cx="3529584" cy="3200400"/>
+          </a:xfrm>
+          <a:prstGeom prst="roundRect">
+            <a:avLst>
+              <a:gd name="adj" fmla="val 3500"/>
+            </a:avLst>
+          </a:prstGeom>
+          <a:solidFill>
+            <a:srgbClr val="FFFFFF"/>
+          </a:solidFill>
+          <a:ln w="12700">
+            <a:solidFill>
+              <a:srgbClr val="C7CDD8"/>
+            </a:solidFill>
+          </a:ln>
+          <a:effectLst/>
+        </p:spPr>
+        <p:style>
+          <a:lnRef idx="1">
+            <a:schemeClr val="accent1"/>
+          </a:lnRef>
+          <a:fillRef idx="3">
+            <a:schemeClr val="accent1"/>
+          </a:fillRef>
+          <a:effectRef idx="2">
+            <a:schemeClr val="accent1"/>
+          </a:effectRef>
+          <a:fontRef idx="minor">
+            <a:schemeClr val="lt1"/>
+          </a:fontRef>
+        </p:style>
+        <p:txBody>
+          <a:bodyPr rtlCol="0" anchor="ctr"/>
+          <a:lstStyle/>
+          <a:p/>
+        </p:txBody>
+      </p:sp>
+      <p:sp>
+        <p:nvSpPr>
+          <p:cNvPr id="16" name="Rectangle 15"/>
+          <p:cNvSpPr/>
+          <p:nvPr/>
+        </p:nvSpPr>
+        <p:spPr>
+          <a:xfrm>
+            <a:off x="8101584" y="1600200"/>
+            <a:ext cx="3529584" cy="82296"/>
+          </a:xfrm>
+          <a:prstGeom prst="rect">
+            <a:avLst/>
+          </a:prstGeom>
+          <a:solidFill>
+            <a:srgbClr val="4F46E5"/>
+          </a:solidFill>
+          <a:ln>
+            <a:noFill/>
+          </a:ln>
+          <a:effectLst/>
+        </p:spPr>
+        <p:style>
+          <a:lnRef idx="1">
+            <a:schemeClr val="accent1"/>
+          </a:lnRef>
+          <a:fillRef idx="3">
+            <a:schemeClr val="accent1"/>
+          </a:fillRef>
+          <a:effectRef idx="2">
+            <a:schemeClr val="accent1"/>
+          </a:effectRef>
+          <a:fontRef idx="minor">
+            <a:schemeClr val="lt1"/>
+          </a:fontRef>
+        </p:style>
+        <p:txBody>
+          <a:bodyPr rtlCol="0" anchor="ctr"/>
+          <a:lstStyle/>
+          <a:p/>
+        </p:txBody>
+      </p:sp>
+      <p:sp>
+        <p:nvSpPr>
+          <p:cNvPr id="17" name="TextBox 16"/>
+          <p:cNvSpPr txBox="1"/>
+          <p:nvPr/>
+        </p:nvSpPr>
+        <p:spPr>
+          <a:xfrm>
+            <a:off x="8394192" y="1938528"/>
+            <a:ext cx="3017520" cy="365760"/>
+          </a:xfrm>
+          <a:prstGeom prst="rect">
+            <a:avLst/>
+          </a:prstGeom>
+          <a:noFill/>
+        </p:spPr>
+        <p:txBody>
+          <a:bodyPr wrap="square" lIns="0" rIns="0" tIns="0" bIns="0">
+            <a:spAutoFit/>
+          </a:bodyPr>
+          <a:lstStyle/>
+          <a:p>
+            <a:pPr algn="l"/>
+            <a:r>
+              <a:rPr sz="1100" b="1">
+                <a:solidFill>
+                  <a:srgbClr val="4F46E5"/>
+                </a:solidFill>
+                <a:latin typeface="Meiryo"/>
+                <a:ea typeface="Meiryo"/>
+              </a:rPr>
+              <a:t>03</a:t>
+            </a:r>
+          </a:p>
+        </p:txBody>
+      </p:sp>
+      <p:sp>
+        <p:nvSpPr>
+          <p:cNvPr id="18" name="TextBox 17"/>
+          <p:cNvSpPr txBox="1"/>
+          <p:nvPr/>
+        </p:nvSpPr>
+        <p:spPr>
+          <a:xfrm>
+            <a:off x="8394192" y="2304288"/>
+            <a:ext cx="3017520" cy="411480"/>
+          </a:xfrm>
+          <a:prstGeom prst="rect">
+            <a:avLst/>
+          </a:prstGeom>
+          <a:noFill/>
+        </p:spPr>
+        <p:txBody>
+          <a:bodyPr wrap="square" lIns="0" rIns="0" tIns="0" bIns="0">
+            <a:spAutoFit/>
+          </a:bodyPr>
+          <a:lstStyle/>
+          <a:p>
+            <a:pPr algn="l"/>
+            <a:r>
+              <a:rPr sz="1500" b="1">
+                <a:solidFill>
+                  <a:srgbClr val="141A33"/>
+                </a:solidFill>
+                <a:latin typeface="Meiryo"/>
+                <a:ea typeface="Meiryo"/>
+              </a:rPr>
+              <a:t>公表する</a:t>
+            </a:r>
+          </a:p>
+        </p:txBody>
+      </p:sp>
+      <p:sp>
+        <p:nvSpPr>
+          <p:cNvPr id="19" name="TextBox 18"/>
+          <p:cNvSpPr txBox="1"/>
+          <p:nvPr/>
+        </p:nvSpPr>
+        <p:spPr>
+          <a:xfrm>
+            <a:off x="8394192" y="2889504"/>
+            <a:ext cx="3017520" cy="1828800"/>
+          </a:xfrm>
+          <a:prstGeom prst="rect">
+            <a:avLst/>
+          </a:prstGeom>
+          <a:noFill/>
+        </p:spPr>
+        <p:txBody>
+          <a:bodyPr wrap="square" lIns="0" rIns="0" tIns="0" bIns="0">
+            <a:spAutoFit/>
+          </a:bodyPr>
+          <a:lstStyle/>
+          <a:p>
+            <a:pPr algn="l">
+              <a:spcAft>
+                <a:spcPts val="200"/>
+              </a:spcAft>
+            </a:pPr>
+            <a:r>
+              <a:rPr sz="1150" b="0">
+                <a:solidFill>
+                  <a:srgbClr val="6B7280"/>
+                </a:solidFill>
+                <a:latin typeface="Meiryo"/>
+                <a:ea typeface="Meiryo"/>
+              </a:rPr>
+              <a:t>プライバシーポリシーに、</a:t>
+            </a:r>
+          </a:p>
+          <a:p>
+            <a:pPr algn="l">
+              <a:spcAft>
+                <a:spcPts val="200"/>
+              </a:spcAft>
+            </a:pPr>
+            <a:r>
+              <a:rPr sz="1150" b="0">
+                <a:solidFill>
+                  <a:srgbClr val="6B7280"/>
+                </a:solidFill>
+                <a:latin typeface="Meiryo"/>
+                <a:ea typeface="Meiryo"/>
+              </a:rPr>
+              <a:t>移転先の国名・その国の制度・</a:t>
+            </a:r>
+          </a:p>
+          <a:p>
+            <a:pPr algn="l">
+              <a:spcAft>
+                <a:spcPts val="200"/>
+              </a:spcAft>
+            </a:pPr>
+            <a:r>
+              <a:rPr sz="1150" b="0">
+                <a:solidFill>
+                  <a:srgbClr val="6B7280"/>
+                </a:solidFill>
+                <a:latin typeface="Meiryo"/>
+                <a:ea typeface="Meiryo"/>
+              </a:rPr>
+              <a:t>相手方の措置を記載します。</a:t>
+            </a:r>
+          </a:p>
+          <a:p>
+            <a:pPr algn="l">
+              <a:spcAft>
+                <a:spcPts val="200"/>
+              </a:spcAft>
+            </a:pPr>
+            <a:r>
+              <a:rPr sz="1150" b="0">
+                <a:solidFill>
+                  <a:srgbClr val="6B7280"/>
+                </a:solidFill>
+                <a:latin typeface="Meiryo"/>
+                <a:ea typeface="Meiryo"/>
+              </a:rPr>
+              <a:t/>
+            </a:r>
+          </a:p>
+          <a:p>
+            <a:pPr algn="l">
+              <a:spcAft>
+                <a:spcPts val="200"/>
+              </a:spcAft>
+            </a:pPr>
+            <a:r>
+              <a:rPr sz="1150" b="0">
+                <a:solidFill>
+                  <a:srgbClr val="6B7280"/>
+                </a:solidFill>
+                <a:latin typeface="Meiryo"/>
+                <a:ea typeface="Meiryo"/>
+              </a:rPr>
+              <a:t>文言案は次ページのとおりです。</a:t>
+            </a:r>
+          </a:p>
+        </p:txBody>
+      </p:sp>
+      <p:sp>
+        <p:nvSpPr>
+          <p:cNvPr id="20" name="Rounded Rectangle 19"/>
+          <p:cNvSpPr/>
+          <p:nvPr/>
+        </p:nvSpPr>
+        <p:spPr>
+          <a:xfrm>
+            <a:off x="566928" y="5120640"/>
+            <a:ext cx="11073384" cy="685800"/>
+          </a:xfrm>
+          <a:prstGeom prst="roundRect">
+            <a:avLst>
+              <a:gd name="adj" fmla="val 12000"/>
+            </a:avLst>
+          </a:prstGeom>
+          <a:solidFill>
+            <a:srgbClr val="F2F4FB"/>
+          </a:solidFill>
+          <a:ln>
+            <a:noFill/>
+          </a:ln>
+          <a:effectLst/>
+        </p:spPr>
+        <p:style>
+          <a:lnRef idx="1">
+            <a:schemeClr val="accent1"/>
+          </a:lnRef>
+          <a:fillRef idx="3">
+            <a:schemeClr val="accent1"/>
+          </a:fillRef>
+          <a:effectRef idx="2">
+            <a:schemeClr val="accent1"/>
+          </a:effectRef>
+          <a:fontRef idx="minor">
+            <a:schemeClr val="lt1"/>
+          </a:fontRef>
+        </p:style>
+        <p:txBody>
+          <a:bodyPr rtlCol="0" anchor="ctr"/>
+          <a:lstStyle/>
+          <a:p/>
+        </p:txBody>
+      </p:sp>
+      <p:sp>
+        <p:nvSpPr>
+          <p:cNvPr id="21" name="TextBox 20"/>
+          <p:cNvSpPr txBox="1"/>
+          <p:nvPr/>
+        </p:nvSpPr>
+        <p:spPr>
+          <a:xfrm>
+            <a:off x="868680" y="5280660"/>
+            <a:ext cx="10515600" cy="365760"/>
+          </a:xfrm>
+          <a:prstGeom prst="rect">
+            <a:avLst/>
+          </a:prstGeom>
+          <a:noFill/>
+        </p:spPr>
+        <p:txBody>
+          <a:bodyPr wrap="square" lIns="0" rIns="0" tIns="0" bIns="0">
+            <a:spAutoFit/>
+          </a:bodyPr>
+          <a:lstStyle/>
+          <a:p>
+            <a:pPr algn="l">
+              <a:spcAft>
+                <a:spcPts val="300"/>
+              </a:spcAft>
+            </a:pPr>
+            <a:r>
+              <a:rPr sz="1250" b="1">
+                <a:solidFill>
+                  <a:srgbClr val="4F46E5"/>
+                </a:solidFill>
+                <a:latin typeface="Meiryo"/>
+                <a:ea typeface="Meiryo"/>
+              </a:rPr>
+              <a:t>AI に送信した情報が、AIモデルの学習に利用されることはありません（商用APIの利用規約による）。</a:t>
             </a:r>
           </a:p>
         </p:txBody>

--- a/docs/サーバー構成のご提案.pptx
+++ b/docs/サーバー構成のご提案.pptx
@@ -3364,7 +3364,7 @@
 </file>
 
 <file path=ppt/slides/slide10.xml><?xml version="1.0" encoding="utf-8"?>
-<p:sld xmlns:a="http://schemas.openxmlformats.org/drawingml/2006/main" xmlns:p="http://schemas.openxmlformats.org/presentationml/2006/main" xmlns:r="http://schemas.openxmlformats.org/officeDocument/2006/relationships">
+<p:sld xmlns:a="http://schemas.openxmlformats.org/drawingml/2006/main" xmlns:r="http://schemas.openxmlformats.org/officeDocument/2006/relationships" xmlns:p="http://schemas.openxmlformats.org/presentationml/2006/main">
   <p:cSld>
     <p:spTree>
       <p:nvGrpSpPr>
@@ -3372,7 +3372,14 @@
         <p:cNvGrpSpPr/>
         <p:nvPr/>
       </p:nvGrpSpPr>
-      <p:grpSpPr/>
+      <p:grpSpPr>
+        <a:xfrm>
+          <a:off x="0" y="0"/>
+          <a:ext cx="0" cy="0"/>
+          <a:chOff x="0" y="0"/>
+          <a:chExt cx="0" cy="0"/>
+        </a:xfrm>
+      </p:grpSpPr>
       <p:sp>
         <p:nvSpPr>
           <p:cNvPr id="2" name="Rectangle 1"/>
@@ -3412,7 +3419,9 @@
         <p:txBody>
           <a:bodyPr rtlCol="0" anchor="ctr"/>
           <a:lstStyle/>
-          <a:p/>
+          <a:p>
+            <a:endParaRPr/>
+          </a:p>
         </p:txBody>
       </p:sp>
       <p:sp>
@@ -3432,21 +3441,27 @@
           <a:noFill/>
         </p:spPr>
         <p:txBody>
-          <a:bodyPr wrap="square" lIns="0" rIns="0" tIns="0" bIns="0">
-            <a:spAutoFit/>
-          </a:bodyPr>
-          <a:lstStyle/>
-          <a:p>
-            <a:pPr algn="l"/>
+          <a:bodyPr wrap="square" lIns="0" tIns="0" rIns="0" bIns="0" anchor="t">
+            <a:spAutoFit/>
+          </a:bodyPr>
+          <a:lstStyle/>
+          <a:p>
+            <a:pPr algn="l">
+              <a:lnSpc>
+                <a:spcPct val="130000"/>
+              </a:lnSpc>
+              <a:spcAft>
+                <a:spcPts val="400"/>
+              </a:spcAft>
+            </a:pPr>
             <a:r>
               <a:rPr sz="2200" b="1">
                 <a:solidFill>
                   <a:srgbClr val="FFFFFF"/>
                 </a:solidFill>
                 <a:latin typeface="Meiryo"/>
-                <a:ea typeface="Meiryo"/>
-              </a:rPr>
-              <a:t>プライバシーポリシー 記載文言案</a:t>
+              </a:rPr>
+              <a:t>今後の進め方</a:t>
             </a:r>
           </a:p>
         </p:txBody>
@@ -3468,21 +3483,27 @@
           <a:noFill/>
         </p:spPr>
         <p:txBody>
-          <a:bodyPr wrap="square" lIns="0" rIns="0" tIns="0" bIns="0">
-            <a:spAutoFit/>
-          </a:bodyPr>
-          <a:lstStyle/>
-          <a:p>
-            <a:pPr algn="l"/>
+          <a:bodyPr wrap="square" lIns="0" tIns="0" rIns="0" bIns="0" anchor="t">
+            <a:spAutoFit/>
+          </a:bodyPr>
+          <a:lstStyle/>
+          <a:p>
+            <a:pPr algn="l">
+              <a:lnSpc>
+                <a:spcPct val="130000"/>
+              </a:lnSpc>
+              <a:spcAft>
+                <a:spcPts val="400"/>
+              </a:spcAft>
+            </a:pPr>
             <a:r>
               <a:rPr sz="1250" b="0">
                 <a:solidFill>
                   <a:srgbClr val="6B7280"/>
                 </a:solidFill>
                 <a:latin typeface="Meiryo"/>
-                <a:ea typeface="Meiryo"/>
-              </a:rPr>
-              <a:t>下記をプライバシーポリシーに追加します。最終的な文面は、顧問の専門家にご確認ください。</a:t>
+              </a:rPr>
+              <a:t>ご承認をいただければ、以下の流れで進めます。</a:t>
             </a:r>
           </a:p>
         </p:txBody>
@@ -3495,12 +3516,12 @@
         </p:nvSpPr>
         <p:spPr>
           <a:xfrm>
-            <a:off x="566928" y="1554480"/>
-            <a:ext cx="11183112" cy="3931920"/>
+            <a:off x="566928" y="1783080"/>
+            <a:ext cx="2606040" cy="2377440"/>
           </a:xfrm>
           <a:prstGeom prst="roundRect">
             <a:avLst>
-              <a:gd name="adj" fmla="val 3000"/>
+              <a:gd name="adj" fmla="val 6000"/>
             </a:avLst>
           </a:prstGeom>
           <a:solidFill>
@@ -3530,307 +3551,27 @@
         <p:txBody>
           <a:bodyPr rtlCol="0" anchor="ctr"/>
           <a:lstStyle/>
-          <a:p/>
-        </p:txBody>
-      </p:sp>
-      <p:sp>
-        <p:nvSpPr>
-          <p:cNvPr id="6" name="TextBox 5"/>
-          <p:cNvSpPr txBox="1"/>
-          <p:nvPr/>
-        </p:nvSpPr>
-        <p:spPr>
-          <a:xfrm>
-            <a:off x="932688" y="1874520"/>
-            <a:ext cx="10430640" cy="411480"/>
-          </a:xfrm>
-          <a:prstGeom prst="rect">
-            <a:avLst/>
-          </a:prstGeom>
-          <a:noFill/>
-        </p:spPr>
-        <p:txBody>
-          <a:bodyPr wrap="square" lIns="0" rIns="0" tIns="0" bIns="0">
-            <a:spAutoFit/>
-          </a:bodyPr>
-          <a:lstStyle/>
-          <a:p>
-            <a:pPr algn="l"/>
-            <a:r>
-              <a:rPr sz="1350" b="1">
-                <a:solidFill>
-                  <a:srgbClr val="141A33"/>
-                </a:solidFill>
-                <a:latin typeface="Meiryo"/>
-                <a:ea typeface="Meiryo"/>
-              </a:rPr>
-              <a:t>第◯条（外国にある第三者への個人データの提供）</a:t>
-            </a:r>
-          </a:p>
-        </p:txBody>
-      </p:sp>
-      <p:sp>
-        <p:nvSpPr>
-          <p:cNvPr id="7" name="TextBox 6"/>
-          <p:cNvSpPr txBox="1"/>
-          <p:nvPr/>
-        </p:nvSpPr>
-        <p:spPr>
-          <a:xfrm>
-            <a:off x="932688" y="2423160"/>
-            <a:ext cx="10430640" cy="2926080"/>
-          </a:xfrm>
-          <a:prstGeom prst="rect">
-            <a:avLst/>
-          </a:prstGeom>
-          <a:noFill/>
-        </p:spPr>
-        <p:txBody>
-          <a:bodyPr wrap="square" lIns="0" rIns="0" tIns="0" bIns="0">
-            <a:spAutoFit/>
-          </a:bodyPr>
-          <a:lstStyle/>
-          <a:p>
-            <a:pPr algn="l">
-              <a:spcAft>
-                <a:spcPts val="200"/>
-              </a:spcAft>
-            </a:pPr>
-            <a:r>
-              <a:rPr sz="1150" b="0">
-                <a:solidFill>
-                  <a:srgbClr val="141A33"/>
-                </a:solidFill>
-                <a:latin typeface="Meiryo"/>
-                <a:ea typeface="Meiryo"/>
-              </a:rPr>
-              <a:t>当社は、業務の遂行にあたり、次のとおり外国にある第三者へ個人データの取扱いを委託しています。</a:t>
-            </a:r>
-          </a:p>
-          <a:p>
-            <a:pPr algn="l">
-              <a:spcAft>
-                <a:spcPts val="200"/>
-              </a:spcAft>
-            </a:pPr>
-            <a:r>
-              <a:rPr sz="1150" b="0">
-                <a:solidFill>
-                  <a:srgbClr val="141A33"/>
-                </a:solidFill>
-                <a:latin typeface="Meiryo"/>
-                <a:ea typeface="Meiryo"/>
-              </a:rPr>
-              <a:t/>
-            </a:r>
-          </a:p>
-          <a:p>
-            <a:pPr algn="l">
-              <a:spcAft>
-                <a:spcPts val="200"/>
-              </a:spcAft>
-            </a:pPr>
-            <a:r>
-              <a:rPr sz="1150" b="0">
-                <a:solidFill>
-                  <a:srgbClr val="141A33"/>
-                </a:solidFill>
-                <a:latin typeface="Meiryo"/>
-                <a:ea typeface="Meiryo"/>
-              </a:rPr>
-              <a:t>　・Supabase, Inc.（アメリカ合衆国／データの保管場所：日本）</a:t>
-            </a:r>
-          </a:p>
-          <a:p>
-            <a:pPr algn="l">
-              <a:spcAft>
-                <a:spcPts val="200"/>
-              </a:spcAft>
-            </a:pPr>
-            <a:r>
-              <a:rPr sz="1150" b="0">
-                <a:solidFill>
-                  <a:srgbClr val="141A33"/>
-                </a:solidFill>
-                <a:latin typeface="Meiryo"/>
-                <a:ea typeface="Meiryo"/>
-              </a:rPr>
-              <a:t>　　委託する業務：案件情報およびお預かりした書類の保管</a:t>
-            </a:r>
-          </a:p>
-          <a:p>
-            <a:pPr algn="l">
-              <a:spcAft>
-                <a:spcPts val="200"/>
-              </a:spcAft>
-            </a:pPr>
-            <a:r>
-              <a:rPr sz="1150" b="0">
-                <a:solidFill>
-                  <a:srgbClr val="141A33"/>
-                </a:solidFill>
-                <a:latin typeface="Meiryo"/>
-                <a:ea typeface="Meiryo"/>
-              </a:rPr>
-              <a:t/>
-            </a:r>
-          </a:p>
-          <a:p>
-            <a:pPr algn="l">
-              <a:spcAft>
-                <a:spcPts val="200"/>
-              </a:spcAft>
-            </a:pPr>
-            <a:r>
-              <a:rPr sz="1150" b="0">
-                <a:solidFill>
-                  <a:srgbClr val="141A33"/>
-                </a:solidFill>
-                <a:latin typeface="Meiryo"/>
-                <a:ea typeface="Meiryo"/>
-              </a:rPr>
-              <a:t>　・Anthropic PBC（アメリカ合衆国）</a:t>
-            </a:r>
-          </a:p>
-          <a:p>
-            <a:pPr algn="l">
-              <a:spcAft>
-                <a:spcPts val="200"/>
-              </a:spcAft>
-            </a:pPr>
-            <a:r>
-              <a:rPr sz="1150" b="0">
-                <a:solidFill>
-                  <a:srgbClr val="141A33"/>
-                </a:solidFill>
-                <a:latin typeface="Meiryo"/>
-                <a:ea typeface="Meiryo"/>
-              </a:rPr>
-              <a:t>　　委託する業務：書類画像の文字読み取り（OCR）および文章の要約</a:t>
-            </a:r>
-          </a:p>
-          <a:p>
-            <a:pPr algn="l">
-              <a:spcAft>
-                <a:spcPts val="200"/>
-              </a:spcAft>
-            </a:pPr>
-            <a:r>
-              <a:rPr sz="1150" b="0">
-                <a:solidFill>
-                  <a:srgbClr val="141A33"/>
-                </a:solidFill>
-                <a:latin typeface="Meiryo"/>
-                <a:ea typeface="Meiryo"/>
-              </a:rPr>
-              <a:t/>
-            </a:r>
-          </a:p>
-          <a:p>
-            <a:pPr algn="l">
-              <a:spcAft>
-                <a:spcPts val="200"/>
-              </a:spcAft>
-            </a:pPr>
-            <a:r>
-              <a:rPr sz="1150" b="0">
-                <a:solidFill>
-                  <a:srgbClr val="141A33"/>
-                </a:solidFill>
-                <a:latin typeface="Meiryo"/>
-                <a:ea typeface="Meiryo"/>
-              </a:rPr>
-              <a:t>各国における個人情報の保護に関する制度については、個人情報保護委員会の公表資料をご参照ください。</a:t>
-            </a:r>
-          </a:p>
-          <a:p>
-            <a:pPr algn="l">
-              <a:spcAft>
-                <a:spcPts val="200"/>
-              </a:spcAft>
-            </a:pPr>
-            <a:r>
-              <a:rPr sz="1150" b="0">
-                <a:solidFill>
-                  <a:srgbClr val="141A33"/>
-                </a:solidFill>
-                <a:latin typeface="Meiryo"/>
-                <a:ea typeface="Meiryo"/>
-              </a:rPr>
-              <a:t>各委託先はいずれも第三者機関によるセキュリティ認証を取得しており、当社は各社との間でデータの</a:t>
-            </a:r>
-          </a:p>
-          <a:p>
-            <a:pPr algn="l">
-              <a:spcAft>
-                <a:spcPts val="200"/>
-              </a:spcAft>
-            </a:pPr>
-            <a:r>
-              <a:rPr sz="1150" b="0">
-                <a:solidFill>
-                  <a:srgbClr val="141A33"/>
-                </a:solidFill>
-                <a:latin typeface="Meiryo"/>
-                <a:ea typeface="Meiryo"/>
-              </a:rPr>
-              <a:t>取扱いに関する契約を締結したうえで、個人データの安全管理措置を講じています。</a:t>
-            </a:r>
-          </a:p>
-          <a:p>
-            <a:pPr algn="l">
-              <a:spcAft>
-                <a:spcPts val="200"/>
-              </a:spcAft>
-            </a:pPr>
-            <a:r>
-              <a:rPr sz="1150" b="0">
-                <a:solidFill>
-                  <a:srgbClr val="141A33"/>
-                </a:solidFill>
-                <a:latin typeface="Meiryo"/>
-                <a:ea typeface="Meiryo"/>
-              </a:rPr>
-              <a:t/>
-            </a:r>
-          </a:p>
-          <a:p>
-            <a:pPr algn="l">
-              <a:spcAft>
-                <a:spcPts val="200"/>
-              </a:spcAft>
-            </a:pPr>
-            <a:r>
-              <a:rPr sz="1150" b="0">
-                <a:solidFill>
-                  <a:srgbClr val="141A33"/>
-                </a:solidFill>
-                <a:latin typeface="Meiryo"/>
-                <a:ea typeface="Meiryo"/>
-              </a:rPr>
-              <a:t>なお、上記のAI事業者へ送信した情報が、同社のAIモデルの学習に利用されることはありません。</a:t>
-            </a:r>
-          </a:p>
-        </p:txBody>
-      </p:sp>
-      <p:sp>
-        <p:nvSpPr>
-          <p:cNvPr id="8" name="Rounded Rectangle 7"/>
+          <a:p>
+            <a:endParaRPr/>
+          </a:p>
+        </p:txBody>
+      </p:sp>
+      <p:sp>
+        <p:nvSpPr>
+          <p:cNvPr id="6" name="Rectangle 5"/>
           <p:cNvSpPr/>
           <p:nvPr/>
         </p:nvSpPr>
         <p:spPr>
           <a:xfrm>
-            <a:off x="566928" y="5760720"/>
-            <a:ext cx="11073384" cy="685800"/>
-          </a:xfrm>
-          <a:prstGeom prst="roundRect">
-            <a:avLst>
-              <a:gd name="adj" fmla="val 12000"/>
-            </a:avLst>
+            <a:off x="566928" y="1783080"/>
+            <a:ext cx="2606040" cy="82296"/>
+          </a:xfrm>
+          <a:prstGeom prst="rect">
+            <a:avLst/>
           </a:prstGeom>
           <a:solidFill>
-            <a:srgbClr val="FAFAFB"/>
+            <a:srgbClr val="4F46E5"/>
           </a:solidFill>
           <a:ln>
             <a:noFill/>
@@ -3854,7 +3595,93 @@
         <p:txBody>
           <a:bodyPr rtlCol="0" anchor="ctr"/>
           <a:lstStyle/>
-          <a:p/>
+          <a:p>
+            <a:endParaRPr/>
+          </a:p>
+        </p:txBody>
+      </p:sp>
+      <p:sp>
+        <p:nvSpPr>
+          <p:cNvPr id="7" name="TextBox 6"/>
+          <p:cNvSpPr txBox="1"/>
+          <p:nvPr/>
+        </p:nvSpPr>
+        <p:spPr>
+          <a:xfrm>
+            <a:off x="822960" y="2084831"/>
+            <a:ext cx="2103120" cy="274320"/>
+          </a:xfrm>
+          <a:prstGeom prst="rect">
+            <a:avLst/>
+          </a:prstGeom>
+          <a:noFill/>
+        </p:spPr>
+        <p:txBody>
+          <a:bodyPr wrap="square" lIns="0" tIns="0" rIns="0" bIns="0" anchor="t">
+            <a:spAutoFit/>
+          </a:bodyPr>
+          <a:lstStyle/>
+          <a:p>
+            <a:pPr algn="l">
+              <a:lnSpc>
+                <a:spcPct val="130000"/>
+              </a:lnSpc>
+              <a:spcAft>
+                <a:spcPts val="400"/>
+              </a:spcAft>
+            </a:pPr>
+            <a:r>
+              <a:rPr sz="1100" b="1">
+                <a:solidFill>
+                  <a:srgbClr val="4F46E5"/>
+                </a:solidFill>
+                <a:latin typeface="Meiryo"/>
+              </a:rPr>
+              <a:t>STEP 1</a:t>
+            </a:r>
+          </a:p>
+        </p:txBody>
+      </p:sp>
+      <p:sp>
+        <p:nvSpPr>
+          <p:cNvPr id="8" name="TextBox 7"/>
+          <p:cNvSpPr txBox="1"/>
+          <p:nvPr/>
+        </p:nvSpPr>
+        <p:spPr>
+          <a:xfrm>
+            <a:off x="822960" y="2450592"/>
+            <a:ext cx="2103120" cy="365760"/>
+          </a:xfrm>
+          <a:prstGeom prst="rect">
+            <a:avLst/>
+          </a:prstGeom>
+          <a:noFill/>
+        </p:spPr>
+        <p:txBody>
+          <a:bodyPr wrap="square" lIns="0" tIns="0" rIns="0" bIns="0" anchor="t">
+            <a:spAutoFit/>
+          </a:bodyPr>
+          <a:lstStyle/>
+          <a:p>
+            <a:pPr algn="l">
+              <a:lnSpc>
+                <a:spcPct val="130000"/>
+              </a:lnSpc>
+              <a:spcAft>
+                <a:spcPts val="400"/>
+              </a:spcAft>
+            </a:pPr>
+            <a:r>
+              <a:rPr sz="1500" b="1">
+                <a:solidFill>
+                  <a:srgbClr val="141A33"/>
+                </a:solidFill>
+                <a:latin typeface="Meiryo"/>
+              </a:rPr>
+              <a:t>サーバー契約</a:t>
+            </a:r>
+          </a:p>
         </p:txBody>
       </p:sp>
       <p:sp>
@@ -3865,34 +3692,1005 @@
         </p:nvSpPr>
         <p:spPr>
           <a:xfrm>
-            <a:off x="868680" y="5920740"/>
-            <a:ext cx="10515600" cy="365760"/>
-          </a:xfrm>
-          <a:prstGeom prst="rect">
-            <a:avLst/>
-          </a:prstGeom>
-          <a:noFill/>
-        </p:spPr>
-        <p:txBody>
-          <a:bodyPr wrap="square" lIns="0" rIns="0" tIns="0" bIns="0">
-            <a:spAutoFit/>
-          </a:bodyPr>
-          <a:lstStyle/>
-          <a:p>
-            <a:pPr algn="l">
-              <a:spcAft>
-                <a:spcPts val="300"/>
-              </a:spcAft>
-            </a:pPr>
-            <a:r>
-              <a:rPr sz="1200" b="0">
+            <a:off x="822960" y="2999232"/>
+            <a:ext cx="2103120" cy="914400"/>
+          </a:xfrm>
+          <a:prstGeom prst="rect">
+            <a:avLst/>
+          </a:prstGeom>
+          <a:noFill/>
+        </p:spPr>
+        <p:txBody>
+          <a:bodyPr wrap="square" lIns="0" tIns="0" rIns="0" bIns="0" anchor="t">
+            <a:spAutoFit/>
+          </a:bodyPr>
+          <a:lstStyle/>
+          <a:p>
+            <a:pPr algn="l">
+              <a:lnSpc>
+                <a:spcPct val="145000"/>
+              </a:lnSpc>
+              <a:spcAft>
+                <a:spcPts val="400"/>
+              </a:spcAft>
+            </a:pPr>
+            <a:r>
+              <a:rPr sz="1150" b="0">
+                <a:solidFill>
+                  <a:srgbClr val="6B7280"/>
+                </a:solidFill>
+                <a:latin typeface="Meiryo"/>
+              </a:rPr>
+              <a:t>当方名義でAzureを契約し、</a:t>
+            </a:r>
+          </a:p>
+          <a:p>
+            <a:pPr algn="l">
+              <a:lnSpc>
+                <a:spcPct val="145000"/>
+              </a:lnSpc>
+              <a:spcAft>
+                <a:spcPts val="400"/>
+              </a:spcAft>
+            </a:pPr>
+            <a:r>
+              <a:rPr sz="1150" b="0">
+                <a:solidFill>
+                  <a:srgbClr val="6B7280"/>
+                </a:solidFill>
+                <a:latin typeface="Meiryo"/>
+              </a:rPr>
+              <a:t>環境を構築します。</a:t>
+            </a:r>
+          </a:p>
+        </p:txBody>
+      </p:sp>
+      <p:sp>
+        <p:nvSpPr>
+          <p:cNvPr id="10" name="TextBox 9"/>
+          <p:cNvSpPr txBox="1"/>
+          <p:nvPr/>
+        </p:nvSpPr>
+        <p:spPr>
+          <a:xfrm>
+            <a:off x="3200400" y="2788920"/>
+            <a:ext cx="228600" cy="365760"/>
+          </a:xfrm>
+          <a:prstGeom prst="rect">
+            <a:avLst/>
+          </a:prstGeom>
+          <a:noFill/>
+        </p:spPr>
+        <p:txBody>
+          <a:bodyPr wrap="square" lIns="0" tIns="0" rIns="0" bIns="0" anchor="t">
+            <a:spAutoFit/>
+          </a:bodyPr>
+          <a:lstStyle/>
+          <a:p>
+            <a:pPr algn="l">
+              <a:lnSpc>
+                <a:spcPct val="130000"/>
+              </a:lnSpc>
+              <a:spcAft>
+                <a:spcPts val="400"/>
+              </a:spcAft>
+            </a:pPr>
+            <a:r>
+              <a:rPr sz="2000" b="1">
+                <a:solidFill>
+                  <a:srgbClr val="C7CDD8"/>
+                </a:solidFill>
+                <a:latin typeface="Meiryo"/>
+              </a:rPr>
+              <a:t>›</a:t>
+            </a:r>
+          </a:p>
+        </p:txBody>
+      </p:sp>
+      <p:sp>
+        <p:nvSpPr>
+          <p:cNvPr id="11" name="Rounded Rectangle 10"/>
+          <p:cNvSpPr/>
+          <p:nvPr/>
+        </p:nvSpPr>
+        <p:spPr>
+          <a:xfrm>
+            <a:off x="3392424" y="1783080"/>
+            <a:ext cx="2606040" cy="2377440"/>
+          </a:xfrm>
+          <a:prstGeom prst="roundRect">
+            <a:avLst>
+              <a:gd name="adj" fmla="val 6000"/>
+            </a:avLst>
+          </a:prstGeom>
+          <a:solidFill>
+            <a:srgbClr val="FFFFFF"/>
+          </a:solidFill>
+          <a:ln w="12700">
+            <a:solidFill>
+              <a:srgbClr val="C7CDD8"/>
+            </a:solidFill>
+          </a:ln>
+          <a:effectLst/>
+        </p:spPr>
+        <p:style>
+          <a:lnRef idx="1">
+            <a:schemeClr val="accent1"/>
+          </a:lnRef>
+          <a:fillRef idx="3">
+            <a:schemeClr val="accent1"/>
+          </a:fillRef>
+          <a:effectRef idx="2">
+            <a:schemeClr val="accent1"/>
+          </a:effectRef>
+          <a:fontRef idx="minor">
+            <a:schemeClr val="lt1"/>
+          </a:fontRef>
+        </p:style>
+        <p:txBody>
+          <a:bodyPr rtlCol="0" anchor="ctr"/>
+          <a:lstStyle/>
+          <a:p>
+            <a:endParaRPr/>
+          </a:p>
+        </p:txBody>
+      </p:sp>
+      <p:sp>
+        <p:nvSpPr>
+          <p:cNvPr id="12" name="Rectangle 11"/>
+          <p:cNvSpPr/>
+          <p:nvPr/>
+        </p:nvSpPr>
+        <p:spPr>
+          <a:xfrm>
+            <a:off x="3392424" y="1783080"/>
+            <a:ext cx="2606040" cy="82296"/>
+          </a:xfrm>
+          <a:prstGeom prst="rect">
+            <a:avLst/>
+          </a:prstGeom>
+          <a:solidFill>
+            <a:srgbClr val="4F46E5"/>
+          </a:solidFill>
+          <a:ln>
+            <a:noFill/>
+          </a:ln>
+          <a:effectLst/>
+        </p:spPr>
+        <p:style>
+          <a:lnRef idx="1">
+            <a:schemeClr val="accent1"/>
+          </a:lnRef>
+          <a:fillRef idx="3">
+            <a:schemeClr val="accent1"/>
+          </a:fillRef>
+          <a:effectRef idx="2">
+            <a:schemeClr val="accent1"/>
+          </a:effectRef>
+          <a:fontRef idx="minor">
+            <a:schemeClr val="lt1"/>
+          </a:fontRef>
+        </p:style>
+        <p:txBody>
+          <a:bodyPr rtlCol="0" anchor="ctr"/>
+          <a:lstStyle/>
+          <a:p>
+            <a:endParaRPr/>
+          </a:p>
+        </p:txBody>
+      </p:sp>
+      <p:sp>
+        <p:nvSpPr>
+          <p:cNvPr id="13" name="TextBox 12"/>
+          <p:cNvSpPr txBox="1"/>
+          <p:nvPr/>
+        </p:nvSpPr>
+        <p:spPr>
+          <a:xfrm>
+            <a:off x="3648456" y="2084831"/>
+            <a:ext cx="2103120" cy="274320"/>
+          </a:xfrm>
+          <a:prstGeom prst="rect">
+            <a:avLst/>
+          </a:prstGeom>
+          <a:noFill/>
+        </p:spPr>
+        <p:txBody>
+          <a:bodyPr wrap="square" lIns="0" tIns="0" rIns="0" bIns="0" anchor="t">
+            <a:spAutoFit/>
+          </a:bodyPr>
+          <a:lstStyle/>
+          <a:p>
+            <a:pPr algn="l">
+              <a:lnSpc>
+                <a:spcPct val="130000"/>
+              </a:lnSpc>
+              <a:spcAft>
+                <a:spcPts val="400"/>
+              </a:spcAft>
+            </a:pPr>
+            <a:r>
+              <a:rPr sz="1100" b="1">
+                <a:solidFill>
+                  <a:srgbClr val="4F46E5"/>
+                </a:solidFill>
+                <a:latin typeface="Meiryo"/>
+              </a:rPr>
+              <a:t>STEP 2</a:t>
+            </a:r>
+          </a:p>
+        </p:txBody>
+      </p:sp>
+      <p:sp>
+        <p:nvSpPr>
+          <p:cNvPr id="14" name="TextBox 13"/>
+          <p:cNvSpPr txBox="1"/>
+          <p:nvPr/>
+        </p:nvSpPr>
+        <p:spPr>
+          <a:xfrm>
+            <a:off x="3648456" y="2450592"/>
+            <a:ext cx="2103120" cy="365760"/>
+          </a:xfrm>
+          <a:prstGeom prst="rect">
+            <a:avLst/>
+          </a:prstGeom>
+          <a:noFill/>
+        </p:spPr>
+        <p:txBody>
+          <a:bodyPr wrap="square" lIns="0" tIns="0" rIns="0" bIns="0" anchor="t">
+            <a:spAutoFit/>
+          </a:bodyPr>
+          <a:lstStyle/>
+          <a:p>
+            <a:pPr algn="l">
+              <a:lnSpc>
+                <a:spcPct val="130000"/>
+              </a:lnSpc>
+              <a:spcAft>
+                <a:spcPts val="400"/>
+              </a:spcAft>
+            </a:pPr>
+            <a:r>
+              <a:rPr sz="1500" b="1">
                 <a:solidFill>
                   <a:srgbClr val="141A33"/>
                 </a:solidFill>
                 <a:latin typeface="Meiryo"/>
+              </a:rPr>
+              <a:t>システム移設</a:t>
+            </a:r>
+          </a:p>
+        </p:txBody>
+      </p:sp>
+      <p:sp>
+        <p:nvSpPr>
+          <p:cNvPr id="15" name="TextBox 14"/>
+          <p:cNvSpPr txBox="1"/>
+          <p:nvPr/>
+        </p:nvSpPr>
+        <p:spPr>
+          <a:xfrm>
+            <a:off x="3648456" y="2999232"/>
+            <a:ext cx="2103120" cy="914400"/>
+          </a:xfrm>
+          <a:prstGeom prst="rect">
+            <a:avLst/>
+          </a:prstGeom>
+          <a:noFill/>
+        </p:spPr>
+        <p:txBody>
+          <a:bodyPr wrap="square" lIns="0" tIns="0" rIns="0" bIns="0" anchor="t">
+            <a:spAutoFit/>
+          </a:bodyPr>
+          <a:lstStyle/>
+          <a:p>
+            <a:pPr algn="l">
+              <a:lnSpc>
+                <a:spcPct val="145000"/>
+              </a:lnSpc>
+              <a:spcAft>
+                <a:spcPts val="400"/>
+              </a:spcAft>
+            </a:pPr>
+            <a:r>
+              <a:rPr sz="1150" b="0">
+                <a:solidFill>
+                  <a:srgbClr val="6B7280"/>
+                </a:solidFill>
+                <a:latin typeface="Meiryo"/>
+              </a:rPr>
+              <a:t>アプリ本体とAI機能を</a:t>
+            </a:r>
+          </a:p>
+          <a:p>
+            <a:pPr algn="l">
+              <a:lnSpc>
+                <a:spcPct val="145000"/>
+              </a:lnSpc>
+              <a:spcAft>
+                <a:spcPts val="400"/>
+              </a:spcAft>
+            </a:pPr>
+            <a:r>
+              <a:rPr sz="1150" b="0">
+                <a:solidFill>
+                  <a:srgbClr val="6B7280"/>
+                </a:solidFill>
+                <a:latin typeface="Meiryo"/>
+              </a:rPr>
+              <a:t>新サーバーへ移します。</a:t>
+            </a:r>
+          </a:p>
+        </p:txBody>
+      </p:sp>
+      <p:sp>
+        <p:nvSpPr>
+          <p:cNvPr id="16" name="TextBox 15"/>
+          <p:cNvSpPr txBox="1"/>
+          <p:nvPr/>
+        </p:nvSpPr>
+        <p:spPr>
+          <a:xfrm>
+            <a:off x="6025896" y="2788920"/>
+            <a:ext cx="228600" cy="365760"/>
+          </a:xfrm>
+          <a:prstGeom prst="rect">
+            <a:avLst/>
+          </a:prstGeom>
+          <a:noFill/>
+        </p:spPr>
+        <p:txBody>
+          <a:bodyPr wrap="square" lIns="0" tIns="0" rIns="0" bIns="0" anchor="t">
+            <a:spAutoFit/>
+          </a:bodyPr>
+          <a:lstStyle/>
+          <a:p>
+            <a:pPr algn="l">
+              <a:lnSpc>
+                <a:spcPct val="130000"/>
+              </a:lnSpc>
+              <a:spcAft>
+                <a:spcPts val="400"/>
+              </a:spcAft>
+            </a:pPr>
+            <a:r>
+              <a:rPr sz="2000" b="1">
+                <a:solidFill>
+                  <a:srgbClr val="C7CDD8"/>
+                </a:solidFill>
+                <a:latin typeface="Meiryo"/>
+              </a:rPr>
+              <a:t>›</a:t>
+            </a:r>
+          </a:p>
+        </p:txBody>
+      </p:sp>
+      <p:sp>
+        <p:nvSpPr>
+          <p:cNvPr id="17" name="Rounded Rectangle 16"/>
+          <p:cNvSpPr/>
+          <p:nvPr/>
+        </p:nvSpPr>
+        <p:spPr>
+          <a:xfrm>
+            <a:off x="6217920" y="1783080"/>
+            <a:ext cx="2606040" cy="2377440"/>
+          </a:xfrm>
+          <a:prstGeom prst="roundRect">
+            <a:avLst>
+              <a:gd name="adj" fmla="val 6000"/>
+            </a:avLst>
+          </a:prstGeom>
+          <a:solidFill>
+            <a:srgbClr val="FFFFFF"/>
+          </a:solidFill>
+          <a:ln w="12700">
+            <a:solidFill>
+              <a:srgbClr val="C7CDD8"/>
+            </a:solidFill>
+          </a:ln>
+          <a:effectLst/>
+        </p:spPr>
+        <p:style>
+          <a:lnRef idx="1">
+            <a:schemeClr val="accent1"/>
+          </a:lnRef>
+          <a:fillRef idx="3">
+            <a:schemeClr val="accent1"/>
+          </a:fillRef>
+          <a:effectRef idx="2">
+            <a:schemeClr val="accent1"/>
+          </a:effectRef>
+          <a:fontRef idx="minor">
+            <a:schemeClr val="lt1"/>
+          </a:fontRef>
+        </p:style>
+        <p:txBody>
+          <a:bodyPr rtlCol="0" anchor="ctr"/>
+          <a:lstStyle/>
+          <a:p>
+            <a:endParaRPr/>
+          </a:p>
+        </p:txBody>
+      </p:sp>
+      <p:sp>
+        <p:nvSpPr>
+          <p:cNvPr id="18" name="Rectangle 17"/>
+          <p:cNvSpPr/>
+          <p:nvPr/>
+        </p:nvSpPr>
+        <p:spPr>
+          <a:xfrm>
+            <a:off x="6217920" y="1783080"/>
+            <a:ext cx="2606040" cy="82296"/>
+          </a:xfrm>
+          <a:prstGeom prst="rect">
+            <a:avLst/>
+          </a:prstGeom>
+          <a:solidFill>
+            <a:srgbClr val="4F46E5"/>
+          </a:solidFill>
+          <a:ln>
+            <a:noFill/>
+          </a:ln>
+          <a:effectLst/>
+        </p:spPr>
+        <p:style>
+          <a:lnRef idx="1">
+            <a:schemeClr val="accent1"/>
+          </a:lnRef>
+          <a:fillRef idx="3">
+            <a:schemeClr val="accent1"/>
+          </a:fillRef>
+          <a:effectRef idx="2">
+            <a:schemeClr val="accent1"/>
+          </a:effectRef>
+          <a:fontRef idx="minor">
+            <a:schemeClr val="lt1"/>
+          </a:fontRef>
+        </p:style>
+        <p:txBody>
+          <a:bodyPr rtlCol="0" anchor="ctr"/>
+          <a:lstStyle/>
+          <a:p>
+            <a:endParaRPr/>
+          </a:p>
+        </p:txBody>
+      </p:sp>
+      <p:sp>
+        <p:nvSpPr>
+          <p:cNvPr id="19" name="TextBox 18"/>
+          <p:cNvSpPr txBox="1"/>
+          <p:nvPr/>
+        </p:nvSpPr>
+        <p:spPr>
+          <a:xfrm>
+            <a:off x="6473952" y="2084831"/>
+            <a:ext cx="2103120" cy="274320"/>
+          </a:xfrm>
+          <a:prstGeom prst="rect">
+            <a:avLst/>
+          </a:prstGeom>
+          <a:noFill/>
+        </p:spPr>
+        <p:txBody>
+          <a:bodyPr wrap="square" lIns="0" tIns="0" rIns="0" bIns="0" anchor="t">
+            <a:spAutoFit/>
+          </a:bodyPr>
+          <a:lstStyle/>
+          <a:p>
+            <a:pPr algn="l">
+              <a:lnSpc>
+                <a:spcPct val="130000"/>
+              </a:lnSpc>
+              <a:spcAft>
+                <a:spcPts val="400"/>
+              </a:spcAft>
+            </a:pPr>
+            <a:r>
+              <a:rPr sz="1100" b="1">
+                <a:solidFill>
+                  <a:srgbClr val="4F46E5"/>
+                </a:solidFill>
+                <a:latin typeface="Meiryo"/>
+              </a:rPr>
+              <a:t>STEP 3</a:t>
+            </a:r>
+          </a:p>
+        </p:txBody>
+      </p:sp>
+      <p:sp>
+        <p:nvSpPr>
+          <p:cNvPr id="20" name="TextBox 19"/>
+          <p:cNvSpPr txBox="1"/>
+          <p:nvPr/>
+        </p:nvSpPr>
+        <p:spPr>
+          <a:xfrm>
+            <a:off x="6473952" y="2450592"/>
+            <a:ext cx="2103120" cy="365760"/>
+          </a:xfrm>
+          <a:prstGeom prst="rect">
+            <a:avLst/>
+          </a:prstGeom>
+          <a:noFill/>
+        </p:spPr>
+        <p:txBody>
+          <a:bodyPr wrap="square" lIns="0" tIns="0" rIns="0" bIns="0" anchor="t">
+            <a:spAutoFit/>
+          </a:bodyPr>
+          <a:lstStyle/>
+          <a:p>
+            <a:pPr algn="l">
+              <a:lnSpc>
+                <a:spcPct val="130000"/>
+              </a:lnSpc>
+              <a:spcAft>
+                <a:spcPts val="400"/>
+              </a:spcAft>
+            </a:pPr>
+            <a:r>
+              <a:rPr sz="1500" b="1">
+                <a:solidFill>
+                  <a:srgbClr val="141A33"/>
+                </a:solidFill>
+                <a:latin typeface="Meiryo"/>
+              </a:rPr>
+              <a:t>動作確認</a:t>
+            </a:r>
+          </a:p>
+        </p:txBody>
+      </p:sp>
+      <p:sp>
+        <p:nvSpPr>
+          <p:cNvPr id="21" name="TextBox 20"/>
+          <p:cNvSpPr txBox="1"/>
+          <p:nvPr/>
+        </p:nvSpPr>
+        <p:spPr>
+          <a:xfrm>
+            <a:off x="6473952" y="2999232"/>
+            <a:ext cx="2103120" cy="914400"/>
+          </a:xfrm>
+          <a:prstGeom prst="rect">
+            <a:avLst/>
+          </a:prstGeom>
+          <a:noFill/>
+        </p:spPr>
+        <p:txBody>
+          <a:bodyPr wrap="square" lIns="0" tIns="0" rIns="0" bIns="0" anchor="t">
+            <a:spAutoFit/>
+          </a:bodyPr>
+          <a:lstStyle/>
+          <a:p>
+            <a:pPr algn="l">
+              <a:lnSpc>
+                <a:spcPct val="145000"/>
+              </a:lnSpc>
+              <a:spcAft>
+                <a:spcPts val="400"/>
+              </a:spcAft>
+            </a:pPr>
+            <a:r>
+              <a:rPr sz="1150" b="0">
+                <a:solidFill>
+                  <a:srgbClr val="6B7280"/>
+                </a:solidFill>
+                <a:latin typeface="Meiryo"/>
+              </a:rPr>
+              <a:t>実際の業務データで</a:t>
+            </a:r>
+          </a:p>
+          <a:p>
+            <a:pPr algn="l">
+              <a:lnSpc>
+                <a:spcPct val="145000"/>
+              </a:lnSpc>
+              <a:spcAft>
+                <a:spcPts val="400"/>
+              </a:spcAft>
+            </a:pPr>
+            <a:r>
+              <a:rPr sz="1150" b="0">
+                <a:solidFill>
+                  <a:srgbClr val="6B7280"/>
+                </a:solidFill>
+                <a:latin typeface="Meiryo"/>
+              </a:rPr>
+              <a:t>動作と速度を検証します。</a:t>
+            </a:r>
+          </a:p>
+        </p:txBody>
+      </p:sp>
+      <p:sp>
+        <p:nvSpPr>
+          <p:cNvPr id="22" name="TextBox 21"/>
+          <p:cNvSpPr txBox="1"/>
+          <p:nvPr/>
+        </p:nvSpPr>
+        <p:spPr>
+          <a:xfrm>
+            <a:off x="8851392" y="2788920"/>
+            <a:ext cx="228600" cy="365760"/>
+          </a:xfrm>
+          <a:prstGeom prst="rect">
+            <a:avLst/>
+          </a:prstGeom>
+          <a:noFill/>
+        </p:spPr>
+        <p:txBody>
+          <a:bodyPr wrap="square" lIns="0" tIns="0" rIns="0" bIns="0" anchor="t">
+            <a:spAutoFit/>
+          </a:bodyPr>
+          <a:lstStyle/>
+          <a:p>
+            <a:pPr algn="l">
+              <a:lnSpc>
+                <a:spcPct val="130000"/>
+              </a:lnSpc>
+              <a:spcAft>
+                <a:spcPts val="400"/>
+              </a:spcAft>
+            </a:pPr>
+            <a:r>
+              <a:rPr sz="2000" b="1">
+                <a:solidFill>
+                  <a:srgbClr val="C7CDD8"/>
+                </a:solidFill>
+                <a:latin typeface="Meiryo"/>
+              </a:rPr>
+              <a:t>›</a:t>
+            </a:r>
+          </a:p>
+        </p:txBody>
+      </p:sp>
+      <p:sp>
+        <p:nvSpPr>
+          <p:cNvPr id="23" name="Rounded Rectangle 22"/>
+          <p:cNvSpPr/>
+          <p:nvPr/>
+        </p:nvSpPr>
+        <p:spPr>
+          <a:xfrm>
+            <a:off x="9043415" y="1783080"/>
+            <a:ext cx="2606040" cy="2377440"/>
+          </a:xfrm>
+          <a:prstGeom prst="roundRect">
+            <a:avLst>
+              <a:gd name="adj" fmla="val 6000"/>
+            </a:avLst>
+          </a:prstGeom>
+          <a:solidFill>
+            <a:srgbClr val="FFFFFF"/>
+          </a:solidFill>
+          <a:ln w="12700">
+            <a:solidFill>
+              <a:srgbClr val="C7CDD8"/>
+            </a:solidFill>
+          </a:ln>
+          <a:effectLst/>
+        </p:spPr>
+        <p:style>
+          <a:lnRef idx="1">
+            <a:schemeClr val="accent1"/>
+          </a:lnRef>
+          <a:fillRef idx="3">
+            <a:schemeClr val="accent1"/>
+          </a:fillRef>
+          <a:effectRef idx="2">
+            <a:schemeClr val="accent1"/>
+          </a:effectRef>
+          <a:fontRef idx="minor">
+            <a:schemeClr val="lt1"/>
+          </a:fontRef>
+        </p:style>
+        <p:txBody>
+          <a:bodyPr rtlCol="0" anchor="ctr"/>
+          <a:lstStyle/>
+          <a:p>
+            <a:endParaRPr/>
+          </a:p>
+        </p:txBody>
+      </p:sp>
+      <p:sp>
+        <p:nvSpPr>
+          <p:cNvPr id="24" name="Rectangle 23"/>
+          <p:cNvSpPr/>
+          <p:nvPr/>
+        </p:nvSpPr>
+        <p:spPr>
+          <a:xfrm>
+            <a:off x="9043415" y="1783080"/>
+            <a:ext cx="2606040" cy="82296"/>
+          </a:xfrm>
+          <a:prstGeom prst="rect">
+            <a:avLst/>
+          </a:prstGeom>
+          <a:solidFill>
+            <a:srgbClr val="1F5E4B"/>
+          </a:solidFill>
+          <a:ln>
+            <a:noFill/>
+          </a:ln>
+          <a:effectLst/>
+        </p:spPr>
+        <p:style>
+          <a:lnRef idx="1">
+            <a:schemeClr val="accent1"/>
+          </a:lnRef>
+          <a:fillRef idx="3">
+            <a:schemeClr val="accent1"/>
+          </a:fillRef>
+          <a:effectRef idx="2">
+            <a:schemeClr val="accent1"/>
+          </a:effectRef>
+          <a:fontRef idx="minor">
+            <a:schemeClr val="lt1"/>
+          </a:fontRef>
+        </p:style>
+        <p:txBody>
+          <a:bodyPr rtlCol="0" anchor="ctr"/>
+          <a:lstStyle/>
+          <a:p>
+            <a:endParaRPr/>
+          </a:p>
+        </p:txBody>
+      </p:sp>
+      <p:sp>
+        <p:nvSpPr>
+          <p:cNvPr id="25" name="TextBox 24"/>
+          <p:cNvSpPr txBox="1"/>
+          <p:nvPr/>
+        </p:nvSpPr>
+        <p:spPr>
+          <a:xfrm>
+            <a:off x="9299447" y="2084831"/>
+            <a:ext cx="2103120" cy="274320"/>
+          </a:xfrm>
+          <a:prstGeom prst="rect">
+            <a:avLst/>
+          </a:prstGeom>
+          <a:noFill/>
+        </p:spPr>
+        <p:txBody>
+          <a:bodyPr wrap="square" lIns="0" tIns="0" rIns="0" bIns="0" anchor="t">
+            <a:spAutoFit/>
+          </a:bodyPr>
+          <a:lstStyle/>
+          <a:p>
+            <a:pPr algn="l">
+              <a:lnSpc>
+                <a:spcPct val="130000"/>
+              </a:lnSpc>
+              <a:spcAft>
+                <a:spcPts val="400"/>
+              </a:spcAft>
+            </a:pPr>
+            <a:r>
+              <a:rPr sz="1100" b="1">
+                <a:solidFill>
+                  <a:srgbClr val="1F5E4B"/>
+                </a:solidFill>
+                <a:latin typeface="Meiryo"/>
+              </a:rPr>
+              <a:t>STEP 4</a:t>
+            </a:r>
+          </a:p>
+        </p:txBody>
+      </p:sp>
+      <p:sp>
+        <p:nvSpPr>
+          <p:cNvPr id="26" name="TextBox 25"/>
+          <p:cNvSpPr txBox="1"/>
+          <p:nvPr/>
+        </p:nvSpPr>
+        <p:spPr>
+          <a:xfrm>
+            <a:off x="9299447" y="2450592"/>
+            <a:ext cx="2103120" cy="365760"/>
+          </a:xfrm>
+          <a:prstGeom prst="rect">
+            <a:avLst/>
+          </a:prstGeom>
+          <a:noFill/>
+        </p:spPr>
+        <p:txBody>
+          <a:bodyPr wrap="square" lIns="0" tIns="0" rIns="0" bIns="0" anchor="t">
+            <a:spAutoFit/>
+          </a:bodyPr>
+          <a:lstStyle/>
+          <a:p>
+            <a:pPr algn="l">
+              <a:lnSpc>
+                <a:spcPct val="130000"/>
+              </a:lnSpc>
+              <a:spcAft>
+                <a:spcPts val="400"/>
+              </a:spcAft>
+            </a:pPr>
+            <a:r>
+              <a:rPr sz="1500" b="1">
+                <a:solidFill>
+                  <a:srgbClr val="141A33"/>
+                </a:solidFill>
+                <a:latin typeface="Meiryo"/>
+              </a:rPr>
+              <a:t>カード切替</a:t>
+            </a:r>
+          </a:p>
+        </p:txBody>
+      </p:sp>
+      <p:sp>
+        <p:nvSpPr>
+          <p:cNvPr id="27" name="TextBox 26"/>
+          <p:cNvSpPr txBox="1"/>
+          <p:nvPr/>
+        </p:nvSpPr>
+        <p:spPr>
+          <a:xfrm>
+            <a:off x="9299447" y="2999232"/>
+            <a:ext cx="2103120" cy="914400"/>
+          </a:xfrm>
+          <a:prstGeom prst="rect">
+            <a:avLst/>
+          </a:prstGeom>
+          <a:noFill/>
+        </p:spPr>
+        <p:txBody>
+          <a:bodyPr wrap="square" lIns="0" tIns="0" rIns="0" bIns="0" anchor="t">
+            <a:spAutoFit/>
+          </a:bodyPr>
+          <a:lstStyle/>
+          <a:p>
+            <a:pPr algn="l">
+              <a:lnSpc>
+                <a:spcPct val="145000"/>
+              </a:lnSpc>
+              <a:spcAft>
+                <a:spcPts val="400"/>
+              </a:spcAft>
+            </a:pPr>
+            <a:r>
+              <a:rPr sz="1150" b="0">
+                <a:solidFill>
+                  <a:srgbClr val="6B7280"/>
+                </a:solidFill>
+                <a:latin typeface="Meiryo"/>
+              </a:rPr>
+              <a:t>お支払いを御社の</a:t>
+            </a:r>
+          </a:p>
+          <a:p>
+            <a:pPr algn="l">
+              <a:lnSpc>
+                <a:spcPct val="145000"/>
+              </a:lnSpc>
+              <a:spcAft>
+                <a:spcPts val="400"/>
+              </a:spcAft>
+            </a:pPr>
+            <a:r>
+              <a:rPr sz="1150" b="0">
+                <a:solidFill>
+                  <a:srgbClr val="6B7280"/>
+                </a:solidFill>
+                <a:latin typeface="Meiryo"/>
+              </a:rPr>
+              <a:t>クレジットカードへ変更。</a:t>
+            </a:r>
+          </a:p>
+        </p:txBody>
+      </p:sp>
+      <p:sp>
+        <p:nvSpPr>
+          <p:cNvPr id="28" name="Rounded Rectangle 27"/>
+          <p:cNvSpPr/>
+          <p:nvPr/>
+        </p:nvSpPr>
+        <p:spPr>
+          <a:xfrm>
+            <a:off x="566928" y="4572000"/>
+            <a:ext cx="11073384" cy="1481328"/>
+          </a:xfrm>
+          <a:prstGeom prst="roundRect">
+            <a:avLst>
+              <a:gd name="adj" fmla="val 6000"/>
+            </a:avLst>
+          </a:prstGeom>
+          <a:solidFill>
+            <a:srgbClr val="1E2761"/>
+          </a:solidFill>
+          <a:ln>
+            <a:noFill/>
+          </a:ln>
+          <a:effectLst/>
+        </p:spPr>
+        <p:style>
+          <a:lnRef idx="1">
+            <a:schemeClr val="accent1"/>
+          </a:lnRef>
+          <a:fillRef idx="3">
+            <a:schemeClr val="accent1"/>
+          </a:fillRef>
+          <a:effectRef idx="2">
+            <a:schemeClr val="accent1"/>
+          </a:effectRef>
+          <a:fontRef idx="minor">
+            <a:schemeClr val="lt1"/>
+          </a:fontRef>
+        </p:style>
+        <p:txBody>
+          <a:bodyPr rtlCol="0" anchor="ctr"/>
+          <a:lstStyle/>
+          <a:p>
+            <a:endParaRPr/>
+          </a:p>
+        </p:txBody>
+      </p:sp>
+      <p:sp>
+        <p:nvSpPr>
+          <p:cNvPr id="29" name="TextBox 28"/>
+          <p:cNvSpPr txBox="1"/>
+          <p:nvPr/>
+        </p:nvSpPr>
+        <p:spPr>
+          <a:xfrm>
+            <a:off x="914400" y="4828032"/>
+            <a:ext cx="10424160" cy="1005840"/>
+          </a:xfrm>
+          <a:prstGeom prst="rect">
+            <a:avLst/>
+          </a:prstGeom>
+          <a:noFill/>
+        </p:spPr>
+        <p:txBody>
+          <a:bodyPr wrap="square" lIns="0" tIns="0" rIns="0" bIns="0" anchor="t">
+            <a:spAutoFit/>
+          </a:bodyPr>
+          <a:lstStyle/>
+          <a:p>
+            <a:pPr algn="l">
+              <a:lnSpc>
+                <a:spcPct val="160000"/>
+              </a:lnSpc>
+              <a:spcAft>
+                <a:spcPts val="400"/>
+              </a:spcAft>
+            </a:pPr>
+            <a:r>
+              <a:rPr sz="1300" b="0">
+                <a:solidFill>
+                  <a:srgbClr val="FFFFFF"/>
+                </a:solidFill>
+                <a:latin typeface="Meiryo"/>
                 <a:ea typeface="Meiryo"/>
               </a:rPr>
-              <a:t>東京への移行が完了するまでは、Supabase の保管場所を「韓国」と記載してください。移行後に「日本」へ改めます。</a:t>
+              <a:t>ご確認いただきたい点</a:t>
+            </a:r>
+          </a:p>
+          <a:p>
+            <a:r>
+              <a:rPr sz="1300" b="0">
+                <a:solidFill>
+                  <a:srgbClr val="FFFFFF"/>
+                </a:solidFill>
+                <a:latin typeface="Meiryo"/>
+                <a:ea typeface="Meiryo"/>
+              </a:rPr>
+              <a:t>　保管データについて「必ず御社Azure内に置く」という社内ルールはございますか。</a:t>
+            </a:r>
+          </a:p>
+          <a:p>
+            <a:r>
+              <a:rPr sz="1300" b="0">
+                <a:solidFill>
+                  <a:srgbClr val="FFFFFF"/>
+                </a:solidFill>
+                <a:latin typeface="Meiryo"/>
+                <a:ea typeface="Meiryo"/>
+              </a:rPr>
+              <a:t>　特になければ、データベースは Supabase（東京リージョン・国内保管）のまま継続いたします。</a:t>
             </a:r>
           </a:p>
         </p:txBody>
@@ -5803,7 +6601,7 @@
                 <a:latin typeface="Meiryo"/>
                 <a:ea typeface="Meiryo"/>
               </a:rPr>
-              <a:t>Supabase（現在：韓国 → 東京へ移行）</a:t>
+              <a:t>Supabase（東京リージョン）</a:t>
             </a:r>
           </a:p>
         </p:txBody>
@@ -5996,7 +6794,7 @@
                 <a:latin typeface="Meiryo"/>
                 <a:ea typeface="Meiryo"/>
               </a:rPr>
-              <a:t>現在：韓国リージョン</a:t>
+              <a:t>東京リージョン</a:t>
             </a:r>
           </a:p>
           <a:p>
@@ -6008,7 +6806,7 @@
                 <a:latin typeface="Meiryo"/>
                 <a:ea typeface="Meiryo"/>
               </a:rPr>
-              <a:t>2026年8月中に東京へ</a:t>
+              <a:t>（2026年8月 移行完了）</a:t>
             </a:r>
           </a:p>
         </p:txBody>
@@ -6109,7 +6907,7 @@
                 <a:latin typeface="Meiryo"/>
                 <a:ea typeface="Meiryo"/>
               </a:rPr>
-              <a:t>データベースは Supabase をそのまま利用しますが、保管先を韓国リージョンから東京リージョンへ移します（次々ページ）。</a:t>
+              <a:t>データベースは Supabase を継続利用し、保管先は東京リージョン（国内保管）へ移行済みです。</a:t>
             </a:r>
           </a:p>
         </p:txBody>
@@ -7618,7 +8416,7 @@
                 <a:latin typeface="Meiryo"/>
                 <a:ea typeface="Meiryo"/>
               </a:rPr>
-              <a:t>アプリは東京。データは</a:t>
+              <a:t>アプリ・データとも</a:t>
             </a:r>
           </a:p>
           <a:p>
@@ -7630,7 +8428,7 @@
                 <a:latin typeface="Meiryo"/>
                 <a:ea typeface="Meiryo"/>
               </a:rPr>
-              <a:t>2026年8月中に東京へ</a:t>
+              <a:t>東京リージョンに保管。</a:t>
             </a:r>
           </a:p>
           <a:p>
@@ -7642,7 +8440,7 @@
                 <a:latin typeface="Meiryo"/>
                 <a:ea typeface="Meiryo"/>
               </a:rPr>
-              <a:t>移し、国内保管とします。</a:t>
+              <a:t>個人情報は国内で保管します。</a:t>
             </a:r>
           </a:p>
         </p:txBody>
@@ -8694,7 +9492,7 @@
 </file>
 
 <file path=ppt/slides/slide6.xml><?xml version="1.0" encoding="utf-8"?>
-<p:sld xmlns:a="http://schemas.openxmlformats.org/drawingml/2006/main" xmlns:r="http://schemas.openxmlformats.org/officeDocument/2006/relationships" xmlns:p="http://schemas.openxmlformats.org/presentationml/2006/main">
+<p:sld xmlns:a="http://schemas.openxmlformats.org/drawingml/2006/main" xmlns:p="http://schemas.openxmlformats.org/presentationml/2006/main" xmlns:r="http://schemas.openxmlformats.org/officeDocument/2006/relationships">
   <p:cSld>
     <p:spTree>
       <p:nvGrpSpPr>
@@ -8702,14 +9500,7 @@
         <p:cNvGrpSpPr/>
         <p:nvPr/>
       </p:nvGrpSpPr>
-      <p:grpSpPr>
-        <a:xfrm>
-          <a:off x="0" y="0"/>
-          <a:ext cx="0" cy="0"/>
-          <a:chOff x="0" y="0"/>
-          <a:chExt cx="0" cy="0"/>
-        </a:xfrm>
-      </p:grpSpPr>
+      <p:grpSpPr/>
       <p:sp>
         <p:nvSpPr>
           <p:cNvPr id="2" name="Rectangle 1"/>
@@ -8749,9 +9540,7 @@
         <p:txBody>
           <a:bodyPr rtlCol="0" anchor="ctr"/>
           <a:lstStyle/>
-          <a:p>
-            <a:endParaRPr/>
-          </a:p>
+          <a:p/>
         </p:txBody>
       </p:sp>
       <p:sp>
@@ -8771,27 +9560,21 @@
           <a:noFill/>
         </p:spPr>
         <p:txBody>
-          <a:bodyPr wrap="square" lIns="0" tIns="0" rIns="0" bIns="0" anchor="t">
-            <a:spAutoFit/>
-          </a:bodyPr>
-          <a:lstStyle/>
-          <a:p>
-            <a:pPr algn="l">
-              <a:lnSpc>
-                <a:spcPct val="130000"/>
-              </a:lnSpc>
-              <a:spcAft>
-                <a:spcPts val="400"/>
-              </a:spcAft>
-            </a:pPr>
+          <a:bodyPr wrap="square" lIns="0" rIns="0" tIns="0" bIns="0">
+            <a:spAutoFit/>
+          </a:bodyPr>
+          <a:lstStyle/>
+          <a:p>
+            <a:pPr algn="l"/>
             <a:r>
               <a:rPr sz="2200" b="1">
                 <a:solidFill>
                   <a:srgbClr val="FFFFFF"/>
                 </a:solidFill>
                 <a:latin typeface="Meiryo"/>
-              </a:rPr>
-              <a:t>費用の試算</a:t>
+                <a:ea typeface="Meiryo"/>
+              </a:rPr>
+              <a:t>データの保管場所</a:t>
             </a:r>
           </a:p>
         </p:txBody>
@@ -8813,27 +9596,956 @@
           <a:noFill/>
         </p:spPr>
         <p:txBody>
-          <a:bodyPr wrap="square" lIns="0" tIns="0" rIns="0" bIns="0" anchor="t">
-            <a:spAutoFit/>
-          </a:bodyPr>
-          <a:lstStyle/>
-          <a:p>
-            <a:pPr algn="l">
-              <a:lnSpc>
-                <a:spcPct val="130000"/>
-              </a:lnSpc>
-              <a:spcAft>
-                <a:spcPts val="400"/>
-              </a:spcAft>
-            </a:pPr>
+          <a:bodyPr wrap="square" lIns="0" rIns="0" tIns="0" bIns="0">
+            <a:spAutoFit/>
+          </a:bodyPr>
+          <a:lstStyle/>
+          <a:p>
+            <a:pPr algn="l"/>
             <a:r>
               <a:rPr sz="1250" b="0">
                 <a:solidFill>
                   <a:srgbClr val="6B7280"/>
                 </a:solidFill>
                 <a:latin typeface="Meiryo"/>
-              </a:rPr>
-              <a:t>クラウドは基本料金なしの従量課金です。実際の利用量に応じたお支払いになります。</a:t>
+                <a:ea typeface="Meiryo"/>
+              </a:rPr>
+              <a:t>システムは3つの部品でできています。それぞれの保管・処理の場所は次のとおりです。</a:t>
+            </a:r>
+          </a:p>
+        </p:txBody>
+      </p:sp>
+      <p:sp>
+        <p:nvSpPr>
+          <p:cNvPr id="5" name="TextBox 4"/>
+          <p:cNvSpPr txBox="1"/>
+          <p:nvPr/>
+        </p:nvSpPr>
+        <p:spPr>
+          <a:xfrm>
+            <a:off x="566928" y="1600200"/>
+            <a:ext cx="2926080" cy="320040"/>
+          </a:xfrm>
+          <a:prstGeom prst="rect">
+            <a:avLst/>
+          </a:prstGeom>
+          <a:noFill/>
+        </p:spPr>
+        <p:txBody>
+          <a:bodyPr wrap="square" lIns="0" rIns="0" tIns="0" bIns="0">
+            <a:spAutoFit/>
+          </a:bodyPr>
+          <a:lstStyle/>
+          <a:p>
+            <a:pPr algn="l"/>
+            <a:r>
+              <a:rPr sz="1200" b="1">
+                <a:solidFill>
+                  <a:srgbClr val="6B7280"/>
+                </a:solidFill>
+                <a:latin typeface="Meiryo"/>
+                <a:ea typeface="Meiryo"/>
+              </a:rPr>
+              <a:t>部品</a:t>
+            </a:r>
+          </a:p>
+        </p:txBody>
+      </p:sp>
+      <p:sp>
+        <p:nvSpPr>
+          <p:cNvPr id="6" name="TextBox 5"/>
+          <p:cNvSpPr txBox="1"/>
+          <p:nvPr/>
+        </p:nvSpPr>
+        <p:spPr>
+          <a:xfrm>
+            <a:off x="3767328" y="1600200"/>
+            <a:ext cx="2743200" cy="320040"/>
+          </a:xfrm>
+          <a:prstGeom prst="rect">
+            <a:avLst/>
+          </a:prstGeom>
+          <a:noFill/>
+        </p:spPr>
+        <p:txBody>
+          <a:bodyPr wrap="square" lIns="0" rIns="0" tIns="0" bIns="0">
+            <a:spAutoFit/>
+          </a:bodyPr>
+          <a:lstStyle/>
+          <a:p>
+            <a:pPr algn="l"/>
+            <a:r>
+              <a:rPr sz="1200" b="1">
+                <a:solidFill>
+                  <a:srgbClr val="6B7280"/>
+                </a:solidFill>
+                <a:latin typeface="Meiryo"/>
+                <a:ea typeface="Meiryo"/>
+              </a:rPr>
+              <a:t>現在</a:t>
+            </a:r>
+          </a:p>
+        </p:txBody>
+      </p:sp>
+      <p:sp>
+        <p:nvSpPr>
+          <p:cNvPr id="7" name="TextBox 6"/>
+          <p:cNvSpPr txBox="1"/>
+          <p:nvPr/>
+        </p:nvSpPr>
+        <p:spPr>
+          <a:xfrm>
+            <a:off x="6784848" y="1600200"/>
+            <a:ext cx="2743200" cy="320040"/>
+          </a:xfrm>
+          <a:prstGeom prst="rect">
+            <a:avLst/>
+          </a:prstGeom>
+          <a:noFill/>
+        </p:spPr>
+        <p:txBody>
+          <a:bodyPr wrap="square" lIns="0" rIns="0" tIns="0" bIns="0">
+            <a:spAutoFit/>
+          </a:bodyPr>
+          <a:lstStyle/>
+          <a:p>
+            <a:pPr algn="l"/>
+            <a:r>
+              <a:rPr sz="1200" b="1">
+                <a:solidFill>
+                  <a:srgbClr val="6B7280"/>
+                </a:solidFill>
+                <a:latin typeface="Meiryo"/>
+                <a:ea typeface="Meiryo"/>
+              </a:rPr>
+              <a:t>対応後</a:t>
+            </a:r>
+          </a:p>
+        </p:txBody>
+      </p:sp>
+      <p:sp>
+        <p:nvSpPr>
+          <p:cNvPr id="8" name="TextBox 7"/>
+          <p:cNvSpPr txBox="1"/>
+          <p:nvPr/>
+        </p:nvSpPr>
+        <p:spPr>
+          <a:xfrm>
+            <a:off x="9802368" y="1600200"/>
+            <a:ext cx="2514600" cy="320040"/>
+          </a:xfrm>
+          <a:prstGeom prst="rect">
+            <a:avLst/>
+          </a:prstGeom>
+          <a:noFill/>
+        </p:spPr>
+        <p:txBody>
+          <a:bodyPr wrap="square" lIns="0" rIns="0" tIns="0" bIns="0">
+            <a:spAutoFit/>
+          </a:bodyPr>
+          <a:lstStyle/>
+          <a:p>
+            <a:pPr algn="l"/>
+            <a:r>
+              <a:rPr sz="1200" b="1">
+                <a:solidFill>
+                  <a:srgbClr val="6B7280"/>
+                </a:solidFill>
+                <a:latin typeface="Meiryo"/>
+                <a:ea typeface="Meiryo"/>
+              </a:rPr>
+              <a:t>時期</a:t>
+            </a:r>
+          </a:p>
+        </p:txBody>
+      </p:sp>
+      <p:sp>
+        <p:nvSpPr>
+          <p:cNvPr id="9" name="TextBox 8"/>
+          <p:cNvSpPr txBox="1"/>
+          <p:nvPr/>
+        </p:nvSpPr>
+        <p:spPr>
+          <a:xfrm>
+            <a:off x="566928" y="2240280"/>
+            <a:ext cx="2926080" cy="365760"/>
+          </a:xfrm>
+          <a:prstGeom prst="rect">
+            <a:avLst/>
+          </a:prstGeom>
+          <a:noFill/>
+        </p:spPr>
+        <p:txBody>
+          <a:bodyPr wrap="square" lIns="0" rIns="0" tIns="0" bIns="0">
+            <a:spAutoFit/>
+          </a:bodyPr>
+          <a:lstStyle/>
+          <a:p>
+            <a:pPr algn="l"/>
+            <a:r>
+              <a:rPr sz="1250" b="1">
+                <a:solidFill>
+                  <a:srgbClr val="141A33"/>
+                </a:solidFill>
+                <a:latin typeface="Meiryo"/>
+                <a:ea typeface="Meiryo"/>
+              </a:rPr>
+              <a:t>アプリ本体</a:t>
+            </a:r>
+          </a:p>
+        </p:txBody>
+      </p:sp>
+      <p:sp>
+        <p:nvSpPr>
+          <p:cNvPr id="10" name="TextBox 9"/>
+          <p:cNvSpPr txBox="1"/>
+          <p:nvPr/>
+        </p:nvSpPr>
+        <p:spPr>
+          <a:xfrm>
+            <a:off x="3767328" y="2240280"/>
+            <a:ext cx="2743200" cy="365760"/>
+          </a:xfrm>
+          <a:prstGeom prst="rect">
+            <a:avLst/>
+          </a:prstGeom>
+          <a:noFill/>
+        </p:spPr>
+        <p:txBody>
+          <a:bodyPr wrap="square" lIns="0" rIns="0" tIns="0" bIns="0">
+            <a:spAutoFit/>
+          </a:bodyPr>
+          <a:lstStyle/>
+          <a:p>
+            <a:pPr algn="l"/>
+            <a:r>
+              <a:rPr sz="1200" b="0">
+                <a:solidFill>
+                  <a:srgbClr val="6B7280"/>
+                </a:solidFill>
+                <a:latin typeface="Meiryo"/>
+                <a:ea typeface="Meiryo"/>
+              </a:rPr>
+              <a:t>米国オレゴン（Render）</a:t>
+            </a:r>
+          </a:p>
+        </p:txBody>
+      </p:sp>
+      <p:sp>
+        <p:nvSpPr>
+          <p:cNvPr id="11" name="TextBox 10"/>
+          <p:cNvSpPr txBox="1"/>
+          <p:nvPr/>
+        </p:nvSpPr>
+        <p:spPr>
+          <a:xfrm>
+            <a:off x="6784848" y="2240280"/>
+            <a:ext cx="2743200" cy="365760"/>
+          </a:xfrm>
+          <a:prstGeom prst="rect">
+            <a:avLst/>
+          </a:prstGeom>
+          <a:noFill/>
+        </p:spPr>
+        <p:txBody>
+          <a:bodyPr wrap="square" lIns="0" rIns="0" tIns="0" bIns="0">
+            <a:spAutoFit/>
+          </a:bodyPr>
+          <a:lstStyle/>
+          <a:p>
+            <a:pPr algn="l"/>
+            <a:r>
+              <a:rPr sz="1200" b="1">
+                <a:solidFill>
+                  <a:srgbClr val="141A33"/>
+                </a:solidFill>
+                <a:latin typeface="Meiryo"/>
+                <a:ea typeface="Meiryo"/>
+              </a:rPr>
+              <a:t>東京（Azure）</a:t>
+            </a:r>
+          </a:p>
+        </p:txBody>
+      </p:sp>
+      <p:sp>
+        <p:nvSpPr>
+          <p:cNvPr id="12" name="TextBox 11"/>
+          <p:cNvSpPr txBox="1"/>
+          <p:nvPr/>
+        </p:nvSpPr>
+        <p:spPr>
+          <a:xfrm>
+            <a:off x="9802368" y="2240280"/>
+            <a:ext cx="2514600" cy="365760"/>
+          </a:xfrm>
+          <a:prstGeom prst="rect">
+            <a:avLst/>
+          </a:prstGeom>
+          <a:noFill/>
+        </p:spPr>
+        <p:txBody>
+          <a:bodyPr wrap="square" lIns="0" rIns="0" tIns="0" bIns="0">
+            <a:spAutoFit/>
+          </a:bodyPr>
+          <a:lstStyle/>
+          <a:p>
+            <a:pPr algn="l"/>
+            <a:r>
+              <a:rPr sz="1200" b="0">
+                <a:solidFill>
+                  <a:srgbClr val="6B7280"/>
+                </a:solidFill>
+                <a:latin typeface="Meiryo"/>
+                <a:ea typeface="Meiryo"/>
+              </a:rPr>
+              <a:t>完了</a:t>
+            </a:r>
+          </a:p>
+        </p:txBody>
+      </p:sp>
+      <p:sp>
+        <p:nvSpPr>
+          <p:cNvPr id="13" name="Rectangle 12"/>
+          <p:cNvSpPr/>
+          <p:nvPr/>
+        </p:nvSpPr>
+        <p:spPr>
+          <a:xfrm>
+            <a:off x="566928" y="2788920"/>
+            <a:ext cx="11183112" cy="731520"/>
+          </a:xfrm>
+          <a:prstGeom prst="rect">
+            <a:avLst/>
+          </a:prstGeom>
+          <a:solidFill>
+            <a:srgbClr val="F5F6F8"/>
+          </a:solidFill>
+          <a:ln>
+            <a:noFill/>
+          </a:ln>
+          <a:effectLst/>
+        </p:spPr>
+        <p:style>
+          <a:lnRef idx="1">
+            <a:schemeClr val="accent1"/>
+          </a:lnRef>
+          <a:fillRef idx="3">
+            <a:schemeClr val="accent1"/>
+          </a:fillRef>
+          <a:effectRef idx="2">
+            <a:schemeClr val="accent1"/>
+          </a:effectRef>
+          <a:fontRef idx="minor">
+            <a:schemeClr val="lt1"/>
+          </a:fontRef>
+        </p:style>
+        <p:txBody>
+          <a:bodyPr rtlCol="0" anchor="ctr"/>
+          <a:lstStyle/>
+          <a:p/>
+        </p:txBody>
+      </p:sp>
+      <p:sp>
+        <p:nvSpPr>
+          <p:cNvPr id="14" name="TextBox 13"/>
+          <p:cNvSpPr txBox="1"/>
+          <p:nvPr/>
+        </p:nvSpPr>
+        <p:spPr>
+          <a:xfrm>
+            <a:off x="566928" y="2971800"/>
+            <a:ext cx="2926080" cy="365760"/>
+          </a:xfrm>
+          <a:prstGeom prst="rect">
+            <a:avLst/>
+          </a:prstGeom>
+          <a:noFill/>
+        </p:spPr>
+        <p:txBody>
+          <a:bodyPr wrap="square" lIns="0" rIns="0" tIns="0" bIns="0">
+            <a:spAutoFit/>
+          </a:bodyPr>
+          <a:lstStyle/>
+          <a:p>
+            <a:pPr algn="l"/>
+            <a:r>
+              <a:rPr sz="1250" b="1">
+                <a:solidFill>
+                  <a:srgbClr val="141A33"/>
+                </a:solidFill>
+                <a:latin typeface="Meiryo"/>
+                <a:ea typeface="Meiryo"/>
+              </a:rPr>
+              <a:t>データベース・添付ファイル</a:t>
+            </a:r>
+          </a:p>
+        </p:txBody>
+      </p:sp>
+      <p:sp>
+        <p:nvSpPr>
+          <p:cNvPr id="15" name="TextBox 14"/>
+          <p:cNvSpPr txBox="1"/>
+          <p:nvPr/>
+        </p:nvSpPr>
+        <p:spPr>
+          <a:xfrm>
+            <a:off x="3767328" y="2971800"/>
+            <a:ext cx="2743200" cy="365760"/>
+          </a:xfrm>
+          <a:prstGeom prst="rect">
+            <a:avLst/>
+          </a:prstGeom>
+          <a:noFill/>
+        </p:spPr>
+        <p:txBody>
+          <a:bodyPr wrap="square" lIns="0" rIns="0" tIns="0" bIns="0">
+            <a:spAutoFit/>
+          </a:bodyPr>
+          <a:lstStyle/>
+          <a:p>
+            <a:pPr algn="l"/>
+            <a:r>
+              <a:rPr sz="1200" b="0">
+                <a:solidFill>
+                  <a:srgbClr val="6B7280"/>
+                </a:solidFill>
+                <a:latin typeface="Meiryo"/>
+                <a:ea typeface="Meiryo"/>
+              </a:rPr>
+              <a:t>東京（Supabase）</a:t>
+            </a:r>
+          </a:p>
+        </p:txBody>
+      </p:sp>
+      <p:sp>
+        <p:nvSpPr>
+          <p:cNvPr id="16" name="TextBox 15"/>
+          <p:cNvSpPr txBox="1"/>
+          <p:nvPr/>
+        </p:nvSpPr>
+        <p:spPr>
+          <a:xfrm>
+            <a:off x="6784848" y="2971800"/>
+            <a:ext cx="2743200" cy="365760"/>
+          </a:xfrm>
+          <a:prstGeom prst="rect">
+            <a:avLst/>
+          </a:prstGeom>
+          <a:noFill/>
+        </p:spPr>
+        <p:txBody>
+          <a:bodyPr wrap="square" lIns="0" rIns="0" tIns="0" bIns="0">
+            <a:spAutoFit/>
+          </a:bodyPr>
+          <a:lstStyle/>
+          <a:p>
+            <a:pPr algn="l"/>
+            <a:r>
+              <a:rPr sz="1200" b="1">
+                <a:solidFill>
+                  <a:srgbClr val="141A33"/>
+                </a:solidFill>
+                <a:latin typeface="Meiryo"/>
+                <a:ea typeface="Meiryo"/>
+              </a:rPr>
+              <a:t>東京（Supabase）</a:t>
+            </a:r>
+          </a:p>
+        </p:txBody>
+      </p:sp>
+      <p:sp>
+        <p:nvSpPr>
+          <p:cNvPr id="17" name="TextBox 16"/>
+          <p:cNvSpPr txBox="1"/>
+          <p:nvPr/>
+        </p:nvSpPr>
+        <p:spPr>
+          <a:xfrm>
+            <a:off x="9802368" y="2971800"/>
+            <a:ext cx="2514600" cy="365760"/>
+          </a:xfrm>
+          <a:prstGeom prst="rect">
+            <a:avLst/>
+          </a:prstGeom>
+          <a:noFill/>
+        </p:spPr>
+        <p:txBody>
+          <a:bodyPr wrap="square" lIns="0" rIns="0" tIns="0" bIns="0">
+            <a:spAutoFit/>
+          </a:bodyPr>
+          <a:lstStyle/>
+          <a:p>
+            <a:pPr algn="l"/>
+            <a:r>
+              <a:rPr sz="1200" b="0">
+                <a:solidFill>
+                  <a:srgbClr val="6B7280"/>
+                </a:solidFill>
+                <a:latin typeface="Meiryo"/>
+                <a:ea typeface="Meiryo"/>
+              </a:rPr>
+              <a:t>完了</a:t>
+            </a:r>
+          </a:p>
+        </p:txBody>
+      </p:sp>
+      <p:sp>
+        <p:nvSpPr>
+          <p:cNvPr id="18" name="TextBox 17"/>
+          <p:cNvSpPr txBox="1"/>
+          <p:nvPr/>
+        </p:nvSpPr>
+        <p:spPr>
+          <a:xfrm>
+            <a:off x="566928" y="3703320"/>
+            <a:ext cx="2926080" cy="365760"/>
+          </a:xfrm>
+          <a:prstGeom prst="rect">
+            <a:avLst/>
+          </a:prstGeom>
+          <a:noFill/>
+        </p:spPr>
+        <p:txBody>
+          <a:bodyPr wrap="square" lIns="0" rIns="0" tIns="0" bIns="0">
+            <a:spAutoFit/>
+          </a:bodyPr>
+          <a:lstStyle/>
+          <a:p>
+            <a:pPr algn="l"/>
+            <a:r>
+              <a:rPr sz="1250" b="1">
+                <a:solidFill>
+                  <a:srgbClr val="141A33"/>
+                </a:solidFill>
+                <a:latin typeface="Meiryo"/>
+                <a:ea typeface="Meiryo"/>
+              </a:rPr>
+              <a:t>AI・OCR</a:t>
+            </a:r>
+          </a:p>
+        </p:txBody>
+      </p:sp>
+      <p:sp>
+        <p:nvSpPr>
+          <p:cNvPr id="19" name="TextBox 18"/>
+          <p:cNvSpPr txBox="1"/>
+          <p:nvPr/>
+        </p:nvSpPr>
+        <p:spPr>
+          <a:xfrm>
+            <a:off x="3767328" y="3703320"/>
+            <a:ext cx="2743200" cy="365760"/>
+          </a:xfrm>
+          <a:prstGeom prst="rect">
+            <a:avLst/>
+          </a:prstGeom>
+          <a:noFill/>
+        </p:spPr>
+        <p:txBody>
+          <a:bodyPr wrap="square" lIns="0" rIns="0" tIns="0" bIns="0">
+            <a:spAutoFit/>
+          </a:bodyPr>
+          <a:lstStyle/>
+          <a:p>
+            <a:pPr algn="l"/>
+            <a:r>
+              <a:rPr sz="1200" b="0">
+                <a:solidFill>
+                  <a:srgbClr val="6B7280"/>
+                </a:solidFill>
+                <a:latin typeface="Meiryo"/>
+                <a:ea typeface="Meiryo"/>
+              </a:rPr>
+              <a:t>米国（Anthropic）</a:t>
+            </a:r>
+          </a:p>
+        </p:txBody>
+      </p:sp>
+      <p:sp>
+        <p:nvSpPr>
+          <p:cNvPr id="20" name="TextBox 19"/>
+          <p:cNvSpPr txBox="1"/>
+          <p:nvPr/>
+        </p:nvSpPr>
+        <p:spPr>
+          <a:xfrm>
+            <a:off x="6784848" y="3703320"/>
+            <a:ext cx="2743200" cy="365760"/>
+          </a:xfrm>
+          <a:prstGeom prst="rect">
+            <a:avLst/>
+          </a:prstGeom>
+          <a:noFill/>
+        </p:spPr>
+        <p:txBody>
+          <a:bodyPr wrap="square" lIns="0" rIns="0" tIns="0" bIns="0">
+            <a:spAutoFit/>
+          </a:bodyPr>
+          <a:lstStyle/>
+          <a:p>
+            <a:pPr algn="l"/>
+            <a:r>
+              <a:rPr sz="1200" b="1">
+                <a:solidFill>
+                  <a:srgbClr val="141A33"/>
+                </a:solidFill>
+                <a:latin typeface="Meiryo"/>
+                <a:ea typeface="Meiryo"/>
+              </a:rPr>
+              <a:t>当面は米国のまま</a:t>
+            </a:r>
+          </a:p>
+        </p:txBody>
+      </p:sp>
+      <p:sp>
+        <p:nvSpPr>
+          <p:cNvPr id="21" name="TextBox 20"/>
+          <p:cNvSpPr txBox="1"/>
+          <p:nvPr/>
+        </p:nvSpPr>
+        <p:spPr>
+          <a:xfrm>
+            <a:off x="9802368" y="3703320"/>
+            <a:ext cx="2514600" cy="365760"/>
+          </a:xfrm>
+          <a:prstGeom prst="rect">
+            <a:avLst/>
+          </a:prstGeom>
+          <a:noFill/>
+        </p:spPr>
+        <p:txBody>
+          <a:bodyPr wrap="square" lIns="0" rIns="0" tIns="0" bIns="0">
+            <a:spAutoFit/>
+          </a:bodyPr>
+          <a:lstStyle/>
+          <a:p>
+            <a:pPr algn="l"/>
+            <a:r>
+              <a:rPr sz="1200" b="0">
+                <a:solidFill>
+                  <a:srgbClr val="6B7280"/>
+                </a:solidFill>
+                <a:latin typeface="Meiryo"/>
+                <a:ea typeface="Meiryo"/>
+              </a:rPr>
+              <a:t>規約・公表で対応</a:t>
+            </a:r>
+          </a:p>
+        </p:txBody>
+      </p:sp>
+      <p:sp>
+        <p:nvSpPr>
+          <p:cNvPr id="22" name="Rounded Rectangle 21"/>
+          <p:cNvSpPr/>
+          <p:nvPr/>
+        </p:nvSpPr>
+        <p:spPr>
+          <a:xfrm>
+            <a:off x="566928" y="4480560"/>
+            <a:ext cx="11073384" cy="960120"/>
+          </a:xfrm>
+          <a:prstGeom prst="roundRect">
+            <a:avLst>
+              <a:gd name="adj" fmla="val 12000"/>
+            </a:avLst>
+          </a:prstGeom>
+          <a:solidFill>
+            <a:srgbClr val="FAFAFB"/>
+          </a:solidFill>
+          <a:ln>
+            <a:noFill/>
+          </a:ln>
+          <a:effectLst/>
+        </p:spPr>
+        <p:style>
+          <a:lnRef idx="1">
+            <a:schemeClr val="accent1"/>
+          </a:lnRef>
+          <a:fillRef idx="3">
+            <a:schemeClr val="accent1"/>
+          </a:fillRef>
+          <a:effectRef idx="2">
+            <a:schemeClr val="accent1"/>
+          </a:effectRef>
+          <a:fontRef idx="minor">
+            <a:schemeClr val="lt1"/>
+          </a:fontRef>
+        </p:style>
+        <p:txBody>
+          <a:bodyPr rtlCol="0" anchor="ctr"/>
+          <a:lstStyle/>
+          <a:p/>
+        </p:txBody>
+      </p:sp>
+      <p:sp>
+        <p:nvSpPr>
+          <p:cNvPr id="23" name="TextBox 22"/>
+          <p:cNvSpPr txBox="1"/>
+          <p:nvPr/>
+        </p:nvSpPr>
+        <p:spPr>
+          <a:xfrm>
+            <a:off x="868680" y="4640580"/>
+            <a:ext cx="10515600" cy="640080"/>
+          </a:xfrm>
+          <a:prstGeom prst="rect">
+            <a:avLst/>
+          </a:prstGeom>
+          <a:noFill/>
+        </p:spPr>
+        <p:txBody>
+          <a:bodyPr wrap="square" lIns="0" rIns="0" tIns="0" bIns="0">
+            <a:spAutoFit/>
+          </a:bodyPr>
+          <a:lstStyle/>
+          <a:p>
+            <a:pPr algn="l">
+              <a:spcAft>
+                <a:spcPts val="300"/>
+              </a:spcAft>
+            </a:pPr>
+            <a:r>
+              <a:rPr sz="1200" b="0">
+                <a:solidFill>
+                  <a:srgbClr val="141A33"/>
+                </a:solidFill>
+                <a:latin typeface="Meiryo"/>
+                <a:ea typeface="Meiryo"/>
+              </a:rPr>
+              <a:t>案件情報と、戸籍・通帳などの書類ファイルは、すべてデータベース側にあります。</a:t>
+            </a:r>
+          </a:p>
+          <a:p>
+            <a:pPr algn="l">
+              <a:spcAft>
+                <a:spcPts val="300"/>
+              </a:spcAft>
+            </a:pPr>
+            <a:r>
+              <a:rPr sz="1200" b="0">
+                <a:solidFill>
+                  <a:srgbClr val="141A33"/>
+                </a:solidFill>
+                <a:latin typeface="Meiryo"/>
+                <a:ea typeface="Meiryo"/>
+              </a:rPr>
+              <a:t>ここを国内に移すことの効果が最も大きいため、優先して実施します。</a:t>
+            </a:r>
+          </a:p>
+        </p:txBody>
+      </p:sp>
+      <p:sp>
+        <p:nvSpPr>
+          <p:cNvPr id="24" name="Rounded Rectangle 23"/>
+          <p:cNvSpPr/>
+          <p:nvPr/>
+        </p:nvSpPr>
+        <p:spPr>
+          <a:xfrm>
+            <a:off x="566928" y="5486400"/>
+            <a:ext cx="11073384" cy="685800"/>
+          </a:xfrm>
+          <a:prstGeom prst="roundRect">
+            <a:avLst>
+              <a:gd name="adj" fmla="val 12000"/>
+            </a:avLst>
+          </a:prstGeom>
+          <a:solidFill>
+            <a:srgbClr val="F2F4FB"/>
+          </a:solidFill>
+          <a:ln>
+            <a:noFill/>
+          </a:ln>
+          <a:effectLst/>
+        </p:spPr>
+        <p:style>
+          <a:lnRef idx="1">
+            <a:schemeClr val="accent1"/>
+          </a:lnRef>
+          <a:fillRef idx="3">
+            <a:schemeClr val="accent1"/>
+          </a:fillRef>
+          <a:effectRef idx="2">
+            <a:schemeClr val="accent1"/>
+          </a:effectRef>
+          <a:fontRef idx="minor">
+            <a:schemeClr val="lt1"/>
+          </a:fontRef>
+        </p:style>
+        <p:txBody>
+          <a:bodyPr rtlCol="0" anchor="ctr"/>
+          <a:lstStyle/>
+          <a:p/>
+        </p:txBody>
+      </p:sp>
+      <p:sp>
+        <p:nvSpPr>
+          <p:cNvPr id="25" name="TextBox 24"/>
+          <p:cNvSpPr txBox="1"/>
+          <p:nvPr/>
+        </p:nvSpPr>
+        <p:spPr>
+          <a:xfrm>
+            <a:off x="868680" y="5646420"/>
+            <a:ext cx="10515600" cy="365760"/>
+          </a:xfrm>
+          <a:prstGeom prst="rect">
+            <a:avLst/>
+          </a:prstGeom>
+          <a:noFill/>
+        </p:spPr>
+        <p:txBody>
+          <a:bodyPr wrap="square" lIns="0" rIns="0" tIns="0" bIns="0">
+            <a:spAutoFit/>
+          </a:bodyPr>
+          <a:lstStyle/>
+          <a:p>
+            <a:pPr algn="l">
+              <a:spcAft>
+                <a:spcPts val="300"/>
+              </a:spcAft>
+            </a:pPr>
+            <a:r>
+              <a:rPr sz="1250" b="1">
+                <a:solidFill>
+                  <a:srgbClr val="4F46E5"/>
+                </a:solidFill>
+                <a:latin typeface="Meiryo"/>
+                <a:ea typeface="Meiryo"/>
+              </a:rPr>
+              <a:t>AI は現時点で日本国内で処理する選択肢が提供されていないため、当面は米国のまま、契約と公表で対応します。</a:t>
+            </a:r>
+          </a:p>
+        </p:txBody>
+      </p:sp>
+    </p:spTree>
+  </p:cSld>
+  <p:clrMapOvr>
+    <a:masterClrMapping/>
+  </p:clrMapOvr>
+</p:sld>
+</file>
+
+<file path=ppt/slides/slide7.xml><?xml version="1.0" encoding="utf-8"?>
+<p:sld xmlns:a="http://schemas.openxmlformats.org/drawingml/2006/main" xmlns:p="http://schemas.openxmlformats.org/presentationml/2006/main" xmlns:r="http://schemas.openxmlformats.org/officeDocument/2006/relationships">
+  <p:cSld>
+    <p:spTree>
+      <p:nvGrpSpPr>
+        <p:cNvPr id="1" name=""/>
+        <p:cNvGrpSpPr/>
+        <p:nvPr/>
+      </p:nvGrpSpPr>
+      <p:grpSpPr/>
+      <p:sp>
+        <p:nvSpPr>
+          <p:cNvPr id="2" name="Rectangle 1"/>
+          <p:cNvSpPr/>
+          <p:nvPr/>
+        </p:nvSpPr>
+        <p:spPr>
+          <a:xfrm>
+            <a:off x="0" y="0"/>
+            <a:ext cx="12191695" cy="868680"/>
+          </a:xfrm>
+          <a:prstGeom prst="rect">
+            <a:avLst/>
+          </a:prstGeom>
+          <a:solidFill>
+            <a:srgbClr val="1E2761"/>
+          </a:solidFill>
+          <a:ln>
+            <a:noFill/>
+          </a:ln>
+          <a:effectLst/>
+        </p:spPr>
+        <p:style>
+          <a:lnRef idx="1">
+            <a:schemeClr val="accent1"/>
+          </a:lnRef>
+          <a:fillRef idx="3">
+            <a:schemeClr val="accent1"/>
+          </a:fillRef>
+          <a:effectRef idx="2">
+            <a:schemeClr val="accent1"/>
+          </a:effectRef>
+          <a:fontRef idx="minor">
+            <a:schemeClr val="lt1"/>
+          </a:fontRef>
+        </p:style>
+        <p:txBody>
+          <a:bodyPr rtlCol="0" anchor="ctr"/>
+          <a:lstStyle/>
+          <a:p/>
+        </p:txBody>
+      </p:sp>
+      <p:sp>
+        <p:nvSpPr>
+          <p:cNvPr id="3" name="TextBox 2"/>
+          <p:cNvSpPr txBox="1"/>
+          <p:nvPr/>
+        </p:nvSpPr>
+        <p:spPr>
+          <a:xfrm>
+            <a:off x="566928" y="237744"/>
+            <a:ext cx="8686800" cy="411480"/>
+          </a:xfrm>
+          <a:prstGeom prst="rect">
+            <a:avLst/>
+          </a:prstGeom>
+          <a:noFill/>
+        </p:spPr>
+        <p:txBody>
+          <a:bodyPr wrap="square" lIns="0" rIns="0" tIns="0" bIns="0">
+            <a:spAutoFit/>
+          </a:bodyPr>
+          <a:lstStyle/>
+          <a:p>
+            <a:pPr algn="l"/>
+            <a:r>
+              <a:rPr sz="2200" b="1">
+                <a:solidFill>
+                  <a:srgbClr val="FFFFFF"/>
+                </a:solidFill>
+                <a:latin typeface="Meiryo"/>
+                <a:ea typeface="Meiryo"/>
+              </a:rPr>
+              <a:t>個人情報保護法への対応</a:t>
+            </a:r>
+          </a:p>
+        </p:txBody>
+      </p:sp>
+      <p:sp>
+        <p:nvSpPr>
+          <p:cNvPr id="4" name="TextBox 3"/>
+          <p:cNvSpPr txBox="1"/>
+          <p:nvPr/>
+        </p:nvSpPr>
+        <p:spPr>
+          <a:xfrm>
+            <a:off x="566928" y="1024128"/>
+            <a:ext cx="11064240" cy="365760"/>
+          </a:xfrm>
+          <a:prstGeom prst="rect">
+            <a:avLst/>
+          </a:prstGeom>
+          <a:noFill/>
+        </p:spPr>
+        <p:txBody>
+          <a:bodyPr wrap="square" lIns="0" rIns="0" tIns="0" bIns="0">
+            <a:spAutoFit/>
+          </a:bodyPr>
+          <a:lstStyle/>
+          <a:p>
+            <a:pPr algn="l"/>
+            <a:r>
+              <a:rPr sz="1250" b="0">
+                <a:solidFill>
+                  <a:srgbClr val="6B7280"/>
+                </a:solidFill>
+                <a:latin typeface="Meiryo"/>
+                <a:ea typeface="Meiryo"/>
+              </a:rPr>
+              <a:t>外国の事業者に個人データを預ける場合、本人の同意または「体制の確認と公表」が必要です（法第28条）。</a:t>
             </a:r>
           </a:p>
         </p:txBody>
@@ -8846,12 +10558,12 @@
         </p:nvSpPr>
         <p:spPr>
           <a:xfrm>
-            <a:off x="566928" y="1572768"/>
-            <a:ext cx="5394960" cy="2788920"/>
+            <a:off x="566928" y="1600200"/>
+            <a:ext cx="3529584" cy="3200400"/>
           </a:xfrm>
           <a:prstGeom prst="roundRect">
             <a:avLst>
-              <a:gd name="adj" fmla="val 6000"/>
+              <a:gd name="adj" fmla="val 3500"/>
             </a:avLst>
           </a:prstGeom>
           <a:solidFill>
@@ -8881,63 +10593,19 @@
         <p:txBody>
           <a:bodyPr rtlCol="0" anchor="ctr"/>
           <a:lstStyle/>
-          <a:p>
-            <a:endParaRPr/>
-          </a:p>
-        </p:txBody>
-      </p:sp>
-      <p:sp>
-        <p:nvSpPr>
-          <p:cNvPr id="6" name="TextBox 5"/>
-          <p:cNvSpPr txBox="1"/>
-          <p:nvPr/>
-        </p:nvSpPr>
-        <p:spPr>
-          <a:xfrm>
-            <a:off x="841248" y="1810512"/>
-            <a:ext cx="4846320" cy="320040"/>
-          </a:xfrm>
-          <a:prstGeom prst="rect">
-            <a:avLst/>
-          </a:prstGeom>
-          <a:noFill/>
-        </p:spPr>
-        <p:txBody>
-          <a:bodyPr wrap="square" lIns="0" tIns="0" rIns="0" bIns="0" anchor="t">
-            <a:spAutoFit/>
-          </a:bodyPr>
-          <a:lstStyle/>
-          <a:p>
-            <a:pPr algn="l">
-              <a:lnSpc>
-                <a:spcPct val="130000"/>
-              </a:lnSpc>
-              <a:spcAft>
-                <a:spcPts val="400"/>
-              </a:spcAft>
-            </a:pPr>
-            <a:r>
-              <a:rPr sz="1350" b="1">
-                <a:solidFill>
-                  <a:srgbClr val="141A33"/>
-                </a:solidFill>
-                <a:latin typeface="Meiryo"/>
-              </a:rPr>
-              <a:t>AI・OCR 利用料（月300回・1回1,000文字）</a:t>
-            </a:r>
-          </a:p>
-        </p:txBody>
-      </p:sp>
-      <p:sp>
-        <p:nvSpPr>
-          <p:cNvPr id="7" name="Rectangle 6"/>
+          <a:p/>
+        </p:txBody>
+      </p:sp>
+      <p:sp>
+        <p:nvSpPr>
+          <p:cNvPr id="6" name="Rectangle 5"/>
           <p:cNvSpPr/>
           <p:nvPr/>
         </p:nvSpPr>
         <p:spPr>
           <a:xfrm>
-            <a:off x="841248" y="2231136"/>
-            <a:ext cx="457200" cy="36576"/>
+            <a:off x="566928" y="1600200"/>
+            <a:ext cx="3529584" cy="82296"/>
           </a:xfrm>
           <a:prstGeom prst="rect">
             <a:avLst/>
@@ -8967,8 +10635,42 @@
         <p:txBody>
           <a:bodyPr rtlCol="0" anchor="ctr"/>
           <a:lstStyle/>
-          <a:p>
-            <a:endParaRPr/>
+          <a:p/>
+        </p:txBody>
+      </p:sp>
+      <p:sp>
+        <p:nvSpPr>
+          <p:cNvPr id="7" name="TextBox 6"/>
+          <p:cNvSpPr txBox="1"/>
+          <p:nvPr/>
+        </p:nvSpPr>
+        <p:spPr>
+          <a:xfrm>
+            <a:off x="859536" y="1938528"/>
+            <a:ext cx="3017520" cy="365760"/>
+          </a:xfrm>
+          <a:prstGeom prst="rect">
+            <a:avLst/>
+          </a:prstGeom>
+          <a:noFill/>
+        </p:spPr>
+        <p:txBody>
+          <a:bodyPr wrap="square" lIns="0" rIns="0" tIns="0" bIns="0">
+            <a:spAutoFit/>
+          </a:bodyPr>
+          <a:lstStyle/>
+          <a:p>
+            <a:pPr algn="l"/>
+            <a:r>
+              <a:rPr sz="1100" b="1">
+                <a:solidFill>
+                  <a:srgbClr val="4F46E5"/>
+                </a:solidFill>
+                <a:latin typeface="Meiryo"/>
+                <a:ea typeface="Meiryo"/>
+              </a:rPr>
+              <a:t>01</a:t>
+            </a:r>
           </a:p>
         </p:txBody>
       </p:sp>
@@ -8980,434 +10682,156 @@
         </p:nvSpPr>
         <p:spPr>
           <a:xfrm>
-            <a:off x="841248" y="2487168"/>
-            <a:ext cx="2194560" cy="320040"/>
-          </a:xfrm>
-          <a:prstGeom prst="rect">
-            <a:avLst/>
-          </a:prstGeom>
-          <a:noFill/>
-        </p:spPr>
-        <p:txBody>
-          <a:bodyPr wrap="square" lIns="0" tIns="0" rIns="0" bIns="0" anchor="t">
-            <a:spAutoFit/>
-          </a:bodyPr>
-          <a:lstStyle/>
-          <a:p>
-            <a:pPr algn="l">
-              <a:lnSpc>
-                <a:spcPct val="130000"/>
-              </a:lnSpc>
-              <a:spcAft>
-                <a:spcPts val="400"/>
-              </a:spcAft>
-            </a:pPr>
-            <a:r>
-              <a:rPr sz="1200" b="0">
+            <a:off x="859536" y="2304288"/>
+            <a:ext cx="3017520" cy="411480"/>
+          </a:xfrm>
+          <a:prstGeom prst="rect">
+            <a:avLst/>
+          </a:prstGeom>
+          <a:noFill/>
+        </p:spPr>
+        <p:txBody>
+          <a:bodyPr wrap="square" lIns="0" rIns="0" tIns="0" bIns="0">
+            <a:spAutoFit/>
+          </a:bodyPr>
+          <a:lstStyle/>
+          <a:p>
+            <a:pPr algn="l"/>
+            <a:r>
+              <a:rPr sz="1500" b="1">
+                <a:solidFill>
+                  <a:srgbClr val="141A33"/>
+                </a:solidFill>
+                <a:latin typeface="Meiryo"/>
+                <a:ea typeface="Meiryo"/>
+              </a:rPr>
+              <a:t>国内へ移す</a:t>
+            </a:r>
+          </a:p>
+        </p:txBody>
+      </p:sp>
+      <p:sp>
+        <p:nvSpPr>
+          <p:cNvPr id="9" name="TextBox 8"/>
+          <p:cNvSpPr txBox="1"/>
+          <p:nvPr/>
+        </p:nvSpPr>
+        <p:spPr>
+          <a:xfrm>
+            <a:off x="859536" y="2889504"/>
+            <a:ext cx="3017520" cy="1828800"/>
+          </a:xfrm>
+          <a:prstGeom prst="rect">
+            <a:avLst/>
+          </a:prstGeom>
+          <a:noFill/>
+        </p:spPr>
+        <p:txBody>
+          <a:bodyPr wrap="square" lIns="0" rIns="0" tIns="0" bIns="0">
+            <a:spAutoFit/>
+          </a:bodyPr>
+          <a:lstStyle/>
+          <a:p>
+            <a:pPr algn="l">
+              <a:spcAft>
+                <a:spcPts val="200"/>
+              </a:spcAft>
+            </a:pPr>
+            <a:r>
+              <a:rPr sz="1150" b="0">
                 <a:solidFill>
                   <a:srgbClr val="6B7280"/>
                 </a:solidFill>
                 <a:latin typeface="Meiryo"/>
-              </a:rPr>
-              <a:t>読み取り（入力）</a:t>
-            </a:r>
-          </a:p>
-        </p:txBody>
-      </p:sp>
-      <p:sp>
-        <p:nvSpPr>
-          <p:cNvPr id="9" name="TextBox 8"/>
-          <p:cNvSpPr txBox="1"/>
-          <p:nvPr/>
-        </p:nvSpPr>
-        <p:spPr>
-          <a:xfrm>
-            <a:off x="3154680" y="2487168"/>
-            <a:ext cx="1554480" cy="320040"/>
-          </a:xfrm>
-          <a:prstGeom prst="rect">
-            <a:avLst/>
-          </a:prstGeom>
-          <a:noFill/>
-        </p:spPr>
-        <p:txBody>
-          <a:bodyPr wrap="square" lIns="0" tIns="0" rIns="0" bIns="0" anchor="t">
-            <a:spAutoFit/>
-          </a:bodyPr>
-          <a:lstStyle/>
-          <a:p>
-            <a:pPr algn="l">
-              <a:lnSpc>
-                <a:spcPct val="130000"/>
-              </a:lnSpc>
-              <a:spcAft>
-                <a:spcPts val="400"/>
-              </a:spcAft>
-            </a:pPr>
-            <a:r>
-              <a:rPr sz="1200" b="0">
+                <a:ea typeface="Meiryo"/>
+              </a:rPr>
+              <a:t>データベースと添付ファイルを</a:t>
+            </a:r>
+          </a:p>
+          <a:p>
+            <a:pPr algn="l">
+              <a:spcAft>
+                <a:spcPts val="200"/>
+              </a:spcAft>
+            </a:pPr>
+            <a:r>
+              <a:rPr sz="1150" b="0">
                 <a:solidFill>
                   <a:srgbClr val="6B7280"/>
                 </a:solidFill>
                 <a:latin typeface="Meiryo"/>
-              </a:rPr>
-              <a:t>約90万トークン</a:t>
-            </a:r>
-          </a:p>
-        </p:txBody>
-      </p:sp>
-      <p:sp>
-        <p:nvSpPr>
-          <p:cNvPr id="10" name="TextBox 9"/>
-          <p:cNvSpPr txBox="1"/>
-          <p:nvPr/>
-        </p:nvSpPr>
-        <p:spPr>
-          <a:xfrm>
-            <a:off x="4663440" y="2487168"/>
-            <a:ext cx="1097280" cy="320040"/>
-          </a:xfrm>
-          <a:prstGeom prst="rect">
-            <a:avLst/>
-          </a:prstGeom>
-          <a:noFill/>
-        </p:spPr>
-        <p:txBody>
-          <a:bodyPr wrap="square" lIns="0" tIns="0" rIns="0" bIns="0" anchor="t">
-            <a:spAutoFit/>
-          </a:bodyPr>
-          <a:lstStyle/>
-          <a:p>
-            <a:pPr algn="r">
-              <a:lnSpc>
-                <a:spcPct val="130000"/>
-              </a:lnSpc>
-              <a:spcAft>
-                <a:spcPts val="400"/>
-              </a:spcAft>
-            </a:pPr>
-            <a:r>
-              <a:rPr sz="1200" b="0">
-                <a:solidFill>
-                  <a:srgbClr val="141A33"/>
-                </a:solidFill>
-                <a:latin typeface="Meiryo"/>
-              </a:rPr>
-              <a:t>約 700円</a:t>
-            </a:r>
-          </a:p>
-        </p:txBody>
-      </p:sp>
-      <p:sp>
-        <p:nvSpPr>
-          <p:cNvPr id="11" name="TextBox 10"/>
-          <p:cNvSpPr txBox="1"/>
-          <p:nvPr/>
-        </p:nvSpPr>
-        <p:spPr>
-          <a:xfrm>
-            <a:off x="841248" y="2944368"/>
-            <a:ext cx="2194560" cy="320040"/>
-          </a:xfrm>
-          <a:prstGeom prst="rect">
-            <a:avLst/>
-          </a:prstGeom>
-          <a:noFill/>
-        </p:spPr>
-        <p:txBody>
-          <a:bodyPr wrap="square" lIns="0" tIns="0" rIns="0" bIns="0" anchor="t">
-            <a:spAutoFit/>
-          </a:bodyPr>
-          <a:lstStyle/>
-          <a:p>
-            <a:pPr algn="l">
-              <a:lnSpc>
-                <a:spcPct val="130000"/>
-              </a:lnSpc>
-              <a:spcAft>
-                <a:spcPts val="400"/>
-              </a:spcAft>
-            </a:pPr>
-            <a:r>
-              <a:rPr sz="1200" b="0">
+                <a:ea typeface="Meiryo"/>
+              </a:rPr>
+              <a:t>東京リージョンへ移します。</a:t>
+            </a:r>
+          </a:p>
+          <a:p>
+            <a:pPr algn="l">
+              <a:spcAft>
+                <a:spcPts val="200"/>
+              </a:spcAft>
+            </a:pPr>
+            <a:r>
+              <a:rPr sz="1150" b="0">
                 <a:solidFill>
                   <a:srgbClr val="6B7280"/>
                 </a:solidFill>
                 <a:latin typeface="Meiryo"/>
-              </a:rPr>
-              <a:t>生成（出力）</a:t>
-            </a:r>
-          </a:p>
-        </p:txBody>
-      </p:sp>
-      <p:sp>
-        <p:nvSpPr>
-          <p:cNvPr id="12" name="TextBox 11"/>
-          <p:cNvSpPr txBox="1"/>
-          <p:nvPr/>
-        </p:nvSpPr>
-        <p:spPr>
-          <a:xfrm>
-            <a:off x="3154680" y="2944368"/>
-            <a:ext cx="1554480" cy="320040"/>
-          </a:xfrm>
-          <a:prstGeom prst="rect">
-            <a:avLst/>
-          </a:prstGeom>
-          <a:noFill/>
-        </p:spPr>
-        <p:txBody>
-          <a:bodyPr wrap="square" lIns="0" tIns="0" rIns="0" bIns="0" anchor="t">
-            <a:spAutoFit/>
-          </a:bodyPr>
-          <a:lstStyle/>
-          <a:p>
-            <a:pPr algn="l">
-              <a:lnSpc>
-                <a:spcPct val="130000"/>
-              </a:lnSpc>
-              <a:spcAft>
-                <a:spcPts val="400"/>
-              </a:spcAft>
-            </a:pPr>
-            <a:r>
-              <a:rPr sz="1200" b="0">
+                <a:ea typeface="Meiryo"/>
+              </a:rPr>
+              <a:t/>
+            </a:r>
+          </a:p>
+          <a:p>
+            <a:pPr algn="l">
+              <a:spcAft>
+                <a:spcPts val="200"/>
+              </a:spcAft>
+            </a:pPr>
+            <a:r>
+              <a:rPr sz="1150" b="0">
                 <a:solidFill>
                   <a:srgbClr val="6B7280"/>
                 </a:solidFill>
                 <a:latin typeface="Meiryo"/>
-              </a:rPr>
-              <a:t>約45万トークン</a:t>
-            </a:r>
-          </a:p>
-        </p:txBody>
-      </p:sp>
-      <p:sp>
-        <p:nvSpPr>
-          <p:cNvPr id="13" name="TextBox 12"/>
-          <p:cNvSpPr txBox="1"/>
-          <p:nvPr/>
-        </p:nvSpPr>
-        <p:spPr>
-          <a:xfrm>
-            <a:off x="4663440" y="2944368"/>
-            <a:ext cx="1097280" cy="320040"/>
-          </a:xfrm>
-          <a:prstGeom prst="rect">
-            <a:avLst/>
-          </a:prstGeom>
-          <a:noFill/>
-        </p:spPr>
-        <p:txBody>
-          <a:bodyPr wrap="square" lIns="0" tIns="0" rIns="0" bIns="0" anchor="t">
-            <a:spAutoFit/>
-          </a:bodyPr>
-          <a:lstStyle/>
-          <a:p>
-            <a:pPr algn="r">
-              <a:lnSpc>
-                <a:spcPct val="130000"/>
-              </a:lnSpc>
-              <a:spcAft>
-                <a:spcPts val="400"/>
-              </a:spcAft>
-            </a:pPr>
-            <a:r>
-              <a:rPr sz="1200" b="0">
-                <a:solidFill>
-                  <a:srgbClr val="141A33"/>
-                </a:solidFill>
-                <a:latin typeface="Meiryo"/>
-              </a:rPr>
-              <a:t>約 1,800円</a:t>
-            </a:r>
-          </a:p>
-        </p:txBody>
-      </p:sp>
-      <p:sp>
-        <p:nvSpPr>
-          <p:cNvPr id="14" name="Rectangle 13"/>
+                <a:ea typeface="Meiryo"/>
+              </a:rPr>
+              <a:t>全案件のデータが国内保管に</a:t>
+            </a:r>
+          </a:p>
+          <a:p>
+            <a:pPr algn="l">
+              <a:spcAft>
+                <a:spcPts val="200"/>
+              </a:spcAft>
+            </a:pPr>
+            <a:r>
+              <a:rPr sz="1150" b="0">
+                <a:solidFill>
+                  <a:srgbClr val="6B7280"/>
+                </a:solidFill>
+                <a:latin typeface="Meiryo"/>
+                <a:ea typeface="Meiryo"/>
+              </a:rPr>
+              <a:t>なります。2026年8月中に実施。</a:t>
+            </a:r>
+          </a:p>
+        </p:txBody>
+      </p:sp>
+      <p:sp>
+        <p:nvSpPr>
+          <p:cNvPr id="10" name="Rounded Rectangle 9"/>
           <p:cNvSpPr/>
           <p:nvPr/>
         </p:nvSpPr>
         <p:spPr>
           <a:xfrm>
-            <a:off x="841248" y="3456432"/>
-            <a:ext cx="4846320" cy="18288"/>
-          </a:xfrm>
-          <a:prstGeom prst="rect">
-            <a:avLst/>
-          </a:prstGeom>
-          <a:solidFill>
-            <a:srgbClr val="C7CDD8"/>
-          </a:solidFill>
-          <a:ln>
-            <a:noFill/>
-          </a:ln>
-          <a:effectLst/>
-        </p:spPr>
-        <p:style>
-          <a:lnRef idx="1">
-            <a:schemeClr val="accent1"/>
-          </a:lnRef>
-          <a:fillRef idx="3">
-            <a:schemeClr val="accent1"/>
-          </a:fillRef>
-          <a:effectRef idx="2">
-            <a:schemeClr val="accent1"/>
-          </a:effectRef>
-          <a:fontRef idx="minor">
-            <a:schemeClr val="lt1"/>
-          </a:fontRef>
-        </p:style>
-        <p:txBody>
-          <a:bodyPr rtlCol="0" anchor="ctr"/>
-          <a:lstStyle/>
-          <a:p>
-            <a:endParaRPr/>
-          </a:p>
-        </p:txBody>
-      </p:sp>
-      <p:sp>
-        <p:nvSpPr>
-          <p:cNvPr id="15" name="TextBox 14"/>
-          <p:cNvSpPr txBox="1"/>
-          <p:nvPr/>
-        </p:nvSpPr>
-        <p:spPr>
-          <a:xfrm>
-            <a:off x="841248" y="3611880"/>
-            <a:ext cx="2194560" cy="365760"/>
-          </a:xfrm>
-          <a:prstGeom prst="rect">
-            <a:avLst/>
-          </a:prstGeom>
-          <a:noFill/>
-        </p:spPr>
-        <p:txBody>
-          <a:bodyPr wrap="square" lIns="0" tIns="0" rIns="0" bIns="0" anchor="t">
-            <a:spAutoFit/>
-          </a:bodyPr>
-          <a:lstStyle/>
-          <a:p>
-            <a:pPr algn="l">
-              <a:lnSpc>
-                <a:spcPct val="130000"/>
-              </a:lnSpc>
-              <a:spcAft>
-                <a:spcPts val="400"/>
-              </a:spcAft>
-            </a:pPr>
-            <a:r>
-              <a:rPr sz="1300" b="1">
-                <a:solidFill>
-                  <a:srgbClr val="141A33"/>
-                </a:solidFill>
-                <a:latin typeface="Meiryo"/>
-              </a:rPr>
-              <a:t>月額 合計</a:t>
-            </a:r>
-          </a:p>
-        </p:txBody>
-      </p:sp>
-      <p:sp>
-        <p:nvSpPr>
-          <p:cNvPr id="16" name="TextBox 15"/>
-          <p:cNvSpPr txBox="1"/>
-          <p:nvPr/>
-        </p:nvSpPr>
-        <p:spPr>
-          <a:xfrm>
-            <a:off x="3566160" y="3547872"/>
-            <a:ext cx="2194560" cy="457200"/>
-          </a:xfrm>
-          <a:prstGeom prst="rect">
-            <a:avLst/>
-          </a:prstGeom>
-          <a:noFill/>
-        </p:spPr>
-        <p:txBody>
-          <a:bodyPr wrap="square" lIns="0" tIns="0" rIns="0" bIns="0" anchor="t">
-            <a:spAutoFit/>
-          </a:bodyPr>
-          <a:lstStyle/>
-          <a:p>
-            <a:pPr algn="r">
-              <a:lnSpc>
-                <a:spcPct val="130000"/>
-              </a:lnSpc>
-              <a:spcAft>
-                <a:spcPts val="400"/>
-              </a:spcAft>
-            </a:pPr>
-            <a:r>
-              <a:rPr sz="1900" b="1">
-                <a:solidFill>
-                  <a:srgbClr val="4F46E5"/>
-                </a:solidFill>
-                <a:latin typeface="Meiryo"/>
-              </a:rPr>
-              <a:t>約 2,500円</a:t>
-            </a:r>
-          </a:p>
-        </p:txBody>
-      </p:sp>
-      <p:sp>
-        <p:nvSpPr>
-          <p:cNvPr id="17" name="TextBox 16"/>
-          <p:cNvSpPr txBox="1"/>
-          <p:nvPr/>
-        </p:nvSpPr>
-        <p:spPr>
-          <a:xfrm>
-            <a:off x="841248" y="4041648"/>
-            <a:ext cx="4846320" cy="274320"/>
-          </a:xfrm>
-          <a:prstGeom prst="rect">
-            <a:avLst/>
-          </a:prstGeom>
-          <a:noFill/>
-        </p:spPr>
-        <p:txBody>
-          <a:bodyPr wrap="square" lIns="0" tIns="0" rIns="0" bIns="0" anchor="t">
-            <a:spAutoFit/>
-          </a:bodyPr>
-          <a:lstStyle/>
-          <a:p>
-            <a:pPr algn="l">
-              <a:lnSpc>
-                <a:spcPct val="130000"/>
-              </a:lnSpc>
-              <a:spcAft>
-                <a:spcPts val="400"/>
-              </a:spcAft>
-            </a:pPr>
-            <a:r>
-              <a:rPr sz="1050" b="0">
-                <a:solidFill>
-                  <a:srgbClr val="6B7280"/>
-                </a:solidFill>
-                <a:latin typeface="Meiryo"/>
-              </a:rPr>
-              <a:t>※多く見積もっても月5,000円以内に収まる想定です。</a:t>
-            </a:r>
-          </a:p>
-        </p:txBody>
-      </p:sp>
-      <p:sp>
-        <p:nvSpPr>
-          <p:cNvPr id="18" name="Rounded Rectangle 17"/>
-          <p:cNvSpPr/>
-          <p:nvPr/>
-        </p:nvSpPr>
-        <p:spPr>
-          <a:xfrm>
-            <a:off x="6245352" y="1572768"/>
-            <a:ext cx="5394960" cy="2788920"/>
+            <a:off x="4334256" y="1600200"/>
+            <a:ext cx="3529584" cy="3200400"/>
           </a:xfrm>
           <a:prstGeom prst="roundRect">
             <a:avLst>
-              <a:gd name="adj" fmla="val 6000"/>
+              <a:gd name="adj" fmla="val 3500"/>
             </a:avLst>
           </a:prstGeom>
           <a:solidFill>
@@ -9437,69 +10861,25 @@
         <p:txBody>
           <a:bodyPr rtlCol="0" anchor="ctr"/>
           <a:lstStyle/>
-          <a:p>
-            <a:endParaRPr/>
-          </a:p>
-        </p:txBody>
-      </p:sp>
-      <p:sp>
-        <p:nvSpPr>
-          <p:cNvPr id="19" name="TextBox 18"/>
-          <p:cNvSpPr txBox="1"/>
-          <p:nvPr/>
-        </p:nvSpPr>
-        <p:spPr>
-          <a:xfrm>
-            <a:off x="6519672" y="1810512"/>
-            <a:ext cx="4846320" cy="320040"/>
-          </a:xfrm>
-          <a:prstGeom prst="rect">
-            <a:avLst/>
-          </a:prstGeom>
-          <a:noFill/>
-        </p:spPr>
-        <p:txBody>
-          <a:bodyPr wrap="square" lIns="0" tIns="0" rIns="0" bIns="0" anchor="t">
-            <a:spAutoFit/>
-          </a:bodyPr>
-          <a:lstStyle/>
-          <a:p>
-            <a:pPr algn="l">
-              <a:lnSpc>
-                <a:spcPct val="130000"/>
-              </a:lnSpc>
-              <a:spcAft>
-                <a:spcPts val="400"/>
-              </a:spcAft>
-            </a:pPr>
-            <a:r>
-              <a:rPr sz="1350" b="1">
-                <a:solidFill>
-                  <a:srgbClr val="141A33"/>
-                </a:solidFill>
-                <a:latin typeface="Meiryo"/>
-              </a:rPr>
-              <a:t>システム全体の月額（目安）</a:t>
-            </a:r>
-          </a:p>
-        </p:txBody>
-      </p:sp>
-      <p:sp>
-        <p:nvSpPr>
-          <p:cNvPr id="20" name="Rectangle 19"/>
+          <a:p/>
+        </p:txBody>
+      </p:sp>
+      <p:sp>
+        <p:nvSpPr>
+          <p:cNvPr id="11" name="Rectangle 10"/>
           <p:cNvSpPr/>
           <p:nvPr/>
         </p:nvSpPr>
         <p:spPr>
           <a:xfrm>
-            <a:off x="6519672" y="2231136"/>
-            <a:ext cx="457200" cy="36576"/>
+            <a:off x="4334256" y="1600200"/>
+            <a:ext cx="3529584" cy="82296"/>
           </a:xfrm>
           <a:prstGeom prst="rect">
             <a:avLst/>
           </a:prstGeom>
           <a:solidFill>
-            <a:srgbClr val="1F5E4B"/>
+            <a:srgbClr val="4F46E5"/>
           </a:solidFill>
           <a:ln>
             <a:noFill/>
@@ -9523,703 +10903,186 @@
         <p:txBody>
           <a:bodyPr rtlCol="0" anchor="ctr"/>
           <a:lstStyle/>
-          <a:p>
-            <a:endParaRPr/>
-          </a:p>
-        </p:txBody>
-      </p:sp>
-      <p:sp>
-        <p:nvSpPr>
-          <p:cNvPr id="21" name="TextBox 20"/>
-          <p:cNvSpPr txBox="1"/>
-          <p:nvPr/>
-        </p:nvSpPr>
-        <p:spPr>
-          <a:xfrm>
-            <a:off x="6519672" y="2487168"/>
-            <a:ext cx="3108960" cy="320040"/>
-          </a:xfrm>
-          <a:prstGeom prst="rect">
-            <a:avLst/>
-          </a:prstGeom>
-          <a:noFill/>
-        </p:spPr>
-        <p:txBody>
-          <a:bodyPr wrap="square" lIns="0" tIns="0" rIns="0" bIns="0" anchor="t">
-            <a:spAutoFit/>
-          </a:bodyPr>
-          <a:lstStyle/>
-          <a:p>
-            <a:pPr algn="l">
-              <a:lnSpc>
-                <a:spcPct val="130000"/>
-              </a:lnSpc>
-              <a:spcAft>
-                <a:spcPts val="400"/>
-              </a:spcAft>
-            </a:pPr>
-            <a:r>
-              <a:rPr sz="1200" b="0">
+          <a:p/>
+        </p:txBody>
+      </p:sp>
+      <p:sp>
+        <p:nvSpPr>
+          <p:cNvPr id="12" name="TextBox 11"/>
+          <p:cNvSpPr txBox="1"/>
+          <p:nvPr/>
+        </p:nvSpPr>
+        <p:spPr>
+          <a:xfrm>
+            <a:off x="4626864" y="1938528"/>
+            <a:ext cx="3017520" cy="365760"/>
+          </a:xfrm>
+          <a:prstGeom prst="rect">
+            <a:avLst/>
+          </a:prstGeom>
+          <a:noFill/>
+        </p:spPr>
+        <p:txBody>
+          <a:bodyPr wrap="square" lIns="0" rIns="0" tIns="0" bIns="0">
+            <a:spAutoFit/>
+          </a:bodyPr>
+          <a:lstStyle/>
+          <a:p>
+            <a:pPr algn="l"/>
+            <a:r>
+              <a:rPr sz="1100" b="1">
+                <a:solidFill>
+                  <a:srgbClr val="4F46E5"/>
+                </a:solidFill>
+                <a:latin typeface="Meiryo"/>
+                <a:ea typeface="Meiryo"/>
+              </a:rPr>
+              <a:t>02</a:t>
+            </a:r>
+          </a:p>
+        </p:txBody>
+      </p:sp>
+      <p:sp>
+        <p:nvSpPr>
+          <p:cNvPr id="13" name="TextBox 12"/>
+          <p:cNvSpPr txBox="1"/>
+          <p:nvPr/>
+        </p:nvSpPr>
+        <p:spPr>
+          <a:xfrm>
+            <a:off x="4626864" y="2304288"/>
+            <a:ext cx="3017520" cy="411480"/>
+          </a:xfrm>
+          <a:prstGeom prst="rect">
+            <a:avLst/>
+          </a:prstGeom>
+          <a:noFill/>
+        </p:spPr>
+        <p:txBody>
+          <a:bodyPr wrap="square" lIns="0" rIns="0" tIns="0" bIns="0">
+            <a:spAutoFit/>
+          </a:bodyPr>
+          <a:lstStyle/>
+          <a:p>
+            <a:pPr algn="l"/>
+            <a:r>
+              <a:rPr sz="1500" b="1">
+                <a:solidFill>
+                  <a:srgbClr val="141A33"/>
+                </a:solidFill>
+                <a:latin typeface="Meiryo"/>
+                <a:ea typeface="Meiryo"/>
+              </a:rPr>
+              <a:t>契約を結ぶ</a:t>
+            </a:r>
+          </a:p>
+        </p:txBody>
+      </p:sp>
+      <p:sp>
+        <p:nvSpPr>
+          <p:cNvPr id="14" name="TextBox 13"/>
+          <p:cNvSpPr txBox="1"/>
+          <p:nvPr/>
+        </p:nvSpPr>
+        <p:spPr>
+          <a:xfrm>
+            <a:off x="4626864" y="2889504"/>
+            <a:ext cx="3017520" cy="1828800"/>
+          </a:xfrm>
+          <a:prstGeom prst="rect">
+            <a:avLst/>
+          </a:prstGeom>
+          <a:noFill/>
+        </p:spPr>
+        <p:txBody>
+          <a:bodyPr wrap="square" lIns="0" rIns="0" tIns="0" bIns="0">
+            <a:spAutoFit/>
+          </a:bodyPr>
+          <a:lstStyle/>
+          <a:p>
+            <a:pPr algn="l">
+              <a:spcAft>
+                <a:spcPts val="200"/>
+              </a:spcAft>
+            </a:pPr>
+            <a:r>
+              <a:rPr sz="1150" b="0">
                 <a:solidFill>
                   <a:srgbClr val="6B7280"/>
                 </a:solidFill>
                 <a:latin typeface="Meiryo"/>
-              </a:rPr>
-              <a:t>アプリ本体（Azure）</a:t>
-            </a:r>
-          </a:p>
-        </p:txBody>
-      </p:sp>
-      <p:sp>
-        <p:nvSpPr>
-          <p:cNvPr id="22" name="TextBox 21"/>
-          <p:cNvSpPr txBox="1"/>
-          <p:nvPr/>
-        </p:nvSpPr>
-        <p:spPr>
-          <a:xfrm>
-            <a:off x="9601200" y="2487168"/>
-            <a:ext cx="1737360" cy="320040"/>
-          </a:xfrm>
-          <a:prstGeom prst="rect">
-            <a:avLst/>
-          </a:prstGeom>
-          <a:noFill/>
-        </p:spPr>
-        <p:txBody>
-          <a:bodyPr wrap="square" lIns="0" tIns="0" rIns="0" bIns="0" anchor="t">
-            <a:spAutoFit/>
-          </a:bodyPr>
-          <a:lstStyle/>
-          <a:p>
-            <a:pPr algn="r">
-              <a:lnSpc>
-                <a:spcPct val="130000"/>
-              </a:lnSpc>
-              <a:spcAft>
-                <a:spcPts val="400"/>
-              </a:spcAft>
-            </a:pPr>
-            <a:r>
-              <a:rPr sz="1200" b="0">
-                <a:solidFill>
-                  <a:srgbClr val="141A33"/>
-                </a:solidFill>
-                <a:latin typeface="Meiryo"/>
-              </a:rPr>
-              <a:t>3,000 〜 13,000円</a:t>
-            </a:r>
-          </a:p>
-        </p:txBody>
-      </p:sp>
-      <p:sp>
-        <p:nvSpPr>
-          <p:cNvPr id="23" name="TextBox 22"/>
-          <p:cNvSpPr txBox="1"/>
-          <p:nvPr/>
-        </p:nvSpPr>
-        <p:spPr>
-          <a:xfrm>
-            <a:off x="6519672" y="2944368"/>
-            <a:ext cx="3108960" cy="320040"/>
-          </a:xfrm>
-          <a:prstGeom prst="rect">
-            <a:avLst/>
-          </a:prstGeom>
-          <a:noFill/>
-        </p:spPr>
-        <p:txBody>
-          <a:bodyPr wrap="square" lIns="0" tIns="0" rIns="0" bIns="0" anchor="t">
-            <a:spAutoFit/>
-          </a:bodyPr>
-          <a:lstStyle/>
-          <a:p>
-            <a:pPr algn="l">
-              <a:lnSpc>
-                <a:spcPct val="130000"/>
-              </a:lnSpc>
-              <a:spcAft>
-                <a:spcPts val="400"/>
-              </a:spcAft>
-            </a:pPr>
-            <a:r>
-              <a:rPr sz="1200" b="0">
+                <a:ea typeface="Meiryo"/>
+              </a:rPr>
+              <a:t>各委託先との間でデータの</a:t>
+            </a:r>
+          </a:p>
+          <a:p>
+            <a:pPr algn="l">
+              <a:spcAft>
+                <a:spcPts val="200"/>
+              </a:spcAft>
+            </a:pPr>
+            <a:r>
+              <a:rPr sz="1150" b="0">
                 <a:solidFill>
                   <a:srgbClr val="6B7280"/>
                 </a:solidFill>
                 <a:latin typeface="Meiryo"/>
-              </a:rPr>
-              <a:t>AI・OCR（Claude）</a:t>
-            </a:r>
-          </a:p>
-        </p:txBody>
-      </p:sp>
-      <p:sp>
-        <p:nvSpPr>
-          <p:cNvPr id="24" name="TextBox 23"/>
-          <p:cNvSpPr txBox="1"/>
-          <p:nvPr/>
-        </p:nvSpPr>
-        <p:spPr>
-          <a:xfrm>
-            <a:off x="9601200" y="2944368"/>
-            <a:ext cx="1737360" cy="320040"/>
-          </a:xfrm>
-          <a:prstGeom prst="rect">
-            <a:avLst/>
-          </a:prstGeom>
-          <a:noFill/>
-        </p:spPr>
-        <p:txBody>
-          <a:bodyPr wrap="square" lIns="0" tIns="0" rIns="0" bIns="0" anchor="t">
-            <a:spAutoFit/>
-          </a:bodyPr>
-          <a:lstStyle/>
-          <a:p>
-            <a:pPr algn="r">
-              <a:lnSpc>
-                <a:spcPct val="130000"/>
-              </a:lnSpc>
-              <a:spcAft>
-                <a:spcPts val="400"/>
-              </a:spcAft>
-            </a:pPr>
-            <a:r>
-              <a:rPr sz="1200" b="0">
-                <a:solidFill>
-                  <a:srgbClr val="141A33"/>
-                </a:solidFill>
-                <a:latin typeface="Meiryo"/>
-              </a:rPr>
-              <a:t>約 2,500円</a:t>
-            </a:r>
-          </a:p>
-        </p:txBody>
-      </p:sp>
-      <p:sp>
-        <p:nvSpPr>
-          <p:cNvPr id="25" name="TextBox 24"/>
-          <p:cNvSpPr txBox="1"/>
-          <p:nvPr/>
-        </p:nvSpPr>
-        <p:spPr>
-          <a:xfrm>
-            <a:off x="6519672" y="3401568"/>
-            <a:ext cx="3108960" cy="320040"/>
-          </a:xfrm>
-          <a:prstGeom prst="rect">
-            <a:avLst/>
-          </a:prstGeom>
-          <a:noFill/>
-        </p:spPr>
-        <p:txBody>
-          <a:bodyPr wrap="square" lIns="0" tIns="0" rIns="0" bIns="0" anchor="t">
-            <a:spAutoFit/>
-          </a:bodyPr>
-          <a:lstStyle/>
-          <a:p>
-            <a:pPr algn="l">
-              <a:lnSpc>
-                <a:spcPct val="130000"/>
-              </a:lnSpc>
-              <a:spcAft>
-                <a:spcPts val="400"/>
-              </a:spcAft>
-            </a:pPr>
-            <a:r>
-              <a:rPr sz="1200" b="0">
+                <a:ea typeface="Meiryo"/>
+              </a:rPr>
+              <a:t>取扱いに関する契約を締結し、</a:t>
+            </a:r>
+          </a:p>
+          <a:p>
+            <a:pPr algn="l">
+              <a:spcAft>
+                <a:spcPts val="200"/>
+              </a:spcAft>
+            </a:pPr>
+            <a:r>
+              <a:rPr sz="1150" b="0">
                 <a:solidFill>
                   <a:srgbClr val="6B7280"/>
                 </a:solidFill>
                 <a:latin typeface="Meiryo"/>
-              </a:rPr>
-              <a:t>データベース（Supabase）</a:t>
-            </a:r>
-          </a:p>
-        </p:txBody>
-      </p:sp>
-      <p:sp>
-        <p:nvSpPr>
-          <p:cNvPr id="26" name="TextBox 25"/>
-          <p:cNvSpPr txBox="1"/>
-          <p:nvPr/>
-        </p:nvSpPr>
-        <p:spPr>
-          <a:xfrm>
-            <a:off x="9601200" y="3401568"/>
-            <a:ext cx="1737360" cy="320040"/>
-          </a:xfrm>
-          <a:prstGeom prst="rect">
-            <a:avLst/>
-          </a:prstGeom>
-          <a:noFill/>
-        </p:spPr>
-        <p:txBody>
-          <a:bodyPr wrap="square" lIns="0" tIns="0" rIns="0" bIns="0" anchor="t">
-            <a:spAutoFit/>
-          </a:bodyPr>
-          <a:lstStyle/>
-          <a:p>
-            <a:pPr algn="r">
-              <a:lnSpc>
-                <a:spcPct val="130000"/>
-              </a:lnSpc>
-              <a:spcAft>
-                <a:spcPts val="400"/>
-              </a:spcAft>
-            </a:pPr>
-            <a:r>
-              <a:rPr sz="1200" b="0">
-                <a:solidFill>
-                  <a:srgbClr val="141A33"/>
-                </a:solidFill>
-                <a:latin typeface="Meiryo"/>
-              </a:rPr>
-              <a:t>約 4,000円</a:t>
-            </a:r>
-          </a:p>
-        </p:txBody>
-      </p:sp>
-      <p:sp>
-        <p:nvSpPr>
-          <p:cNvPr id="27" name="Rectangle 26"/>
+                <a:ea typeface="Meiryo"/>
+              </a:rPr>
+              <a:t/>
+            </a:r>
+          </a:p>
+          <a:p>
+            <a:pPr algn="l">
+              <a:spcAft>
+                <a:spcPts val="200"/>
+              </a:spcAft>
+            </a:pPr>
+            <a:r>
+              <a:rPr sz="1150" b="0">
+                <a:solidFill>
+                  <a:srgbClr val="6B7280"/>
+                </a:solidFill>
+                <a:latin typeface="Meiryo"/>
+                <a:ea typeface="Meiryo"/>
+              </a:rPr>
+              <a:t>安全管理措置を確認します。</a:t>
+            </a:r>
+          </a:p>
+        </p:txBody>
+      </p:sp>
+      <p:sp>
+        <p:nvSpPr>
+          <p:cNvPr id="15" name="Rounded Rectangle 14"/>
           <p:cNvSpPr/>
           <p:nvPr/>
         </p:nvSpPr>
         <p:spPr>
           <a:xfrm>
-            <a:off x="6519672" y="3858768"/>
-            <a:ext cx="4846320" cy="18288"/>
-          </a:xfrm>
-          <a:prstGeom prst="rect">
-            <a:avLst/>
-          </a:prstGeom>
-          <a:solidFill>
-            <a:srgbClr val="C7CDD8"/>
-          </a:solidFill>
-          <a:ln>
-            <a:noFill/>
-          </a:ln>
-          <a:effectLst/>
-        </p:spPr>
-        <p:style>
-          <a:lnRef idx="1">
-            <a:schemeClr val="accent1"/>
-          </a:lnRef>
-          <a:fillRef idx="3">
-            <a:schemeClr val="accent1"/>
-          </a:fillRef>
-          <a:effectRef idx="2">
-            <a:schemeClr val="accent1"/>
-          </a:effectRef>
-          <a:fontRef idx="minor">
-            <a:schemeClr val="lt1"/>
-          </a:fontRef>
-        </p:style>
-        <p:txBody>
-          <a:bodyPr rtlCol="0" anchor="ctr"/>
-          <a:lstStyle/>
-          <a:p>
-            <a:endParaRPr/>
-          </a:p>
-        </p:txBody>
-      </p:sp>
-      <p:sp>
-        <p:nvSpPr>
-          <p:cNvPr id="28" name="TextBox 27"/>
-          <p:cNvSpPr txBox="1"/>
-          <p:nvPr/>
-        </p:nvSpPr>
-        <p:spPr>
-          <a:xfrm>
-            <a:off x="6519672" y="4005072"/>
-            <a:ext cx="2194560" cy="365760"/>
-          </a:xfrm>
-          <a:prstGeom prst="rect">
-            <a:avLst/>
-          </a:prstGeom>
-          <a:noFill/>
-        </p:spPr>
-        <p:txBody>
-          <a:bodyPr wrap="square" lIns="0" tIns="0" rIns="0" bIns="0" anchor="t">
-            <a:spAutoFit/>
-          </a:bodyPr>
-          <a:lstStyle/>
-          <a:p>
-            <a:pPr algn="l">
-              <a:lnSpc>
-                <a:spcPct val="130000"/>
-              </a:lnSpc>
-              <a:spcAft>
-                <a:spcPts val="400"/>
-              </a:spcAft>
-            </a:pPr>
-            <a:r>
-              <a:rPr sz="1300" b="1">
-                <a:solidFill>
-                  <a:srgbClr val="141A33"/>
-                </a:solidFill>
-                <a:latin typeface="Meiryo"/>
-              </a:rPr>
-              <a:t>月額 合計</a:t>
-            </a:r>
-          </a:p>
-        </p:txBody>
-      </p:sp>
-      <p:sp>
-        <p:nvSpPr>
-          <p:cNvPr id="29" name="TextBox 28"/>
-          <p:cNvSpPr txBox="1"/>
-          <p:nvPr/>
-        </p:nvSpPr>
-        <p:spPr>
-          <a:xfrm>
-            <a:off x="8595360" y="3931920"/>
-            <a:ext cx="2743200" cy="457200"/>
-          </a:xfrm>
-          <a:prstGeom prst="rect">
-            <a:avLst/>
-          </a:prstGeom>
-          <a:noFill/>
-        </p:spPr>
-        <p:txBody>
-          <a:bodyPr wrap="square" lIns="0" tIns="0" rIns="0" bIns="0" anchor="t">
-            <a:spAutoFit/>
-          </a:bodyPr>
-          <a:lstStyle/>
-          <a:p>
-            <a:pPr algn="r">
-              <a:lnSpc>
-                <a:spcPct val="130000"/>
-              </a:lnSpc>
-              <a:spcAft>
-                <a:spcPts val="400"/>
-              </a:spcAft>
-            </a:pPr>
-            <a:r>
-              <a:rPr sz="1900" b="1">
-                <a:solidFill>
-                  <a:srgbClr val="1F5E4B"/>
-                </a:solidFill>
-                <a:latin typeface="Meiryo"/>
-              </a:rPr>
-              <a:t>約 1万 〜 2万円</a:t>
-            </a:r>
-          </a:p>
-        </p:txBody>
-      </p:sp>
-      <p:sp>
-        <p:nvSpPr>
-          <p:cNvPr id="30" name="Rounded Rectangle 29"/>
-          <p:cNvSpPr/>
-          <p:nvPr/>
-        </p:nvSpPr>
-        <p:spPr>
-          <a:xfrm>
-            <a:off x="566928" y="4617720"/>
-            <a:ext cx="11073384" cy="1572768"/>
+            <a:off x="8101584" y="1600200"/>
+            <a:ext cx="3529584" cy="3200400"/>
           </a:xfrm>
           <a:prstGeom prst="roundRect">
             <a:avLst>
-              <a:gd name="adj" fmla="val 6000"/>
-            </a:avLst>
-          </a:prstGeom>
-          <a:solidFill>
-            <a:srgbClr val="F5F6F8"/>
-          </a:solidFill>
-          <a:ln>
-            <a:noFill/>
-          </a:ln>
-          <a:effectLst/>
-        </p:spPr>
-        <p:style>
-          <a:lnRef idx="1">
-            <a:schemeClr val="accent1"/>
-          </a:lnRef>
-          <a:fillRef idx="3">
-            <a:schemeClr val="accent1"/>
-          </a:fillRef>
-          <a:effectRef idx="2">
-            <a:schemeClr val="accent1"/>
-          </a:effectRef>
-          <a:fontRef idx="minor">
-            <a:schemeClr val="lt1"/>
-          </a:fontRef>
-        </p:style>
-        <p:txBody>
-          <a:bodyPr rtlCol="0" anchor="ctr"/>
-          <a:lstStyle/>
-          <a:p>
-            <a:endParaRPr/>
-          </a:p>
-        </p:txBody>
-      </p:sp>
-      <p:sp>
-        <p:nvSpPr>
-          <p:cNvPr id="31" name="TextBox 30"/>
-          <p:cNvSpPr txBox="1"/>
-          <p:nvPr/>
-        </p:nvSpPr>
-        <p:spPr>
-          <a:xfrm>
-            <a:off x="868680" y="4828032"/>
-            <a:ext cx="10515600" cy="1188720"/>
-          </a:xfrm>
-          <a:prstGeom prst="rect">
-            <a:avLst/>
-          </a:prstGeom>
-          <a:noFill/>
-        </p:spPr>
-        <p:txBody>
-          <a:bodyPr wrap="square" lIns="0" tIns="0" rIns="0" bIns="0" anchor="t">
-            <a:spAutoFit/>
-          </a:bodyPr>
-          <a:lstStyle/>
-          <a:p>
-            <a:pPr algn="l">
-              <a:lnSpc>
-                <a:spcPct val="155000"/>
-              </a:lnSpc>
-              <a:spcAft>
-                <a:spcPts val="400"/>
-              </a:spcAft>
-            </a:pPr>
-            <a:r>
-              <a:rPr sz="1200" b="0">
-                <a:solidFill>
-                  <a:srgbClr val="141A33"/>
-                </a:solidFill>
-                <a:latin typeface="Meiryo"/>
-              </a:rPr>
-              <a:t>試算の前提</a:t>
-            </a:r>
-          </a:p>
-          <a:p>
-            <a:pPr algn="l">
-              <a:lnSpc>
-                <a:spcPct val="155000"/>
-              </a:lnSpc>
-              <a:spcAft>
-                <a:spcPts val="400"/>
-              </a:spcAft>
-            </a:pPr>
-            <a:r>
-              <a:rPr sz="1200" b="0">
-                <a:solidFill>
-                  <a:srgbClr val="141A33"/>
-                </a:solidFill>
-                <a:latin typeface="Meiryo"/>
-              </a:rPr>
-              <a:t>・OCR／AI書類作成：月300回、1回あたり約1,000文字の読み取り・生成</a:t>
-            </a:r>
-          </a:p>
-          <a:p>
-            <a:pPr algn="l">
-              <a:lnSpc>
-                <a:spcPct val="155000"/>
-              </a:lnSpc>
-              <a:spcAft>
-                <a:spcPts val="400"/>
-              </a:spcAft>
-            </a:pPr>
-            <a:r>
-              <a:rPr sz="1200" b="0">
-                <a:solidFill>
-                  <a:srgbClr val="141A33"/>
-                </a:solidFill>
-                <a:latin typeface="Meiryo"/>
-              </a:rPr>
-              <a:t>・既存サーバーを利用した場合も同じ従量課金のため、料金差はほぼ発生しません</a:t>
-            </a:r>
-          </a:p>
-          <a:p>
-            <a:pPr algn="l">
-              <a:lnSpc>
-                <a:spcPct val="155000"/>
-              </a:lnSpc>
-              <a:spcAft>
-                <a:spcPts val="400"/>
-              </a:spcAft>
-            </a:pPr>
-            <a:r>
-              <a:rPr sz="1200" b="0">
-                <a:solidFill>
-                  <a:srgbClr val="141A33"/>
-                </a:solidFill>
-                <a:latin typeface="Meiryo"/>
-              </a:rPr>
-              <a:t>・実際のご利用量が固まった段階で、正式なお見積もりを提出いたします</a:t>
-            </a:r>
-          </a:p>
-        </p:txBody>
-      </p:sp>
-    </p:spTree>
-  </p:cSld>
-  <p:clrMapOvr>
-    <a:masterClrMapping/>
-  </p:clrMapOvr>
-</p:sld>
-</file>
-
-<file path=ppt/slides/slide7.xml><?xml version="1.0" encoding="utf-8"?>
-<p:sld xmlns:a="http://schemas.openxmlformats.org/drawingml/2006/main" xmlns:r="http://schemas.openxmlformats.org/officeDocument/2006/relationships" xmlns:p="http://schemas.openxmlformats.org/presentationml/2006/main">
-  <p:cSld>
-    <p:spTree>
-      <p:nvGrpSpPr>
-        <p:cNvPr id="1" name=""/>
-        <p:cNvGrpSpPr/>
-        <p:nvPr/>
-      </p:nvGrpSpPr>
-      <p:grpSpPr>
-        <a:xfrm>
-          <a:off x="0" y="0"/>
-          <a:ext cx="0" cy="0"/>
-          <a:chOff x="0" y="0"/>
-          <a:chExt cx="0" cy="0"/>
-        </a:xfrm>
-      </p:grpSpPr>
-      <p:sp>
-        <p:nvSpPr>
-          <p:cNvPr id="2" name="Rectangle 1"/>
-          <p:cNvSpPr/>
-          <p:nvPr/>
-        </p:nvSpPr>
-        <p:spPr>
-          <a:xfrm>
-            <a:off x="0" y="0"/>
-            <a:ext cx="12191695" cy="868680"/>
-          </a:xfrm>
-          <a:prstGeom prst="rect">
-            <a:avLst/>
-          </a:prstGeom>
-          <a:solidFill>
-            <a:srgbClr val="1E2761"/>
-          </a:solidFill>
-          <a:ln>
-            <a:noFill/>
-          </a:ln>
-          <a:effectLst/>
-        </p:spPr>
-        <p:style>
-          <a:lnRef idx="1">
-            <a:schemeClr val="accent1"/>
-          </a:lnRef>
-          <a:fillRef idx="3">
-            <a:schemeClr val="accent1"/>
-          </a:fillRef>
-          <a:effectRef idx="2">
-            <a:schemeClr val="accent1"/>
-          </a:effectRef>
-          <a:fontRef idx="minor">
-            <a:schemeClr val="lt1"/>
-          </a:fontRef>
-        </p:style>
-        <p:txBody>
-          <a:bodyPr rtlCol="0" anchor="ctr"/>
-          <a:lstStyle/>
-          <a:p>
-            <a:endParaRPr/>
-          </a:p>
-        </p:txBody>
-      </p:sp>
-      <p:sp>
-        <p:nvSpPr>
-          <p:cNvPr id="3" name="TextBox 2"/>
-          <p:cNvSpPr txBox="1"/>
-          <p:nvPr/>
-        </p:nvSpPr>
-        <p:spPr>
-          <a:xfrm>
-            <a:off x="566928" y="237744"/>
-            <a:ext cx="8686800" cy="411480"/>
-          </a:xfrm>
-          <a:prstGeom prst="rect">
-            <a:avLst/>
-          </a:prstGeom>
-          <a:noFill/>
-        </p:spPr>
-        <p:txBody>
-          <a:bodyPr wrap="square" lIns="0" tIns="0" rIns="0" bIns="0" anchor="t">
-            <a:spAutoFit/>
-          </a:bodyPr>
-          <a:lstStyle/>
-          <a:p>
-            <a:pPr algn="l">
-              <a:lnSpc>
-                <a:spcPct val="130000"/>
-              </a:lnSpc>
-              <a:spcAft>
-                <a:spcPts val="400"/>
-              </a:spcAft>
-            </a:pPr>
-            <a:r>
-              <a:rPr sz="2200" b="1">
-                <a:solidFill>
-                  <a:srgbClr val="FFFFFF"/>
-                </a:solidFill>
-                <a:latin typeface="Meiryo"/>
-              </a:rPr>
-              <a:t>今後の進め方</a:t>
-            </a:r>
-          </a:p>
-        </p:txBody>
-      </p:sp>
-      <p:sp>
-        <p:nvSpPr>
-          <p:cNvPr id="4" name="TextBox 3"/>
-          <p:cNvSpPr txBox="1"/>
-          <p:nvPr/>
-        </p:nvSpPr>
-        <p:spPr>
-          <a:xfrm>
-            <a:off x="566928" y="1024128"/>
-            <a:ext cx="11064240" cy="365760"/>
-          </a:xfrm>
-          <a:prstGeom prst="rect">
-            <a:avLst/>
-          </a:prstGeom>
-          <a:noFill/>
-        </p:spPr>
-        <p:txBody>
-          <a:bodyPr wrap="square" lIns="0" tIns="0" rIns="0" bIns="0" anchor="t">
-            <a:spAutoFit/>
-          </a:bodyPr>
-          <a:lstStyle/>
-          <a:p>
-            <a:pPr algn="l">
-              <a:lnSpc>
-                <a:spcPct val="130000"/>
-              </a:lnSpc>
-              <a:spcAft>
-                <a:spcPts val="400"/>
-              </a:spcAft>
-            </a:pPr>
-            <a:r>
-              <a:rPr sz="1250" b="0">
-                <a:solidFill>
-                  <a:srgbClr val="6B7280"/>
-                </a:solidFill>
-                <a:latin typeface="Meiryo"/>
-              </a:rPr>
-              <a:t>ご承認をいただければ、以下の流れで進めます。</a:t>
-            </a:r>
-          </a:p>
-        </p:txBody>
-      </p:sp>
-      <p:sp>
-        <p:nvSpPr>
-          <p:cNvPr id="5" name="Rounded Rectangle 4"/>
-          <p:cNvSpPr/>
-          <p:nvPr/>
-        </p:nvSpPr>
-        <p:spPr>
-          <a:xfrm>
-            <a:off x="566928" y="1783080"/>
-            <a:ext cx="2606040" cy="2377440"/>
-          </a:xfrm>
-          <a:prstGeom prst="roundRect">
-            <a:avLst>
-              <a:gd name="adj" fmla="val 6000"/>
+              <a:gd name="adj" fmla="val 3500"/>
             </a:avLst>
           </a:prstGeom>
           <a:solidFill>
@@ -10249,21 +11112,19 @@
         <p:txBody>
           <a:bodyPr rtlCol="0" anchor="ctr"/>
           <a:lstStyle/>
-          <a:p>
-            <a:endParaRPr/>
-          </a:p>
-        </p:txBody>
-      </p:sp>
-      <p:sp>
-        <p:nvSpPr>
-          <p:cNvPr id="6" name="Rectangle 5"/>
+          <a:p/>
+        </p:txBody>
+      </p:sp>
+      <p:sp>
+        <p:nvSpPr>
+          <p:cNvPr id="16" name="Rectangle 15"/>
           <p:cNvSpPr/>
           <p:nvPr/>
         </p:nvSpPr>
         <p:spPr>
           <a:xfrm>
-            <a:off x="566928" y="1783080"/>
-            <a:ext cx="2606040" cy="82296"/>
+            <a:off x="8101584" y="1600200"/>
+            <a:ext cx="3529584" cy="82296"/>
           </a:xfrm>
           <a:prstGeom prst="rect">
             <a:avLst/>
@@ -10293,123 +11154,106 @@
         <p:txBody>
           <a:bodyPr rtlCol="0" anchor="ctr"/>
           <a:lstStyle/>
-          <a:p>
-            <a:endParaRPr/>
-          </a:p>
-        </p:txBody>
-      </p:sp>
-      <p:sp>
-        <p:nvSpPr>
-          <p:cNvPr id="7" name="TextBox 6"/>
-          <p:cNvSpPr txBox="1"/>
-          <p:nvPr/>
-        </p:nvSpPr>
-        <p:spPr>
-          <a:xfrm>
-            <a:off x="822960" y="2084831"/>
-            <a:ext cx="2103120" cy="274320"/>
-          </a:xfrm>
-          <a:prstGeom prst="rect">
-            <a:avLst/>
-          </a:prstGeom>
-          <a:noFill/>
-        </p:spPr>
-        <p:txBody>
-          <a:bodyPr wrap="square" lIns="0" tIns="0" rIns="0" bIns="0" anchor="t">
-            <a:spAutoFit/>
-          </a:bodyPr>
-          <a:lstStyle/>
-          <a:p>
-            <a:pPr algn="l">
-              <a:lnSpc>
-                <a:spcPct val="130000"/>
-              </a:lnSpc>
-              <a:spcAft>
-                <a:spcPts val="400"/>
-              </a:spcAft>
-            </a:pPr>
+          <a:p/>
+        </p:txBody>
+      </p:sp>
+      <p:sp>
+        <p:nvSpPr>
+          <p:cNvPr id="17" name="TextBox 16"/>
+          <p:cNvSpPr txBox="1"/>
+          <p:nvPr/>
+        </p:nvSpPr>
+        <p:spPr>
+          <a:xfrm>
+            <a:off x="8394192" y="1938528"/>
+            <a:ext cx="3017520" cy="365760"/>
+          </a:xfrm>
+          <a:prstGeom prst="rect">
+            <a:avLst/>
+          </a:prstGeom>
+          <a:noFill/>
+        </p:spPr>
+        <p:txBody>
+          <a:bodyPr wrap="square" lIns="0" rIns="0" tIns="0" bIns="0">
+            <a:spAutoFit/>
+          </a:bodyPr>
+          <a:lstStyle/>
+          <a:p>
+            <a:pPr algn="l"/>
             <a:r>
               <a:rPr sz="1100" b="1">
                 <a:solidFill>
                   <a:srgbClr val="4F46E5"/>
                 </a:solidFill>
                 <a:latin typeface="Meiryo"/>
-              </a:rPr>
-              <a:t>STEP 1</a:t>
-            </a:r>
-          </a:p>
-        </p:txBody>
-      </p:sp>
-      <p:sp>
-        <p:nvSpPr>
-          <p:cNvPr id="8" name="TextBox 7"/>
-          <p:cNvSpPr txBox="1"/>
-          <p:nvPr/>
-        </p:nvSpPr>
-        <p:spPr>
-          <a:xfrm>
-            <a:off x="822960" y="2450592"/>
-            <a:ext cx="2103120" cy="365760"/>
-          </a:xfrm>
-          <a:prstGeom prst="rect">
-            <a:avLst/>
-          </a:prstGeom>
-          <a:noFill/>
-        </p:spPr>
-        <p:txBody>
-          <a:bodyPr wrap="square" lIns="0" tIns="0" rIns="0" bIns="0" anchor="t">
-            <a:spAutoFit/>
-          </a:bodyPr>
-          <a:lstStyle/>
-          <a:p>
-            <a:pPr algn="l">
-              <a:lnSpc>
-                <a:spcPct val="130000"/>
-              </a:lnSpc>
-              <a:spcAft>
-                <a:spcPts val="400"/>
-              </a:spcAft>
-            </a:pPr>
+                <a:ea typeface="Meiryo"/>
+              </a:rPr>
+              <a:t>03</a:t>
+            </a:r>
+          </a:p>
+        </p:txBody>
+      </p:sp>
+      <p:sp>
+        <p:nvSpPr>
+          <p:cNvPr id="18" name="TextBox 17"/>
+          <p:cNvSpPr txBox="1"/>
+          <p:nvPr/>
+        </p:nvSpPr>
+        <p:spPr>
+          <a:xfrm>
+            <a:off x="8394192" y="2304288"/>
+            <a:ext cx="3017520" cy="411480"/>
+          </a:xfrm>
+          <a:prstGeom prst="rect">
+            <a:avLst/>
+          </a:prstGeom>
+          <a:noFill/>
+        </p:spPr>
+        <p:txBody>
+          <a:bodyPr wrap="square" lIns="0" rIns="0" tIns="0" bIns="0">
+            <a:spAutoFit/>
+          </a:bodyPr>
+          <a:lstStyle/>
+          <a:p>
+            <a:pPr algn="l"/>
             <a:r>
               <a:rPr sz="1500" b="1">
                 <a:solidFill>
                   <a:srgbClr val="141A33"/>
                 </a:solidFill>
                 <a:latin typeface="Meiryo"/>
-              </a:rPr>
-              <a:t>サーバー契約</a:t>
-            </a:r>
-          </a:p>
-        </p:txBody>
-      </p:sp>
-      <p:sp>
-        <p:nvSpPr>
-          <p:cNvPr id="9" name="TextBox 8"/>
-          <p:cNvSpPr txBox="1"/>
-          <p:nvPr/>
-        </p:nvSpPr>
-        <p:spPr>
-          <a:xfrm>
-            <a:off x="822960" y="2999232"/>
-            <a:ext cx="2103120" cy="914400"/>
-          </a:xfrm>
-          <a:prstGeom prst="rect">
-            <a:avLst/>
-          </a:prstGeom>
-          <a:noFill/>
-        </p:spPr>
-        <p:txBody>
-          <a:bodyPr wrap="square" lIns="0" tIns="0" rIns="0" bIns="0" anchor="t">
-            <a:spAutoFit/>
-          </a:bodyPr>
-          <a:lstStyle/>
-          <a:p>
-            <a:pPr algn="l">
-              <a:lnSpc>
-                <a:spcPct val="145000"/>
-              </a:lnSpc>
-              <a:spcAft>
-                <a:spcPts val="400"/>
+                <a:ea typeface="Meiryo"/>
+              </a:rPr>
+              <a:t>公表する</a:t>
+            </a:r>
+          </a:p>
+        </p:txBody>
+      </p:sp>
+      <p:sp>
+        <p:nvSpPr>
+          <p:cNvPr id="19" name="TextBox 18"/>
+          <p:cNvSpPr txBox="1"/>
+          <p:nvPr/>
+        </p:nvSpPr>
+        <p:spPr>
+          <a:xfrm>
+            <a:off x="8394192" y="2889504"/>
+            <a:ext cx="3017520" cy="1828800"/>
+          </a:xfrm>
+          <a:prstGeom prst="rect">
+            <a:avLst/>
+          </a:prstGeom>
+          <a:noFill/>
+        </p:spPr>
+        <p:txBody>
+          <a:bodyPr wrap="square" lIns="0" rIns="0" tIns="0" bIns="0">
+            <a:spAutoFit/>
+          </a:bodyPr>
+          <a:lstStyle/>
+          <a:p>
+            <a:pPr algn="l">
+              <a:spcAft>
+                <a:spcPts val="200"/>
               </a:spcAft>
             </a:pPr>
             <a:r>
@@ -10418,17 +11262,15 @@
                   <a:srgbClr val="6B7280"/>
                 </a:solidFill>
                 <a:latin typeface="Meiryo"/>
-              </a:rPr>
-              <a:t>当方名義でAzureを契約し、</a:t>
-            </a:r>
-          </a:p>
-          <a:p>
-            <a:pPr algn="l">
-              <a:lnSpc>
-                <a:spcPct val="145000"/>
-              </a:lnSpc>
-              <a:spcAft>
-                <a:spcPts val="400"/>
+                <a:ea typeface="Meiryo"/>
+              </a:rPr>
+              <a:t>プライバシーポリシーに、</a:t>
+            </a:r>
+          </a:p>
+          <a:p>
+            <a:pPr algn="l">
+              <a:spcAft>
+                <a:spcPts val="200"/>
               </a:spcAft>
             </a:pPr>
             <a:r>
@@ -10437,77 +11279,85 @@
                   <a:srgbClr val="6B7280"/>
                 </a:solidFill>
                 <a:latin typeface="Meiryo"/>
-              </a:rPr>
-              <a:t>環境を構築します。</a:t>
-            </a:r>
-          </a:p>
-        </p:txBody>
-      </p:sp>
-      <p:sp>
-        <p:nvSpPr>
-          <p:cNvPr id="10" name="TextBox 9"/>
-          <p:cNvSpPr txBox="1"/>
-          <p:nvPr/>
-        </p:nvSpPr>
-        <p:spPr>
-          <a:xfrm>
-            <a:off x="3200400" y="2788920"/>
-            <a:ext cx="228600" cy="365760"/>
-          </a:xfrm>
-          <a:prstGeom prst="rect">
-            <a:avLst/>
-          </a:prstGeom>
-          <a:noFill/>
-        </p:spPr>
-        <p:txBody>
-          <a:bodyPr wrap="square" lIns="0" tIns="0" rIns="0" bIns="0" anchor="t">
-            <a:spAutoFit/>
-          </a:bodyPr>
-          <a:lstStyle/>
-          <a:p>
-            <a:pPr algn="l">
-              <a:lnSpc>
-                <a:spcPct val="130000"/>
-              </a:lnSpc>
-              <a:spcAft>
-                <a:spcPts val="400"/>
-              </a:spcAft>
-            </a:pPr>
-            <a:r>
-              <a:rPr sz="2000" b="1">
-                <a:solidFill>
-                  <a:srgbClr val="C7CDD8"/>
-                </a:solidFill>
-                <a:latin typeface="Meiryo"/>
-              </a:rPr>
-              <a:t>›</a:t>
-            </a:r>
-          </a:p>
-        </p:txBody>
-      </p:sp>
-      <p:sp>
-        <p:nvSpPr>
-          <p:cNvPr id="11" name="Rounded Rectangle 10"/>
+                <a:ea typeface="Meiryo"/>
+              </a:rPr>
+              <a:t>移転先の国名・その国の制度・</a:t>
+            </a:r>
+          </a:p>
+          <a:p>
+            <a:pPr algn="l">
+              <a:spcAft>
+                <a:spcPts val="200"/>
+              </a:spcAft>
+            </a:pPr>
+            <a:r>
+              <a:rPr sz="1150" b="0">
+                <a:solidFill>
+                  <a:srgbClr val="6B7280"/>
+                </a:solidFill>
+                <a:latin typeface="Meiryo"/>
+                <a:ea typeface="Meiryo"/>
+              </a:rPr>
+              <a:t>相手方の措置を記載します。</a:t>
+            </a:r>
+          </a:p>
+          <a:p>
+            <a:pPr algn="l">
+              <a:spcAft>
+                <a:spcPts val="200"/>
+              </a:spcAft>
+            </a:pPr>
+            <a:r>
+              <a:rPr sz="1150" b="0">
+                <a:solidFill>
+                  <a:srgbClr val="6B7280"/>
+                </a:solidFill>
+                <a:latin typeface="Meiryo"/>
+                <a:ea typeface="Meiryo"/>
+              </a:rPr>
+              <a:t/>
+            </a:r>
+          </a:p>
+          <a:p>
+            <a:pPr algn="l">
+              <a:spcAft>
+                <a:spcPts val="200"/>
+              </a:spcAft>
+            </a:pPr>
+            <a:r>
+              <a:rPr sz="1150" b="0">
+                <a:solidFill>
+                  <a:srgbClr val="6B7280"/>
+                </a:solidFill>
+                <a:latin typeface="Meiryo"/>
+                <a:ea typeface="Meiryo"/>
+              </a:rPr>
+              <a:t>文言案は次ページのとおりです。</a:t>
+            </a:r>
+          </a:p>
+        </p:txBody>
+      </p:sp>
+      <p:sp>
+        <p:nvSpPr>
+          <p:cNvPr id="20" name="Rounded Rectangle 19"/>
           <p:cNvSpPr/>
           <p:nvPr/>
         </p:nvSpPr>
         <p:spPr>
           <a:xfrm>
-            <a:off x="3392424" y="1783080"/>
-            <a:ext cx="2606040" cy="2377440"/>
+            <a:off x="566928" y="5120640"/>
+            <a:ext cx="11073384" cy="685800"/>
           </a:xfrm>
           <a:prstGeom prst="roundRect">
             <a:avLst>
-              <a:gd name="adj" fmla="val 6000"/>
+              <a:gd name="adj" fmla="val 12000"/>
             </a:avLst>
           </a:prstGeom>
           <a:solidFill>
-            <a:srgbClr val="FFFFFF"/>
+            <a:srgbClr val="F2F4FB"/>
           </a:solidFill>
-          <a:ln w="12700">
-            <a:solidFill>
-              <a:srgbClr val="C7CDD8"/>
-            </a:solidFill>
+          <a:ln>
+            <a:noFill/>
           </a:ln>
           <a:effectLst/>
         </p:spPr>
@@ -10528,867 +11378,45 @@
         <p:txBody>
           <a:bodyPr rtlCol="0" anchor="ctr"/>
           <a:lstStyle/>
-          <a:p>
-            <a:endParaRPr/>
-          </a:p>
-        </p:txBody>
-      </p:sp>
-      <p:sp>
-        <p:nvSpPr>
-          <p:cNvPr id="12" name="Rectangle 11"/>
-          <p:cNvSpPr/>
-          <p:nvPr/>
-        </p:nvSpPr>
-        <p:spPr>
-          <a:xfrm>
-            <a:off x="3392424" y="1783080"/>
-            <a:ext cx="2606040" cy="82296"/>
-          </a:xfrm>
-          <a:prstGeom prst="rect">
-            <a:avLst/>
-          </a:prstGeom>
-          <a:solidFill>
-            <a:srgbClr val="4F46E5"/>
-          </a:solidFill>
-          <a:ln>
-            <a:noFill/>
-          </a:ln>
-          <a:effectLst/>
-        </p:spPr>
-        <p:style>
-          <a:lnRef idx="1">
-            <a:schemeClr val="accent1"/>
-          </a:lnRef>
-          <a:fillRef idx="3">
-            <a:schemeClr val="accent1"/>
-          </a:fillRef>
-          <a:effectRef idx="2">
-            <a:schemeClr val="accent1"/>
-          </a:effectRef>
-          <a:fontRef idx="minor">
-            <a:schemeClr val="lt1"/>
-          </a:fontRef>
-        </p:style>
-        <p:txBody>
-          <a:bodyPr rtlCol="0" anchor="ctr"/>
-          <a:lstStyle/>
-          <a:p>
-            <a:endParaRPr/>
-          </a:p>
-        </p:txBody>
-      </p:sp>
-      <p:sp>
-        <p:nvSpPr>
-          <p:cNvPr id="13" name="TextBox 12"/>
-          <p:cNvSpPr txBox="1"/>
-          <p:nvPr/>
-        </p:nvSpPr>
-        <p:spPr>
-          <a:xfrm>
-            <a:off x="3648456" y="2084831"/>
-            <a:ext cx="2103120" cy="274320"/>
-          </a:xfrm>
-          <a:prstGeom prst="rect">
-            <a:avLst/>
-          </a:prstGeom>
-          <a:noFill/>
-        </p:spPr>
-        <p:txBody>
-          <a:bodyPr wrap="square" lIns="0" tIns="0" rIns="0" bIns="0" anchor="t">
-            <a:spAutoFit/>
-          </a:bodyPr>
-          <a:lstStyle/>
-          <a:p>
-            <a:pPr algn="l">
-              <a:lnSpc>
-                <a:spcPct val="130000"/>
-              </a:lnSpc>
-              <a:spcAft>
-                <a:spcPts val="400"/>
-              </a:spcAft>
-            </a:pPr>
-            <a:r>
-              <a:rPr sz="1100" b="1">
+          <a:p/>
+        </p:txBody>
+      </p:sp>
+      <p:sp>
+        <p:nvSpPr>
+          <p:cNvPr id="21" name="TextBox 20"/>
+          <p:cNvSpPr txBox="1"/>
+          <p:nvPr/>
+        </p:nvSpPr>
+        <p:spPr>
+          <a:xfrm>
+            <a:off x="868680" y="5280660"/>
+            <a:ext cx="10515600" cy="365760"/>
+          </a:xfrm>
+          <a:prstGeom prst="rect">
+            <a:avLst/>
+          </a:prstGeom>
+          <a:noFill/>
+        </p:spPr>
+        <p:txBody>
+          <a:bodyPr wrap="square" lIns="0" rIns="0" tIns="0" bIns="0">
+            <a:spAutoFit/>
+          </a:bodyPr>
+          <a:lstStyle/>
+          <a:p>
+            <a:pPr algn="l">
+              <a:spcAft>
+                <a:spcPts val="300"/>
+              </a:spcAft>
+            </a:pPr>
+            <a:r>
+              <a:rPr sz="1250" b="1">
                 <a:solidFill>
                   <a:srgbClr val="4F46E5"/>
                 </a:solidFill>
                 <a:latin typeface="Meiryo"/>
-              </a:rPr>
-              <a:t>STEP 2</a:t>
-            </a:r>
-          </a:p>
-        </p:txBody>
-      </p:sp>
-      <p:sp>
-        <p:nvSpPr>
-          <p:cNvPr id="14" name="TextBox 13"/>
-          <p:cNvSpPr txBox="1"/>
-          <p:nvPr/>
-        </p:nvSpPr>
-        <p:spPr>
-          <a:xfrm>
-            <a:off x="3648456" y="2450592"/>
-            <a:ext cx="2103120" cy="365760"/>
-          </a:xfrm>
-          <a:prstGeom prst="rect">
-            <a:avLst/>
-          </a:prstGeom>
-          <a:noFill/>
-        </p:spPr>
-        <p:txBody>
-          <a:bodyPr wrap="square" lIns="0" tIns="0" rIns="0" bIns="0" anchor="t">
-            <a:spAutoFit/>
-          </a:bodyPr>
-          <a:lstStyle/>
-          <a:p>
-            <a:pPr algn="l">
-              <a:lnSpc>
-                <a:spcPct val="130000"/>
-              </a:lnSpc>
-              <a:spcAft>
-                <a:spcPts val="400"/>
-              </a:spcAft>
-            </a:pPr>
-            <a:r>
-              <a:rPr sz="1500" b="1">
-                <a:solidFill>
-                  <a:srgbClr val="141A33"/>
-                </a:solidFill>
-                <a:latin typeface="Meiryo"/>
-              </a:rPr>
-              <a:t>システム移設</a:t>
-            </a:r>
-          </a:p>
-        </p:txBody>
-      </p:sp>
-      <p:sp>
-        <p:nvSpPr>
-          <p:cNvPr id="15" name="TextBox 14"/>
-          <p:cNvSpPr txBox="1"/>
-          <p:nvPr/>
-        </p:nvSpPr>
-        <p:spPr>
-          <a:xfrm>
-            <a:off x="3648456" y="2999232"/>
-            <a:ext cx="2103120" cy="914400"/>
-          </a:xfrm>
-          <a:prstGeom prst="rect">
-            <a:avLst/>
-          </a:prstGeom>
-          <a:noFill/>
-        </p:spPr>
-        <p:txBody>
-          <a:bodyPr wrap="square" lIns="0" tIns="0" rIns="0" bIns="0" anchor="t">
-            <a:spAutoFit/>
-          </a:bodyPr>
-          <a:lstStyle/>
-          <a:p>
-            <a:pPr algn="l">
-              <a:lnSpc>
-                <a:spcPct val="145000"/>
-              </a:lnSpc>
-              <a:spcAft>
-                <a:spcPts val="400"/>
-              </a:spcAft>
-            </a:pPr>
-            <a:r>
-              <a:rPr sz="1150" b="0">
-                <a:solidFill>
-                  <a:srgbClr val="6B7280"/>
-                </a:solidFill>
-                <a:latin typeface="Meiryo"/>
-              </a:rPr>
-              <a:t>アプリ本体とAI機能を</a:t>
-            </a:r>
-          </a:p>
-          <a:p>
-            <a:pPr algn="l">
-              <a:lnSpc>
-                <a:spcPct val="145000"/>
-              </a:lnSpc>
-              <a:spcAft>
-                <a:spcPts val="400"/>
-              </a:spcAft>
-            </a:pPr>
-            <a:r>
-              <a:rPr sz="1150" b="0">
-                <a:solidFill>
-                  <a:srgbClr val="6B7280"/>
-                </a:solidFill>
-                <a:latin typeface="Meiryo"/>
-              </a:rPr>
-              <a:t>新サーバーへ移します。</a:t>
-            </a:r>
-          </a:p>
-        </p:txBody>
-      </p:sp>
-      <p:sp>
-        <p:nvSpPr>
-          <p:cNvPr id="16" name="TextBox 15"/>
-          <p:cNvSpPr txBox="1"/>
-          <p:nvPr/>
-        </p:nvSpPr>
-        <p:spPr>
-          <a:xfrm>
-            <a:off x="6025896" y="2788920"/>
-            <a:ext cx="228600" cy="365760"/>
-          </a:xfrm>
-          <a:prstGeom prst="rect">
-            <a:avLst/>
-          </a:prstGeom>
-          <a:noFill/>
-        </p:spPr>
-        <p:txBody>
-          <a:bodyPr wrap="square" lIns="0" tIns="0" rIns="0" bIns="0" anchor="t">
-            <a:spAutoFit/>
-          </a:bodyPr>
-          <a:lstStyle/>
-          <a:p>
-            <a:pPr algn="l">
-              <a:lnSpc>
-                <a:spcPct val="130000"/>
-              </a:lnSpc>
-              <a:spcAft>
-                <a:spcPts val="400"/>
-              </a:spcAft>
-            </a:pPr>
-            <a:r>
-              <a:rPr sz="2000" b="1">
-                <a:solidFill>
-                  <a:srgbClr val="C7CDD8"/>
-                </a:solidFill>
-                <a:latin typeface="Meiryo"/>
-              </a:rPr>
-              <a:t>›</a:t>
-            </a:r>
-          </a:p>
-        </p:txBody>
-      </p:sp>
-      <p:sp>
-        <p:nvSpPr>
-          <p:cNvPr id="17" name="Rounded Rectangle 16"/>
-          <p:cNvSpPr/>
-          <p:nvPr/>
-        </p:nvSpPr>
-        <p:spPr>
-          <a:xfrm>
-            <a:off x="6217920" y="1783080"/>
-            <a:ext cx="2606040" cy="2377440"/>
-          </a:xfrm>
-          <a:prstGeom prst="roundRect">
-            <a:avLst>
-              <a:gd name="adj" fmla="val 6000"/>
-            </a:avLst>
-          </a:prstGeom>
-          <a:solidFill>
-            <a:srgbClr val="FFFFFF"/>
-          </a:solidFill>
-          <a:ln w="12700">
-            <a:solidFill>
-              <a:srgbClr val="C7CDD8"/>
-            </a:solidFill>
-          </a:ln>
-          <a:effectLst/>
-        </p:spPr>
-        <p:style>
-          <a:lnRef idx="1">
-            <a:schemeClr val="accent1"/>
-          </a:lnRef>
-          <a:fillRef idx="3">
-            <a:schemeClr val="accent1"/>
-          </a:fillRef>
-          <a:effectRef idx="2">
-            <a:schemeClr val="accent1"/>
-          </a:effectRef>
-          <a:fontRef idx="minor">
-            <a:schemeClr val="lt1"/>
-          </a:fontRef>
-        </p:style>
-        <p:txBody>
-          <a:bodyPr rtlCol="0" anchor="ctr"/>
-          <a:lstStyle/>
-          <a:p>
-            <a:endParaRPr/>
-          </a:p>
-        </p:txBody>
-      </p:sp>
-      <p:sp>
-        <p:nvSpPr>
-          <p:cNvPr id="18" name="Rectangle 17"/>
-          <p:cNvSpPr/>
-          <p:nvPr/>
-        </p:nvSpPr>
-        <p:spPr>
-          <a:xfrm>
-            <a:off x="6217920" y="1783080"/>
-            <a:ext cx="2606040" cy="82296"/>
-          </a:xfrm>
-          <a:prstGeom prst="rect">
-            <a:avLst/>
-          </a:prstGeom>
-          <a:solidFill>
-            <a:srgbClr val="4F46E5"/>
-          </a:solidFill>
-          <a:ln>
-            <a:noFill/>
-          </a:ln>
-          <a:effectLst/>
-        </p:spPr>
-        <p:style>
-          <a:lnRef idx="1">
-            <a:schemeClr val="accent1"/>
-          </a:lnRef>
-          <a:fillRef idx="3">
-            <a:schemeClr val="accent1"/>
-          </a:fillRef>
-          <a:effectRef idx="2">
-            <a:schemeClr val="accent1"/>
-          </a:effectRef>
-          <a:fontRef idx="minor">
-            <a:schemeClr val="lt1"/>
-          </a:fontRef>
-        </p:style>
-        <p:txBody>
-          <a:bodyPr rtlCol="0" anchor="ctr"/>
-          <a:lstStyle/>
-          <a:p>
-            <a:endParaRPr/>
-          </a:p>
-        </p:txBody>
-      </p:sp>
-      <p:sp>
-        <p:nvSpPr>
-          <p:cNvPr id="19" name="TextBox 18"/>
-          <p:cNvSpPr txBox="1"/>
-          <p:nvPr/>
-        </p:nvSpPr>
-        <p:spPr>
-          <a:xfrm>
-            <a:off x="6473952" y="2084831"/>
-            <a:ext cx="2103120" cy="274320"/>
-          </a:xfrm>
-          <a:prstGeom prst="rect">
-            <a:avLst/>
-          </a:prstGeom>
-          <a:noFill/>
-        </p:spPr>
-        <p:txBody>
-          <a:bodyPr wrap="square" lIns="0" tIns="0" rIns="0" bIns="0" anchor="t">
-            <a:spAutoFit/>
-          </a:bodyPr>
-          <a:lstStyle/>
-          <a:p>
-            <a:pPr algn="l">
-              <a:lnSpc>
-                <a:spcPct val="130000"/>
-              </a:lnSpc>
-              <a:spcAft>
-                <a:spcPts val="400"/>
-              </a:spcAft>
-            </a:pPr>
-            <a:r>
-              <a:rPr sz="1100" b="1">
-                <a:solidFill>
-                  <a:srgbClr val="4F46E5"/>
-                </a:solidFill>
-                <a:latin typeface="Meiryo"/>
-              </a:rPr>
-              <a:t>STEP 3</a:t>
-            </a:r>
-          </a:p>
-        </p:txBody>
-      </p:sp>
-      <p:sp>
-        <p:nvSpPr>
-          <p:cNvPr id="20" name="TextBox 19"/>
-          <p:cNvSpPr txBox="1"/>
-          <p:nvPr/>
-        </p:nvSpPr>
-        <p:spPr>
-          <a:xfrm>
-            <a:off x="6473952" y="2450592"/>
-            <a:ext cx="2103120" cy="365760"/>
-          </a:xfrm>
-          <a:prstGeom prst="rect">
-            <a:avLst/>
-          </a:prstGeom>
-          <a:noFill/>
-        </p:spPr>
-        <p:txBody>
-          <a:bodyPr wrap="square" lIns="0" tIns="0" rIns="0" bIns="0" anchor="t">
-            <a:spAutoFit/>
-          </a:bodyPr>
-          <a:lstStyle/>
-          <a:p>
-            <a:pPr algn="l">
-              <a:lnSpc>
-                <a:spcPct val="130000"/>
-              </a:lnSpc>
-              <a:spcAft>
-                <a:spcPts val="400"/>
-              </a:spcAft>
-            </a:pPr>
-            <a:r>
-              <a:rPr sz="1500" b="1">
-                <a:solidFill>
-                  <a:srgbClr val="141A33"/>
-                </a:solidFill>
-                <a:latin typeface="Meiryo"/>
-              </a:rPr>
-              <a:t>動作確認</a:t>
-            </a:r>
-          </a:p>
-        </p:txBody>
-      </p:sp>
-      <p:sp>
-        <p:nvSpPr>
-          <p:cNvPr id="21" name="TextBox 20"/>
-          <p:cNvSpPr txBox="1"/>
-          <p:nvPr/>
-        </p:nvSpPr>
-        <p:spPr>
-          <a:xfrm>
-            <a:off x="6473952" y="2999232"/>
-            <a:ext cx="2103120" cy="914400"/>
-          </a:xfrm>
-          <a:prstGeom prst="rect">
-            <a:avLst/>
-          </a:prstGeom>
-          <a:noFill/>
-        </p:spPr>
-        <p:txBody>
-          <a:bodyPr wrap="square" lIns="0" tIns="0" rIns="0" bIns="0" anchor="t">
-            <a:spAutoFit/>
-          </a:bodyPr>
-          <a:lstStyle/>
-          <a:p>
-            <a:pPr algn="l">
-              <a:lnSpc>
-                <a:spcPct val="145000"/>
-              </a:lnSpc>
-              <a:spcAft>
-                <a:spcPts val="400"/>
-              </a:spcAft>
-            </a:pPr>
-            <a:r>
-              <a:rPr sz="1150" b="0">
-                <a:solidFill>
-                  <a:srgbClr val="6B7280"/>
-                </a:solidFill>
-                <a:latin typeface="Meiryo"/>
-              </a:rPr>
-              <a:t>実際の業務データで</a:t>
-            </a:r>
-          </a:p>
-          <a:p>
-            <a:pPr algn="l">
-              <a:lnSpc>
-                <a:spcPct val="145000"/>
-              </a:lnSpc>
-              <a:spcAft>
-                <a:spcPts val="400"/>
-              </a:spcAft>
-            </a:pPr>
-            <a:r>
-              <a:rPr sz="1150" b="0">
-                <a:solidFill>
-                  <a:srgbClr val="6B7280"/>
-                </a:solidFill>
-                <a:latin typeface="Meiryo"/>
-              </a:rPr>
-              <a:t>動作と速度を検証します。</a:t>
-            </a:r>
-          </a:p>
-        </p:txBody>
-      </p:sp>
-      <p:sp>
-        <p:nvSpPr>
-          <p:cNvPr id="22" name="TextBox 21"/>
-          <p:cNvSpPr txBox="1"/>
-          <p:nvPr/>
-        </p:nvSpPr>
-        <p:spPr>
-          <a:xfrm>
-            <a:off x="8851392" y="2788920"/>
-            <a:ext cx="228600" cy="365760"/>
-          </a:xfrm>
-          <a:prstGeom prst="rect">
-            <a:avLst/>
-          </a:prstGeom>
-          <a:noFill/>
-        </p:spPr>
-        <p:txBody>
-          <a:bodyPr wrap="square" lIns="0" tIns="0" rIns="0" bIns="0" anchor="t">
-            <a:spAutoFit/>
-          </a:bodyPr>
-          <a:lstStyle/>
-          <a:p>
-            <a:pPr algn="l">
-              <a:lnSpc>
-                <a:spcPct val="130000"/>
-              </a:lnSpc>
-              <a:spcAft>
-                <a:spcPts val="400"/>
-              </a:spcAft>
-            </a:pPr>
-            <a:r>
-              <a:rPr sz="2000" b="1">
-                <a:solidFill>
-                  <a:srgbClr val="C7CDD8"/>
-                </a:solidFill>
-                <a:latin typeface="Meiryo"/>
-              </a:rPr>
-              <a:t>›</a:t>
-            </a:r>
-          </a:p>
-        </p:txBody>
-      </p:sp>
-      <p:sp>
-        <p:nvSpPr>
-          <p:cNvPr id="23" name="Rounded Rectangle 22"/>
-          <p:cNvSpPr/>
-          <p:nvPr/>
-        </p:nvSpPr>
-        <p:spPr>
-          <a:xfrm>
-            <a:off x="9043415" y="1783080"/>
-            <a:ext cx="2606040" cy="2377440"/>
-          </a:xfrm>
-          <a:prstGeom prst="roundRect">
-            <a:avLst>
-              <a:gd name="adj" fmla="val 6000"/>
-            </a:avLst>
-          </a:prstGeom>
-          <a:solidFill>
-            <a:srgbClr val="FFFFFF"/>
-          </a:solidFill>
-          <a:ln w="12700">
-            <a:solidFill>
-              <a:srgbClr val="C7CDD8"/>
-            </a:solidFill>
-          </a:ln>
-          <a:effectLst/>
-        </p:spPr>
-        <p:style>
-          <a:lnRef idx="1">
-            <a:schemeClr val="accent1"/>
-          </a:lnRef>
-          <a:fillRef idx="3">
-            <a:schemeClr val="accent1"/>
-          </a:fillRef>
-          <a:effectRef idx="2">
-            <a:schemeClr val="accent1"/>
-          </a:effectRef>
-          <a:fontRef idx="minor">
-            <a:schemeClr val="lt1"/>
-          </a:fontRef>
-        </p:style>
-        <p:txBody>
-          <a:bodyPr rtlCol="0" anchor="ctr"/>
-          <a:lstStyle/>
-          <a:p>
-            <a:endParaRPr/>
-          </a:p>
-        </p:txBody>
-      </p:sp>
-      <p:sp>
-        <p:nvSpPr>
-          <p:cNvPr id="24" name="Rectangle 23"/>
-          <p:cNvSpPr/>
-          <p:nvPr/>
-        </p:nvSpPr>
-        <p:spPr>
-          <a:xfrm>
-            <a:off x="9043415" y="1783080"/>
-            <a:ext cx="2606040" cy="82296"/>
-          </a:xfrm>
-          <a:prstGeom prst="rect">
-            <a:avLst/>
-          </a:prstGeom>
-          <a:solidFill>
-            <a:srgbClr val="1F5E4B"/>
-          </a:solidFill>
-          <a:ln>
-            <a:noFill/>
-          </a:ln>
-          <a:effectLst/>
-        </p:spPr>
-        <p:style>
-          <a:lnRef idx="1">
-            <a:schemeClr val="accent1"/>
-          </a:lnRef>
-          <a:fillRef idx="3">
-            <a:schemeClr val="accent1"/>
-          </a:fillRef>
-          <a:effectRef idx="2">
-            <a:schemeClr val="accent1"/>
-          </a:effectRef>
-          <a:fontRef idx="minor">
-            <a:schemeClr val="lt1"/>
-          </a:fontRef>
-        </p:style>
-        <p:txBody>
-          <a:bodyPr rtlCol="0" anchor="ctr"/>
-          <a:lstStyle/>
-          <a:p>
-            <a:endParaRPr/>
-          </a:p>
-        </p:txBody>
-      </p:sp>
-      <p:sp>
-        <p:nvSpPr>
-          <p:cNvPr id="25" name="TextBox 24"/>
-          <p:cNvSpPr txBox="1"/>
-          <p:nvPr/>
-        </p:nvSpPr>
-        <p:spPr>
-          <a:xfrm>
-            <a:off x="9299447" y="2084831"/>
-            <a:ext cx="2103120" cy="274320"/>
-          </a:xfrm>
-          <a:prstGeom prst="rect">
-            <a:avLst/>
-          </a:prstGeom>
-          <a:noFill/>
-        </p:spPr>
-        <p:txBody>
-          <a:bodyPr wrap="square" lIns="0" tIns="0" rIns="0" bIns="0" anchor="t">
-            <a:spAutoFit/>
-          </a:bodyPr>
-          <a:lstStyle/>
-          <a:p>
-            <a:pPr algn="l">
-              <a:lnSpc>
-                <a:spcPct val="130000"/>
-              </a:lnSpc>
-              <a:spcAft>
-                <a:spcPts val="400"/>
-              </a:spcAft>
-            </a:pPr>
-            <a:r>
-              <a:rPr sz="1100" b="1">
-                <a:solidFill>
-                  <a:srgbClr val="1F5E4B"/>
-                </a:solidFill>
-                <a:latin typeface="Meiryo"/>
-              </a:rPr>
-              <a:t>STEP 4</a:t>
-            </a:r>
-          </a:p>
-        </p:txBody>
-      </p:sp>
-      <p:sp>
-        <p:nvSpPr>
-          <p:cNvPr id="26" name="TextBox 25"/>
-          <p:cNvSpPr txBox="1"/>
-          <p:nvPr/>
-        </p:nvSpPr>
-        <p:spPr>
-          <a:xfrm>
-            <a:off x="9299447" y="2450592"/>
-            <a:ext cx="2103120" cy="365760"/>
-          </a:xfrm>
-          <a:prstGeom prst="rect">
-            <a:avLst/>
-          </a:prstGeom>
-          <a:noFill/>
-        </p:spPr>
-        <p:txBody>
-          <a:bodyPr wrap="square" lIns="0" tIns="0" rIns="0" bIns="0" anchor="t">
-            <a:spAutoFit/>
-          </a:bodyPr>
-          <a:lstStyle/>
-          <a:p>
-            <a:pPr algn="l">
-              <a:lnSpc>
-                <a:spcPct val="130000"/>
-              </a:lnSpc>
-              <a:spcAft>
-                <a:spcPts val="400"/>
-              </a:spcAft>
-            </a:pPr>
-            <a:r>
-              <a:rPr sz="1500" b="1">
-                <a:solidFill>
-                  <a:srgbClr val="141A33"/>
-                </a:solidFill>
-                <a:latin typeface="Meiryo"/>
-              </a:rPr>
-              <a:t>カード切替</a:t>
-            </a:r>
-          </a:p>
-        </p:txBody>
-      </p:sp>
-      <p:sp>
-        <p:nvSpPr>
-          <p:cNvPr id="27" name="TextBox 26"/>
-          <p:cNvSpPr txBox="1"/>
-          <p:nvPr/>
-        </p:nvSpPr>
-        <p:spPr>
-          <a:xfrm>
-            <a:off x="9299447" y="2999232"/>
-            <a:ext cx="2103120" cy="914400"/>
-          </a:xfrm>
-          <a:prstGeom prst="rect">
-            <a:avLst/>
-          </a:prstGeom>
-          <a:noFill/>
-        </p:spPr>
-        <p:txBody>
-          <a:bodyPr wrap="square" lIns="0" tIns="0" rIns="0" bIns="0" anchor="t">
-            <a:spAutoFit/>
-          </a:bodyPr>
-          <a:lstStyle/>
-          <a:p>
-            <a:pPr algn="l">
-              <a:lnSpc>
-                <a:spcPct val="145000"/>
-              </a:lnSpc>
-              <a:spcAft>
-                <a:spcPts val="400"/>
-              </a:spcAft>
-            </a:pPr>
-            <a:r>
-              <a:rPr sz="1150" b="0">
-                <a:solidFill>
-                  <a:srgbClr val="6B7280"/>
-                </a:solidFill>
-                <a:latin typeface="Meiryo"/>
-              </a:rPr>
-              <a:t>お支払いを御社の</a:t>
-            </a:r>
-          </a:p>
-          <a:p>
-            <a:pPr algn="l">
-              <a:lnSpc>
-                <a:spcPct val="145000"/>
-              </a:lnSpc>
-              <a:spcAft>
-                <a:spcPts val="400"/>
-              </a:spcAft>
-            </a:pPr>
-            <a:r>
-              <a:rPr sz="1150" b="0">
-                <a:solidFill>
-                  <a:srgbClr val="6B7280"/>
-                </a:solidFill>
-                <a:latin typeface="Meiryo"/>
-              </a:rPr>
-              <a:t>クレジットカードへ変更。</a:t>
-            </a:r>
-          </a:p>
-        </p:txBody>
-      </p:sp>
-      <p:sp>
-        <p:nvSpPr>
-          <p:cNvPr id="28" name="Rounded Rectangle 27"/>
-          <p:cNvSpPr/>
-          <p:nvPr/>
-        </p:nvSpPr>
-        <p:spPr>
-          <a:xfrm>
-            <a:off x="566928" y="4572000"/>
-            <a:ext cx="11073384" cy="1481328"/>
-          </a:xfrm>
-          <a:prstGeom prst="roundRect">
-            <a:avLst>
-              <a:gd name="adj" fmla="val 6000"/>
-            </a:avLst>
-          </a:prstGeom>
-          <a:solidFill>
-            <a:srgbClr val="1E2761"/>
-          </a:solidFill>
-          <a:ln>
-            <a:noFill/>
-          </a:ln>
-          <a:effectLst/>
-        </p:spPr>
-        <p:style>
-          <a:lnRef idx="1">
-            <a:schemeClr val="accent1"/>
-          </a:lnRef>
-          <a:fillRef idx="3">
-            <a:schemeClr val="accent1"/>
-          </a:fillRef>
-          <a:effectRef idx="2">
-            <a:schemeClr val="accent1"/>
-          </a:effectRef>
-          <a:fontRef idx="minor">
-            <a:schemeClr val="lt1"/>
-          </a:fontRef>
-        </p:style>
-        <p:txBody>
-          <a:bodyPr rtlCol="0" anchor="ctr"/>
-          <a:lstStyle/>
-          <a:p>
-            <a:endParaRPr/>
-          </a:p>
-        </p:txBody>
-      </p:sp>
-      <p:sp>
-        <p:nvSpPr>
-          <p:cNvPr id="29" name="TextBox 28"/>
-          <p:cNvSpPr txBox="1"/>
-          <p:nvPr/>
-        </p:nvSpPr>
-        <p:spPr>
-          <a:xfrm>
-            <a:off x="914400" y="4828032"/>
-            <a:ext cx="10424160" cy="1005840"/>
-          </a:xfrm>
-          <a:prstGeom prst="rect">
-            <a:avLst/>
-          </a:prstGeom>
-          <a:noFill/>
-        </p:spPr>
-        <p:txBody>
-          <a:bodyPr wrap="square" lIns="0" tIns="0" rIns="0" bIns="0" anchor="t">
-            <a:spAutoFit/>
-          </a:bodyPr>
-          <a:lstStyle/>
-          <a:p>
-            <a:pPr algn="l">
-              <a:lnSpc>
-                <a:spcPct val="160000"/>
-              </a:lnSpc>
-              <a:spcAft>
-                <a:spcPts val="400"/>
-              </a:spcAft>
-            </a:pPr>
-            <a:r>
-              <a:rPr sz="1300" b="0">
-                <a:solidFill>
-                  <a:srgbClr val="FFFFFF"/>
-                </a:solidFill>
-                <a:latin typeface="Meiryo"/>
                 <a:ea typeface="Meiryo"/>
               </a:rPr>
-              <a:t>ご確認いただきたい点</a:t>
-            </a:r>
-          </a:p>
-          <a:p>
-            <a:r>
-              <a:rPr sz="1300" b="0">
-                <a:solidFill>
-                  <a:srgbClr val="FFFFFF"/>
-                </a:solidFill>
-                <a:latin typeface="Meiryo"/>
-                <a:ea typeface="Meiryo"/>
-              </a:rPr>
-              <a:t>　保管データについて「必ず御社Azure内に置く」という社内ルールはございますか。</a:t>
-            </a:r>
-          </a:p>
-          <a:p>
-            <a:r>
-              <a:rPr sz="1300" b="0">
-                <a:solidFill>
-                  <a:srgbClr val="FFFFFF"/>
-                </a:solidFill>
-                <a:latin typeface="Meiryo"/>
-                <a:ea typeface="Meiryo"/>
-              </a:rPr>
-              <a:t>　特になければ、データベースは Supabase のまま東京リージョンへ移し、国内保管といたします。</a:t>
+              <a:t>AI に送信した情報が、AIモデルの学習に利用されることはありません（商用APIの利用規約による）。</a:t>
             </a:r>
           </a:p>
         </p:txBody>
@@ -11484,7 +11512,7 @@
                 <a:latin typeface="Meiryo"/>
                 <a:ea typeface="Meiryo"/>
               </a:rPr>
-              <a:t>データの保管場所</a:t>
+              <a:t>プライバシーポリシー 記載文言案</a:t>
             </a:r>
           </a:p>
         </p:txBody>
@@ -11520,318 +11548,34 @@
                 <a:latin typeface="Meiryo"/>
                 <a:ea typeface="Meiryo"/>
               </a:rPr>
-              <a:t>システムは3つの部品でできています。それぞれの保管・処理の場所は次のとおりです。</a:t>
-            </a:r>
-          </a:p>
-        </p:txBody>
-      </p:sp>
-      <p:sp>
-        <p:nvSpPr>
-          <p:cNvPr id="5" name="TextBox 4"/>
-          <p:cNvSpPr txBox="1"/>
-          <p:nvPr/>
-        </p:nvSpPr>
-        <p:spPr>
-          <a:xfrm>
-            <a:off x="566928" y="1600200"/>
-            <a:ext cx="2926080" cy="320040"/>
-          </a:xfrm>
-          <a:prstGeom prst="rect">
-            <a:avLst/>
-          </a:prstGeom>
-          <a:noFill/>
-        </p:spPr>
-        <p:txBody>
-          <a:bodyPr wrap="square" lIns="0" rIns="0" tIns="0" bIns="0">
-            <a:spAutoFit/>
-          </a:bodyPr>
-          <a:lstStyle/>
-          <a:p>
-            <a:pPr algn="l"/>
-            <a:r>
-              <a:rPr sz="1200" b="1">
-                <a:solidFill>
-                  <a:srgbClr val="6B7280"/>
-                </a:solidFill>
-                <a:latin typeface="Meiryo"/>
-                <a:ea typeface="Meiryo"/>
-              </a:rPr>
-              <a:t>部品</a:t>
-            </a:r>
-          </a:p>
-        </p:txBody>
-      </p:sp>
-      <p:sp>
-        <p:nvSpPr>
-          <p:cNvPr id="6" name="TextBox 5"/>
-          <p:cNvSpPr txBox="1"/>
-          <p:nvPr/>
-        </p:nvSpPr>
-        <p:spPr>
-          <a:xfrm>
-            <a:off x="3767328" y="1600200"/>
-            <a:ext cx="2743200" cy="320040"/>
-          </a:xfrm>
-          <a:prstGeom prst="rect">
-            <a:avLst/>
-          </a:prstGeom>
-          <a:noFill/>
-        </p:spPr>
-        <p:txBody>
-          <a:bodyPr wrap="square" lIns="0" rIns="0" tIns="0" bIns="0">
-            <a:spAutoFit/>
-          </a:bodyPr>
-          <a:lstStyle/>
-          <a:p>
-            <a:pPr algn="l"/>
-            <a:r>
-              <a:rPr sz="1200" b="1">
-                <a:solidFill>
-                  <a:srgbClr val="6B7280"/>
-                </a:solidFill>
-                <a:latin typeface="Meiryo"/>
-                <a:ea typeface="Meiryo"/>
-              </a:rPr>
-              <a:t>現在</a:t>
-            </a:r>
-          </a:p>
-        </p:txBody>
-      </p:sp>
-      <p:sp>
-        <p:nvSpPr>
-          <p:cNvPr id="7" name="TextBox 6"/>
-          <p:cNvSpPr txBox="1"/>
-          <p:nvPr/>
-        </p:nvSpPr>
-        <p:spPr>
-          <a:xfrm>
-            <a:off x="6784848" y="1600200"/>
-            <a:ext cx="2743200" cy="320040"/>
-          </a:xfrm>
-          <a:prstGeom prst="rect">
-            <a:avLst/>
-          </a:prstGeom>
-          <a:noFill/>
-        </p:spPr>
-        <p:txBody>
-          <a:bodyPr wrap="square" lIns="0" rIns="0" tIns="0" bIns="0">
-            <a:spAutoFit/>
-          </a:bodyPr>
-          <a:lstStyle/>
-          <a:p>
-            <a:pPr algn="l"/>
-            <a:r>
-              <a:rPr sz="1200" b="1">
-                <a:solidFill>
-                  <a:srgbClr val="6B7280"/>
-                </a:solidFill>
-                <a:latin typeface="Meiryo"/>
-                <a:ea typeface="Meiryo"/>
-              </a:rPr>
-              <a:t>対応後</a:t>
-            </a:r>
-          </a:p>
-        </p:txBody>
-      </p:sp>
-      <p:sp>
-        <p:nvSpPr>
-          <p:cNvPr id="8" name="TextBox 7"/>
-          <p:cNvSpPr txBox="1"/>
-          <p:nvPr/>
-        </p:nvSpPr>
-        <p:spPr>
-          <a:xfrm>
-            <a:off x="9802368" y="1600200"/>
-            <a:ext cx="2514600" cy="320040"/>
-          </a:xfrm>
-          <a:prstGeom prst="rect">
-            <a:avLst/>
-          </a:prstGeom>
-          <a:noFill/>
-        </p:spPr>
-        <p:txBody>
-          <a:bodyPr wrap="square" lIns="0" rIns="0" tIns="0" bIns="0">
-            <a:spAutoFit/>
-          </a:bodyPr>
-          <a:lstStyle/>
-          <a:p>
-            <a:pPr algn="l"/>
-            <a:r>
-              <a:rPr sz="1200" b="1">
-                <a:solidFill>
-                  <a:srgbClr val="6B7280"/>
-                </a:solidFill>
-                <a:latin typeface="Meiryo"/>
-                <a:ea typeface="Meiryo"/>
-              </a:rPr>
-              <a:t>時期</a:t>
-            </a:r>
-          </a:p>
-        </p:txBody>
-      </p:sp>
-      <p:sp>
-        <p:nvSpPr>
-          <p:cNvPr id="9" name="TextBox 8"/>
-          <p:cNvSpPr txBox="1"/>
-          <p:nvPr/>
-        </p:nvSpPr>
-        <p:spPr>
-          <a:xfrm>
-            <a:off x="566928" y="2240280"/>
-            <a:ext cx="2926080" cy="365760"/>
-          </a:xfrm>
-          <a:prstGeom prst="rect">
-            <a:avLst/>
-          </a:prstGeom>
-          <a:noFill/>
-        </p:spPr>
-        <p:txBody>
-          <a:bodyPr wrap="square" lIns="0" rIns="0" tIns="0" bIns="0">
-            <a:spAutoFit/>
-          </a:bodyPr>
-          <a:lstStyle/>
-          <a:p>
-            <a:pPr algn="l"/>
-            <a:r>
-              <a:rPr sz="1250" b="1">
-                <a:solidFill>
-                  <a:srgbClr val="141A33"/>
-                </a:solidFill>
-                <a:latin typeface="Meiryo"/>
-                <a:ea typeface="Meiryo"/>
-              </a:rPr>
-              <a:t>アプリ本体</a:t>
-            </a:r>
-          </a:p>
-        </p:txBody>
-      </p:sp>
-      <p:sp>
-        <p:nvSpPr>
-          <p:cNvPr id="10" name="TextBox 9"/>
-          <p:cNvSpPr txBox="1"/>
-          <p:nvPr/>
-        </p:nvSpPr>
-        <p:spPr>
-          <a:xfrm>
-            <a:off x="3767328" y="2240280"/>
-            <a:ext cx="2743200" cy="365760"/>
-          </a:xfrm>
-          <a:prstGeom prst="rect">
-            <a:avLst/>
-          </a:prstGeom>
-          <a:noFill/>
-        </p:spPr>
-        <p:txBody>
-          <a:bodyPr wrap="square" lIns="0" rIns="0" tIns="0" bIns="0">
-            <a:spAutoFit/>
-          </a:bodyPr>
-          <a:lstStyle/>
-          <a:p>
-            <a:pPr algn="l"/>
-            <a:r>
-              <a:rPr sz="1200" b="0">
-                <a:solidFill>
-                  <a:srgbClr val="6B7280"/>
-                </a:solidFill>
-                <a:latin typeface="Meiryo"/>
-                <a:ea typeface="Meiryo"/>
-              </a:rPr>
-              <a:t>米国オレゴン（Render）</a:t>
-            </a:r>
-          </a:p>
-        </p:txBody>
-      </p:sp>
-      <p:sp>
-        <p:nvSpPr>
-          <p:cNvPr id="11" name="TextBox 10"/>
-          <p:cNvSpPr txBox="1"/>
-          <p:nvPr/>
-        </p:nvSpPr>
-        <p:spPr>
-          <a:xfrm>
-            <a:off x="6784848" y="2240280"/>
-            <a:ext cx="2743200" cy="365760"/>
-          </a:xfrm>
-          <a:prstGeom prst="rect">
-            <a:avLst/>
-          </a:prstGeom>
-          <a:noFill/>
-        </p:spPr>
-        <p:txBody>
-          <a:bodyPr wrap="square" lIns="0" rIns="0" tIns="0" bIns="0">
-            <a:spAutoFit/>
-          </a:bodyPr>
-          <a:lstStyle/>
-          <a:p>
-            <a:pPr algn="l"/>
-            <a:r>
-              <a:rPr sz="1200" b="1">
-                <a:solidFill>
-                  <a:srgbClr val="141A33"/>
-                </a:solidFill>
-                <a:latin typeface="Meiryo"/>
-                <a:ea typeface="Meiryo"/>
-              </a:rPr>
-              <a:t>東京（Azure）</a:t>
-            </a:r>
-          </a:p>
-        </p:txBody>
-      </p:sp>
-      <p:sp>
-        <p:nvSpPr>
-          <p:cNvPr id="12" name="TextBox 11"/>
-          <p:cNvSpPr txBox="1"/>
-          <p:nvPr/>
-        </p:nvSpPr>
-        <p:spPr>
-          <a:xfrm>
-            <a:off x="9802368" y="2240280"/>
-            <a:ext cx="2514600" cy="365760"/>
-          </a:xfrm>
-          <a:prstGeom prst="rect">
-            <a:avLst/>
-          </a:prstGeom>
-          <a:noFill/>
-        </p:spPr>
-        <p:txBody>
-          <a:bodyPr wrap="square" lIns="0" rIns="0" tIns="0" bIns="0">
-            <a:spAutoFit/>
-          </a:bodyPr>
-          <a:lstStyle/>
-          <a:p>
-            <a:pPr algn="l"/>
-            <a:r>
-              <a:rPr sz="1200" b="0">
-                <a:solidFill>
-                  <a:srgbClr val="6B7280"/>
-                </a:solidFill>
-                <a:latin typeface="Meiryo"/>
-                <a:ea typeface="Meiryo"/>
-              </a:rPr>
-              <a:t>完了</a:t>
-            </a:r>
-          </a:p>
-        </p:txBody>
-      </p:sp>
-      <p:sp>
-        <p:nvSpPr>
-          <p:cNvPr id="13" name="Rectangle 12"/>
+              <a:t>下記をプライバシーポリシーに追加します。最終的な文面は、顧問の専門家にご確認ください。</a:t>
+            </a:r>
+          </a:p>
+        </p:txBody>
+      </p:sp>
+      <p:sp>
+        <p:nvSpPr>
+          <p:cNvPr id="5" name="Rounded Rectangle 4"/>
           <p:cNvSpPr/>
           <p:nvPr/>
         </p:nvSpPr>
         <p:spPr>
           <a:xfrm>
-            <a:off x="566928" y="2788920"/>
-            <a:ext cx="11183112" cy="731520"/>
-          </a:xfrm>
-          <a:prstGeom prst="rect">
-            <a:avLst/>
+            <a:off x="566928" y="1554480"/>
+            <a:ext cx="11183112" cy="3931920"/>
+          </a:xfrm>
+          <a:prstGeom prst="roundRect">
+            <a:avLst>
+              <a:gd name="adj" fmla="val 3000"/>
+            </a:avLst>
           </a:prstGeom>
           <a:solidFill>
-            <a:srgbClr val="F5F6F8"/>
+            <a:srgbClr val="FFFFFF"/>
           </a:solidFill>
-          <a:ln>
-            <a:noFill/>
+          <a:ln w="12700">
+            <a:solidFill>
+              <a:srgbClr val="C7CDD8"/>
+            </a:solidFill>
           </a:ln>
           <a:effectLst/>
         </p:spPr>
@@ -11857,14 +11601,14 @@
       </p:sp>
       <p:sp>
         <p:nvSpPr>
-          <p:cNvPr id="14" name="TextBox 13"/>
-          <p:cNvSpPr txBox="1"/>
-          <p:nvPr/>
-        </p:nvSpPr>
-        <p:spPr>
-          <a:xfrm>
-            <a:off x="566928" y="2971800"/>
-            <a:ext cx="2926080" cy="365760"/>
+          <p:cNvPr id="6" name="TextBox 5"/>
+          <p:cNvSpPr txBox="1"/>
+          <p:nvPr/>
+        </p:nvSpPr>
+        <p:spPr>
+          <a:xfrm>
+            <a:off x="932688" y="1874520"/>
+            <a:ext cx="10430640" cy="411480"/>
           </a:xfrm>
           <a:prstGeom prst="rect">
             <a:avLst/>
@@ -11879,28 +11623,28 @@
           <a:p>
             <a:pPr algn="l"/>
             <a:r>
-              <a:rPr sz="1250" b="1">
+              <a:rPr sz="1350" b="1">
                 <a:solidFill>
                   <a:srgbClr val="141A33"/>
                 </a:solidFill>
                 <a:latin typeface="Meiryo"/>
                 <a:ea typeface="Meiryo"/>
               </a:rPr>
-              <a:t>データベース・添付ファイル</a:t>
-            </a:r>
-          </a:p>
-        </p:txBody>
-      </p:sp>
-      <p:sp>
-        <p:nvSpPr>
-          <p:cNvPr id="15" name="TextBox 14"/>
-          <p:cNvSpPr txBox="1"/>
-          <p:nvPr/>
-        </p:nvSpPr>
-        <p:spPr>
-          <a:xfrm>
-            <a:off x="3767328" y="2971800"/>
-            <a:ext cx="2743200" cy="365760"/>
+              <a:t>第◯条（外国にある第三者への個人データの提供）</a:t>
+            </a:r>
+          </a:p>
+        </p:txBody>
+      </p:sp>
+      <p:sp>
+        <p:nvSpPr>
+          <p:cNvPr id="7" name="TextBox 6"/>
+          <p:cNvSpPr txBox="1"/>
+          <p:nvPr/>
+        </p:nvSpPr>
+        <p:spPr>
+          <a:xfrm>
+            <a:off x="932688" y="2423160"/>
+            <a:ext cx="10430640" cy="2926080"/>
           </a:xfrm>
           <a:prstGeom prst="rect">
             <a:avLst/>
@@ -11913,246 +11657,238 @@
           </a:bodyPr>
           <a:lstStyle/>
           <a:p>
-            <a:pPr algn="l"/>
-            <a:r>
-              <a:rPr sz="1200" b="0">
-                <a:solidFill>
-                  <a:srgbClr val="6B7280"/>
+            <a:pPr algn="l">
+              <a:spcAft>
+                <a:spcPts val="200"/>
+              </a:spcAft>
+            </a:pPr>
+            <a:r>
+              <a:rPr sz="1150" b="0">
+                <a:solidFill>
+                  <a:srgbClr val="141A33"/>
                 </a:solidFill>
                 <a:latin typeface="Meiryo"/>
                 <a:ea typeface="Meiryo"/>
               </a:rPr>
-              <a:t>韓国ソウル（Supabase）</a:t>
-            </a:r>
-          </a:p>
-        </p:txBody>
-      </p:sp>
-      <p:sp>
-        <p:nvSpPr>
-          <p:cNvPr id="16" name="TextBox 15"/>
-          <p:cNvSpPr txBox="1"/>
-          <p:nvPr/>
-        </p:nvSpPr>
-        <p:spPr>
-          <a:xfrm>
-            <a:off x="6784848" y="2971800"/>
-            <a:ext cx="2743200" cy="365760"/>
-          </a:xfrm>
-          <a:prstGeom prst="rect">
-            <a:avLst/>
-          </a:prstGeom>
-          <a:noFill/>
-        </p:spPr>
-        <p:txBody>
-          <a:bodyPr wrap="square" lIns="0" rIns="0" tIns="0" bIns="0">
-            <a:spAutoFit/>
-          </a:bodyPr>
-          <a:lstStyle/>
-          <a:p>
-            <a:pPr algn="l"/>
-            <a:r>
-              <a:rPr sz="1200" b="1">
+              <a:t>当社は、業務の遂行にあたり、次のとおり外国にある第三者へ個人データの取扱いを委託しています。</a:t>
+            </a:r>
+          </a:p>
+          <a:p>
+            <a:pPr algn="l">
+              <a:spcAft>
+                <a:spcPts val="200"/>
+              </a:spcAft>
+            </a:pPr>
+            <a:r>
+              <a:rPr sz="1150" b="0">
                 <a:solidFill>
                   <a:srgbClr val="141A33"/>
                 </a:solidFill>
                 <a:latin typeface="Meiryo"/>
                 <a:ea typeface="Meiryo"/>
               </a:rPr>
-              <a:t>東京（Supabase）</a:t>
-            </a:r>
-          </a:p>
-        </p:txBody>
-      </p:sp>
-      <p:sp>
-        <p:nvSpPr>
-          <p:cNvPr id="17" name="TextBox 16"/>
-          <p:cNvSpPr txBox="1"/>
-          <p:nvPr/>
-        </p:nvSpPr>
-        <p:spPr>
-          <a:xfrm>
-            <a:off x="9802368" y="2971800"/>
-            <a:ext cx="2514600" cy="365760"/>
-          </a:xfrm>
-          <a:prstGeom prst="rect">
-            <a:avLst/>
-          </a:prstGeom>
-          <a:noFill/>
-        </p:spPr>
-        <p:txBody>
-          <a:bodyPr wrap="square" lIns="0" rIns="0" tIns="0" bIns="0">
-            <a:spAutoFit/>
-          </a:bodyPr>
-          <a:lstStyle/>
-          <a:p>
-            <a:pPr algn="l"/>
-            <a:r>
-              <a:rPr sz="1200" b="0">
-                <a:solidFill>
-                  <a:srgbClr val="6B7280"/>
+              <a:t/>
+            </a:r>
+          </a:p>
+          <a:p>
+            <a:pPr algn="l">
+              <a:spcAft>
+                <a:spcPts val="200"/>
+              </a:spcAft>
+            </a:pPr>
+            <a:r>
+              <a:rPr sz="1150" b="0">
+                <a:solidFill>
+                  <a:srgbClr val="141A33"/>
                 </a:solidFill>
                 <a:latin typeface="Meiryo"/>
                 <a:ea typeface="Meiryo"/>
               </a:rPr>
-              <a:t>2026年8月中</a:t>
-            </a:r>
-          </a:p>
-        </p:txBody>
-      </p:sp>
-      <p:sp>
-        <p:nvSpPr>
-          <p:cNvPr id="18" name="TextBox 17"/>
-          <p:cNvSpPr txBox="1"/>
-          <p:nvPr/>
-        </p:nvSpPr>
-        <p:spPr>
-          <a:xfrm>
-            <a:off x="566928" y="3703320"/>
-            <a:ext cx="2926080" cy="365760"/>
-          </a:xfrm>
-          <a:prstGeom prst="rect">
-            <a:avLst/>
-          </a:prstGeom>
-          <a:noFill/>
-        </p:spPr>
-        <p:txBody>
-          <a:bodyPr wrap="square" lIns="0" rIns="0" tIns="0" bIns="0">
-            <a:spAutoFit/>
-          </a:bodyPr>
-          <a:lstStyle/>
-          <a:p>
-            <a:pPr algn="l"/>
-            <a:r>
-              <a:rPr sz="1250" b="1">
+              <a:t>　・Supabase, Inc.（アメリカ合衆国／データの保管場所：日本）</a:t>
+            </a:r>
+          </a:p>
+          <a:p>
+            <a:pPr algn="l">
+              <a:spcAft>
+                <a:spcPts val="200"/>
+              </a:spcAft>
+            </a:pPr>
+            <a:r>
+              <a:rPr sz="1150" b="0">
                 <a:solidFill>
                   <a:srgbClr val="141A33"/>
                 </a:solidFill>
                 <a:latin typeface="Meiryo"/>
                 <a:ea typeface="Meiryo"/>
               </a:rPr>
-              <a:t>AI・OCR</a:t>
-            </a:r>
-          </a:p>
-        </p:txBody>
-      </p:sp>
-      <p:sp>
-        <p:nvSpPr>
-          <p:cNvPr id="19" name="TextBox 18"/>
-          <p:cNvSpPr txBox="1"/>
-          <p:nvPr/>
-        </p:nvSpPr>
-        <p:spPr>
-          <a:xfrm>
-            <a:off x="3767328" y="3703320"/>
-            <a:ext cx="2743200" cy="365760"/>
-          </a:xfrm>
-          <a:prstGeom prst="rect">
-            <a:avLst/>
-          </a:prstGeom>
-          <a:noFill/>
-        </p:spPr>
-        <p:txBody>
-          <a:bodyPr wrap="square" lIns="0" rIns="0" tIns="0" bIns="0">
-            <a:spAutoFit/>
-          </a:bodyPr>
-          <a:lstStyle/>
-          <a:p>
-            <a:pPr algn="l"/>
-            <a:r>
-              <a:rPr sz="1200" b="0">
-                <a:solidFill>
-                  <a:srgbClr val="6B7280"/>
+              <a:t>　　委託する業務：案件情報およびお預かりした書類の保管</a:t>
+            </a:r>
+          </a:p>
+          <a:p>
+            <a:pPr algn="l">
+              <a:spcAft>
+                <a:spcPts val="200"/>
+              </a:spcAft>
+            </a:pPr>
+            <a:r>
+              <a:rPr sz="1150" b="0">
+                <a:solidFill>
+                  <a:srgbClr val="141A33"/>
                 </a:solidFill>
                 <a:latin typeface="Meiryo"/>
                 <a:ea typeface="Meiryo"/>
               </a:rPr>
-              <a:t>米国（Anthropic）</a:t>
-            </a:r>
-          </a:p>
-        </p:txBody>
-      </p:sp>
-      <p:sp>
-        <p:nvSpPr>
-          <p:cNvPr id="20" name="TextBox 19"/>
-          <p:cNvSpPr txBox="1"/>
-          <p:nvPr/>
-        </p:nvSpPr>
-        <p:spPr>
-          <a:xfrm>
-            <a:off x="6784848" y="3703320"/>
-            <a:ext cx="2743200" cy="365760"/>
-          </a:xfrm>
-          <a:prstGeom prst="rect">
-            <a:avLst/>
-          </a:prstGeom>
-          <a:noFill/>
-        </p:spPr>
-        <p:txBody>
-          <a:bodyPr wrap="square" lIns="0" rIns="0" tIns="0" bIns="0">
-            <a:spAutoFit/>
-          </a:bodyPr>
-          <a:lstStyle/>
-          <a:p>
-            <a:pPr algn="l"/>
-            <a:r>
-              <a:rPr sz="1200" b="1">
+              <a:t/>
+            </a:r>
+          </a:p>
+          <a:p>
+            <a:pPr algn="l">
+              <a:spcAft>
+                <a:spcPts val="200"/>
+              </a:spcAft>
+            </a:pPr>
+            <a:r>
+              <a:rPr sz="1150" b="0">
                 <a:solidFill>
                   <a:srgbClr val="141A33"/>
                 </a:solidFill>
                 <a:latin typeface="Meiryo"/>
                 <a:ea typeface="Meiryo"/>
               </a:rPr>
-              <a:t>当面は米国のまま</a:t>
-            </a:r>
-          </a:p>
-        </p:txBody>
-      </p:sp>
-      <p:sp>
-        <p:nvSpPr>
-          <p:cNvPr id="21" name="TextBox 20"/>
-          <p:cNvSpPr txBox="1"/>
-          <p:nvPr/>
-        </p:nvSpPr>
-        <p:spPr>
-          <a:xfrm>
-            <a:off x="9802368" y="3703320"/>
-            <a:ext cx="2514600" cy="365760"/>
-          </a:xfrm>
-          <a:prstGeom prst="rect">
-            <a:avLst/>
-          </a:prstGeom>
-          <a:noFill/>
-        </p:spPr>
-        <p:txBody>
-          <a:bodyPr wrap="square" lIns="0" rIns="0" tIns="0" bIns="0">
-            <a:spAutoFit/>
-          </a:bodyPr>
-          <a:lstStyle/>
-          <a:p>
-            <a:pPr algn="l"/>
-            <a:r>
-              <a:rPr sz="1200" b="0">
-                <a:solidFill>
-                  <a:srgbClr val="6B7280"/>
+              <a:t>　・Anthropic PBC（アメリカ合衆国）</a:t>
+            </a:r>
+          </a:p>
+          <a:p>
+            <a:pPr algn="l">
+              <a:spcAft>
+                <a:spcPts val="200"/>
+              </a:spcAft>
+            </a:pPr>
+            <a:r>
+              <a:rPr sz="1150" b="0">
+                <a:solidFill>
+                  <a:srgbClr val="141A33"/>
                 </a:solidFill>
                 <a:latin typeface="Meiryo"/>
                 <a:ea typeface="Meiryo"/>
               </a:rPr>
-              <a:t>規約・公表で対応</a:t>
-            </a:r>
-          </a:p>
-        </p:txBody>
-      </p:sp>
-      <p:sp>
-        <p:nvSpPr>
-          <p:cNvPr id="22" name="Rounded Rectangle 21"/>
+              <a:t>　　委託する業務：書類画像の文字読み取り（OCR）および文章の要約</a:t>
+            </a:r>
+          </a:p>
+          <a:p>
+            <a:pPr algn="l">
+              <a:spcAft>
+                <a:spcPts val="200"/>
+              </a:spcAft>
+            </a:pPr>
+            <a:r>
+              <a:rPr sz="1150" b="0">
+                <a:solidFill>
+                  <a:srgbClr val="141A33"/>
+                </a:solidFill>
+                <a:latin typeface="Meiryo"/>
+                <a:ea typeface="Meiryo"/>
+              </a:rPr>
+              <a:t/>
+            </a:r>
+          </a:p>
+          <a:p>
+            <a:pPr algn="l">
+              <a:spcAft>
+                <a:spcPts val="200"/>
+              </a:spcAft>
+            </a:pPr>
+            <a:r>
+              <a:rPr sz="1150" b="0">
+                <a:solidFill>
+                  <a:srgbClr val="141A33"/>
+                </a:solidFill>
+                <a:latin typeface="Meiryo"/>
+                <a:ea typeface="Meiryo"/>
+              </a:rPr>
+              <a:t>各国における個人情報の保護に関する制度については、個人情報保護委員会の公表資料をご参照ください。</a:t>
+            </a:r>
+          </a:p>
+          <a:p>
+            <a:pPr algn="l">
+              <a:spcAft>
+                <a:spcPts val="200"/>
+              </a:spcAft>
+            </a:pPr>
+            <a:r>
+              <a:rPr sz="1150" b="0">
+                <a:solidFill>
+                  <a:srgbClr val="141A33"/>
+                </a:solidFill>
+                <a:latin typeface="Meiryo"/>
+                <a:ea typeface="Meiryo"/>
+              </a:rPr>
+              <a:t>各委託先はいずれも第三者機関によるセキュリティ認証を取得しており、当社は各社との間でデータの</a:t>
+            </a:r>
+          </a:p>
+          <a:p>
+            <a:pPr algn="l">
+              <a:spcAft>
+                <a:spcPts val="200"/>
+              </a:spcAft>
+            </a:pPr>
+            <a:r>
+              <a:rPr sz="1150" b="0">
+                <a:solidFill>
+                  <a:srgbClr val="141A33"/>
+                </a:solidFill>
+                <a:latin typeface="Meiryo"/>
+                <a:ea typeface="Meiryo"/>
+              </a:rPr>
+              <a:t>取扱いに関する契約を締結したうえで、個人データの安全管理措置を講じています。</a:t>
+            </a:r>
+          </a:p>
+          <a:p>
+            <a:pPr algn="l">
+              <a:spcAft>
+                <a:spcPts val="200"/>
+              </a:spcAft>
+            </a:pPr>
+            <a:r>
+              <a:rPr sz="1150" b="0">
+                <a:solidFill>
+                  <a:srgbClr val="141A33"/>
+                </a:solidFill>
+                <a:latin typeface="Meiryo"/>
+                <a:ea typeface="Meiryo"/>
+              </a:rPr>
+              <a:t/>
+            </a:r>
+          </a:p>
+          <a:p>
+            <a:pPr algn="l">
+              <a:spcAft>
+                <a:spcPts val="200"/>
+              </a:spcAft>
+            </a:pPr>
+            <a:r>
+              <a:rPr sz="1150" b="0">
+                <a:solidFill>
+                  <a:srgbClr val="141A33"/>
+                </a:solidFill>
+                <a:latin typeface="Meiryo"/>
+                <a:ea typeface="Meiryo"/>
+              </a:rPr>
+              <a:t>なお、上記のAI事業者へ送信した情報が、同社のAIモデルの学習に利用されることはありません。</a:t>
+            </a:r>
+          </a:p>
+        </p:txBody>
+      </p:sp>
+      <p:sp>
+        <p:nvSpPr>
+          <p:cNvPr id="8" name="Rounded Rectangle 7"/>
           <p:cNvSpPr/>
           <p:nvPr/>
         </p:nvSpPr>
         <p:spPr>
           <a:xfrm>
-            <a:off x="566928" y="4480560"/>
-            <a:ext cx="11073384" cy="960120"/>
+            <a:off x="566928" y="5760720"/>
+            <a:ext cx="11073384" cy="685800"/>
           </a:xfrm>
           <a:prstGeom prst="roundRect">
             <a:avLst>
@@ -12189,14 +11925,14 @@
       </p:sp>
       <p:sp>
         <p:nvSpPr>
-          <p:cNvPr id="23" name="TextBox 22"/>
-          <p:cNvSpPr txBox="1"/>
-          <p:nvPr/>
-        </p:nvSpPr>
-        <p:spPr>
-          <a:xfrm>
-            <a:off x="868680" y="4640580"/>
-            <a:ext cx="10515600" cy="640080"/>
+          <p:cNvPr id="9" name="TextBox 8"/>
+          <p:cNvSpPr txBox="1"/>
+          <p:nvPr/>
+        </p:nvSpPr>
+        <p:spPr>
+          <a:xfrm>
+            <a:off x="868680" y="5920740"/>
+            <a:ext cx="10515600" cy="365760"/>
           </a:xfrm>
           <a:prstGeom prst="rect">
             <a:avLst/>
@@ -12222,108 +11958,7 @@
                 <a:latin typeface="Meiryo"/>
                 <a:ea typeface="Meiryo"/>
               </a:rPr>
-              <a:t>案件情報と、戸籍・通帳などの書類ファイルは、すべてデータベース側にあります。</a:t>
-            </a:r>
-          </a:p>
-          <a:p>
-            <a:pPr algn="l">
-              <a:spcAft>
-                <a:spcPts val="300"/>
-              </a:spcAft>
-            </a:pPr>
-            <a:r>
-              <a:rPr sz="1200" b="0">
-                <a:solidFill>
-                  <a:srgbClr val="141A33"/>
-                </a:solidFill>
-                <a:latin typeface="Meiryo"/>
-                <a:ea typeface="Meiryo"/>
-              </a:rPr>
-              <a:t>ここを国内に移すことの効果が最も大きいため、優先して実施します。</a:t>
-            </a:r>
-          </a:p>
-        </p:txBody>
-      </p:sp>
-      <p:sp>
-        <p:nvSpPr>
-          <p:cNvPr id="24" name="Rounded Rectangle 23"/>
-          <p:cNvSpPr/>
-          <p:nvPr/>
-        </p:nvSpPr>
-        <p:spPr>
-          <a:xfrm>
-            <a:off x="566928" y="5486400"/>
-            <a:ext cx="11073384" cy="685800"/>
-          </a:xfrm>
-          <a:prstGeom prst="roundRect">
-            <a:avLst>
-              <a:gd name="adj" fmla="val 12000"/>
-            </a:avLst>
-          </a:prstGeom>
-          <a:solidFill>
-            <a:srgbClr val="F2F4FB"/>
-          </a:solidFill>
-          <a:ln>
-            <a:noFill/>
-          </a:ln>
-          <a:effectLst/>
-        </p:spPr>
-        <p:style>
-          <a:lnRef idx="1">
-            <a:schemeClr val="accent1"/>
-          </a:lnRef>
-          <a:fillRef idx="3">
-            <a:schemeClr val="accent1"/>
-          </a:fillRef>
-          <a:effectRef idx="2">
-            <a:schemeClr val="accent1"/>
-          </a:effectRef>
-          <a:fontRef idx="minor">
-            <a:schemeClr val="lt1"/>
-          </a:fontRef>
-        </p:style>
-        <p:txBody>
-          <a:bodyPr rtlCol="0" anchor="ctr"/>
-          <a:lstStyle/>
-          <a:p/>
-        </p:txBody>
-      </p:sp>
-      <p:sp>
-        <p:nvSpPr>
-          <p:cNvPr id="25" name="TextBox 24"/>
-          <p:cNvSpPr txBox="1"/>
-          <p:nvPr/>
-        </p:nvSpPr>
-        <p:spPr>
-          <a:xfrm>
-            <a:off x="868680" y="5646420"/>
-            <a:ext cx="10515600" cy="365760"/>
-          </a:xfrm>
-          <a:prstGeom prst="rect">
-            <a:avLst/>
-          </a:prstGeom>
-          <a:noFill/>
-        </p:spPr>
-        <p:txBody>
-          <a:bodyPr wrap="square" lIns="0" rIns="0" tIns="0" bIns="0">
-            <a:spAutoFit/>
-          </a:bodyPr>
-          <a:lstStyle/>
-          <a:p>
-            <a:pPr algn="l">
-              <a:spcAft>
-                <a:spcPts val="300"/>
-              </a:spcAft>
-            </a:pPr>
-            <a:r>
-              <a:rPr sz="1250" b="1">
-                <a:solidFill>
-                  <a:srgbClr val="4F46E5"/>
-                </a:solidFill>
-                <a:latin typeface="Meiryo"/>
-                <a:ea typeface="Meiryo"/>
-              </a:rPr>
-              <a:t>AI は現時点で日本国内で処理する選択肢が提供されていないため、当面は米国のまま、契約と公表で対応します。</a:t>
+              <a:t>Supabase の保管場所は東京リージョン（日本）へ移行済みです。上記のとおり「日本」と記載してください。</a:t>
             </a:r>
           </a:p>
         </p:txBody>
@@ -12337,7 +11972,7 @@
 </file>
 
 <file path=ppt/slides/slide9.xml><?xml version="1.0" encoding="utf-8"?>
-<p:sld xmlns:a="http://schemas.openxmlformats.org/drawingml/2006/main" xmlns:p="http://schemas.openxmlformats.org/presentationml/2006/main" xmlns:r="http://schemas.openxmlformats.org/officeDocument/2006/relationships">
+<p:sld xmlns:a="http://schemas.openxmlformats.org/drawingml/2006/main" xmlns:r="http://schemas.openxmlformats.org/officeDocument/2006/relationships" xmlns:p="http://schemas.openxmlformats.org/presentationml/2006/main">
   <p:cSld>
     <p:spTree>
       <p:nvGrpSpPr>
@@ -12345,7 +11980,14 @@
         <p:cNvGrpSpPr/>
         <p:nvPr/>
       </p:nvGrpSpPr>
-      <p:grpSpPr/>
+      <p:grpSpPr>
+        <a:xfrm>
+          <a:off x="0" y="0"/>
+          <a:ext cx="0" cy="0"/>
+          <a:chOff x="0" y="0"/>
+          <a:chExt cx="0" cy="0"/>
+        </a:xfrm>
+      </p:grpSpPr>
       <p:sp>
         <p:nvSpPr>
           <p:cNvPr id="2" name="Rectangle 1"/>
@@ -12385,7 +12027,9 @@
         <p:txBody>
           <a:bodyPr rtlCol="0" anchor="ctr"/>
           <a:lstStyle/>
-          <a:p/>
+          <a:p>
+            <a:endParaRPr/>
+          </a:p>
         </p:txBody>
       </p:sp>
       <p:sp>
@@ -12405,21 +12049,27 @@
           <a:noFill/>
         </p:spPr>
         <p:txBody>
-          <a:bodyPr wrap="square" lIns="0" rIns="0" tIns="0" bIns="0">
-            <a:spAutoFit/>
-          </a:bodyPr>
-          <a:lstStyle/>
-          <a:p>
-            <a:pPr algn="l"/>
+          <a:bodyPr wrap="square" lIns="0" tIns="0" rIns="0" bIns="0" anchor="t">
+            <a:spAutoFit/>
+          </a:bodyPr>
+          <a:lstStyle/>
+          <a:p>
+            <a:pPr algn="l">
+              <a:lnSpc>
+                <a:spcPct val="130000"/>
+              </a:lnSpc>
+              <a:spcAft>
+                <a:spcPts val="400"/>
+              </a:spcAft>
+            </a:pPr>
             <a:r>
               <a:rPr sz="2200" b="1">
                 <a:solidFill>
                   <a:srgbClr val="FFFFFF"/>
                 </a:solidFill>
                 <a:latin typeface="Meiryo"/>
-                <a:ea typeface="Meiryo"/>
-              </a:rPr>
-              <a:t>個人情報保護法への対応</a:t>
+              </a:rPr>
+              <a:t>費用の試算</a:t>
             </a:r>
           </a:p>
         </p:txBody>
@@ -12441,21 +12091,27 @@
           <a:noFill/>
         </p:spPr>
         <p:txBody>
-          <a:bodyPr wrap="square" lIns="0" rIns="0" tIns="0" bIns="0">
-            <a:spAutoFit/>
-          </a:bodyPr>
-          <a:lstStyle/>
-          <a:p>
-            <a:pPr algn="l"/>
+          <a:bodyPr wrap="square" lIns="0" tIns="0" rIns="0" bIns="0" anchor="t">
+            <a:spAutoFit/>
+          </a:bodyPr>
+          <a:lstStyle/>
+          <a:p>
+            <a:pPr algn="l">
+              <a:lnSpc>
+                <a:spcPct val="130000"/>
+              </a:lnSpc>
+              <a:spcAft>
+                <a:spcPts val="400"/>
+              </a:spcAft>
+            </a:pPr>
             <a:r>
               <a:rPr sz="1250" b="0">
                 <a:solidFill>
                   <a:srgbClr val="6B7280"/>
                 </a:solidFill>
                 <a:latin typeface="Meiryo"/>
-                <a:ea typeface="Meiryo"/>
-              </a:rPr>
-              <a:t>外国の事業者に個人データを預ける場合、本人の同意または「体制の確認と公表」が必要です（法第28条）。</a:t>
+              </a:rPr>
+              <a:t>クラウドは基本料金なしの従量課金です。実際の利用量に応じたお支払いになります。</a:t>
             </a:r>
           </a:p>
         </p:txBody>
@@ -12468,12 +12124,12 @@
         </p:nvSpPr>
         <p:spPr>
           <a:xfrm>
-            <a:off x="566928" y="1600200"/>
-            <a:ext cx="3529584" cy="3200400"/>
+            <a:off x="566928" y="1572768"/>
+            <a:ext cx="5394960" cy="2788920"/>
           </a:xfrm>
           <a:prstGeom prst="roundRect">
             <a:avLst>
-              <a:gd name="adj" fmla="val 3500"/>
+              <a:gd name="adj" fmla="val 6000"/>
             </a:avLst>
           </a:prstGeom>
           <a:solidFill>
@@ -12503,19 +12159,63 @@
         <p:txBody>
           <a:bodyPr rtlCol="0" anchor="ctr"/>
           <a:lstStyle/>
-          <a:p/>
-        </p:txBody>
-      </p:sp>
-      <p:sp>
-        <p:nvSpPr>
-          <p:cNvPr id="6" name="Rectangle 5"/>
+          <a:p>
+            <a:endParaRPr/>
+          </a:p>
+        </p:txBody>
+      </p:sp>
+      <p:sp>
+        <p:nvSpPr>
+          <p:cNvPr id="6" name="TextBox 5"/>
+          <p:cNvSpPr txBox="1"/>
+          <p:nvPr/>
+        </p:nvSpPr>
+        <p:spPr>
+          <a:xfrm>
+            <a:off x="841248" y="1810512"/>
+            <a:ext cx="4846320" cy="320040"/>
+          </a:xfrm>
+          <a:prstGeom prst="rect">
+            <a:avLst/>
+          </a:prstGeom>
+          <a:noFill/>
+        </p:spPr>
+        <p:txBody>
+          <a:bodyPr wrap="square" lIns="0" tIns="0" rIns="0" bIns="0" anchor="t">
+            <a:spAutoFit/>
+          </a:bodyPr>
+          <a:lstStyle/>
+          <a:p>
+            <a:pPr algn="l">
+              <a:lnSpc>
+                <a:spcPct val="130000"/>
+              </a:lnSpc>
+              <a:spcAft>
+                <a:spcPts val="400"/>
+              </a:spcAft>
+            </a:pPr>
+            <a:r>
+              <a:rPr sz="1350" b="1">
+                <a:solidFill>
+                  <a:srgbClr val="141A33"/>
+                </a:solidFill>
+                <a:latin typeface="Meiryo"/>
+              </a:rPr>
+              <a:t>AI・OCR 利用料（月300回・1回1,000文字）</a:t>
+            </a:r>
+          </a:p>
+        </p:txBody>
+      </p:sp>
+      <p:sp>
+        <p:nvSpPr>
+          <p:cNvPr id="7" name="Rectangle 6"/>
           <p:cNvSpPr/>
           <p:nvPr/>
         </p:nvSpPr>
         <p:spPr>
           <a:xfrm>
-            <a:off x="566928" y="1600200"/>
-            <a:ext cx="3529584" cy="82296"/>
+            <a:off x="841248" y="2231136"/>
+            <a:ext cx="457200" cy="36576"/>
           </a:xfrm>
           <a:prstGeom prst="rect">
             <a:avLst/>
@@ -12545,203 +12245,447 @@
         <p:txBody>
           <a:bodyPr rtlCol="0" anchor="ctr"/>
           <a:lstStyle/>
-          <a:p/>
-        </p:txBody>
-      </p:sp>
-      <p:sp>
-        <p:nvSpPr>
-          <p:cNvPr id="7" name="TextBox 6"/>
-          <p:cNvSpPr txBox="1"/>
-          <p:nvPr/>
-        </p:nvSpPr>
-        <p:spPr>
-          <a:xfrm>
-            <a:off x="859536" y="1938528"/>
-            <a:ext cx="3017520" cy="365760"/>
-          </a:xfrm>
-          <a:prstGeom prst="rect">
-            <a:avLst/>
-          </a:prstGeom>
-          <a:noFill/>
-        </p:spPr>
-        <p:txBody>
-          <a:bodyPr wrap="square" lIns="0" rIns="0" tIns="0" bIns="0">
-            <a:spAutoFit/>
-          </a:bodyPr>
-          <a:lstStyle/>
-          <a:p>
-            <a:pPr algn="l"/>
-            <a:r>
-              <a:rPr sz="1100" b="1">
+          <a:p>
+            <a:endParaRPr/>
+          </a:p>
+        </p:txBody>
+      </p:sp>
+      <p:sp>
+        <p:nvSpPr>
+          <p:cNvPr id="8" name="TextBox 7"/>
+          <p:cNvSpPr txBox="1"/>
+          <p:nvPr/>
+        </p:nvSpPr>
+        <p:spPr>
+          <a:xfrm>
+            <a:off x="841248" y="2487168"/>
+            <a:ext cx="2194560" cy="320040"/>
+          </a:xfrm>
+          <a:prstGeom prst="rect">
+            <a:avLst/>
+          </a:prstGeom>
+          <a:noFill/>
+        </p:spPr>
+        <p:txBody>
+          <a:bodyPr wrap="square" lIns="0" tIns="0" rIns="0" bIns="0" anchor="t">
+            <a:spAutoFit/>
+          </a:bodyPr>
+          <a:lstStyle/>
+          <a:p>
+            <a:pPr algn="l">
+              <a:lnSpc>
+                <a:spcPct val="130000"/>
+              </a:lnSpc>
+              <a:spcAft>
+                <a:spcPts val="400"/>
+              </a:spcAft>
+            </a:pPr>
+            <a:r>
+              <a:rPr sz="1200" b="0">
+                <a:solidFill>
+                  <a:srgbClr val="6B7280"/>
+                </a:solidFill>
+                <a:latin typeface="Meiryo"/>
+              </a:rPr>
+              <a:t>読み取り（入力）</a:t>
+            </a:r>
+          </a:p>
+        </p:txBody>
+      </p:sp>
+      <p:sp>
+        <p:nvSpPr>
+          <p:cNvPr id="9" name="TextBox 8"/>
+          <p:cNvSpPr txBox="1"/>
+          <p:nvPr/>
+        </p:nvSpPr>
+        <p:spPr>
+          <a:xfrm>
+            <a:off x="3154680" y="2487168"/>
+            <a:ext cx="1554480" cy="320040"/>
+          </a:xfrm>
+          <a:prstGeom prst="rect">
+            <a:avLst/>
+          </a:prstGeom>
+          <a:noFill/>
+        </p:spPr>
+        <p:txBody>
+          <a:bodyPr wrap="square" lIns="0" tIns="0" rIns="0" bIns="0" anchor="t">
+            <a:spAutoFit/>
+          </a:bodyPr>
+          <a:lstStyle/>
+          <a:p>
+            <a:pPr algn="l">
+              <a:lnSpc>
+                <a:spcPct val="130000"/>
+              </a:lnSpc>
+              <a:spcAft>
+                <a:spcPts val="400"/>
+              </a:spcAft>
+            </a:pPr>
+            <a:r>
+              <a:rPr sz="1200" b="0">
+                <a:solidFill>
+                  <a:srgbClr val="6B7280"/>
+                </a:solidFill>
+                <a:latin typeface="Meiryo"/>
+              </a:rPr>
+              <a:t>約90万トークン</a:t>
+            </a:r>
+          </a:p>
+        </p:txBody>
+      </p:sp>
+      <p:sp>
+        <p:nvSpPr>
+          <p:cNvPr id="10" name="TextBox 9"/>
+          <p:cNvSpPr txBox="1"/>
+          <p:nvPr/>
+        </p:nvSpPr>
+        <p:spPr>
+          <a:xfrm>
+            <a:off x="4663440" y="2487168"/>
+            <a:ext cx="1097280" cy="320040"/>
+          </a:xfrm>
+          <a:prstGeom prst="rect">
+            <a:avLst/>
+          </a:prstGeom>
+          <a:noFill/>
+        </p:spPr>
+        <p:txBody>
+          <a:bodyPr wrap="square" lIns="0" tIns="0" rIns="0" bIns="0" anchor="t">
+            <a:spAutoFit/>
+          </a:bodyPr>
+          <a:lstStyle/>
+          <a:p>
+            <a:pPr algn="r">
+              <a:lnSpc>
+                <a:spcPct val="130000"/>
+              </a:lnSpc>
+              <a:spcAft>
+                <a:spcPts val="400"/>
+              </a:spcAft>
+            </a:pPr>
+            <a:r>
+              <a:rPr sz="1200" b="0">
+                <a:solidFill>
+                  <a:srgbClr val="141A33"/>
+                </a:solidFill>
+                <a:latin typeface="Meiryo"/>
+              </a:rPr>
+              <a:t>約 700円</a:t>
+            </a:r>
+          </a:p>
+        </p:txBody>
+      </p:sp>
+      <p:sp>
+        <p:nvSpPr>
+          <p:cNvPr id="11" name="TextBox 10"/>
+          <p:cNvSpPr txBox="1"/>
+          <p:nvPr/>
+        </p:nvSpPr>
+        <p:spPr>
+          <a:xfrm>
+            <a:off x="841248" y="2944368"/>
+            <a:ext cx="2194560" cy="320040"/>
+          </a:xfrm>
+          <a:prstGeom prst="rect">
+            <a:avLst/>
+          </a:prstGeom>
+          <a:noFill/>
+        </p:spPr>
+        <p:txBody>
+          <a:bodyPr wrap="square" lIns="0" tIns="0" rIns="0" bIns="0" anchor="t">
+            <a:spAutoFit/>
+          </a:bodyPr>
+          <a:lstStyle/>
+          <a:p>
+            <a:pPr algn="l">
+              <a:lnSpc>
+                <a:spcPct val="130000"/>
+              </a:lnSpc>
+              <a:spcAft>
+                <a:spcPts val="400"/>
+              </a:spcAft>
+            </a:pPr>
+            <a:r>
+              <a:rPr sz="1200" b="0">
+                <a:solidFill>
+                  <a:srgbClr val="6B7280"/>
+                </a:solidFill>
+                <a:latin typeface="Meiryo"/>
+              </a:rPr>
+              <a:t>生成（出力）</a:t>
+            </a:r>
+          </a:p>
+        </p:txBody>
+      </p:sp>
+      <p:sp>
+        <p:nvSpPr>
+          <p:cNvPr id="12" name="TextBox 11"/>
+          <p:cNvSpPr txBox="1"/>
+          <p:nvPr/>
+        </p:nvSpPr>
+        <p:spPr>
+          <a:xfrm>
+            <a:off x="3154680" y="2944368"/>
+            <a:ext cx="1554480" cy="320040"/>
+          </a:xfrm>
+          <a:prstGeom prst="rect">
+            <a:avLst/>
+          </a:prstGeom>
+          <a:noFill/>
+        </p:spPr>
+        <p:txBody>
+          <a:bodyPr wrap="square" lIns="0" tIns="0" rIns="0" bIns="0" anchor="t">
+            <a:spAutoFit/>
+          </a:bodyPr>
+          <a:lstStyle/>
+          <a:p>
+            <a:pPr algn="l">
+              <a:lnSpc>
+                <a:spcPct val="130000"/>
+              </a:lnSpc>
+              <a:spcAft>
+                <a:spcPts val="400"/>
+              </a:spcAft>
+            </a:pPr>
+            <a:r>
+              <a:rPr sz="1200" b="0">
+                <a:solidFill>
+                  <a:srgbClr val="6B7280"/>
+                </a:solidFill>
+                <a:latin typeface="Meiryo"/>
+              </a:rPr>
+              <a:t>約45万トークン</a:t>
+            </a:r>
+          </a:p>
+        </p:txBody>
+      </p:sp>
+      <p:sp>
+        <p:nvSpPr>
+          <p:cNvPr id="13" name="TextBox 12"/>
+          <p:cNvSpPr txBox="1"/>
+          <p:nvPr/>
+        </p:nvSpPr>
+        <p:spPr>
+          <a:xfrm>
+            <a:off x="4663440" y="2944368"/>
+            <a:ext cx="1097280" cy="320040"/>
+          </a:xfrm>
+          <a:prstGeom prst="rect">
+            <a:avLst/>
+          </a:prstGeom>
+          <a:noFill/>
+        </p:spPr>
+        <p:txBody>
+          <a:bodyPr wrap="square" lIns="0" tIns="0" rIns="0" bIns="0" anchor="t">
+            <a:spAutoFit/>
+          </a:bodyPr>
+          <a:lstStyle/>
+          <a:p>
+            <a:pPr algn="r">
+              <a:lnSpc>
+                <a:spcPct val="130000"/>
+              </a:lnSpc>
+              <a:spcAft>
+                <a:spcPts val="400"/>
+              </a:spcAft>
+            </a:pPr>
+            <a:r>
+              <a:rPr sz="1200" b="0">
+                <a:solidFill>
+                  <a:srgbClr val="141A33"/>
+                </a:solidFill>
+                <a:latin typeface="Meiryo"/>
+              </a:rPr>
+              <a:t>約 1,800円</a:t>
+            </a:r>
+          </a:p>
+        </p:txBody>
+      </p:sp>
+      <p:sp>
+        <p:nvSpPr>
+          <p:cNvPr id="14" name="Rectangle 13"/>
+          <p:cNvSpPr/>
+          <p:nvPr/>
+        </p:nvSpPr>
+        <p:spPr>
+          <a:xfrm>
+            <a:off x="841248" y="3456432"/>
+            <a:ext cx="4846320" cy="18288"/>
+          </a:xfrm>
+          <a:prstGeom prst="rect">
+            <a:avLst/>
+          </a:prstGeom>
+          <a:solidFill>
+            <a:srgbClr val="C7CDD8"/>
+          </a:solidFill>
+          <a:ln>
+            <a:noFill/>
+          </a:ln>
+          <a:effectLst/>
+        </p:spPr>
+        <p:style>
+          <a:lnRef idx="1">
+            <a:schemeClr val="accent1"/>
+          </a:lnRef>
+          <a:fillRef idx="3">
+            <a:schemeClr val="accent1"/>
+          </a:fillRef>
+          <a:effectRef idx="2">
+            <a:schemeClr val="accent1"/>
+          </a:effectRef>
+          <a:fontRef idx="minor">
+            <a:schemeClr val="lt1"/>
+          </a:fontRef>
+        </p:style>
+        <p:txBody>
+          <a:bodyPr rtlCol="0" anchor="ctr"/>
+          <a:lstStyle/>
+          <a:p>
+            <a:endParaRPr/>
+          </a:p>
+        </p:txBody>
+      </p:sp>
+      <p:sp>
+        <p:nvSpPr>
+          <p:cNvPr id="15" name="TextBox 14"/>
+          <p:cNvSpPr txBox="1"/>
+          <p:nvPr/>
+        </p:nvSpPr>
+        <p:spPr>
+          <a:xfrm>
+            <a:off x="841248" y="3611880"/>
+            <a:ext cx="2194560" cy="365760"/>
+          </a:xfrm>
+          <a:prstGeom prst="rect">
+            <a:avLst/>
+          </a:prstGeom>
+          <a:noFill/>
+        </p:spPr>
+        <p:txBody>
+          <a:bodyPr wrap="square" lIns="0" tIns="0" rIns="0" bIns="0" anchor="t">
+            <a:spAutoFit/>
+          </a:bodyPr>
+          <a:lstStyle/>
+          <a:p>
+            <a:pPr algn="l">
+              <a:lnSpc>
+                <a:spcPct val="130000"/>
+              </a:lnSpc>
+              <a:spcAft>
+                <a:spcPts val="400"/>
+              </a:spcAft>
+            </a:pPr>
+            <a:r>
+              <a:rPr sz="1300" b="1">
+                <a:solidFill>
+                  <a:srgbClr val="141A33"/>
+                </a:solidFill>
+                <a:latin typeface="Meiryo"/>
+              </a:rPr>
+              <a:t>月額 合計</a:t>
+            </a:r>
+          </a:p>
+        </p:txBody>
+      </p:sp>
+      <p:sp>
+        <p:nvSpPr>
+          <p:cNvPr id="16" name="TextBox 15"/>
+          <p:cNvSpPr txBox="1"/>
+          <p:nvPr/>
+        </p:nvSpPr>
+        <p:spPr>
+          <a:xfrm>
+            <a:off x="3566160" y="3547872"/>
+            <a:ext cx="2194560" cy="457200"/>
+          </a:xfrm>
+          <a:prstGeom prst="rect">
+            <a:avLst/>
+          </a:prstGeom>
+          <a:noFill/>
+        </p:spPr>
+        <p:txBody>
+          <a:bodyPr wrap="square" lIns="0" tIns="0" rIns="0" bIns="0" anchor="t">
+            <a:spAutoFit/>
+          </a:bodyPr>
+          <a:lstStyle/>
+          <a:p>
+            <a:pPr algn="r">
+              <a:lnSpc>
+                <a:spcPct val="130000"/>
+              </a:lnSpc>
+              <a:spcAft>
+                <a:spcPts val="400"/>
+              </a:spcAft>
+            </a:pPr>
+            <a:r>
+              <a:rPr sz="1900" b="1">
                 <a:solidFill>
                   <a:srgbClr val="4F46E5"/>
                 </a:solidFill>
                 <a:latin typeface="Meiryo"/>
-                <a:ea typeface="Meiryo"/>
-              </a:rPr>
-              <a:t>01</a:t>
-            </a:r>
-          </a:p>
-        </p:txBody>
-      </p:sp>
-      <p:sp>
-        <p:nvSpPr>
-          <p:cNvPr id="8" name="TextBox 7"/>
-          <p:cNvSpPr txBox="1"/>
-          <p:nvPr/>
-        </p:nvSpPr>
-        <p:spPr>
-          <a:xfrm>
-            <a:off x="859536" y="2304288"/>
-            <a:ext cx="3017520" cy="411480"/>
-          </a:xfrm>
-          <a:prstGeom prst="rect">
-            <a:avLst/>
-          </a:prstGeom>
-          <a:noFill/>
-        </p:spPr>
-        <p:txBody>
-          <a:bodyPr wrap="square" lIns="0" rIns="0" tIns="0" bIns="0">
-            <a:spAutoFit/>
-          </a:bodyPr>
-          <a:lstStyle/>
-          <a:p>
-            <a:pPr algn="l"/>
-            <a:r>
-              <a:rPr sz="1500" b="1">
-                <a:solidFill>
-                  <a:srgbClr val="141A33"/>
-                </a:solidFill>
-                <a:latin typeface="Meiryo"/>
-                <a:ea typeface="Meiryo"/>
-              </a:rPr>
-              <a:t>国内へ移す</a:t>
-            </a:r>
-          </a:p>
-        </p:txBody>
-      </p:sp>
-      <p:sp>
-        <p:nvSpPr>
-          <p:cNvPr id="9" name="TextBox 8"/>
-          <p:cNvSpPr txBox="1"/>
-          <p:nvPr/>
-        </p:nvSpPr>
-        <p:spPr>
-          <a:xfrm>
-            <a:off x="859536" y="2889504"/>
-            <a:ext cx="3017520" cy="1828800"/>
-          </a:xfrm>
-          <a:prstGeom prst="rect">
-            <a:avLst/>
-          </a:prstGeom>
-          <a:noFill/>
-        </p:spPr>
-        <p:txBody>
-          <a:bodyPr wrap="square" lIns="0" rIns="0" tIns="0" bIns="0">
-            <a:spAutoFit/>
-          </a:bodyPr>
-          <a:lstStyle/>
-          <a:p>
-            <a:pPr algn="l">
-              <a:spcAft>
-                <a:spcPts val="200"/>
-              </a:spcAft>
-            </a:pPr>
-            <a:r>
-              <a:rPr sz="1150" b="0">
+              </a:rPr>
+              <a:t>約 2,500円</a:t>
+            </a:r>
+          </a:p>
+        </p:txBody>
+      </p:sp>
+      <p:sp>
+        <p:nvSpPr>
+          <p:cNvPr id="17" name="TextBox 16"/>
+          <p:cNvSpPr txBox="1"/>
+          <p:nvPr/>
+        </p:nvSpPr>
+        <p:spPr>
+          <a:xfrm>
+            <a:off x="841248" y="4041648"/>
+            <a:ext cx="4846320" cy="274320"/>
+          </a:xfrm>
+          <a:prstGeom prst="rect">
+            <a:avLst/>
+          </a:prstGeom>
+          <a:noFill/>
+        </p:spPr>
+        <p:txBody>
+          <a:bodyPr wrap="square" lIns="0" tIns="0" rIns="0" bIns="0" anchor="t">
+            <a:spAutoFit/>
+          </a:bodyPr>
+          <a:lstStyle/>
+          <a:p>
+            <a:pPr algn="l">
+              <a:lnSpc>
+                <a:spcPct val="130000"/>
+              </a:lnSpc>
+              <a:spcAft>
+                <a:spcPts val="400"/>
+              </a:spcAft>
+            </a:pPr>
+            <a:r>
+              <a:rPr sz="1050" b="0">
                 <a:solidFill>
                   <a:srgbClr val="6B7280"/>
                 </a:solidFill>
                 <a:latin typeface="Meiryo"/>
-                <a:ea typeface="Meiryo"/>
-              </a:rPr>
-              <a:t>データベースと添付ファイルを</a:t>
-            </a:r>
-          </a:p>
-          <a:p>
-            <a:pPr algn="l">
-              <a:spcAft>
-                <a:spcPts val="200"/>
-              </a:spcAft>
-            </a:pPr>
-            <a:r>
-              <a:rPr sz="1150" b="0">
-                <a:solidFill>
-                  <a:srgbClr val="6B7280"/>
-                </a:solidFill>
-                <a:latin typeface="Meiryo"/>
-                <a:ea typeface="Meiryo"/>
-              </a:rPr>
-              <a:t>東京リージョンへ移します。</a:t>
-            </a:r>
-          </a:p>
-          <a:p>
-            <a:pPr algn="l">
-              <a:spcAft>
-                <a:spcPts val="200"/>
-              </a:spcAft>
-            </a:pPr>
-            <a:r>
-              <a:rPr sz="1150" b="0">
-                <a:solidFill>
-                  <a:srgbClr val="6B7280"/>
-                </a:solidFill>
-                <a:latin typeface="Meiryo"/>
-                <a:ea typeface="Meiryo"/>
-              </a:rPr>
-              <a:t/>
-            </a:r>
-          </a:p>
-          <a:p>
-            <a:pPr algn="l">
-              <a:spcAft>
-                <a:spcPts val="200"/>
-              </a:spcAft>
-            </a:pPr>
-            <a:r>
-              <a:rPr sz="1150" b="0">
-                <a:solidFill>
-                  <a:srgbClr val="6B7280"/>
-                </a:solidFill>
-                <a:latin typeface="Meiryo"/>
-                <a:ea typeface="Meiryo"/>
-              </a:rPr>
-              <a:t>全案件のデータが国内保管に</a:t>
-            </a:r>
-          </a:p>
-          <a:p>
-            <a:pPr algn="l">
-              <a:spcAft>
-                <a:spcPts val="200"/>
-              </a:spcAft>
-            </a:pPr>
-            <a:r>
-              <a:rPr sz="1150" b="0">
-                <a:solidFill>
-                  <a:srgbClr val="6B7280"/>
-                </a:solidFill>
-                <a:latin typeface="Meiryo"/>
-                <a:ea typeface="Meiryo"/>
-              </a:rPr>
-              <a:t>なります。2026年8月中に実施。</a:t>
-            </a:r>
-          </a:p>
-        </p:txBody>
-      </p:sp>
-      <p:sp>
-        <p:nvSpPr>
-          <p:cNvPr id="10" name="Rounded Rectangle 9"/>
+              </a:rPr>
+              <a:t>※多く見積もっても月5,000円以内に収まる想定です。</a:t>
+            </a:r>
+          </a:p>
+        </p:txBody>
+      </p:sp>
+      <p:sp>
+        <p:nvSpPr>
+          <p:cNvPr id="18" name="Rounded Rectangle 17"/>
           <p:cNvSpPr/>
           <p:nvPr/>
         </p:nvSpPr>
         <p:spPr>
           <a:xfrm>
-            <a:off x="4334256" y="1600200"/>
-            <a:ext cx="3529584" cy="3200400"/>
+            <a:off x="6245352" y="1572768"/>
+            <a:ext cx="5394960" cy="2788920"/>
           </a:xfrm>
           <a:prstGeom prst="roundRect">
             <a:avLst>
-              <a:gd name="adj" fmla="val 3500"/>
+              <a:gd name="adj" fmla="val 6000"/>
             </a:avLst>
           </a:prstGeom>
           <a:solidFill>
@@ -12771,25 +12715,69 @@
         <p:txBody>
           <a:bodyPr rtlCol="0" anchor="ctr"/>
           <a:lstStyle/>
-          <a:p/>
-        </p:txBody>
-      </p:sp>
-      <p:sp>
-        <p:nvSpPr>
-          <p:cNvPr id="11" name="Rectangle 10"/>
+          <a:p>
+            <a:endParaRPr/>
+          </a:p>
+        </p:txBody>
+      </p:sp>
+      <p:sp>
+        <p:nvSpPr>
+          <p:cNvPr id="19" name="TextBox 18"/>
+          <p:cNvSpPr txBox="1"/>
+          <p:nvPr/>
+        </p:nvSpPr>
+        <p:spPr>
+          <a:xfrm>
+            <a:off x="6519672" y="1810512"/>
+            <a:ext cx="4846320" cy="320040"/>
+          </a:xfrm>
+          <a:prstGeom prst="rect">
+            <a:avLst/>
+          </a:prstGeom>
+          <a:noFill/>
+        </p:spPr>
+        <p:txBody>
+          <a:bodyPr wrap="square" lIns="0" tIns="0" rIns="0" bIns="0" anchor="t">
+            <a:spAutoFit/>
+          </a:bodyPr>
+          <a:lstStyle/>
+          <a:p>
+            <a:pPr algn="l">
+              <a:lnSpc>
+                <a:spcPct val="130000"/>
+              </a:lnSpc>
+              <a:spcAft>
+                <a:spcPts val="400"/>
+              </a:spcAft>
+            </a:pPr>
+            <a:r>
+              <a:rPr sz="1350" b="1">
+                <a:solidFill>
+                  <a:srgbClr val="141A33"/>
+                </a:solidFill>
+                <a:latin typeface="Meiryo"/>
+              </a:rPr>
+              <a:t>システム全体の月額（目安）</a:t>
+            </a:r>
+          </a:p>
+        </p:txBody>
+      </p:sp>
+      <p:sp>
+        <p:nvSpPr>
+          <p:cNvPr id="20" name="Rectangle 19"/>
           <p:cNvSpPr/>
           <p:nvPr/>
         </p:nvSpPr>
         <p:spPr>
           <a:xfrm>
-            <a:off x="4334256" y="1600200"/>
-            <a:ext cx="3529584" cy="82296"/>
+            <a:off x="6519672" y="2231136"/>
+            <a:ext cx="457200" cy="36576"/>
           </a:xfrm>
           <a:prstGeom prst="rect">
             <a:avLst/>
           </a:prstGeom>
           <a:solidFill>
-            <a:srgbClr val="4F46E5"/>
+            <a:srgbClr val="1F5E4B"/>
           </a:solidFill>
           <a:ln>
             <a:noFill/>
@@ -12813,195 +12801,282 @@
         <p:txBody>
           <a:bodyPr rtlCol="0" anchor="ctr"/>
           <a:lstStyle/>
-          <a:p/>
-        </p:txBody>
-      </p:sp>
-      <p:sp>
-        <p:nvSpPr>
-          <p:cNvPr id="12" name="TextBox 11"/>
-          <p:cNvSpPr txBox="1"/>
-          <p:nvPr/>
-        </p:nvSpPr>
-        <p:spPr>
-          <a:xfrm>
-            <a:off x="4626864" y="1938528"/>
-            <a:ext cx="3017520" cy="365760"/>
-          </a:xfrm>
-          <a:prstGeom prst="rect">
-            <a:avLst/>
-          </a:prstGeom>
-          <a:noFill/>
-        </p:spPr>
-        <p:txBody>
-          <a:bodyPr wrap="square" lIns="0" rIns="0" tIns="0" bIns="0">
-            <a:spAutoFit/>
-          </a:bodyPr>
-          <a:lstStyle/>
-          <a:p>
-            <a:pPr algn="l"/>
-            <a:r>
-              <a:rPr sz="1100" b="1">
-                <a:solidFill>
-                  <a:srgbClr val="4F46E5"/>
-                </a:solidFill>
-                <a:latin typeface="Meiryo"/>
-                <a:ea typeface="Meiryo"/>
-              </a:rPr>
-              <a:t>02</a:t>
-            </a:r>
-          </a:p>
-        </p:txBody>
-      </p:sp>
-      <p:sp>
-        <p:nvSpPr>
-          <p:cNvPr id="13" name="TextBox 12"/>
-          <p:cNvSpPr txBox="1"/>
-          <p:nvPr/>
-        </p:nvSpPr>
-        <p:spPr>
-          <a:xfrm>
-            <a:off x="4626864" y="2304288"/>
-            <a:ext cx="3017520" cy="411480"/>
-          </a:xfrm>
-          <a:prstGeom prst="rect">
-            <a:avLst/>
-          </a:prstGeom>
-          <a:noFill/>
-        </p:spPr>
-        <p:txBody>
-          <a:bodyPr wrap="square" lIns="0" rIns="0" tIns="0" bIns="0">
-            <a:spAutoFit/>
-          </a:bodyPr>
-          <a:lstStyle/>
-          <a:p>
-            <a:pPr algn="l"/>
-            <a:r>
-              <a:rPr sz="1500" b="1">
+          <a:p>
+            <a:endParaRPr/>
+          </a:p>
+        </p:txBody>
+      </p:sp>
+      <p:sp>
+        <p:nvSpPr>
+          <p:cNvPr id="21" name="TextBox 20"/>
+          <p:cNvSpPr txBox="1"/>
+          <p:nvPr/>
+        </p:nvSpPr>
+        <p:spPr>
+          <a:xfrm>
+            <a:off x="6519672" y="2487168"/>
+            <a:ext cx="3108960" cy="320040"/>
+          </a:xfrm>
+          <a:prstGeom prst="rect">
+            <a:avLst/>
+          </a:prstGeom>
+          <a:noFill/>
+        </p:spPr>
+        <p:txBody>
+          <a:bodyPr wrap="square" lIns="0" tIns="0" rIns="0" bIns="0" anchor="t">
+            <a:spAutoFit/>
+          </a:bodyPr>
+          <a:lstStyle/>
+          <a:p>
+            <a:pPr algn="l">
+              <a:lnSpc>
+                <a:spcPct val="130000"/>
+              </a:lnSpc>
+              <a:spcAft>
+                <a:spcPts val="400"/>
+              </a:spcAft>
+            </a:pPr>
+            <a:r>
+              <a:rPr sz="1200" b="0">
+                <a:solidFill>
+                  <a:srgbClr val="6B7280"/>
+                </a:solidFill>
+                <a:latin typeface="Meiryo"/>
+              </a:rPr>
+              <a:t>アプリ本体（Azure）</a:t>
+            </a:r>
+          </a:p>
+        </p:txBody>
+      </p:sp>
+      <p:sp>
+        <p:nvSpPr>
+          <p:cNvPr id="22" name="TextBox 21"/>
+          <p:cNvSpPr txBox="1"/>
+          <p:nvPr/>
+        </p:nvSpPr>
+        <p:spPr>
+          <a:xfrm>
+            <a:off x="9601200" y="2487168"/>
+            <a:ext cx="1737360" cy="320040"/>
+          </a:xfrm>
+          <a:prstGeom prst="rect">
+            <a:avLst/>
+          </a:prstGeom>
+          <a:noFill/>
+        </p:spPr>
+        <p:txBody>
+          <a:bodyPr wrap="square" lIns="0" tIns="0" rIns="0" bIns="0" anchor="t">
+            <a:spAutoFit/>
+          </a:bodyPr>
+          <a:lstStyle/>
+          <a:p>
+            <a:pPr algn="r">
+              <a:lnSpc>
+                <a:spcPct val="130000"/>
+              </a:lnSpc>
+              <a:spcAft>
+                <a:spcPts val="400"/>
+              </a:spcAft>
+            </a:pPr>
+            <a:r>
+              <a:rPr sz="1200" b="0">
                 <a:solidFill>
                   <a:srgbClr val="141A33"/>
                 </a:solidFill>
                 <a:latin typeface="Meiryo"/>
-                <a:ea typeface="Meiryo"/>
-              </a:rPr>
-              <a:t>契約を結ぶ</a:t>
-            </a:r>
-          </a:p>
-        </p:txBody>
-      </p:sp>
-      <p:sp>
-        <p:nvSpPr>
-          <p:cNvPr id="14" name="TextBox 13"/>
-          <p:cNvSpPr txBox="1"/>
-          <p:nvPr/>
-        </p:nvSpPr>
-        <p:spPr>
-          <a:xfrm>
-            <a:off x="4626864" y="2889504"/>
-            <a:ext cx="3017520" cy="1828800"/>
-          </a:xfrm>
-          <a:prstGeom prst="rect">
-            <a:avLst/>
-          </a:prstGeom>
-          <a:noFill/>
-        </p:spPr>
-        <p:txBody>
-          <a:bodyPr wrap="square" lIns="0" rIns="0" tIns="0" bIns="0">
-            <a:spAutoFit/>
-          </a:bodyPr>
-          <a:lstStyle/>
-          <a:p>
-            <a:pPr algn="l">
-              <a:spcAft>
-                <a:spcPts val="200"/>
-              </a:spcAft>
-            </a:pPr>
-            <a:r>
-              <a:rPr sz="1150" b="0">
+              </a:rPr>
+              <a:t>3,000 〜 13,000円</a:t>
+            </a:r>
+          </a:p>
+        </p:txBody>
+      </p:sp>
+      <p:sp>
+        <p:nvSpPr>
+          <p:cNvPr id="23" name="TextBox 22"/>
+          <p:cNvSpPr txBox="1"/>
+          <p:nvPr/>
+        </p:nvSpPr>
+        <p:spPr>
+          <a:xfrm>
+            <a:off x="6519672" y="2944368"/>
+            <a:ext cx="3108960" cy="320040"/>
+          </a:xfrm>
+          <a:prstGeom prst="rect">
+            <a:avLst/>
+          </a:prstGeom>
+          <a:noFill/>
+        </p:spPr>
+        <p:txBody>
+          <a:bodyPr wrap="square" lIns="0" tIns="0" rIns="0" bIns="0" anchor="t">
+            <a:spAutoFit/>
+          </a:bodyPr>
+          <a:lstStyle/>
+          <a:p>
+            <a:pPr algn="l">
+              <a:lnSpc>
+                <a:spcPct val="130000"/>
+              </a:lnSpc>
+              <a:spcAft>
+                <a:spcPts val="400"/>
+              </a:spcAft>
+            </a:pPr>
+            <a:r>
+              <a:rPr sz="1200" b="0">
                 <a:solidFill>
                   <a:srgbClr val="6B7280"/>
                 </a:solidFill>
                 <a:latin typeface="Meiryo"/>
-                <a:ea typeface="Meiryo"/>
-              </a:rPr>
-              <a:t>各委託先との間でデータの</a:t>
-            </a:r>
-          </a:p>
-          <a:p>
-            <a:pPr algn="l">
-              <a:spcAft>
-                <a:spcPts val="200"/>
-              </a:spcAft>
-            </a:pPr>
-            <a:r>
-              <a:rPr sz="1150" b="0">
+              </a:rPr>
+              <a:t>AI・OCR（Claude）</a:t>
+            </a:r>
+          </a:p>
+        </p:txBody>
+      </p:sp>
+      <p:sp>
+        <p:nvSpPr>
+          <p:cNvPr id="24" name="TextBox 23"/>
+          <p:cNvSpPr txBox="1"/>
+          <p:nvPr/>
+        </p:nvSpPr>
+        <p:spPr>
+          <a:xfrm>
+            <a:off x="9601200" y="2944368"/>
+            <a:ext cx="1737360" cy="320040"/>
+          </a:xfrm>
+          <a:prstGeom prst="rect">
+            <a:avLst/>
+          </a:prstGeom>
+          <a:noFill/>
+        </p:spPr>
+        <p:txBody>
+          <a:bodyPr wrap="square" lIns="0" tIns="0" rIns="0" bIns="0" anchor="t">
+            <a:spAutoFit/>
+          </a:bodyPr>
+          <a:lstStyle/>
+          <a:p>
+            <a:pPr algn="r">
+              <a:lnSpc>
+                <a:spcPct val="130000"/>
+              </a:lnSpc>
+              <a:spcAft>
+                <a:spcPts val="400"/>
+              </a:spcAft>
+            </a:pPr>
+            <a:r>
+              <a:rPr sz="1200" b="0">
+                <a:solidFill>
+                  <a:srgbClr val="141A33"/>
+                </a:solidFill>
+                <a:latin typeface="Meiryo"/>
+              </a:rPr>
+              <a:t>約 2,500円</a:t>
+            </a:r>
+          </a:p>
+        </p:txBody>
+      </p:sp>
+      <p:sp>
+        <p:nvSpPr>
+          <p:cNvPr id="25" name="TextBox 24"/>
+          <p:cNvSpPr txBox="1"/>
+          <p:nvPr/>
+        </p:nvSpPr>
+        <p:spPr>
+          <a:xfrm>
+            <a:off x="6519672" y="3401568"/>
+            <a:ext cx="3108960" cy="320040"/>
+          </a:xfrm>
+          <a:prstGeom prst="rect">
+            <a:avLst/>
+          </a:prstGeom>
+          <a:noFill/>
+        </p:spPr>
+        <p:txBody>
+          <a:bodyPr wrap="square" lIns="0" tIns="0" rIns="0" bIns="0" anchor="t">
+            <a:spAutoFit/>
+          </a:bodyPr>
+          <a:lstStyle/>
+          <a:p>
+            <a:pPr algn="l">
+              <a:lnSpc>
+                <a:spcPct val="130000"/>
+              </a:lnSpc>
+              <a:spcAft>
+                <a:spcPts val="400"/>
+              </a:spcAft>
+            </a:pPr>
+            <a:r>
+              <a:rPr sz="1200" b="0">
                 <a:solidFill>
                   <a:srgbClr val="6B7280"/>
                 </a:solidFill>
                 <a:latin typeface="Meiryo"/>
-                <a:ea typeface="Meiryo"/>
-              </a:rPr>
-              <a:t>取扱いに関する契約を締結し、</a:t>
-            </a:r>
-          </a:p>
-          <a:p>
-            <a:pPr algn="l">
-              <a:spcAft>
-                <a:spcPts val="200"/>
-              </a:spcAft>
-            </a:pPr>
-            <a:r>
-              <a:rPr sz="1150" b="0">
-                <a:solidFill>
-                  <a:srgbClr val="6B7280"/>
-                </a:solidFill>
-                <a:latin typeface="Meiryo"/>
-                <a:ea typeface="Meiryo"/>
-              </a:rPr>
-              <a:t/>
-            </a:r>
-          </a:p>
-          <a:p>
-            <a:pPr algn="l">
-              <a:spcAft>
-                <a:spcPts val="200"/>
-              </a:spcAft>
-            </a:pPr>
-            <a:r>
-              <a:rPr sz="1150" b="0">
-                <a:solidFill>
-                  <a:srgbClr val="6B7280"/>
-                </a:solidFill>
-                <a:latin typeface="Meiryo"/>
-                <a:ea typeface="Meiryo"/>
-              </a:rPr>
-              <a:t>安全管理措置を確認します。</a:t>
-            </a:r>
-          </a:p>
-        </p:txBody>
-      </p:sp>
-      <p:sp>
-        <p:nvSpPr>
-          <p:cNvPr id="15" name="Rounded Rectangle 14"/>
+              </a:rPr>
+              <a:t>データベース（Supabase）</a:t>
+            </a:r>
+          </a:p>
+        </p:txBody>
+      </p:sp>
+      <p:sp>
+        <p:nvSpPr>
+          <p:cNvPr id="26" name="TextBox 25"/>
+          <p:cNvSpPr txBox="1"/>
+          <p:nvPr/>
+        </p:nvSpPr>
+        <p:spPr>
+          <a:xfrm>
+            <a:off x="9601200" y="3401568"/>
+            <a:ext cx="1737360" cy="320040"/>
+          </a:xfrm>
+          <a:prstGeom prst="rect">
+            <a:avLst/>
+          </a:prstGeom>
+          <a:noFill/>
+        </p:spPr>
+        <p:txBody>
+          <a:bodyPr wrap="square" lIns="0" tIns="0" rIns="0" bIns="0" anchor="t">
+            <a:spAutoFit/>
+          </a:bodyPr>
+          <a:lstStyle/>
+          <a:p>
+            <a:pPr algn="r">
+              <a:lnSpc>
+                <a:spcPct val="130000"/>
+              </a:lnSpc>
+              <a:spcAft>
+                <a:spcPts val="400"/>
+              </a:spcAft>
+            </a:pPr>
+            <a:r>
+              <a:rPr sz="1200" b="0">
+                <a:solidFill>
+                  <a:srgbClr val="141A33"/>
+                </a:solidFill>
+                <a:latin typeface="Meiryo"/>
+              </a:rPr>
+              <a:t>約 4,000円</a:t>
+            </a:r>
+          </a:p>
+        </p:txBody>
+      </p:sp>
+      <p:sp>
+        <p:nvSpPr>
+          <p:cNvPr id="27" name="Rectangle 26"/>
           <p:cNvSpPr/>
           <p:nvPr/>
         </p:nvSpPr>
         <p:spPr>
           <a:xfrm>
-            <a:off x="8101584" y="1600200"/>
-            <a:ext cx="3529584" cy="3200400"/>
-          </a:xfrm>
-          <a:prstGeom prst="roundRect">
-            <a:avLst>
-              <a:gd name="adj" fmla="val 3500"/>
-            </a:avLst>
+            <a:off x="6519672" y="3858768"/>
+            <a:ext cx="4846320" cy="18288"/>
+          </a:xfrm>
+          <a:prstGeom prst="rect">
+            <a:avLst/>
           </a:prstGeom>
           <a:solidFill>
-            <a:srgbClr val="FFFFFF"/>
+            <a:srgbClr val="C7CDD8"/>
           </a:solidFill>
-          <a:ln w="12700">
-            <a:solidFill>
-              <a:srgbClr val="C7CDD8"/>
-            </a:solidFill>
+          <a:ln>
+            <a:noFill/>
           </a:ln>
           <a:effectLst/>
         </p:spPr>
@@ -13022,25 +13097,113 @@
         <p:txBody>
           <a:bodyPr rtlCol="0" anchor="ctr"/>
           <a:lstStyle/>
-          <a:p/>
-        </p:txBody>
-      </p:sp>
-      <p:sp>
-        <p:nvSpPr>
-          <p:cNvPr id="16" name="Rectangle 15"/>
+          <a:p>
+            <a:endParaRPr/>
+          </a:p>
+        </p:txBody>
+      </p:sp>
+      <p:sp>
+        <p:nvSpPr>
+          <p:cNvPr id="28" name="TextBox 27"/>
+          <p:cNvSpPr txBox="1"/>
+          <p:nvPr/>
+        </p:nvSpPr>
+        <p:spPr>
+          <a:xfrm>
+            <a:off x="6519672" y="4005072"/>
+            <a:ext cx="2194560" cy="365760"/>
+          </a:xfrm>
+          <a:prstGeom prst="rect">
+            <a:avLst/>
+          </a:prstGeom>
+          <a:noFill/>
+        </p:spPr>
+        <p:txBody>
+          <a:bodyPr wrap="square" lIns="0" tIns="0" rIns="0" bIns="0" anchor="t">
+            <a:spAutoFit/>
+          </a:bodyPr>
+          <a:lstStyle/>
+          <a:p>
+            <a:pPr algn="l">
+              <a:lnSpc>
+                <a:spcPct val="130000"/>
+              </a:lnSpc>
+              <a:spcAft>
+                <a:spcPts val="400"/>
+              </a:spcAft>
+            </a:pPr>
+            <a:r>
+              <a:rPr sz="1300" b="1">
+                <a:solidFill>
+                  <a:srgbClr val="141A33"/>
+                </a:solidFill>
+                <a:latin typeface="Meiryo"/>
+              </a:rPr>
+              <a:t>月額 合計</a:t>
+            </a:r>
+          </a:p>
+        </p:txBody>
+      </p:sp>
+      <p:sp>
+        <p:nvSpPr>
+          <p:cNvPr id="29" name="TextBox 28"/>
+          <p:cNvSpPr txBox="1"/>
+          <p:nvPr/>
+        </p:nvSpPr>
+        <p:spPr>
+          <a:xfrm>
+            <a:off x="8595360" y="3931920"/>
+            <a:ext cx="2743200" cy="457200"/>
+          </a:xfrm>
+          <a:prstGeom prst="rect">
+            <a:avLst/>
+          </a:prstGeom>
+          <a:noFill/>
+        </p:spPr>
+        <p:txBody>
+          <a:bodyPr wrap="square" lIns="0" tIns="0" rIns="0" bIns="0" anchor="t">
+            <a:spAutoFit/>
+          </a:bodyPr>
+          <a:lstStyle/>
+          <a:p>
+            <a:pPr algn="r">
+              <a:lnSpc>
+                <a:spcPct val="130000"/>
+              </a:lnSpc>
+              <a:spcAft>
+                <a:spcPts val="400"/>
+              </a:spcAft>
+            </a:pPr>
+            <a:r>
+              <a:rPr sz="1900" b="1">
+                <a:solidFill>
+                  <a:srgbClr val="1F5E4B"/>
+                </a:solidFill>
+                <a:latin typeface="Meiryo"/>
+              </a:rPr>
+              <a:t>約 1万 〜 2万円</a:t>
+            </a:r>
+          </a:p>
+        </p:txBody>
+      </p:sp>
+      <p:sp>
+        <p:nvSpPr>
+          <p:cNvPr id="30" name="Rounded Rectangle 29"/>
           <p:cNvSpPr/>
           <p:nvPr/>
         </p:nvSpPr>
         <p:spPr>
           <a:xfrm>
-            <a:off x="8101584" y="1600200"/>
-            <a:ext cx="3529584" cy="82296"/>
-          </a:xfrm>
-          <a:prstGeom prst="rect">
-            <a:avLst/>
+            <a:off x="566928" y="4617720"/>
+            <a:ext cx="11073384" cy="1572768"/>
+          </a:xfrm>
+          <a:prstGeom prst="roundRect">
+            <a:avLst>
+              <a:gd name="adj" fmla="val 6000"/>
+            </a:avLst>
           </a:prstGeom>
           <a:solidFill>
-            <a:srgbClr val="4F46E5"/>
+            <a:srgbClr val="F5F6F8"/>
           </a:solidFill>
           <a:ln>
             <a:noFill/>
@@ -13064,269 +13227,106 @@
         <p:txBody>
           <a:bodyPr rtlCol="0" anchor="ctr"/>
           <a:lstStyle/>
-          <a:p/>
-        </p:txBody>
-      </p:sp>
-      <p:sp>
-        <p:nvSpPr>
-          <p:cNvPr id="17" name="TextBox 16"/>
-          <p:cNvSpPr txBox="1"/>
-          <p:nvPr/>
-        </p:nvSpPr>
-        <p:spPr>
-          <a:xfrm>
-            <a:off x="8394192" y="1938528"/>
-            <a:ext cx="3017520" cy="365760"/>
-          </a:xfrm>
-          <a:prstGeom prst="rect">
-            <a:avLst/>
-          </a:prstGeom>
-          <a:noFill/>
-        </p:spPr>
-        <p:txBody>
-          <a:bodyPr wrap="square" lIns="0" rIns="0" tIns="0" bIns="0">
-            <a:spAutoFit/>
-          </a:bodyPr>
-          <a:lstStyle/>
-          <a:p>
-            <a:pPr algn="l"/>
-            <a:r>
-              <a:rPr sz="1100" b="1">
-                <a:solidFill>
-                  <a:srgbClr val="4F46E5"/>
-                </a:solidFill>
-                <a:latin typeface="Meiryo"/>
-                <a:ea typeface="Meiryo"/>
-              </a:rPr>
-              <a:t>03</a:t>
-            </a:r>
-          </a:p>
-        </p:txBody>
-      </p:sp>
-      <p:sp>
-        <p:nvSpPr>
-          <p:cNvPr id="18" name="TextBox 17"/>
-          <p:cNvSpPr txBox="1"/>
-          <p:nvPr/>
-        </p:nvSpPr>
-        <p:spPr>
-          <a:xfrm>
-            <a:off x="8394192" y="2304288"/>
-            <a:ext cx="3017520" cy="411480"/>
-          </a:xfrm>
-          <a:prstGeom prst="rect">
-            <a:avLst/>
-          </a:prstGeom>
-          <a:noFill/>
-        </p:spPr>
-        <p:txBody>
-          <a:bodyPr wrap="square" lIns="0" rIns="0" tIns="0" bIns="0">
-            <a:spAutoFit/>
-          </a:bodyPr>
-          <a:lstStyle/>
-          <a:p>
-            <a:pPr algn="l"/>
-            <a:r>
-              <a:rPr sz="1500" b="1">
+          <a:p>
+            <a:endParaRPr/>
+          </a:p>
+        </p:txBody>
+      </p:sp>
+      <p:sp>
+        <p:nvSpPr>
+          <p:cNvPr id="31" name="TextBox 30"/>
+          <p:cNvSpPr txBox="1"/>
+          <p:nvPr/>
+        </p:nvSpPr>
+        <p:spPr>
+          <a:xfrm>
+            <a:off x="868680" y="4828032"/>
+            <a:ext cx="10515600" cy="1188720"/>
+          </a:xfrm>
+          <a:prstGeom prst="rect">
+            <a:avLst/>
+          </a:prstGeom>
+          <a:noFill/>
+        </p:spPr>
+        <p:txBody>
+          <a:bodyPr wrap="square" lIns="0" tIns="0" rIns="0" bIns="0" anchor="t">
+            <a:spAutoFit/>
+          </a:bodyPr>
+          <a:lstStyle/>
+          <a:p>
+            <a:pPr algn="l">
+              <a:lnSpc>
+                <a:spcPct val="155000"/>
+              </a:lnSpc>
+              <a:spcAft>
+                <a:spcPts val="400"/>
+              </a:spcAft>
+            </a:pPr>
+            <a:r>
+              <a:rPr sz="1200" b="0">
                 <a:solidFill>
                   <a:srgbClr val="141A33"/>
                 </a:solidFill>
                 <a:latin typeface="Meiryo"/>
-                <a:ea typeface="Meiryo"/>
-              </a:rPr>
-              <a:t>公表する</a:t>
-            </a:r>
-          </a:p>
-        </p:txBody>
-      </p:sp>
-      <p:sp>
-        <p:nvSpPr>
-          <p:cNvPr id="19" name="TextBox 18"/>
-          <p:cNvSpPr txBox="1"/>
-          <p:nvPr/>
-        </p:nvSpPr>
-        <p:spPr>
-          <a:xfrm>
-            <a:off x="8394192" y="2889504"/>
-            <a:ext cx="3017520" cy="1828800"/>
-          </a:xfrm>
-          <a:prstGeom prst="rect">
-            <a:avLst/>
-          </a:prstGeom>
-          <a:noFill/>
-        </p:spPr>
-        <p:txBody>
-          <a:bodyPr wrap="square" lIns="0" rIns="0" tIns="0" bIns="0">
-            <a:spAutoFit/>
-          </a:bodyPr>
-          <a:lstStyle/>
-          <a:p>
-            <a:pPr algn="l">
-              <a:spcAft>
-                <a:spcPts val="200"/>
-              </a:spcAft>
-            </a:pPr>
-            <a:r>
-              <a:rPr sz="1150" b="0">
-                <a:solidFill>
-                  <a:srgbClr val="6B7280"/>
-                </a:solidFill>
-                <a:latin typeface="Meiryo"/>
-                <a:ea typeface="Meiryo"/>
-              </a:rPr>
-              <a:t>プライバシーポリシーに、</a:t>
-            </a:r>
-          </a:p>
-          <a:p>
-            <a:pPr algn="l">
-              <a:spcAft>
-                <a:spcPts val="200"/>
-              </a:spcAft>
-            </a:pPr>
-            <a:r>
-              <a:rPr sz="1150" b="0">
-                <a:solidFill>
-                  <a:srgbClr val="6B7280"/>
-                </a:solidFill>
-                <a:latin typeface="Meiryo"/>
-                <a:ea typeface="Meiryo"/>
-              </a:rPr>
-              <a:t>移転先の国名・その国の制度・</a:t>
-            </a:r>
-          </a:p>
-          <a:p>
-            <a:pPr algn="l">
-              <a:spcAft>
-                <a:spcPts val="200"/>
-              </a:spcAft>
-            </a:pPr>
-            <a:r>
-              <a:rPr sz="1150" b="0">
-                <a:solidFill>
-                  <a:srgbClr val="6B7280"/>
-                </a:solidFill>
-                <a:latin typeface="Meiryo"/>
-                <a:ea typeface="Meiryo"/>
-              </a:rPr>
-              <a:t>相手方の措置を記載します。</a:t>
-            </a:r>
-          </a:p>
-          <a:p>
-            <a:pPr algn="l">
-              <a:spcAft>
-                <a:spcPts val="200"/>
-              </a:spcAft>
-            </a:pPr>
-            <a:r>
-              <a:rPr sz="1150" b="0">
-                <a:solidFill>
-                  <a:srgbClr val="6B7280"/>
-                </a:solidFill>
-                <a:latin typeface="Meiryo"/>
-                <a:ea typeface="Meiryo"/>
-              </a:rPr>
-              <a:t/>
-            </a:r>
-          </a:p>
-          <a:p>
-            <a:pPr algn="l">
-              <a:spcAft>
-                <a:spcPts val="200"/>
-              </a:spcAft>
-            </a:pPr>
-            <a:r>
-              <a:rPr sz="1150" b="0">
-                <a:solidFill>
-                  <a:srgbClr val="6B7280"/>
-                </a:solidFill>
-                <a:latin typeface="Meiryo"/>
-                <a:ea typeface="Meiryo"/>
-              </a:rPr>
-              <a:t>文言案は次ページのとおりです。</a:t>
-            </a:r>
-          </a:p>
-        </p:txBody>
-      </p:sp>
-      <p:sp>
-        <p:nvSpPr>
-          <p:cNvPr id="20" name="Rounded Rectangle 19"/>
-          <p:cNvSpPr/>
-          <p:nvPr/>
-        </p:nvSpPr>
-        <p:spPr>
-          <a:xfrm>
-            <a:off x="566928" y="5120640"/>
-            <a:ext cx="11073384" cy="685800"/>
-          </a:xfrm>
-          <a:prstGeom prst="roundRect">
-            <a:avLst>
-              <a:gd name="adj" fmla="val 12000"/>
-            </a:avLst>
-          </a:prstGeom>
-          <a:solidFill>
-            <a:srgbClr val="F2F4FB"/>
-          </a:solidFill>
-          <a:ln>
-            <a:noFill/>
-          </a:ln>
-          <a:effectLst/>
-        </p:spPr>
-        <p:style>
-          <a:lnRef idx="1">
-            <a:schemeClr val="accent1"/>
-          </a:lnRef>
-          <a:fillRef idx="3">
-            <a:schemeClr val="accent1"/>
-          </a:fillRef>
-          <a:effectRef idx="2">
-            <a:schemeClr val="accent1"/>
-          </a:effectRef>
-          <a:fontRef idx="minor">
-            <a:schemeClr val="lt1"/>
-          </a:fontRef>
-        </p:style>
-        <p:txBody>
-          <a:bodyPr rtlCol="0" anchor="ctr"/>
-          <a:lstStyle/>
-          <a:p/>
-        </p:txBody>
-      </p:sp>
-      <p:sp>
-        <p:nvSpPr>
-          <p:cNvPr id="21" name="TextBox 20"/>
-          <p:cNvSpPr txBox="1"/>
-          <p:nvPr/>
-        </p:nvSpPr>
-        <p:spPr>
-          <a:xfrm>
-            <a:off x="868680" y="5280660"/>
-            <a:ext cx="10515600" cy="365760"/>
-          </a:xfrm>
-          <a:prstGeom prst="rect">
-            <a:avLst/>
-          </a:prstGeom>
-          <a:noFill/>
-        </p:spPr>
-        <p:txBody>
-          <a:bodyPr wrap="square" lIns="0" rIns="0" tIns="0" bIns="0">
-            <a:spAutoFit/>
-          </a:bodyPr>
-          <a:lstStyle/>
-          <a:p>
-            <a:pPr algn="l">
-              <a:spcAft>
-                <a:spcPts val="300"/>
-              </a:spcAft>
-            </a:pPr>
-            <a:r>
-              <a:rPr sz="1250" b="1">
-                <a:solidFill>
-                  <a:srgbClr val="4F46E5"/>
-                </a:solidFill>
-                <a:latin typeface="Meiryo"/>
-                <a:ea typeface="Meiryo"/>
-              </a:rPr>
-              <a:t>AI に送信した情報が、AIモデルの学習に利用されることはありません（商用APIの利用規約による）。</a:t>
+              </a:rPr>
+              <a:t>試算の前提</a:t>
+            </a:r>
+          </a:p>
+          <a:p>
+            <a:pPr algn="l">
+              <a:lnSpc>
+                <a:spcPct val="155000"/>
+              </a:lnSpc>
+              <a:spcAft>
+                <a:spcPts val="400"/>
+              </a:spcAft>
+            </a:pPr>
+            <a:r>
+              <a:rPr sz="1200" b="0">
+                <a:solidFill>
+                  <a:srgbClr val="141A33"/>
+                </a:solidFill>
+                <a:latin typeface="Meiryo"/>
+              </a:rPr>
+              <a:t>・OCR／AI書類作成：月300回、1回あたり約1,000文字の読み取り・生成</a:t>
+            </a:r>
+          </a:p>
+          <a:p>
+            <a:pPr algn="l">
+              <a:lnSpc>
+                <a:spcPct val="155000"/>
+              </a:lnSpc>
+              <a:spcAft>
+                <a:spcPts val="400"/>
+              </a:spcAft>
+            </a:pPr>
+            <a:r>
+              <a:rPr sz="1200" b="0">
+                <a:solidFill>
+                  <a:srgbClr val="141A33"/>
+                </a:solidFill>
+                <a:latin typeface="Meiryo"/>
+              </a:rPr>
+              <a:t>・既存サーバーを利用した場合も同じ従量課金のため、料金差はほぼ発生しません</a:t>
+            </a:r>
+          </a:p>
+          <a:p>
+            <a:pPr algn="l">
+              <a:lnSpc>
+                <a:spcPct val="155000"/>
+              </a:lnSpc>
+              <a:spcAft>
+                <a:spcPts val="400"/>
+              </a:spcAft>
+            </a:pPr>
+            <a:r>
+              <a:rPr sz="1200" b="0">
+                <a:solidFill>
+                  <a:srgbClr val="141A33"/>
+                </a:solidFill>
+                <a:latin typeface="Meiryo"/>
+              </a:rPr>
+              <a:t>・実際のご利用量が固まった段階で、正式なお見積もりを提出いたします</a:t>
             </a:r>
           </a:p>
         </p:txBody>
